--- a/第八週(10-29)/第八週_第3節_簡報.pptx
+++ b/第八週(10-29)/第八週_第3節_簡報.pptx
@@ -508,7 +508,7 @@
                 <a:ea typeface="Arial Unicode MS"/>
                 <a:cs typeface="Arial Unicode MS"/>
               </a:rPr>
-              <a:t>這一節分兩段。前半段，我們一週一週走過去，每一週只講最重要的幾句話和一張表。後半段，大家打開一份模擬考，二十八題，題目跟期中考一樣是中文和英文對照，網頁上可以再打開越南文。做完按交卷，網頁會告訴你哪一週錯得最多，那一週的講義回去再翻一次。
+              <a:t>這一節分兩段。前半段，我們一週一週走過去，每一週只講最重要的幾句話和一張表。後半段，大家打開一份模擬考，二十八題，題目跟期中考一樣是越南文為主、中文對照。做完按交卷，網頁會告訴你哪一週錯得最多，那一週的講義回去再翻一次。
 </a:t>
             </a:r>
           </a:p>
@@ -1817,7 +1817,7 @@
                 <a:ea typeface="Arial Unicode MS"/>
                 <a:cs typeface="Arial Unicode MS"/>
               </a:rPr>
-              <a:t>二十八題，第一週到第八週都有，每一題都是中文加英文，跟期中考一樣。右上角的「Tiếng Việt」按鈕可以開關越南文，建議先關掉，試著讀英文，真的看不懂再打開。
+              <a:t>二十八題，第一週到第八週都有。每一題上面是越南文，下面是中文對照，跟期中考一樣。右上角有一個「English」按鈕，可以再打開英文，平常不用開。
 </a:t>
             </a:r>
           </a:p>
@@ -2653,7 +2653,29 @@
                 <a:ea typeface="Arial Unicode MS"/>
                 <a:cs typeface="Arial Unicode MS"/>
               </a:rPr>
-              <a:t>：題目是中文和英文對照，沒有越南文。所以今天的模擬考，請大家試著讀英文那一行，網頁上越南文可以關掉。
+              <a:t>：題目以</a:t>
+            </a:r>
+            <a:r>
+              <a:rPr sz="1600" b="1" lang="zh-TW" dirty="0">
+                <a:solidFill>
+                  <a:srgbClr val="000000"/>
+                </a:solidFill>
+                <a:latin typeface="Arial Unicode MS"/>
+                <a:ea typeface="Arial Unicode MS"/>
+                <a:cs typeface="Arial Unicode MS"/>
+              </a:rPr>
+              <a:t>越南文為主，旁邊附中文對照</a:t>
+            </a:r>
+            <a:r>
+              <a:rPr sz="1600" lang="zh-TW" dirty="0">
+                <a:solidFill>
+                  <a:srgbClr val="000000"/>
+                </a:solidFill>
+                <a:latin typeface="Arial Unicode MS"/>
+                <a:ea typeface="Arial Unicode MS"/>
+                <a:cs typeface="Arial Unicode MS"/>
+              </a:rPr>
+              <a:t>。今天的模擬考就是這個樣子，大家可以順便練習：越南文看懂了，再對一下中文的關鍵字，例如「門檻」「煞停距離」「外參」，這些中文名詞上課一直在用。
 </a:t>
             </a:r>
           </a:p>
@@ -9717,7 +9739,7 @@
                 <a:ea typeface="Arial" pitchFamily="34" charset="-122"/>
                 <a:cs typeface="Arial" pitchFamily="34" charset="-120"/>
               </a:rPr>
-              <a:t>28 câu, tuần 1–8. Đề song ngữ Trung–Anh; nút «Tiếng Việt» bật/tắt dòng tiếng Việt</a:t>
+              <a:t>28 câu, tuần 1–8. Tiếng Việt là chính, có tiếng Trung đối chiếu (giống đề thi thật)</a:t>
             </a:r>
             <a:endParaRPr lang="en-US" sz="1150" dirty="0"/>
           </a:p>
@@ -9737,7 +9759,7 @@
                 <a:ea typeface="微軟正黑體" pitchFamily="34" charset="-122"/>
                 <a:cs typeface="微軟正黑體" pitchFamily="34" charset="-120"/>
               </a:rPr>
-              <a:t>28 題，第一到八週。中英對照；「Tiếng Việt」鈕開關越南文</a:t>
+              <a:t>28 題，第一到八週。越南文為主、中文對照（跟期中考一樣）</a:t>
             </a:r>
             <a:endParaRPr lang="en-US" sz="1150" dirty="0"/>
           </a:p>
@@ -12174,7 +12196,7 @@
                 <a:ea typeface="Arial" pitchFamily="34" charset="-122"/>
                 <a:cs typeface="Arial" pitchFamily="34" charset="-120"/>
               </a:rPr>
-              <a:t>中 / EN</a:t>
+              <a:t>VI / 中</a:t>
             </a:r>
             <a:endParaRPr lang="en-US" sz="2500" dirty="0"/>
           </a:p>
@@ -12216,7 +12238,7 @@
                 <a:ea typeface="Arial" pitchFamily="34" charset="-122"/>
                 <a:cs typeface="Arial" pitchFamily="34" charset="-120"/>
               </a:rPr>
-              <a:t>song ngữ Trung–Anh</a:t>
+              <a:t>tiếng Việt là chính</a:t>
             </a:r>
             <a:endParaRPr lang="en-US" sz="1250" dirty="0"/>
           </a:p>
@@ -12236,7 +12258,7 @@
                 <a:ea typeface="微軟正黑體" pitchFamily="34" charset="-122"/>
                 <a:cs typeface="微軟正黑體" pitchFamily="34" charset="-120"/>
               </a:rPr>
-              <a:t>中英對照</a:t>
+              <a:t>越南文為主、中文對照</a:t>
             </a:r>
             <a:endParaRPr lang="en-US" sz="1250" dirty="0"/>
           </a:p>
@@ -12278,7 +12300,7 @@
                 <a:ea typeface="Arial" pitchFamily="34" charset="-122"/>
                 <a:cs typeface="Arial" pitchFamily="34" charset="-120"/>
               </a:rPr>
-              <a:t>Đề không có tiếng Việt.</a:t>
+              <a:t>Mỗi câu có tiếng Trung đối chiếu.</a:t>
             </a:r>
             <a:endParaRPr lang="en-US" sz="1100" dirty="0"/>
           </a:p>
@@ -12298,7 +12320,7 @@
                 <a:ea typeface="微軟正黑體" pitchFamily="34" charset="-122"/>
                 <a:cs typeface="微軟正黑體" pitchFamily="34" charset="-120"/>
               </a:rPr>
-              <a:t>考卷沒有越南文。</a:t>
+              <a:t>每一題都附中文對照。</a:t>
             </a:r>
             <a:endParaRPr lang="en-US" sz="1100" dirty="0"/>
           </a:p>

--- a/第八週(10-29)/第八週_第3節_簡報.pptx
+++ b/第八週(10-29)/第八週_第3節_簡報.pptx
@@ -3895,11 +3895,11 @@
                 <a:spcPts val="0"/>
               </a:spcBef>
               <a:spcAft>
-                <a:spcPts val="267"/>
+                <a:spcPts val="233"/>
               </a:spcAft>
             </a:pPr>
             <a:r>
-              <a:rPr sz="1600" b="1" lang="zh-TW" dirty="0">
+              <a:rPr sz="1400" b="1" lang="zh-TW" dirty="0">
                 <a:solidFill>
                   <a:srgbClr val="000000"/>
                 </a:solidFill>
@@ -3910,7 +3910,7 @@
               <a:t>這一張的目的：</a:t>
             </a:r>
             <a:r>
-              <a:rPr sz="1600" lang="zh-TW" dirty="0">
+              <a:rPr sz="1400" lang="zh-TW" dirty="0">
                 <a:solidFill>
                   <a:srgbClr val="000000"/>
                 </a:solidFill>
@@ -3928,11 +3928,11 @@
                 <a:spcPts val="0"/>
               </a:spcBef>
               <a:spcAft>
-                <a:spcPts val="267"/>
+                <a:spcPts val="233"/>
               </a:spcAft>
             </a:pPr>
             <a:r>
-              <a:rPr sz="1600" lang="zh-TW" dirty="0">
+              <a:rPr sz="1400" lang="zh-TW" dirty="0">
                 <a:solidFill>
                   <a:srgbClr val="000000"/>
                 </a:solidFill>
@@ -3943,7 +3943,7 @@
               <a:t>ODD 六格，本課的定版：</a:t>
             </a:r>
             <a:r>
-              <a:rPr sz="1600" b="1" lang="zh-TW" dirty="0">
+              <a:rPr sz="1400" b="1" lang="zh-TW" dirty="0">
                 <a:solidFill>
                   <a:srgbClr val="000000"/>
                 </a:solidFill>
@@ -3954,7 +3954,7 @@
               <a:t>道路類型、速度域、交通狀況、天候與光照、地理範圍、人的角色</a:t>
             </a:r>
             <a:r>
-              <a:rPr sz="1600" lang="zh-TW" dirty="0">
+              <a:rPr sz="1400" lang="zh-TW" dirty="0">
                 <a:solidFill>
                   <a:srgbClr val="000000"/>
                 </a:solidFill>
@@ -3972,11 +3972,11 @@
                 <a:spcPts val="0"/>
               </a:spcBef>
               <a:spcAft>
-                <a:spcPts val="267"/>
+                <a:spcPts val="233"/>
               </a:spcAft>
             </a:pPr>
             <a:r>
-              <a:rPr sz="1600" lang="zh-TW" dirty="0">
+              <a:rPr sz="1400" lang="zh-TW" dirty="0">
                 <a:solidFill>
                   <a:srgbClr val="000000"/>
                 </a:solidFill>
@@ -3994,11 +3994,11 @@
                 <a:spcPts val="0"/>
               </a:spcBef>
               <a:spcAft>
-                <a:spcPts val="267"/>
+                <a:spcPts val="233"/>
               </a:spcAft>
             </a:pPr>
             <a:r>
-              <a:rPr sz="1600" lang="zh-TW" dirty="0">
+              <a:rPr sz="1400" lang="zh-TW" dirty="0">
                 <a:solidFill>
                   <a:srgbClr val="000000"/>
                 </a:solidFill>
@@ -4009,7 +4009,7 @@
               <a:t>第一，</a:t>
             </a:r>
             <a:r>
-              <a:rPr sz="1600" b="1" lang="zh-TW" dirty="0">
+              <a:rPr sz="1400" b="1" lang="zh-TW" dirty="0">
                 <a:solidFill>
                   <a:srgbClr val="000000"/>
                 </a:solidFill>
@@ -4020,7 +4020,7 @@
               <a:t>「至少」是下限</a:t>
             </a:r>
             <a:r>
-              <a:rPr sz="1600" lang="zh-TW" dirty="0">
+              <a:rPr sz="1400" lang="zh-TW" dirty="0">
                 <a:solidFill>
                   <a:srgbClr val="000000"/>
                 </a:solidFill>
@@ -4038,11 +4038,11 @@
                 <a:spcPts val="0"/>
               </a:spcBef>
               <a:spcAft>
-                <a:spcPts val="267"/>
+                <a:spcPts val="233"/>
               </a:spcAft>
             </a:pPr>
             <a:r>
-              <a:rPr sz="1600" lang="zh-TW" dirty="0">
+              <a:rPr sz="1400" lang="zh-TW" dirty="0">
                 <a:solidFill>
                   <a:srgbClr val="000000"/>
                 </a:solidFill>
@@ -4053,7 +4053,7 @@
               <a:t>第二，</a:t>
             </a:r>
             <a:r>
-              <a:rPr sz="1600" b="1" lang="zh-TW" dirty="0">
+              <a:rPr sz="1400" b="1" lang="zh-TW" dirty="0">
                 <a:solidFill>
                   <a:srgbClr val="000000"/>
                 </a:solidFill>
@@ -4064,7 +4064,7 @@
               <a:t>單位要看清楚</a:t>
             </a:r>
             <a:r>
-              <a:rPr sz="1600" lang="zh-TW" dirty="0">
+              <a:rPr sz="1400" lang="zh-TW" dirty="0">
                 <a:solidFill>
                   <a:srgbClr val="000000"/>
                 </a:solidFill>
@@ -4072,7 +4072,7 @@
                 <a:ea typeface="Arial Unicode MS"/>
                 <a:cs typeface="Arial Unicode MS"/>
               </a:rPr>
-              <a:t>。mm/h 是雨下得多大，不是積水多深；lx 是照度，亮不亮；能見度不等於感測器的量程。
+              <a:t>。mm/h 是雨下得多大，不是積水多深；能見度不等於感測器的量程。
 </a:t>
             </a:r>
           </a:p>
@@ -4082,11 +4082,11 @@
                 <a:spcPts val="0"/>
               </a:spcBef>
               <a:spcAft>
-                <a:spcPts val="267"/>
+                <a:spcPts val="233"/>
               </a:spcAft>
             </a:pPr>
             <a:r>
-              <a:rPr sz="1600" lang="zh-TW" dirty="0">
+              <a:rPr sz="1400" b="1" lang="zh-TW" dirty="0">
                 <a:solidFill>
                   <a:srgbClr val="000000"/>
                 </a:solidFill>
@@ -4094,10 +4094,10 @@
                 <a:ea typeface="Arial Unicode MS"/>
                 <a:cs typeface="Arial Unicode MS"/>
               </a:rPr>
-              <a:t>第三，</a:t>
-            </a:r>
-            <a:r>
-              <a:rPr sz="1600" b="1" lang="zh-TW" dirty="0">
+              <a:t>lx 是什麼？</a:t>
+            </a:r>
+            <a:r>
+              <a:rPr sz="1400" lang="zh-TW" dirty="0">
                 <a:solidFill>
                   <a:srgbClr val="000000"/>
                 </a:solidFill>
@@ -4105,10 +4105,10 @@
                 <a:ea typeface="Arial Unicode MS"/>
                 <a:cs typeface="Arial Unicode MS"/>
               </a:rPr>
-              <a:t>開慢一點不會讓它變回符合。</a:t>
-            </a:r>
-            <a:r>
-              <a:rPr sz="1600" lang="zh-TW" dirty="0">
+              <a:t>lx 是 lux 的縮寫，中文叫「勒克斯」，是</a:t>
+            </a:r>
+            <a:r>
+              <a:rPr sz="1400" b="1" lang="zh-TW" dirty="0">
                 <a:solidFill>
                   <a:srgbClr val="000000"/>
                 </a:solidFill>
@@ -4116,7 +4116,18 @@
                 <a:ea typeface="Arial Unicode MS"/>
                 <a:cs typeface="Arial Unicode MS"/>
               </a:rPr>
-              <a:t>條件就是條件，不符合就是不符合。
+              <a:t>照度</a:t>
+            </a:r>
+            <a:r>
+              <a:rPr sz="1400" lang="zh-TW" dirty="0">
+                <a:solidFill>
+                  <a:srgbClr val="000000"/>
+                </a:solidFill>
+                <a:latin typeface="Arial Unicode MS"/>
+                <a:ea typeface="Arial Unicode MS"/>
+                <a:cs typeface="Arial Unicode MS"/>
+              </a:rPr>
+              <a:t>的單位，量的是「照在這個地方的光有多少」，數字愈大愈亮。給大家幾個大約的數字：正午的太陽直射大約三萬到十萬 lx，第五週光達規格表上那個「100 klx 陽光」就是這個；陰天白天大約一千；辦公室大約三百到五百；周圍很暗的公共區域照明大約二十到五十；黃昏快結束、天快全黑的時候大約三點四；滿月的晚上只有零點幾。所以「至少 20 lx」大概是「有開燈的暗處」；現場只有 5 lx，就是天快黑、路燈又不夠亮。
 </a:t>
             </a:r>
           </a:p>
@@ -4126,11 +4137,55 @@
                 <a:spcPts val="0"/>
               </a:spcBef>
               <a:spcAft>
-                <a:spcPts val="267"/>
+                <a:spcPts val="233"/>
               </a:spcAft>
             </a:pPr>
             <a:r>
-              <a:rPr sz="1600" lang="zh-TW" dirty="0">
+              <a:rPr sz="1400" lang="zh-TW" dirty="0">
+                <a:solidFill>
+                  <a:srgbClr val="000000"/>
+                </a:solidFill>
+                <a:latin typeface="Arial Unicode MS"/>
+                <a:ea typeface="Arial Unicode MS"/>
+                <a:cs typeface="Arial Unicode MS"/>
+              </a:rPr>
+              <a:t>第三，</a:t>
+            </a:r>
+            <a:r>
+              <a:rPr sz="1400" b="1" lang="zh-TW" dirty="0">
+                <a:solidFill>
+                  <a:srgbClr val="000000"/>
+                </a:solidFill>
+                <a:latin typeface="Arial Unicode MS"/>
+                <a:ea typeface="Arial Unicode MS"/>
+                <a:cs typeface="Arial Unicode MS"/>
+              </a:rPr>
+              <a:t>開慢一點不會讓它變回符合。</a:t>
+            </a:r>
+            <a:r>
+              <a:rPr sz="1400" lang="zh-TW" dirty="0">
+                <a:solidFill>
+                  <a:srgbClr val="000000"/>
+                </a:solidFill>
+                <a:latin typeface="Arial Unicode MS"/>
+                <a:ea typeface="Arial Unicode MS"/>
+                <a:cs typeface="Arial Unicode MS"/>
+              </a:rPr>
+              <a:t>條件就是條件，不符合就是不符合。
+</a:t>
+            </a:r>
+          </a:p>
+          <a:p>
+            <a:pPr algn="l">
+              <a:spcBef>
+                <a:spcPts val="0"/>
+              </a:spcBef>
+              <a:spcAft>
+                <a:spcPts val="233"/>
+              </a:spcAft>
+            </a:pPr>
+            <a:r>
+              <a:rPr sz="1400" lang="zh-TW" dirty="0">
                 <a:solidFill>
                   <a:srgbClr val="000000"/>
                 </a:solidFill>
@@ -17945,7 +18000,7 @@
                           <a:ea typeface="Arial" pitchFamily="34" charset="-122"/>
                           <a:cs typeface="Arial" pitchFamily="34" charset="-120"/>
                         </a:rPr>
-                        <a:t>Không mưa, mặt đường khô; độ rọi ít nhất 20 lx</a:t>
+                        <a:t>Không mưa, mặt đường khô; độ rọi ít nhất 20 lx (lux)</a:t>
                       </a:r>
                       <a:endParaRPr lang="en-US" sz="1180" dirty="0"/>
                     </a:p>
@@ -17962,7 +18017,7 @@
                           <a:ea typeface="微軟正黑體" pitchFamily="34" charset="-122"/>
                           <a:cs typeface="微軟正黑體" pitchFamily="34" charset="-120"/>
                         </a:rPr>
-                        <a:t>無雨、路面乾燥；照度至少 20 lx</a:t>
+                        <a:t>無雨、路面乾燥；照度至少 20 lx（勒克斯）</a:t>
                       </a:r>
                       <a:endParaRPr lang="en-US" sz="1180" dirty="0"/>
                     </a:p>

--- a/第八週(10-29)/第八週_第3節_簡報.pptx
+++ b/第八週(10-29)/第八週_第3節_簡報.pptx
@@ -4369,7 +4369,7 @@
                 <a:ea typeface="Arial Unicode MS"/>
                 <a:cs typeface="Arial Unicode MS"/>
               </a:rPr>
-              <a:t>看表。相機直接量的是角度和亮度，</a:t>
+              <a:t>看表。前六列是第三週那張表。相機直接量的是角度和亮度，</a:t>
             </a:r>
             <a:r>
               <a:rPr sz="1600" b="1" lang="zh-TW" dirty="0">
@@ -4392,6 +4392,116 @@
                 <a:cs typeface="Arial Unicode MS"/>
               </a:rPr>
               <a:t>，紅綠燈、路牌都靠它；距離是算出來的。光達直接量距離，可是不知道那是什麼。雷達量距離和朝自己的速度。超音波只看近處。衛星定位量的是自己的座標，不知道前面有什麼。熱像量溫度差。
+</a:t>
+            </a:r>
+          </a:p>
+          <a:p>
+            <a:pPr algn="l">
+              <a:spcBef>
+                <a:spcPts val="0"/>
+              </a:spcBef>
+              <a:spcAft>
+                <a:spcPts val="267"/>
+              </a:spcAft>
+            </a:pPr>
+            <a:r>
+              <a:rPr sz="1600" lang="zh-TW" dirty="0">
+                <a:solidFill>
+                  <a:srgbClr val="000000"/>
+                </a:solidFill>
+                <a:latin typeface="Arial Unicode MS"/>
+                <a:ea typeface="Arial Unicode MS"/>
+                <a:cs typeface="Arial Unicode MS"/>
+              </a:rPr>
+              <a:t>最後一列 </a:t>
+            </a:r>
+            <a:r>
+              <a:rPr sz="1600" b="1" lang="zh-TW" dirty="0">
+                <a:solidFill>
+                  <a:srgbClr val="000000"/>
+                </a:solidFill>
+                <a:latin typeface="Arial Unicode MS"/>
+                <a:ea typeface="Arial Unicode MS"/>
+                <a:cs typeface="Arial Unicode MS"/>
+              </a:rPr>
+              <a:t>IMU</a:t>
+            </a:r>
+            <a:r>
+              <a:rPr sz="1600" lang="zh-TW" dirty="0">
+                <a:solidFill>
+                  <a:srgbClr val="000000"/>
+                </a:solidFill>
+                <a:latin typeface="Arial Unicode MS"/>
+                <a:ea typeface="Arial Unicode MS"/>
+                <a:cs typeface="Arial Unicode MS"/>
+              </a:rPr>
+              <a:t> 是第六週加的：它裡面有加速度計和陀螺儀，直接量的是</a:t>
+            </a:r>
+            <a:r>
+              <a:rPr sz="1600" b="1" lang="zh-TW" dirty="0">
+                <a:solidFill>
+                  <a:srgbClr val="000000"/>
+                </a:solidFill>
+                <a:latin typeface="Arial Unicode MS"/>
+                <a:ea typeface="Arial Unicode MS"/>
+                <a:cs typeface="Arial Unicode MS"/>
+              </a:rPr>
+              <a:t>自己</a:t>
+            </a:r>
+            <a:r>
+              <a:rPr sz="1600" lang="zh-TW" dirty="0">
+                <a:solidFill>
+                  <a:srgbClr val="000000"/>
+                </a:solidFill>
+                <a:latin typeface="Arial Unicode MS"/>
+                <a:ea typeface="Arial Unicode MS"/>
+                <a:cs typeface="Arial Unicode MS"/>
+              </a:rPr>
+              <a:t>加速多少、轉得多快，把這些一路加起來，推算自己走到哪裡。它最大的弱點是</a:t>
+            </a:r>
+            <a:r>
+              <a:rPr sz="1600" b="1" lang="zh-TW" dirty="0">
+                <a:solidFill>
+                  <a:srgbClr val="000000"/>
+                </a:solidFill>
+                <a:latin typeface="Arial Unicode MS"/>
+                <a:ea typeface="Arial Unicode MS"/>
+                <a:cs typeface="Arial Unicode MS"/>
+              </a:rPr>
+              <a:t>漂移</a:t>
+            </a:r>
+            <a:r>
+              <a:rPr sz="1600" lang="zh-TW" dirty="0">
+                <a:solidFill>
+                  <a:srgbClr val="000000"/>
+                </a:solidFill>
+                <a:latin typeface="Arial Unicode MS"/>
+                <a:ea typeface="Arial Unicode MS"/>
+                <a:cs typeface="Arial Unicode MS"/>
+              </a:rPr>
+              <a:t>：小小的誤差一直累加，橫向誤差跟時間的平方成正比，所以 IMU 只能補衛星定位短短的空檔，不能單獨用。注意表上有兩種感測器量的是「自己」，不是外面的東西：</a:t>
+            </a:r>
+            <a:r>
+              <a:rPr sz="1600" b="1" lang="zh-TW" dirty="0">
+                <a:solidFill>
+                  <a:srgbClr val="000000"/>
+                </a:solidFill>
+                <a:latin typeface="Arial Unicode MS"/>
+                <a:ea typeface="Arial Unicode MS"/>
+                <a:cs typeface="Arial Unicode MS"/>
+              </a:rPr>
+              <a:t>衛星定位和 IMU</a:t>
+            </a:r>
+            <a:r>
+              <a:rPr sz="1600" lang="zh-TW" dirty="0">
+                <a:solidFill>
+                  <a:srgbClr val="000000"/>
+                </a:solidFill>
+                <a:latin typeface="Arial Unicode MS"/>
+                <a:ea typeface="Arial Unicode MS"/>
+                <a:cs typeface="Arial Unicode MS"/>
+              </a:rPr>
+              <a:t>。
 </a:t>
             </a:r>
           </a:p>
@@ -18565,7 +18675,7 @@
       </p:nvGrpSpPr>
       <p:grpSpPr>
         <a:xfrm>
-          <a:off x="389746" y="0"/>
+          <a:off x="607982" y="0"/>
           <a:ext cx="1" cy="1"/>
           <a:chOff x="0" y="0"/>
           <a:chExt cx="0" cy="0"/>
@@ -18579,8 +18689,8 @@
         </p:nvSpPr>
         <p:spPr>
           <a:xfrm>
-            <a:off x="849794" y="267664"/>
-            <a:ext cx="7444411" cy="769535"/>
+            <a:off x="1044024" y="253697"/>
+            <a:ext cx="7055952" cy="729379"/>
           </a:xfrm>
           <a:prstGeom prst="rect">
             <a:avLst/>
@@ -18599,7 +18709,7 @@
               <a:buNone/>
             </a:pPr>
             <a:r>
-              <a:rPr lang="en-US" sz="2010" b="1" dirty="0">
+              <a:rPr lang="en-US" sz="1910" b="1" dirty="0">
                 <a:solidFill>
                   <a:srgbClr val="0B1F3A"/>
                 </a:solidFill>
@@ -18607,9 +18717,9 @@
                 <a:ea typeface="Arial" pitchFamily="34" charset="-122"/>
                 <a:cs typeface="Arial" pitchFamily="34" charset="-120"/>
               </a:rPr>
-              <a:t>Tuần 3: sáu loại cảm biến đo trực tiếp cái gì</a:t>
-            </a:r>
-            <a:endParaRPr lang="en-US" sz="2010" dirty="0"/>
+              <a:t>Tuần 3 + tuần 6: mỗi cảm biến đo trực tiếp cái gì</a:t>
+            </a:r>
+            <a:endParaRPr lang="en-US" sz="1910" dirty="0"/>
           </a:p>
           <a:p>
             <a:pPr indent="0" marL="0">
@@ -18619,7 +18729,7 @@
               <a:buNone/>
             </a:pPr>
             <a:r>
-              <a:rPr lang="en-US" sz="1230" dirty="0">
+              <a:rPr lang="en-US" sz="1170" dirty="0">
                 <a:solidFill>
                   <a:srgbClr val="5F7183"/>
                 </a:solidFill>
@@ -18627,9 +18737,9 @@
                 <a:ea typeface="微軟正黑體" pitchFamily="34" charset="-122"/>
                 <a:cs typeface="微軟正黑體" pitchFamily="34" charset="-120"/>
               </a:rPr>
-              <a:t>第三週：六種感測器，直接量到什麼</a:t>
-            </a:r>
-            <a:endParaRPr lang="en-US" sz="2010" dirty="0"/>
+              <a:t>第三週＋第六週：每種感測器直接量到什麼</a:t>
+            </a:r>
+            <a:endParaRPr lang="en-US" sz="1910" dirty="0"/>
           </a:p>
         </p:txBody>
       </p:sp>
@@ -18648,20 +18758,20 @@
           </p:nvPr>
         </p:nvGraphicFramePr>
         <p:xfrm>
-          <a:off x="849794" y="1037199"/>
-          <a:ext cx="7444411" cy="836451"/>
+          <a:off x="1044024" y="983076"/>
+          <a:ext cx="7055952" cy="792804"/>
         </p:xfrm>
         <a:graphic>
           <a:graphicData uri="http://schemas.openxmlformats.org/drawingml/2006/table">
             <a:tbl>
               <a:tblPr/>
               <a:tblGrid>
-                <a:gridCol w="1338321"/>
-                <a:gridCol w="2174772"/>
-                <a:gridCol w="1756546"/>
-                <a:gridCol w="2174772"/>
+                <a:gridCol w="1268486"/>
+                <a:gridCol w="2061289"/>
+                <a:gridCol w="1664887"/>
+                <a:gridCol w="2061289"/>
               </a:tblGrid>
-              <a:tr h="301122">
+              <a:tr h="261625">
                 <a:tc>
                   <a:txBody>
                     <a:bodyPr/>
@@ -18671,7 +18781,7 @@
                         <a:buNone/>
                       </a:pPr>
                       <a:r>
-                        <a:rPr lang="en-US" sz="960" b="1" dirty="0">
+                        <a:rPr lang="en-US" sz="870" b="1" dirty="0">
                           <a:solidFill>
                             <a:srgbClr val="FFFFFF"/>
                           </a:solidFill>
@@ -18681,14 +18791,14 @@
                         </a:rPr>
                         <a:t>Cảm biến</a:t>
                       </a:r>
-                      <a:endParaRPr lang="en-US" sz="1100" dirty="0"/>
-                    </a:p>
-                    <a:p>
-                      <a:pPr algn="l" indent="0" marL="0">
-                        <a:buNone/>
-                      </a:pPr>
-                      <a:r>
-                        <a:rPr lang="en-US" sz="820" dirty="0">
+                      <a:endParaRPr lang="en-US" sz="1040" dirty="0"/>
+                    </a:p>
+                    <a:p>
+                      <a:pPr algn="l" indent="0" marL="0">
+                        <a:buNone/>
+                      </a:pPr>
+                      <a:r>
+                        <a:rPr lang="en-US" sz="740" dirty="0">
                           <a:solidFill>
                             <a:srgbClr val="CFE0EC"/>
                           </a:solidFill>
@@ -18698,7 +18808,7 @@
                         </a:rPr>
                         <a:t>感測器</a:t>
                       </a:r>
-                      <a:endParaRPr lang="en-US" sz="1100" dirty="0"/>
+                      <a:endParaRPr lang="en-US" sz="1040" dirty="0"/>
                     </a:p>
                   </a:txBody>
                   <a:tcPr marL="63500" marR="63500" marT="38100" marB="38100" anchor="ctr">
@@ -18752,7 +18862,7 @@
                         <a:buNone/>
                       </a:pPr>
                       <a:r>
-                        <a:rPr lang="en-US" sz="960" b="1" dirty="0">
+                        <a:rPr lang="en-US" sz="870" b="1" dirty="0">
                           <a:solidFill>
                             <a:srgbClr val="FFFFFF"/>
                           </a:solidFill>
@@ -18762,14 +18872,14 @@
                         </a:rPr>
                         <a:t>Đo trực tiếp</a:t>
                       </a:r>
-                      <a:endParaRPr lang="en-US" sz="1100" dirty="0"/>
-                    </a:p>
-                    <a:p>
-                      <a:pPr algn="l" indent="0" marL="0">
-                        <a:buNone/>
-                      </a:pPr>
-                      <a:r>
-                        <a:rPr lang="en-US" sz="820" dirty="0">
+                      <a:endParaRPr lang="en-US" sz="1040" dirty="0"/>
+                    </a:p>
+                    <a:p>
+                      <a:pPr algn="l" indent="0" marL="0">
+                        <a:buNone/>
+                      </a:pPr>
+                      <a:r>
+                        <a:rPr lang="en-US" sz="740" dirty="0">
                           <a:solidFill>
                             <a:srgbClr val="CFE0EC"/>
                           </a:solidFill>
@@ -18779,7 +18889,7 @@
                         </a:rPr>
                         <a:t>直接量到</a:t>
                       </a:r>
-                      <a:endParaRPr lang="en-US" sz="1100" dirty="0"/>
+                      <a:endParaRPr lang="en-US" sz="1040" dirty="0"/>
                     </a:p>
                   </a:txBody>
                   <a:tcPr marL="63500" marR="63500" marT="38100" marB="38100" anchor="ctr">
@@ -18833,7 +18943,7 @@
                         <a:buNone/>
                       </a:pPr>
                       <a:r>
-                        <a:rPr lang="en-US" sz="960" b="1" dirty="0">
+                        <a:rPr lang="en-US" sz="870" b="1" dirty="0">
                           <a:solidFill>
                             <a:srgbClr val="FFFFFF"/>
                           </a:solidFill>
@@ -18843,14 +18953,14 @@
                         </a:rPr>
                         <a:t>Tầm (trời nắng, giá trị lớp học)</a:t>
                       </a:r>
-                      <a:endParaRPr lang="en-US" sz="1100" dirty="0"/>
-                    </a:p>
-                    <a:p>
-                      <a:pPr algn="l" indent="0" marL="0">
-                        <a:buNone/>
-                      </a:pPr>
-                      <a:r>
-                        <a:rPr lang="en-US" sz="820" dirty="0">
+                      <a:endParaRPr lang="en-US" sz="1040" dirty="0"/>
+                    </a:p>
+                    <a:p>
+                      <a:pPr algn="l" indent="0" marL="0">
+                        <a:buNone/>
+                      </a:pPr>
+                      <a:r>
+                        <a:rPr lang="en-US" sz="740" dirty="0">
                           <a:solidFill>
                             <a:srgbClr val="CFE0EC"/>
                           </a:solidFill>
@@ -18860,7 +18970,7 @@
                         </a:rPr>
                         <a:t>有效距離（晴天，課堂設定）</a:t>
                       </a:r>
-                      <a:endParaRPr lang="en-US" sz="1100" dirty="0"/>
+                      <a:endParaRPr lang="en-US" sz="1040" dirty="0"/>
                     </a:p>
                   </a:txBody>
                   <a:tcPr marL="63500" marR="63500" marT="38100" marB="38100" anchor="ctr">
@@ -18914,7 +19024,7 @@
                         <a:buNone/>
                       </a:pPr>
                       <a:r>
-                        <a:rPr lang="en-US" sz="960" b="1" dirty="0">
+                        <a:rPr lang="en-US" sz="870" b="1" dirty="0">
                           <a:solidFill>
                             <a:srgbClr val="FFFFFF"/>
                           </a:solidFill>
@@ -18924,14 +19034,14 @@
                         </a:rPr>
                         <a:t>Điểm yếu</a:t>
                       </a:r>
-                      <a:endParaRPr lang="en-US" sz="1100" dirty="0"/>
-                    </a:p>
-                    <a:p>
-                      <a:pPr algn="l" indent="0" marL="0">
-                        <a:buNone/>
-                      </a:pPr>
-                      <a:r>
-                        <a:rPr lang="en-US" sz="820" dirty="0">
+                      <a:endParaRPr lang="en-US" sz="1040" dirty="0"/>
+                    </a:p>
+                    <a:p>
+                      <a:pPr algn="l" indent="0" marL="0">
+                        <a:buNone/>
+                      </a:pPr>
+                      <a:r>
+                        <a:rPr lang="en-US" sz="740" dirty="0">
                           <a:solidFill>
                             <a:srgbClr val="CFE0EC"/>
                           </a:solidFill>
@@ -18941,7 +19051,7 @@
                         </a:rPr>
                         <a:t>弱點</a:t>
                       </a:r>
-                      <a:endParaRPr lang="en-US" sz="1100" dirty="0"/>
+                      <a:endParaRPr lang="en-US" sz="1040" dirty="0"/>
                     </a:p>
                   </a:txBody>
                   <a:tcPr marL="63500" marR="63500" marT="38100" marB="38100" anchor="ctr">
@@ -18987,7 +19097,7 @@
                   </a:tcPr>
                 </a:tc>
               </a:tr>
-              <a:tr h="301122">
+              <a:tr h="261625">
                 <a:tc>
                   <a:txBody>
                     <a:bodyPr/>
@@ -18997,7 +19107,7 @@
                         <a:buNone/>
                       </a:pPr>
                       <a:r>
-                        <a:rPr lang="en-US" sz="960" b="1" dirty="0">
+                        <a:rPr lang="en-US" sz="870" b="1" dirty="0">
                           <a:solidFill>
                             <a:srgbClr val="0B1F3A"/>
                           </a:solidFill>
@@ -19007,14 +19117,14 @@
                         </a:rPr>
                         <a:t>Camera</a:t>
                       </a:r>
-                      <a:endParaRPr lang="en-US" sz="1100" dirty="0"/>
-                    </a:p>
-                    <a:p>
-                      <a:pPr algn="l" indent="0" marL="0">
-                        <a:buNone/>
-                      </a:pPr>
-                      <a:r>
-                        <a:rPr lang="en-US" sz="820" dirty="0">
+                      <a:endParaRPr lang="en-US" sz="1040" dirty="0"/>
+                    </a:p>
+                    <a:p>
+                      <a:pPr algn="l" indent="0" marL="0">
+                        <a:buNone/>
+                      </a:pPr>
+                      <a:r>
+                        <a:rPr lang="en-US" sz="740" dirty="0">
                           <a:solidFill>
                             <a:srgbClr val="5F7183"/>
                           </a:solidFill>
@@ -19024,7 +19134,7 @@
                         </a:rPr>
                         <a:t>相機</a:t>
                       </a:r>
-                      <a:endParaRPr lang="en-US" sz="1100" dirty="0"/>
+                      <a:endParaRPr lang="en-US" sz="1040" dirty="0"/>
                     </a:p>
                   </a:txBody>
                   <a:tcPr marL="63500" marR="63500" marT="38100" marB="38100" anchor="ctr">
@@ -19075,7 +19185,7 @@
                         <a:buNone/>
                       </a:pPr>
                       <a:r>
-                        <a:rPr lang="en-US" sz="960" dirty="0">
+                        <a:rPr lang="en-US" sz="870" dirty="0">
                           <a:solidFill>
                             <a:srgbClr val="1A2733"/>
                           </a:solidFill>
@@ -19085,14 +19195,14 @@
                         </a:rPr>
                         <a:t>Góc, độ sáng, màu</a:t>
                       </a:r>
-                      <a:endParaRPr lang="en-US" sz="1100" dirty="0"/>
-                    </a:p>
-                    <a:p>
-                      <a:pPr algn="l" indent="0" marL="0">
-                        <a:buNone/>
-                      </a:pPr>
-                      <a:r>
-                        <a:rPr lang="en-US" sz="820" dirty="0">
+                      <a:endParaRPr lang="en-US" sz="1040" dirty="0"/>
+                    </a:p>
+                    <a:p>
+                      <a:pPr algn="l" indent="0" marL="0">
+                        <a:buNone/>
+                      </a:pPr>
+                      <a:r>
+                        <a:rPr lang="en-US" sz="740" dirty="0">
                           <a:solidFill>
                             <a:srgbClr val="5F7183"/>
                           </a:solidFill>
@@ -19102,7 +19212,7 @@
                         </a:rPr>
                         <a:t>角度、亮度、顏色</a:t>
                       </a:r>
-                      <a:endParaRPr lang="en-US" sz="1100" dirty="0"/>
+                      <a:endParaRPr lang="en-US" sz="1040" dirty="0"/>
                     </a:p>
                   </a:txBody>
                   <a:tcPr marL="63500" marR="63500" marT="38100" marB="38100" anchor="ctr">
@@ -19153,7 +19263,7 @@
                         <a:buNone/>
                       </a:pPr>
                       <a:r>
-                        <a:rPr lang="en-US" sz="960" dirty="0">
+                        <a:rPr lang="en-US" sz="870" dirty="0">
                           <a:solidFill>
                             <a:srgbClr val="1A2733"/>
                           </a:solidFill>
@@ -19163,7 +19273,7 @@
                         </a:rPr>
                         <a:t>80 m</a:t>
                       </a:r>
-                      <a:endParaRPr lang="en-US" sz="1100" dirty="0"/>
+                      <a:endParaRPr lang="en-US" sz="1040" dirty="0"/>
                     </a:p>
                   </a:txBody>
                   <a:tcPr marL="63500" marR="63500" marT="38100" marB="38100" anchor="ctr">
@@ -19214,7 +19324,7 @@
                         <a:buNone/>
                       </a:pPr>
                       <a:r>
-                        <a:rPr lang="en-US" sz="960" dirty="0">
+                        <a:rPr lang="en-US" sz="870" dirty="0">
                           <a:solidFill>
                             <a:srgbClr val="1A2733"/>
                           </a:solidFill>
@@ -19224,14 +19334,14 @@
                         </a:rPr>
                         <a:t>Khoảng cách là đoán; sợ tối, mưa</a:t>
                       </a:r>
-                      <a:endParaRPr lang="en-US" sz="1100" dirty="0"/>
-                    </a:p>
-                    <a:p>
-                      <a:pPr algn="l" indent="0" marL="0">
-                        <a:buNone/>
-                      </a:pPr>
-                      <a:r>
-                        <a:rPr lang="en-US" sz="820" dirty="0">
+                      <a:endParaRPr lang="en-US" sz="1040" dirty="0"/>
+                    </a:p>
+                    <a:p>
+                      <a:pPr algn="l" indent="0" marL="0">
+                        <a:buNone/>
+                      </a:pPr>
+                      <a:r>
+                        <a:rPr lang="en-US" sz="740" dirty="0">
                           <a:solidFill>
                             <a:srgbClr val="5F7183"/>
                           </a:solidFill>
@@ -19241,7 +19351,7 @@
                         </a:rPr>
                         <a:t>距離是算的；怕暗、怕雨</a:t>
                       </a:r>
-                      <a:endParaRPr lang="en-US" sz="1100" dirty="0"/>
+                      <a:endParaRPr lang="en-US" sz="1040" dirty="0"/>
                     </a:p>
                   </a:txBody>
                   <a:tcPr marL="63500" marR="63500" marT="38100" marB="38100" anchor="ctr">
@@ -19284,7 +19394,7 @@
                   </a:tcPr>
                 </a:tc>
               </a:tr>
-              <a:tr h="301122">
+              <a:tr h="261625">
                 <a:tc>
                   <a:txBody>
                     <a:bodyPr/>
@@ -19294,7 +19404,7 @@
                         <a:buNone/>
                       </a:pPr>
                       <a:r>
-                        <a:rPr lang="en-US" sz="960" b="1" dirty="0">
+                        <a:rPr lang="en-US" sz="870" b="1" dirty="0">
                           <a:solidFill>
                             <a:srgbClr val="0B1F3A"/>
                           </a:solidFill>
@@ -19304,14 +19414,14 @@
                         </a:rPr>
                         <a:t>Lidar</a:t>
                       </a:r>
-                      <a:endParaRPr lang="en-US" sz="1100" dirty="0"/>
-                    </a:p>
-                    <a:p>
-                      <a:pPr algn="l" indent="0" marL="0">
-                        <a:buNone/>
-                      </a:pPr>
-                      <a:r>
-                        <a:rPr lang="en-US" sz="820" dirty="0">
+                      <a:endParaRPr lang="en-US" sz="1040" dirty="0"/>
+                    </a:p>
+                    <a:p>
+                      <a:pPr algn="l" indent="0" marL="0">
+                        <a:buNone/>
+                      </a:pPr>
+                      <a:r>
+                        <a:rPr lang="en-US" sz="740" dirty="0">
                           <a:solidFill>
                             <a:srgbClr val="5F7183"/>
                           </a:solidFill>
@@ -19321,7 +19431,7 @@
                         </a:rPr>
                         <a:t>光達</a:t>
                       </a:r>
-                      <a:endParaRPr lang="en-US" sz="1100" dirty="0"/>
+                      <a:endParaRPr lang="en-US" sz="1040" dirty="0"/>
                     </a:p>
                   </a:txBody>
                   <a:tcPr marL="63500" marR="63500" marT="38100" marB="38100" anchor="ctr">
@@ -19372,7 +19482,7 @@
                         <a:buNone/>
                       </a:pPr>
                       <a:r>
-                        <a:rPr lang="en-US" sz="960" dirty="0">
+                        <a:rPr lang="en-US" sz="870" dirty="0">
                           <a:solidFill>
                             <a:srgbClr val="1A2733"/>
                           </a:solidFill>
@@ -19382,14 +19492,14 @@
                         </a:rPr>
                         <a:t>Khoảng cách (thời gian bay)</a:t>
                       </a:r>
-                      <a:endParaRPr lang="en-US" sz="1100" dirty="0"/>
-                    </a:p>
-                    <a:p>
-                      <a:pPr algn="l" indent="0" marL="0">
-                        <a:buNone/>
-                      </a:pPr>
-                      <a:r>
-                        <a:rPr lang="en-US" sz="820" dirty="0">
+                      <a:endParaRPr lang="en-US" sz="1040" dirty="0"/>
+                    </a:p>
+                    <a:p>
+                      <a:pPr algn="l" indent="0" marL="0">
+                        <a:buNone/>
+                      </a:pPr>
+                      <a:r>
+                        <a:rPr lang="en-US" sz="740" dirty="0">
                           <a:solidFill>
                             <a:srgbClr val="5F7183"/>
                           </a:solidFill>
@@ -19399,7 +19509,7 @@
                         </a:rPr>
                         <a:t>距離（飛行時間）</a:t>
                       </a:r>
-                      <a:endParaRPr lang="en-US" sz="1100" dirty="0"/>
+                      <a:endParaRPr lang="en-US" sz="1040" dirty="0"/>
                     </a:p>
                   </a:txBody>
                   <a:tcPr marL="63500" marR="63500" marT="38100" marB="38100" anchor="ctr">
@@ -19450,7 +19560,7 @@
                         <a:buNone/>
                       </a:pPr>
                       <a:r>
-                        <a:rPr lang="en-US" sz="960" dirty="0">
+                        <a:rPr lang="en-US" sz="870" dirty="0">
                           <a:solidFill>
                             <a:srgbClr val="1A2733"/>
                           </a:solidFill>
@@ -19460,7 +19570,7 @@
                         </a:rPr>
                         <a:t>100 m</a:t>
                       </a:r>
-                      <a:endParaRPr lang="en-US" sz="1100" dirty="0"/>
+                      <a:endParaRPr lang="en-US" sz="1040" dirty="0"/>
                     </a:p>
                   </a:txBody>
                   <a:tcPr marL="63500" marR="63500" marT="38100" marB="38100" anchor="ctr">
@@ -19511,7 +19621,7 @@
                         <a:buNone/>
                       </a:pPr>
                       <a:r>
-                        <a:rPr lang="en-US" sz="960" dirty="0">
+                        <a:rPr lang="en-US" sz="870" dirty="0">
                           <a:solidFill>
                             <a:srgbClr val="1A2733"/>
                           </a:solidFill>
@@ -19521,14 +19631,14 @@
                         </a:rPr>
                         <a:t>Xa thì thưa; không biết «là gì»</a:t>
                       </a:r>
-                      <a:endParaRPr lang="en-US" sz="1100" dirty="0"/>
-                    </a:p>
-                    <a:p>
-                      <a:pPr algn="l" indent="0" marL="0">
-                        <a:buNone/>
-                      </a:pPr>
-                      <a:r>
-                        <a:rPr lang="en-US" sz="820" dirty="0">
+                      <a:endParaRPr lang="en-US" sz="1040" dirty="0"/>
+                    </a:p>
+                    <a:p>
+                      <a:pPr algn="l" indent="0" marL="0">
+                        <a:buNone/>
+                      </a:pPr>
+                      <a:r>
+                        <a:rPr lang="en-US" sz="740" dirty="0">
                           <a:solidFill>
                             <a:srgbClr val="5F7183"/>
                           </a:solidFill>
@@ -19538,7 +19648,7 @@
                         </a:rPr>
                         <a:t>一遠就稀；不知道是什麼</a:t>
                       </a:r>
-                      <a:endParaRPr lang="en-US" sz="1100" dirty="0"/>
+                      <a:endParaRPr lang="en-US" sz="1040" dirty="0"/>
                     </a:p>
                   </a:txBody>
                   <a:tcPr marL="63500" marR="63500" marT="38100" marB="38100" anchor="ctr">
@@ -19581,7 +19691,7 @@
                   </a:tcPr>
                 </a:tc>
               </a:tr>
-              <a:tr h="301122">
+              <a:tr h="261625">
                 <a:tc>
                   <a:txBody>
                     <a:bodyPr/>
@@ -19591,7 +19701,7 @@
                         <a:buNone/>
                       </a:pPr>
                       <a:r>
-                        <a:rPr lang="en-US" sz="960" b="1" dirty="0">
+                        <a:rPr lang="en-US" sz="870" b="1" dirty="0">
                           <a:solidFill>
                             <a:srgbClr val="0B1F3A"/>
                           </a:solidFill>
@@ -19601,14 +19711,14 @@
                         </a:rPr>
                         <a:t>Radar</a:t>
                       </a:r>
-                      <a:endParaRPr lang="en-US" sz="1100" dirty="0"/>
-                    </a:p>
-                    <a:p>
-                      <a:pPr algn="l" indent="0" marL="0">
-                        <a:buNone/>
-                      </a:pPr>
-                      <a:r>
-                        <a:rPr lang="en-US" sz="820" dirty="0">
+                      <a:endParaRPr lang="en-US" sz="1040" dirty="0"/>
+                    </a:p>
+                    <a:p>
+                      <a:pPr algn="l" indent="0" marL="0">
+                        <a:buNone/>
+                      </a:pPr>
+                      <a:r>
+                        <a:rPr lang="en-US" sz="740" dirty="0">
                           <a:solidFill>
                             <a:srgbClr val="5F7183"/>
                           </a:solidFill>
@@ -19618,7 +19728,7 @@
                         </a:rPr>
                         <a:t>雷達</a:t>
                       </a:r>
-                      <a:endParaRPr lang="en-US" sz="1100" dirty="0"/>
+                      <a:endParaRPr lang="en-US" sz="1040" dirty="0"/>
                     </a:p>
                   </a:txBody>
                   <a:tcPr marL="63500" marR="63500" marT="38100" marB="38100" anchor="ctr">
@@ -19669,7 +19779,7 @@
                         <a:buNone/>
                       </a:pPr>
                       <a:r>
-                        <a:rPr lang="en-US" sz="960" dirty="0">
+                        <a:rPr lang="en-US" sz="870" dirty="0">
                           <a:solidFill>
                             <a:srgbClr val="1A2733"/>
                           </a:solidFill>
@@ -19679,14 +19789,14 @@
                         </a:rPr>
                         <a:t>Khoảng cách + tốc độ hướng tâm</a:t>
                       </a:r>
-                      <a:endParaRPr lang="en-US" sz="1100" dirty="0"/>
-                    </a:p>
-                    <a:p>
-                      <a:pPr algn="l" indent="0" marL="0">
-                        <a:buNone/>
-                      </a:pPr>
-                      <a:r>
-                        <a:rPr lang="en-US" sz="820" dirty="0">
+                      <a:endParaRPr lang="en-US" sz="1040" dirty="0"/>
+                    </a:p>
+                    <a:p>
+                      <a:pPr algn="l" indent="0" marL="0">
+                        <a:buNone/>
+                      </a:pPr>
+                      <a:r>
+                        <a:rPr lang="en-US" sz="740" dirty="0">
                           <a:solidFill>
                             <a:srgbClr val="5F7183"/>
                           </a:solidFill>
@@ -19696,7 +19806,7 @@
                         </a:rPr>
                         <a:t>距離＋朝自己的速度</a:t>
                       </a:r>
-                      <a:endParaRPr lang="en-US" sz="1100" dirty="0"/>
+                      <a:endParaRPr lang="en-US" sz="1040" dirty="0"/>
                     </a:p>
                   </a:txBody>
                   <a:tcPr marL="63500" marR="63500" marT="38100" marB="38100" anchor="ctr">
@@ -19747,7 +19857,7 @@
                         <a:buNone/>
                       </a:pPr>
                       <a:r>
-                        <a:rPr lang="en-US" sz="960" dirty="0">
+                        <a:rPr lang="en-US" sz="870" dirty="0">
                           <a:solidFill>
                             <a:srgbClr val="1A2733"/>
                           </a:solidFill>
@@ -19757,7 +19867,7 @@
                         </a:rPr>
                         <a:t>250 m</a:t>
                       </a:r>
-                      <a:endParaRPr lang="en-US" sz="1100" dirty="0"/>
+                      <a:endParaRPr lang="en-US" sz="1040" dirty="0"/>
                     </a:p>
                   </a:txBody>
                   <a:tcPr marL="63500" marR="63500" marT="38100" marB="38100" anchor="ctr">
@@ -19808,7 +19918,7 @@
                         <a:buNone/>
                       </a:pPr>
                       <a:r>
-                        <a:rPr lang="en-US" sz="960" dirty="0">
+                        <a:rPr lang="en-US" sz="870" dirty="0">
                           <a:solidFill>
                             <a:srgbClr val="1A2733"/>
                           </a:solidFill>
@@ -19818,14 +19928,14 @@
                         </a:rPr>
                         <a:t>Góc thô; ít bắt người, xe máy</a:t>
                       </a:r>
-                      <a:endParaRPr lang="en-US" sz="1100" dirty="0"/>
-                    </a:p>
-                    <a:p>
-                      <a:pPr algn="l" indent="0" marL="0">
-                        <a:buNone/>
-                      </a:pPr>
-                      <a:r>
-                        <a:rPr lang="en-US" sz="820" dirty="0">
+                      <a:endParaRPr lang="en-US" sz="1040" dirty="0"/>
+                    </a:p>
+                    <a:p>
+                      <a:pPr algn="l" indent="0" marL="0">
+                        <a:buNone/>
+                      </a:pPr>
+                      <a:r>
+                        <a:rPr lang="en-US" sz="740" dirty="0">
                           <a:solidFill>
                             <a:srgbClr val="5F7183"/>
                           </a:solidFill>
@@ -19835,7 +19945,7 @@
                         </a:rPr>
                         <a:t>角度粗；抓不太到人、機車</a:t>
                       </a:r>
-                      <a:endParaRPr lang="en-US" sz="1100" dirty="0"/>
+                      <a:endParaRPr lang="en-US" sz="1040" dirty="0"/>
                     </a:p>
                   </a:txBody>
                   <a:tcPr marL="63500" marR="63500" marT="38100" marB="38100" anchor="ctr">
@@ -19878,7 +19988,7 @@
                   </a:tcPr>
                 </a:tc>
               </a:tr>
-              <a:tr h="301122">
+              <a:tr h="261625">
                 <a:tc>
                   <a:txBody>
                     <a:bodyPr/>
@@ -19888,7 +19998,7 @@
                         <a:buNone/>
                       </a:pPr>
                       <a:r>
-                        <a:rPr lang="en-US" sz="960" b="1" dirty="0">
+                        <a:rPr lang="en-US" sz="870" b="1" dirty="0">
                           <a:solidFill>
                             <a:srgbClr val="0B1F3A"/>
                           </a:solidFill>
@@ -19898,14 +20008,14 @@
                         </a:rPr>
                         <a:t>Siêu âm</a:t>
                       </a:r>
-                      <a:endParaRPr lang="en-US" sz="1100" dirty="0"/>
-                    </a:p>
-                    <a:p>
-                      <a:pPr algn="l" indent="0" marL="0">
-                        <a:buNone/>
-                      </a:pPr>
-                      <a:r>
-                        <a:rPr lang="en-US" sz="820" dirty="0">
+                      <a:endParaRPr lang="en-US" sz="1040" dirty="0"/>
+                    </a:p>
+                    <a:p>
+                      <a:pPr algn="l" indent="0" marL="0">
+                        <a:buNone/>
+                      </a:pPr>
+                      <a:r>
+                        <a:rPr lang="en-US" sz="740" dirty="0">
                           <a:solidFill>
                             <a:srgbClr val="5F7183"/>
                           </a:solidFill>
@@ -19915,7 +20025,7 @@
                         </a:rPr>
                         <a:t>超音波</a:t>
                       </a:r>
-                      <a:endParaRPr lang="en-US" sz="1100" dirty="0"/>
+                      <a:endParaRPr lang="en-US" sz="1040" dirty="0"/>
                     </a:p>
                   </a:txBody>
                   <a:tcPr marL="63500" marR="63500" marT="38100" marB="38100" anchor="ctr">
@@ -19966,7 +20076,7 @@
                         <a:buNone/>
                       </a:pPr>
                       <a:r>
-                        <a:rPr lang="en-US" sz="960" dirty="0">
+                        <a:rPr lang="en-US" sz="870" dirty="0">
                           <a:solidFill>
                             <a:srgbClr val="1A2733"/>
                           </a:solidFill>
@@ -19976,14 +20086,14 @@
                         </a:rPr>
                         <a:t>Khoảng cách</a:t>
                       </a:r>
-                      <a:endParaRPr lang="en-US" sz="1100" dirty="0"/>
-                    </a:p>
-                    <a:p>
-                      <a:pPr algn="l" indent="0" marL="0">
-                        <a:buNone/>
-                      </a:pPr>
-                      <a:r>
-                        <a:rPr lang="en-US" sz="820" dirty="0">
+                      <a:endParaRPr lang="en-US" sz="1040" dirty="0"/>
+                    </a:p>
+                    <a:p>
+                      <a:pPr algn="l" indent="0" marL="0">
+                        <a:buNone/>
+                      </a:pPr>
+                      <a:r>
+                        <a:rPr lang="en-US" sz="740" dirty="0">
                           <a:solidFill>
                             <a:srgbClr val="5F7183"/>
                           </a:solidFill>
@@ -19993,7 +20103,7 @@
                         </a:rPr>
                         <a:t>距離</a:t>
                       </a:r>
-                      <a:endParaRPr lang="en-US" sz="1100" dirty="0"/>
+                      <a:endParaRPr lang="en-US" sz="1040" dirty="0"/>
                     </a:p>
                   </a:txBody>
                   <a:tcPr marL="63500" marR="63500" marT="38100" marB="38100" anchor="ctr">
@@ -20044,7 +20154,7 @@
                         <a:buNone/>
                       </a:pPr>
                       <a:r>
-                        <a:rPr lang="en-US" sz="960" dirty="0">
+                        <a:rPr lang="en-US" sz="870" dirty="0">
                           <a:solidFill>
                             <a:srgbClr val="1A2733"/>
                           </a:solidFill>
@@ -20054,7 +20164,7 @@
                         </a:rPr>
                         <a:t>4.5 m</a:t>
                       </a:r>
-                      <a:endParaRPr lang="en-US" sz="1100" dirty="0"/>
+                      <a:endParaRPr lang="en-US" sz="1040" dirty="0"/>
                     </a:p>
                   </a:txBody>
                   <a:tcPr marL="63500" marR="63500" marT="38100" marB="38100" anchor="ctr">
@@ -20105,7 +20215,7 @@
                         <a:buNone/>
                       </a:pPr>
                       <a:r>
-                        <a:rPr lang="en-US" sz="960" dirty="0">
+                        <a:rPr lang="en-US" sz="870" dirty="0">
                           <a:solidFill>
                             <a:srgbClr val="1A2733"/>
                           </a:solidFill>
@@ -20115,14 +20225,14 @@
                         </a:rPr>
                         <a:t>Chỉ gần</a:t>
                       </a:r>
-                      <a:endParaRPr lang="en-US" sz="1100" dirty="0"/>
-                    </a:p>
-                    <a:p>
-                      <a:pPr algn="l" indent="0" marL="0">
-                        <a:buNone/>
-                      </a:pPr>
-                      <a:r>
-                        <a:rPr lang="en-US" sz="820" dirty="0">
+                      <a:endParaRPr lang="en-US" sz="1040" dirty="0"/>
+                    </a:p>
+                    <a:p>
+                      <a:pPr algn="l" indent="0" marL="0">
+                        <a:buNone/>
+                      </a:pPr>
+                      <a:r>
+                        <a:rPr lang="en-US" sz="740" dirty="0">
                           <a:solidFill>
                             <a:srgbClr val="5F7183"/>
                           </a:solidFill>
@@ -20132,7 +20242,7 @@
                         </a:rPr>
                         <a:t>只看近處</a:t>
                       </a:r>
-                      <a:endParaRPr lang="en-US" sz="1100" dirty="0"/>
+                      <a:endParaRPr lang="en-US" sz="1040" dirty="0"/>
                     </a:p>
                   </a:txBody>
                   <a:tcPr marL="63500" marR="63500" marT="38100" marB="38100" anchor="ctr">
@@ -20175,7 +20285,7 @@
                   </a:tcPr>
                 </a:tc>
               </a:tr>
-              <a:tr h="301122">
+              <a:tr h="261625">
                 <a:tc>
                   <a:txBody>
                     <a:bodyPr/>
@@ -20185,7 +20295,7 @@
                         <a:buNone/>
                       </a:pPr>
                       <a:r>
-                        <a:rPr lang="en-US" sz="960" b="1" dirty="0">
+                        <a:rPr lang="en-US" sz="870" b="1" dirty="0">
                           <a:solidFill>
                             <a:srgbClr val="0B1F3A"/>
                           </a:solidFill>
@@ -20195,14 +20305,14 @@
                         </a:rPr>
                         <a:t>GNSS</a:t>
                       </a:r>
-                      <a:endParaRPr lang="en-US" sz="1100" dirty="0"/>
-                    </a:p>
-                    <a:p>
-                      <a:pPr algn="l" indent="0" marL="0">
-                        <a:buNone/>
-                      </a:pPr>
-                      <a:r>
-                        <a:rPr lang="en-US" sz="820" dirty="0">
+                      <a:endParaRPr lang="en-US" sz="1040" dirty="0"/>
+                    </a:p>
+                    <a:p>
+                      <a:pPr algn="l" indent="0" marL="0">
+                        <a:buNone/>
+                      </a:pPr>
+                      <a:r>
+                        <a:rPr lang="en-US" sz="740" dirty="0">
                           <a:solidFill>
                             <a:srgbClr val="5F7183"/>
                           </a:solidFill>
@@ -20212,7 +20322,7 @@
                         </a:rPr>
                         <a:t>衛星定位</a:t>
                       </a:r>
-                      <a:endParaRPr lang="en-US" sz="1100" dirty="0"/>
+                      <a:endParaRPr lang="en-US" sz="1040" dirty="0"/>
                     </a:p>
                   </a:txBody>
                   <a:tcPr marL="63500" marR="63500" marT="38100" marB="38100" anchor="ctr">
@@ -20263,7 +20373,7 @@
                         <a:buNone/>
                       </a:pPr>
                       <a:r>
-                        <a:rPr lang="en-US" sz="960" dirty="0">
+                        <a:rPr lang="en-US" sz="870" dirty="0">
                           <a:solidFill>
                             <a:srgbClr val="1A2733"/>
                           </a:solidFill>
@@ -20273,14 +20383,14 @@
                         </a:rPr>
                         <a:t>Toạ độ của chính mình</a:t>
                       </a:r>
-                      <a:endParaRPr lang="en-US" sz="1100" dirty="0"/>
-                    </a:p>
-                    <a:p>
-                      <a:pPr algn="l" indent="0" marL="0">
-                        <a:buNone/>
-                      </a:pPr>
-                      <a:r>
-                        <a:rPr lang="en-US" sz="820" dirty="0">
+                      <a:endParaRPr lang="en-US" sz="1040" dirty="0"/>
+                    </a:p>
+                    <a:p>
+                      <a:pPr algn="l" indent="0" marL="0">
+                        <a:buNone/>
+                      </a:pPr>
+                      <a:r>
+                        <a:rPr lang="en-US" sz="740" dirty="0">
                           <a:solidFill>
                             <a:srgbClr val="5F7183"/>
                           </a:solidFill>
@@ -20290,7 +20400,7 @@
                         </a:rPr>
                         <a:t>自己的座標</a:t>
                       </a:r>
-                      <a:endParaRPr lang="en-US" sz="1100" dirty="0"/>
+                      <a:endParaRPr lang="en-US" sz="1040" dirty="0"/>
                     </a:p>
                   </a:txBody>
                   <a:tcPr marL="63500" marR="63500" marT="38100" marB="38100" anchor="ctr">
@@ -20341,7 +20451,7 @@
                         <a:buNone/>
                       </a:pPr>
                       <a:r>
-                        <a:rPr lang="en-US" sz="960" dirty="0">
+                        <a:rPr lang="en-US" sz="870" dirty="0">
                           <a:solidFill>
                             <a:srgbClr val="1A2733"/>
                           </a:solidFill>
@@ -20351,7 +20461,7 @@
                         </a:rPr>
                         <a:t>±2.5 m</a:t>
                       </a:r>
-                      <a:endParaRPr lang="en-US" sz="1100" dirty="0"/>
+                      <a:endParaRPr lang="en-US" sz="1040" dirty="0"/>
                     </a:p>
                   </a:txBody>
                   <a:tcPr marL="63500" marR="63500" marT="38100" marB="38100" anchor="ctr">
@@ -20402,7 +20512,7 @@
                         <a:buNone/>
                       </a:pPr>
                       <a:r>
-                        <a:rPr lang="en-US" sz="960" dirty="0">
+                        <a:rPr lang="en-US" sz="870" dirty="0">
                           <a:solidFill>
                             <a:srgbClr val="1A2733"/>
                           </a:solidFill>
@@ -20412,14 +20522,14 @@
                         </a:rPr>
                         <a:t>Không biết phía trước có gì; hầm thì mất</a:t>
                       </a:r>
-                      <a:endParaRPr lang="en-US" sz="1100" dirty="0"/>
-                    </a:p>
-                    <a:p>
-                      <a:pPr algn="l" indent="0" marL="0">
-                        <a:buNone/>
-                      </a:pPr>
-                      <a:r>
-                        <a:rPr lang="en-US" sz="820" dirty="0">
+                      <a:endParaRPr lang="en-US" sz="1040" dirty="0"/>
+                    </a:p>
+                    <a:p>
+                      <a:pPr algn="l" indent="0" marL="0">
+                        <a:buNone/>
+                      </a:pPr>
+                      <a:r>
+                        <a:rPr lang="en-US" sz="740" dirty="0">
                           <a:solidFill>
                             <a:srgbClr val="5F7183"/>
                           </a:solidFill>
@@ -20429,7 +20539,7 @@
                         </a:rPr>
                         <a:t>不知道前面有什麼；隧道沒訊號</a:t>
                       </a:r>
-                      <a:endParaRPr lang="en-US" sz="1100" dirty="0"/>
+                      <a:endParaRPr lang="en-US" sz="1040" dirty="0"/>
                     </a:p>
                   </a:txBody>
                   <a:tcPr marL="63500" marR="63500" marT="38100" marB="38100" anchor="ctr">
@@ -20472,7 +20582,7 @@
                   </a:tcPr>
                 </a:tc>
               </a:tr>
-              <a:tr h="301122">
+              <a:tr h="261625">
                 <a:tc>
                   <a:txBody>
                     <a:bodyPr/>
@@ -20482,7 +20592,7 @@
                         <a:buNone/>
                       </a:pPr>
                       <a:r>
-                        <a:rPr lang="en-US" sz="960" b="1" dirty="0">
+                        <a:rPr lang="en-US" sz="870" b="1" dirty="0">
                           <a:solidFill>
                             <a:srgbClr val="0B1F3A"/>
                           </a:solidFill>
@@ -20492,14 +20602,14 @@
                         </a:rPr>
                         <a:t>Camera nhiệt</a:t>
                       </a:r>
-                      <a:endParaRPr lang="en-US" sz="1100" dirty="0"/>
-                    </a:p>
-                    <a:p>
-                      <a:pPr algn="l" indent="0" marL="0">
-                        <a:buNone/>
-                      </a:pPr>
-                      <a:r>
-                        <a:rPr lang="en-US" sz="820" dirty="0">
+                      <a:endParaRPr lang="en-US" sz="1040" dirty="0"/>
+                    </a:p>
+                    <a:p>
+                      <a:pPr algn="l" indent="0" marL="0">
+                        <a:buNone/>
+                      </a:pPr>
+                      <a:r>
+                        <a:rPr lang="en-US" sz="740" dirty="0">
                           <a:solidFill>
                             <a:srgbClr val="5F7183"/>
                           </a:solidFill>
@@ -20509,7 +20619,7 @@
                         </a:rPr>
                         <a:t>熱像</a:t>
                       </a:r>
-                      <a:endParaRPr lang="en-US" sz="1100" dirty="0"/>
+                      <a:endParaRPr lang="en-US" sz="1040" dirty="0"/>
                     </a:p>
                   </a:txBody>
                   <a:tcPr marL="63500" marR="63500" marT="38100" marB="38100" anchor="ctr">
@@ -20560,7 +20670,7 @@
                         <a:buNone/>
                       </a:pPr>
                       <a:r>
-                        <a:rPr lang="en-US" sz="960" dirty="0">
+                        <a:rPr lang="en-US" sz="870" dirty="0">
                           <a:solidFill>
                             <a:srgbClr val="1A2733"/>
                           </a:solidFill>
@@ -20570,14 +20680,14 @@
                         </a:rPr>
                         <a:t>Chênh lệch nhiệt độ</a:t>
                       </a:r>
-                      <a:endParaRPr lang="en-US" sz="1100" dirty="0"/>
-                    </a:p>
-                    <a:p>
-                      <a:pPr algn="l" indent="0" marL="0">
-                        <a:buNone/>
-                      </a:pPr>
-                      <a:r>
-                        <a:rPr lang="en-US" sz="820" dirty="0">
+                      <a:endParaRPr lang="en-US" sz="1040" dirty="0"/>
+                    </a:p>
+                    <a:p>
+                      <a:pPr algn="l" indent="0" marL="0">
+                        <a:buNone/>
+                      </a:pPr>
+                      <a:r>
+                        <a:rPr lang="en-US" sz="740" dirty="0">
                           <a:solidFill>
                             <a:srgbClr val="5F7183"/>
                           </a:solidFill>
@@ -20587,7 +20697,7 @@
                         </a:rPr>
                         <a:t>溫度差</a:t>
                       </a:r>
-                      <a:endParaRPr lang="en-US" sz="1100" dirty="0"/>
+                      <a:endParaRPr lang="en-US" sz="1040" dirty="0"/>
                     </a:p>
                   </a:txBody>
                   <a:tcPr marL="63500" marR="63500" marT="38100" marB="38100" anchor="ctr">
@@ -20638,7 +20748,7 @@
                         <a:buNone/>
                       </a:pPr>
                       <a:r>
-                        <a:rPr lang="en-US" sz="960" dirty="0">
+                        <a:rPr lang="en-US" sz="870" dirty="0">
                           <a:solidFill>
                             <a:srgbClr val="1A2733"/>
                           </a:solidFill>
@@ -20648,7 +20758,7 @@
                         </a:rPr>
                         <a:t>150 m</a:t>
                       </a:r>
-                      <a:endParaRPr lang="en-US" sz="1100" dirty="0"/>
+                      <a:endParaRPr lang="en-US" sz="1040" dirty="0"/>
                     </a:p>
                   </a:txBody>
                   <a:tcPr marL="63500" marR="63500" marT="38100" marB="38100" anchor="ctr">
@@ -20699,7 +20809,7 @@
                         <a:buNone/>
                       </a:pPr>
                       <a:r>
-                        <a:rPr lang="en-US" sz="960" dirty="0">
+                        <a:rPr lang="en-US" sz="870" dirty="0">
                           <a:solidFill>
                             <a:srgbClr val="1A2733"/>
                           </a:solidFill>
@@ -20709,14 +20819,14 @@
                         </a:rPr>
                         <a:t>Độ phân giải thấp</a:t>
                       </a:r>
-                      <a:endParaRPr lang="en-US" sz="1100" dirty="0"/>
-                    </a:p>
-                    <a:p>
-                      <a:pPr algn="l" indent="0" marL="0">
-                        <a:buNone/>
-                      </a:pPr>
-                      <a:r>
-                        <a:rPr lang="en-US" sz="820" dirty="0">
+                      <a:endParaRPr lang="en-US" sz="1040" dirty="0"/>
+                    </a:p>
+                    <a:p>
+                      <a:pPr algn="l" indent="0" marL="0">
+                        <a:buNone/>
+                      </a:pPr>
+                      <a:r>
+                        <a:rPr lang="en-US" sz="740" dirty="0">
                           <a:solidFill>
                             <a:srgbClr val="5F7183"/>
                           </a:solidFill>
@@ -20726,7 +20836,304 @@
                         </a:rPr>
                         <a:t>解析度低</a:t>
                       </a:r>
-                      <a:endParaRPr lang="en-US" sz="1100" dirty="0"/>
+                      <a:endParaRPr lang="en-US" sz="1040" dirty="0"/>
+                    </a:p>
+                  </a:txBody>
+                  <a:tcPr marL="63500" marR="63500" marT="38100" marB="38100" anchor="ctr">
+                    <a:lnL w="6350" cap="flat" cmpd="sng" algn="ctr">
+                      <a:solidFill>
+                        <a:srgbClr val="DBE3EA"/>
+                      </a:solidFill>
+                      <a:prstDash val="solid"/>
+                      <a:round/>
+                      <a:headEnd type="none" w="med" len="med"/>
+                      <a:tailEnd type="none" w="med" len="med"/>
+                    </a:lnL>
+                    <a:lnR w="6350" cap="flat" cmpd="sng" algn="ctr">
+                      <a:solidFill>
+                        <a:srgbClr val="DBE3EA"/>
+                      </a:solidFill>
+                      <a:prstDash val="solid"/>
+                      <a:round/>
+                      <a:headEnd type="none" w="med" len="med"/>
+                      <a:tailEnd type="none" w="med" len="med"/>
+                    </a:lnR>
+                    <a:lnT w="6350" cap="flat" cmpd="sng" algn="ctr">
+                      <a:solidFill>
+                        <a:srgbClr val="DBE3EA"/>
+                      </a:solidFill>
+                      <a:prstDash val="solid"/>
+                      <a:round/>
+                      <a:headEnd type="none" w="med" len="med"/>
+                      <a:tailEnd type="none" w="med" len="med"/>
+                    </a:lnT>
+                    <a:lnB w="6350" cap="flat" cmpd="sng" algn="ctr">
+                      <a:solidFill>
+                        <a:srgbClr val="DBE3EA"/>
+                      </a:solidFill>
+                      <a:prstDash val="solid"/>
+                      <a:round/>
+                      <a:headEnd type="none" w="med" len="med"/>
+                      <a:tailEnd type="none" w="med" len="med"/>
+                    </a:lnB>
+                  </a:tcPr>
+                </a:tc>
+              </a:tr>
+              <a:tr h="261625">
+                <a:tc>
+                  <a:txBody>
+                    <a:bodyPr/>
+                    <a:lstStyle/>
+                    <a:p>
+                      <a:pPr algn="l" indent="0" marL="0">
+                        <a:buNone/>
+                      </a:pPr>
+                      <a:r>
+                        <a:rPr lang="en-US" sz="870" b="1" dirty="0">
+                          <a:solidFill>
+                            <a:srgbClr val="0B1F3A"/>
+                          </a:solidFill>
+                          <a:latin typeface="Arial" pitchFamily="34" charset="0"/>
+                          <a:ea typeface="Arial" pitchFamily="34" charset="-122"/>
+                          <a:cs typeface="Arial" pitchFamily="34" charset="-120"/>
+                        </a:rPr>
+                        <a:t>IMU (tuần 6)</a:t>
+                      </a:r>
+                      <a:endParaRPr lang="en-US" sz="1040" dirty="0"/>
+                    </a:p>
+                    <a:p>
+                      <a:pPr algn="l" indent="0" marL="0">
+                        <a:buNone/>
+                      </a:pPr>
+                      <a:r>
+                        <a:rPr lang="en-US" sz="740" dirty="0">
+                          <a:solidFill>
+                            <a:srgbClr val="5F7183"/>
+                          </a:solidFill>
+                          <a:latin typeface="微軟正黑體" pitchFamily="34" charset="0"/>
+                          <a:ea typeface="微軟正黑體" pitchFamily="34" charset="-122"/>
+                          <a:cs typeface="微軟正黑體" pitchFamily="34" charset="-120"/>
+                        </a:rPr>
+                        <a:t>IMU（第六週）</a:t>
+                      </a:r>
+                      <a:endParaRPr lang="en-US" sz="1040" dirty="0"/>
+                    </a:p>
+                  </a:txBody>
+                  <a:tcPr marL="63500" marR="63500" marT="38100" marB="38100" anchor="ctr">
+                    <a:lnL w="6350" cap="flat" cmpd="sng" algn="ctr">
+                      <a:solidFill>
+                        <a:srgbClr val="DBE3EA"/>
+                      </a:solidFill>
+                      <a:prstDash val="solid"/>
+                      <a:round/>
+                      <a:headEnd type="none" w="med" len="med"/>
+                      <a:tailEnd type="none" w="med" len="med"/>
+                    </a:lnL>
+                    <a:lnR w="6350" cap="flat" cmpd="sng" algn="ctr">
+                      <a:solidFill>
+                        <a:srgbClr val="DBE3EA"/>
+                      </a:solidFill>
+                      <a:prstDash val="solid"/>
+                      <a:round/>
+                      <a:headEnd type="none" w="med" len="med"/>
+                      <a:tailEnd type="none" w="med" len="med"/>
+                    </a:lnR>
+                    <a:lnT w="6350" cap="flat" cmpd="sng" algn="ctr">
+                      <a:solidFill>
+                        <a:srgbClr val="DBE3EA"/>
+                      </a:solidFill>
+                      <a:prstDash val="solid"/>
+                      <a:round/>
+                      <a:headEnd type="none" w="med" len="med"/>
+                      <a:tailEnd type="none" w="med" len="med"/>
+                    </a:lnT>
+                    <a:lnB w="6350" cap="flat" cmpd="sng" algn="ctr">
+                      <a:solidFill>
+                        <a:srgbClr val="DBE3EA"/>
+                      </a:solidFill>
+                      <a:prstDash val="solid"/>
+                      <a:round/>
+                      <a:headEnd type="none" w="med" len="med"/>
+                      <a:tailEnd type="none" w="med" len="med"/>
+                    </a:lnB>
+                  </a:tcPr>
+                </a:tc>
+                <a:tc>
+                  <a:txBody>
+                    <a:bodyPr/>
+                    <a:lstStyle/>
+                    <a:p>
+                      <a:pPr algn="l" indent="0" marL="0">
+                        <a:buNone/>
+                      </a:pPr>
+                      <a:r>
+                        <a:rPr lang="en-US" sz="870" dirty="0">
+                          <a:solidFill>
+                            <a:srgbClr val="1A2733"/>
+                          </a:solidFill>
+                          <a:latin typeface="Arial" pitchFamily="34" charset="0"/>
+                          <a:ea typeface="Arial" pitchFamily="34" charset="-122"/>
+                          <a:cs typeface="Arial" pitchFamily="34" charset="-120"/>
+                        </a:rPr>
+                        <a:t>Gia tốc, tốc độ quay của chính xe</a:t>
+                      </a:r>
+                      <a:endParaRPr lang="en-US" sz="1040" dirty="0"/>
+                    </a:p>
+                    <a:p>
+                      <a:pPr algn="l" indent="0" marL="0">
+                        <a:buNone/>
+                      </a:pPr>
+                      <a:r>
+                        <a:rPr lang="en-US" sz="740" dirty="0">
+                          <a:solidFill>
+                            <a:srgbClr val="5F7183"/>
+                          </a:solidFill>
+                          <a:latin typeface="微軟正黑體" pitchFamily="34" charset="0"/>
+                          <a:ea typeface="微軟正黑體" pitchFamily="34" charset="-122"/>
+                          <a:cs typeface="微軟正黑體" pitchFamily="34" charset="-120"/>
+                        </a:rPr>
+                        <a:t>自己的加速度、轉多快</a:t>
+                      </a:r>
+                      <a:endParaRPr lang="en-US" sz="1040" dirty="0"/>
+                    </a:p>
+                  </a:txBody>
+                  <a:tcPr marL="63500" marR="63500" marT="38100" marB="38100" anchor="ctr">
+                    <a:lnL w="6350" cap="flat" cmpd="sng" algn="ctr">
+                      <a:solidFill>
+                        <a:srgbClr val="DBE3EA"/>
+                      </a:solidFill>
+                      <a:prstDash val="solid"/>
+                      <a:round/>
+                      <a:headEnd type="none" w="med" len="med"/>
+                      <a:tailEnd type="none" w="med" len="med"/>
+                    </a:lnL>
+                    <a:lnR w="6350" cap="flat" cmpd="sng" algn="ctr">
+                      <a:solidFill>
+                        <a:srgbClr val="DBE3EA"/>
+                      </a:solidFill>
+                      <a:prstDash val="solid"/>
+                      <a:round/>
+                      <a:headEnd type="none" w="med" len="med"/>
+                      <a:tailEnd type="none" w="med" len="med"/>
+                    </a:lnR>
+                    <a:lnT w="6350" cap="flat" cmpd="sng" algn="ctr">
+                      <a:solidFill>
+                        <a:srgbClr val="DBE3EA"/>
+                      </a:solidFill>
+                      <a:prstDash val="solid"/>
+                      <a:round/>
+                      <a:headEnd type="none" w="med" len="med"/>
+                      <a:tailEnd type="none" w="med" len="med"/>
+                    </a:lnT>
+                    <a:lnB w="6350" cap="flat" cmpd="sng" algn="ctr">
+                      <a:solidFill>
+                        <a:srgbClr val="DBE3EA"/>
+                      </a:solidFill>
+                      <a:prstDash val="solid"/>
+                      <a:round/>
+                      <a:headEnd type="none" w="med" len="med"/>
+                      <a:tailEnd type="none" w="med" len="med"/>
+                    </a:lnB>
+                  </a:tcPr>
+                </a:tc>
+                <a:tc>
+                  <a:txBody>
+                    <a:bodyPr/>
+                    <a:lstStyle/>
+                    <a:p>
+                      <a:pPr algn="l" indent="0" marL="0">
+                        <a:buNone/>
+                      </a:pPr>
+                      <a:r>
+                        <a:rPr lang="en-US" sz="870" dirty="0">
+                          <a:solidFill>
+                            <a:srgbClr val="1A2733"/>
+                          </a:solidFill>
+                          <a:latin typeface="Arial" pitchFamily="34" charset="0"/>
+                          <a:ea typeface="Arial" pitchFamily="34" charset="-122"/>
+                          <a:cs typeface="Arial" pitchFamily="34" charset="-120"/>
+                        </a:rPr>
+                        <a:t>—</a:t>
+                      </a:r>
+                      <a:endParaRPr lang="en-US" sz="1040" dirty="0"/>
+                    </a:p>
+                  </a:txBody>
+                  <a:tcPr marL="63500" marR="63500" marT="38100" marB="38100" anchor="ctr">
+                    <a:lnL w="6350" cap="flat" cmpd="sng" algn="ctr">
+                      <a:solidFill>
+                        <a:srgbClr val="DBE3EA"/>
+                      </a:solidFill>
+                      <a:prstDash val="solid"/>
+                      <a:round/>
+                      <a:headEnd type="none" w="med" len="med"/>
+                      <a:tailEnd type="none" w="med" len="med"/>
+                    </a:lnL>
+                    <a:lnR w="6350" cap="flat" cmpd="sng" algn="ctr">
+                      <a:solidFill>
+                        <a:srgbClr val="DBE3EA"/>
+                      </a:solidFill>
+                      <a:prstDash val="solid"/>
+                      <a:round/>
+                      <a:headEnd type="none" w="med" len="med"/>
+                      <a:tailEnd type="none" w="med" len="med"/>
+                    </a:lnR>
+                    <a:lnT w="6350" cap="flat" cmpd="sng" algn="ctr">
+                      <a:solidFill>
+                        <a:srgbClr val="DBE3EA"/>
+                      </a:solidFill>
+                      <a:prstDash val="solid"/>
+                      <a:round/>
+                      <a:headEnd type="none" w="med" len="med"/>
+                      <a:tailEnd type="none" w="med" len="med"/>
+                    </a:lnT>
+                    <a:lnB w="6350" cap="flat" cmpd="sng" algn="ctr">
+                      <a:solidFill>
+                        <a:srgbClr val="DBE3EA"/>
+                      </a:solidFill>
+                      <a:prstDash val="solid"/>
+                      <a:round/>
+                      <a:headEnd type="none" w="med" len="med"/>
+                      <a:tailEnd type="none" w="med" len="med"/>
+                    </a:lnB>
+                  </a:tcPr>
+                </a:tc>
+                <a:tc>
+                  <a:txBody>
+                    <a:bodyPr/>
+                    <a:lstStyle/>
+                    <a:p>
+                      <a:pPr algn="l" indent="0" marL="0">
+                        <a:buNone/>
+                      </a:pPr>
+                      <a:r>
+                        <a:rPr lang="en-US" sz="870" dirty="0">
+                          <a:solidFill>
+                            <a:srgbClr val="1A2733"/>
+                          </a:solidFill>
+                          <a:latin typeface="Arial" pitchFamily="34" charset="0"/>
+                          <a:ea typeface="Arial" pitchFamily="34" charset="-122"/>
+                          <a:cs typeface="Arial" pitchFamily="34" charset="-120"/>
+                        </a:rPr>
+                        <a:t>Trôi: sai số tăng theo t²</a:t>
+                      </a:r>
+                      <a:endParaRPr lang="en-US" sz="1040" dirty="0"/>
+                    </a:p>
+                    <a:p>
+                      <a:pPr algn="l" indent="0" marL="0">
+                        <a:buNone/>
+                      </a:pPr>
+                      <a:r>
+                        <a:rPr lang="en-US" sz="740" dirty="0">
+                          <a:solidFill>
+                            <a:srgbClr val="5F7183"/>
+                          </a:solidFill>
+                          <a:latin typeface="微軟正黑體" pitchFamily="34" charset="0"/>
+                          <a:ea typeface="微軟正黑體" pitchFamily="34" charset="-122"/>
+                          <a:cs typeface="微軟正黑體" pitchFamily="34" charset="-120"/>
+                        </a:rPr>
+                        <a:t>會漂移：誤差跟 t² 變大</a:t>
+                      </a:r>
+                      <a:endParaRPr lang="en-US" sz="1040" dirty="0"/>
                     </a:p>
                   </a:txBody>
                   <a:tcPr marL="63500" marR="63500" marT="38100" marB="38100" anchor="ctr">
@@ -20781,8 +21188,8 @@
         </p:nvSpPr>
         <p:spPr>
           <a:xfrm>
-            <a:off x="849794" y="4210925"/>
-            <a:ext cx="7444411" cy="418225"/>
+            <a:off x="1044024" y="4232748"/>
+            <a:ext cx="7055952" cy="396402"/>
           </a:xfrm>
           <a:prstGeom prst="rect">
             <a:avLst/>
@@ -20801,7 +21208,7 @@
               <a:buNone/>
             </a:pPr>
             <a:r>
-              <a:rPr lang="en-US" sz="1100" b="1" dirty="0">
+              <a:rPr lang="en-US" sz="1040" b="1" dirty="0">
                 <a:solidFill>
                   <a:srgbClr val="007F72"/>
                 </a:solidFill>
@@ -20811,7 +21218,7 @@
               </a:rPr>
               <a:t>Đo được khoảng cách ≠ biết là gì. Chỉ camera đọc được màu đèn giao thông.</a:t>
             </a:r>
-            <a:endParaRPr lang="en-US" sz="1100" dirty="0"/>
+            <a:endParaRPr lang="en-US" sz="1040" dirty="0"/>
           </a:p>
           <a:p>
             <a:pPr indent="0" marL="0">
@@ -20821,7 +21228,7 @@
               <a:buNone/>
             </a:pPr>
             <a:r>
-              <a:rPr lang="en-US" sz="1010" dirty="0">
+              <a:rPr lang="en-US" sz="950" dirty="0">
                 <a:solidFill>
                   <a:srgbClr val="007F72"/>
                 </a:solidFill>
@@ -20831,7 +21238,7 @@
               </a:rPr>
               <a:t>量得到距離≠知道是什麼。只有相機讀得出紅綠燈的顏色。</a:t>
             </a:r>
-            <a:endParaRPr lang="en-US" sz="1100" dirty="0"/>
+            <a:endParaRPr lang="en-US" sz="1040" dirty="0"/>
           </a:p>
         </p:txBody>
       </p:sp>
@@ -20867,8 +21274,8 @@
         </p:nvSpPr>
         <p:spPr>
           <a:xfrm>
-            <a:off x="490121" y="117103"/>
-            <a:ext cx="752806" cy="234206"/>
+            <a:off x="703119" y="110992"/>
+            <a:ext cx="713523" cy="221985"/>
           </a:xfrm>
           <a:prstGeom prst="rect">
             <a:avLst/>
@@ -20884,7 +21291,7 @@
               <a:buNone/>
             </a:pPr>
             <a:r>
-              <a:rPr lang="en-US" sz="820" dirty="0">
+              <a:rPr lang="en-US" sz="780" dirty="0">
                 <a:solidFill>
                   <a:srgbClr val="5F7183"/>
                 </a:solidFill>
@@ -20894,7 +21301,7 @@
               </a:rPr>
               <a:t>6 / 15</a:t>
             </a:r>
-            <a:endParaRPr lang="en-US" sz="820" dirty="0"/>
+            <a:endParaRPr lang="en-US" sz="780" dirty="0"/>
           </a:p>
         </p:txBody>
       </p:sp>
@@ -20906,8 +21313,8 @@
         </p:nvSpPr>
         <p:spPr>
           <a:xfrm>
-            <a:off x="1268020" y="117103"/>
-            <a:ext cx="1840192" cy="234206"/>
+            <a:off x="1440426" y="110992"/>
+            <a:ext cx="1744168" cy="221985"/>
           </a:xfrm>
           <a:prstGeom prst="rect">
             <a:avLst/>
@@ -20923,7 +21330,7 @@
               <a:buNone/>
             </a:pPr>
             <a:r>
-              <a:rPr lang="en-US" sz="820" dirty="0">
+              <a:rPr lang="en-US" sz="780" dirty="0">
                 <a:solidFill>
                   <a:srgbClr val="5F7183"/>
                 </a:solidFill>
@@ -20933,7 +21340,7 @@
               </a:rPr>
               <a:t>Tiết 3 · 第 3 節</a:t>
             </a:r>
-            <a:endParaRPr lang="en-US" sz="820" dirty="0"/>
+            <a:endParaRPr lang="en-US" sz="780" dirty="0"/>
           </a:p>
         </p:txBody>
       </p:sp>

--- a/第八週(10-29)/第八週_第3節_簡報.pptx
+++ b/第八週(10-29)/第八週_第3節_簡報.pptx
@@ -2817,11 +2817,11 @@
                 <a:spcPts val="0"/>
               </a:spcBef>
               <a:spcAft>
-                <a:spcPts val="233"/>
+                <a:spcPts val="133"/>
               </a:spcAft>
             </a:pPr>
             <a:r>
-              <a:rPr sz="1400" b="1" lang="zh-TW" dirty="0">
+              <a:rPr sz="800" b="1" lang="zh-TW" dirty="0">
                 <a:solidFill>
                   <a:srgbClr val="000000"/>
                 </a:solidFill>
@@ -2832,7 +2832,7 @@
               <a:t>這一張的目的：</a:t>
             </a:r>
             <a:r>
-              <a:rPr sz="1400" lang="zh-TW" dirty="0">
+              <a:rPr sz="800" lang="zh-TW" dirty="0">
                 <a:solidFill>
                   <a:srgbClr val="000000"/>
                 </a:solidFill>
@@ -2840,7 +2840,7 @@
                 <a:ea typeface="Arial Unicode MS"/>
                 <a:cs typeface="Arial Unicode MS"/>
               </a:rPr>
-              <a:t>讓大家先看到整個地圖：八週，每週一句話，等一下再一週一週展開。
+              <a:t>讓大家先看到整個地圖：八週，每週一句話；每一句都說得出意思、舉得出例子、記得住那一週的關鍵數字，期中考就有一半的把握。
 </a:t>
             </a:r>
           </a:p>
@@ -2850,11 +2850,11 @@
                 <a:spcPts val="0"/>
               </a:spcBef>
               <a:spcAft>
-                <a:spcPts val="233"/>
+                <a:spcPts val="133"/>
               </a:spcAft>
             </a:pPr>
             <a:r>
-              <a:rPr sz="1400" lang="zh-TW" dirty="0">
+              <a:rPr sz="800" b="1" lang="zh-TW" dirty="0">
                 <a:solidFill>
                   <a:srgbClr val="000000"/>
                 </a:solidFill>
@@ -2862,7 +2862,62 @@
                 <a:ea typeface="Arial Unicode MS"/>
                 <a:cs typeface="Arial Unicode MS"/>
               </a:rPr>
-              <a:t>這張表是整個期中考的地圖。每一週一句話，我從上往下唸一次。
+              <a:t>第一週：等級講的是分工，不是能力。</a:t>
+            </a:r>
+            <a:r>
+              <a:rPr sz="800" lang="zh-TW" dirty="0">
+                <a:solidFill>
+                  <a:srgbClr val="000000"/>
+                </a:solidFill>
+                <a:latin typeface="Arial Unicode MS"/>
+                <a:ea typeface="Arial Unicode MS"/>
+                <a:cs typeface="Arial Unicode MS"/>
+              </a:rPr>
+              <a:t>SAE 的 L0 到 L5，問的不是「這台車多聰明」，而是「開車這件事，人和系統怎麼分工」：方向和速度誰在控制、誰負責看路、出狀況誰接手。舉個例子：自動緊急煞車（AEB）的技術很厲害，快撞上的時候自己煞得住，可是它只在最後那一瞬間出手，平常完全不管開車，所以是 </a:t>
+            </a:r>
+            <a:r>
+              <a:rPr sz="800" b="1" lang="zh-TW" dirty="0">
+                <a:solidFill>
+                  <a:srgbClr val="000000"/>
+                </a:solidFill>
+                <a:latin typeface="Arial Unicode MS"/>
+                <a:ea typeface="Arial Unicode MS"/>
+                <a:cs typeface="Arial Unicode MS"/>
+              </a:rPr>
+              <a:t>L0</a:t>
+            </a:r>
+            <a:r>
+              <a:rPr sz="800" lang="zh-TW" dirty="0">
+                <a:solidFill>
+                  <a:srgbClr val="000000"/>
+                </a:solidFill>
+                <a:latin typeface="Arial Unicode MS"/>
+                <a:ea typeface="Arial Unicode MS"/>
+                <a:cs typeface="Arial Unicode MS"/>
+              </a:rPr>
+              <a:t>，不是 L1。反過來，一台車可以自己置中、跟車，聽起來很先進，但只要人必須一直看路，就是 </a:t>
+            </a:r>
+            <a:r>
+              <a:rPr sz="800" b="1" lang="zh-TW" dirty="0">
+                <a:solidFill>
+                  <a:srgbClr val="000000"/>
+                </a:solidFill>
+                <a:latin typeface="Arial Unicode MS"/>
+                <a:ea typeface="Arial Unicode MS"/>
+                <a:cs typeface="Arial Unicode MS"/>
+              </a:rPr>
+              <a:t>L2</a:t>
+            </a:r>
+            <a:r>
+              <a:rPr sz="800" lang="zh-TW" dirty="0">
+                <a:solidFill>
+                  <a:srgbClr val="000000"/>
+                </a:solidFill>
+                <a:latin typeface="Arial Unicode MS"/>
+                <a:ea typeface="Arial Unicode MS"/>
+                <a:cs typeface="Arial Unicode MS"/>
+              </a:rPr>
+              <a:t>；車主買的 Tesla FSD（Supervised）就是 L2。判斷三步驟：瞬間還是持續？管一項還是兩項？誰看路、誰接手？最常見的誤會是「等級愈高愈好」「L2+ 是正式等級」，都不對。
 </a:t>
             </a:r>
           </a:p>
@@ -2872,11 +2927,11 @@
                 <a:spcPts val="0"/>
               </a:spcBef>
               <a:spcAft>
-                <a:spcPts val="233"/>
+                <a:spcPts val="133"/>
               </a:spcAft>
             </a:pPr>
             <a:r>
-              <a:rPr sz="1400" lang="zh-TW" dirty="0">
+              <a:rPr sz="800" b="1" lang="zh-TW" dirty="0">
                 <a:solidFill>
                   <a:srgbClr val="000000"/>
                 </a:solidFill>
@@ -2884,10 +2939,10 @@
                 <a:ea typeface="Arial Unicode MS"/>
                 <a:cs typeface="Arial Unicode MS"/>
               </a:rPr>
-              <a:t>第一週：</a:t>
-            </a:r>
-            <a:r>
-              <a:rPr sz="1400" b="1" lang="zh-TW" dirty="0">
+              <a:t>第二週：「至少」是下限；雷達量的是朝自己那一段的速度。</a:t>
+            </a:r>
+            <a:r>
+              <a:rPr sz="800" lang="zh-TW" dirty="0">
                 <a:solidFill>
                   <a:srgbClr val="000000"/>
                 </a:solidFill>
@@ -2895,10 +2950,10 @@
                 <a:ea typeface="Arial Unicode MS"/>
                 <a:cs typeface="Arial Unicode MS"/>
               </a:rPr>
-              <a:t>等級講的是分工，不是能力。</a:t>
-            </a:r>
-            <a:r>
-              <a:rPr sz="1400" lang="zh-TW" dirty="0">
+              <a:t>這句話講兩件事。第一件是讀 ODD 條件。「照度至少 20 lx」，意思是低於 20 就出了 ODD；現場 5 lx，不能說「5 比 20 小，沒超過，所以符合」，方向看反了。單位也要看清楚：mm/h 是雨下多大，lx 是亮不亮。第二件是雷達量速度的方式。雷達用都卜勒效應，只量得到東西</a:t>
+            </a:r>
+            <a:r>
+              <a:rPr sz="800" b="1" lang="zh-TW" dirty="0">
                 <a:solidFill>
                   <a:srgbClr val="000000"/>
                 </a:solidFill>
@@ -2906,7 +2961,18 @@
                 <a:ea typeface="Arial Unicode MS"/>
                 <a:cs typeface="Arial Unicode MS"/>
               </a:rPr>
-              <a:t>
+              <a:t>朝自己靠近或遠離</a:t>
+            </a:r>
+            <a:r>
+              <a:rPr sz="800" lang="zh-TW" dirty="0">
+                <a:solidFill>
+                  <a:srgbClr val="000000"/>
+                </a:solidFill>
+                <a:latin typeface="Arial Unicode MS"/>
+                <a:ea typeface="Arial Unicode MS"/>
+                <a:cs typeface="Arial Unicode MS"/>
+              </a:rPr>
+              <a:t>的那一段速度。一台車從正前方橫著開過去，雷達量到的接近 0；上週觀察台那台黑色轎車，其實時速 22，雷達量到 ≈0，就是這個原因。
 </a:t>
             </a:r>
           </a:p>
@@ -2916,11 +2982,11 @@
                 <a:spcPts val="0"/>
               </a:spcBef>
               <a:spcAft>
-                <a:spcPts val="233"/>
+                <a:spcPts val="133"/>
               </a:spcAft>
             </a:pPr>
             <a:r>
-              <a:rPr sz="1400" lang="zh-TW" dirty="0">
+              <a:rPr sz="800" b="1" lang="zh-TW" dirty="0">
                 <a:solidFill>
                   <a:srgbClr val="000000"/>
                 </a:solidFill>
@@ -2928,10 +2994,10 @@
                 <a:ea typeface="Arial Unicode MS"/>
                 <a:cs typeface="Arial Unicode MS"/>
               </a:rPr>
-              <a:t>第二週：</a:t>
-            </a:r>
-            <a:r>
-              <a:rPr sz="1400" b="1" lang="zh-TW" dirty="0">
+              <a:t>第三週：量得到距離，不等於知道是什麼；距離兩倍，相機誤差四倍。</a:t>
+            </a:r>
+            <a:r>
+              <a:rPr sz="800" lang="zh-TW" dirty="0">
                 <a:solidFill>
                   <a:srgbClr val="000000"/>
                 </a:solidFill>
@@ -2939,10 +3005,10 @@
                 <a:ea typeface="Arial Unicode MS"/>
                 <a:cs typeface="Arial Unicode MS"/>
               </a:rPr>
-              <a:t>「至少」是下限；雷達量的是朝自己的那一段速度。</a:t>
-            </a:r>
-            <a:r>
-              <a:rPr sz="1400" lang="zh-TW" dirty="0">
+              <a:t>光達打出去的點，每一個都知道多遠，可是光達不知道那一團點是人、是垃圾桶，還是一根柱子，它給的永遠是「未分類的障礙物」。反過來，相機認得出那是人，可是距離是用照片「算」出來的，不是量的。所以第二個數字很重要：相機估距離的誤差，跟距離的</a:t>
+            </a:r>
+            <a:r>
+              <a:rPr sz="800" b="1" lang="zh-TW" dirty="0">
                 <a:solidFill>
                   <a:srgbClr val="000000"/>
                 </a:solidFill>
@@ -2950,7 +3016,18 @@
                 <a:ea typeface="Arial Unicode MS"/>
                 <a:cs typeface="Arial Unicode MS"/>
               </a:rPr>
-              <a:t>
+              <a:t>平方</a:t>
+            </a:r>
+            <a:r>
+              <a:rPr sz="800" lang="zh-TW" dirty="0">
+                <a:solidFill>
+                  <a:srgbClr val="000000"/>
+                </a:solidFill>
+                <a:latin typeface="Arial Unicode MS"/>
+                <a:ea typeface="Arial Unicode MS"/>
+                <a:cs typeface="Arial Unicode MS"/>
+              </a:rPr>
+              <a:t>成正比。二十公尺誤差 ±0.15 公尺，四十公尺就變 ±0.58 公尺，大約四倍。光達也有類似的規則：距離兩倍，打在人身上的點剩四分之一，十公尺 308 點、二十公尺 77 點。就像看遠處的人：愈遠，愈難估他到底離你多遠。
 </a:t>
             </a:r>
           </a:p>
@@ -2960,11 +3037,11 @@
                 <a:spcPts val="0"/>
               </a:spcBef>
               <a:spcAft>
-                <a:spcPts val="233"/>
+                <a:spcPts val="133"/>
               </a:spcAft>
             </a:pPr>
             <a:r>
-              <a:rPr sz="1400" lang="zh-TW" dirty="0">
+              <a:rPr sz="800" b="1" lang="zh-TW" dirty="0">
                 <a:solidFill>
                   <a:srgbClr val="000000"/>
                 </a:solidFill>
@@ -2972,10 +3049,10 @@
                 <a:ea typeface="Arial Unicode MS"/>
                 <a:cs typeface="Arial Unicode MS"/>
               </a:rPr>
-              <a:t>第三週：</a:t>
-            </a:r>
-            <a:r>
-              <a:rPr sz="1400" b="1" lang="zh-TW" dirty="0">
+              <a:t>第四週：時速 50 煞停 20 公尺，至少要看到 25 公尺；模擬是一道篩子。</a:t>
+            </a:r>
+            <a:r>
+              <a:rPr sz="800" lang="zh-TW" dirty="0">
                 <a:solidFill>
                   <a:srgbClr val="000000"/>
                 </a:solidFill>
@@ -2983,10 +3060,10 @@
                 <a:ea typeface="Arial Unicode MS"/>
                 <a:cs typeface="Arial Unicode MS"/>
               </a:rPr>
-              <a:t>量得到距離，不等於知道那是什麼；距離兩倍，相機誤差四倍。</a:t>
-            </a:r>
-            <a:r>
-              <a:rPr sz="1400" lang="zh-TW" dirty="0">
+              <a:t>煞停距離分兩段：反應那 0.3 秒走的路，加上踩煞車到停下來的路。時速 50 是每秒 13.9 公尺，反應 4.2 公尺、煞車 16.1 公尺，合起來大約 20 公尺。感測器至少要看到它的 1.25 倍，25 公尺，這個 1.25 是本課取的餘裕。看到的距離比煞停距離短，就是一定撞。「模擬是篩子」：在模擬器裡過不了的設計，可以先淘汰；可是模擬裡不撞，不代表真車不撞，因為模擬和現實有三種落差：外觀、行為、物理。通過模擬，只是拿到上真車測試的門票。還有，證明安全的單位是</a:t>
+            </a:r>
+            <a:r>
+              <a:rPr sz="800" b="1" lang="zh-TW" dirty="0">
                 <a:solidFill>
                   <a:srgbClr val="000000"/>
                 </a:solidFill>
@@ -2994,7 +3071,18 @@
                 <a:ea typeface="Arial Unicode MS"/>
                 <a:cs typeface="Arial Unicode MS"/>
               </a:rPr>
-              <a:t>
+              <a:t>場景</a:t>
+            </a:r>
+            <a:r>
+              <a:rPr sz="800" lang="zh-TW" dirty="0">
+                <a:solidFill>
+                  <a:srgbClr val="000000"/>
+                </a:solidFill>
+                <a:latin typeface="Arial Unicode MS"/>
+                <a:ea typeface="Arial Unicode MS"/>
+                <a:cs typeface="Arial Unicode MS"/>
+              </a:rPr>
+              <a:t>，不是跑了多少公里。
 </a:t>
             </a:r>
           </a:p>
@@ -3004,11 +3092,11 @@
                 <a:spcPts val="0"/>
               </a:spcBef>
               <a:spcAft>
-                <a:spcPts val="233"/>
+                <a:spcPts val="133"/>
               </a:spcAft>
             </a:pPr>
             <a:r>
-              <a:rPr sz="1400" lang="zh-TW" dirty="0">
+              <a:rPr sz="800" b="1" lang="zh-TW" dirty="0">
                 <a:solidFill>
                   <a:srgbClr val="000000"/>
                 </a:solidFill>
@@ -3016,10 +3104,10 @@
                 <a:ea typeface="Arial Unicode MS"/>
                 <a:cs typeface="Arial Unicode MS"/>
               </a:rPr>
-              <a:t>第四週：</a:t>
-            </a:r>
-            <a:r>
-              <a:rPr sz="1400" b="1" lang="zh-TW" dirty="0">
+              <a:t>第五週：測距要問對多少反射率；差 1 度，50 公尺外差 0.87 公尺。</a:t>
+            </a:r>
+            <a:r>
+              <a:rPr sz="800" lang="zh-TW" dirty="0">
                 <a:solidFill>
                   <a:srgbClr val="000000"/>
                 </a:solidFill>
@@ -3027,10 +3115,10 @@
                 <a:ea typeface="Arial Unicode MS"/>
                 <a:cs typeface="Arial Unicode MS"/>
               </a:rPr>
-              <a:t>時速五十煞停二十公尺，射線至少二十五公尺；模擬是一道篩子。</a:t>
-            </a:r>
-            <a:r>
-              <a:rPr sz="1400" lang="zh-TW" dirty="0">
+              <a:t>規格表寫「測距 170 公尺」，一定要追問：對什麼東西？OS1 對反射率 80% 的白色目標是 170 公尺，對 10% 的黑色目標只有 90 公尺。路上有黑車、穿深色衣服的人，所以設計要用 </a:t>
+            </a:r>
+            <a:r>
+              <a:rPr sz="800" b="1" lang="zh-TW" dirty="0">
                 <a:solidFill>
                   <a:srgbClr val="000000"/>
                 </a:solidFill>
@@ -3038,7 +3126,18 @@
                 <a:ea typeface="Arial Unicode MS"/>
                 <a:cs typeface="Arial Unicode MS"/>
               </a:rPr>
-              <a:t>
+              <a:t>90 公尺</a:t>
+            </a:r>
+            <a:r>
+              <a:rPr sz="800" lang="zh-TW" dirty="0">
+                <a:solidFill>
+                  <a:srgbClr val="000000"/>
+                </a:solidFill>
+                <a:latin typeface="Arial Unicode MS"/>
+                <a:ea typeface="Arial Unicode MS"/>
+                <a:cs typeface="Arial Unicode MS"/>
+              </a:rPr>
+              <a:t>。就像手電筒照白牆和照黑布，看得到的距離差很多。第二個數字講標定：相機和光達的安裝角度差 1 度，50 公尺外就偏 0.87 公尺，快半個車道，而且是橫著偏。所以標定要很準，還要定期重標；nuScenes 收資料的時候，大約每週重標兩次。
 </a:t>
             </a:r>
           </a:p>
@@ -3048,11 +3147,11 @@
                 <a:spcPts val="0"/>
               </a:spcBef>
               <a:spcAft>
-                <a:spcPts val="233"/>
+                <a:spcPts val="133"/>
               </a:spcAft>
             </a:pPr>
             <a:r>
-              <a:rPr sz="1400" lang="zh-TW" dirty="0">
+              <a:rPr sz="800" b="1" lang="zh-TW" dirty="0">
                 <a:solidFill>
                   <a:srgbClr val="000000"/>
                 </a:solidFill>
@@ -3060,10 +3159,10 @@
                 <a:ea typeface="Arial Unicode MS"/>
                 <a:cs typeface="Arial Unicode MS"/>
               </a:rPr>
-              <a:t>第五週：</a:t>
-            </a:r>
-            <a:r>
-              <a:rPr sz="1400" b="1" lang="zh-TW" dirty="0">
+              <a:t>第六週：沒有一種感測器五個情境都贏。</a:t>
+            </a:r>
+            <a:r>
+              <a:rPr sz="800" lang="zh-TW" dirty="0">
                 <a:solidFill>
                   <a:srgbClr val="000000"/>
                 </a:solidFill>
@@ -3071,18 +3170,7 @@
                 <a:ea typeface="Arial Unicode MS"/>
                 <a:cs typeface="Arial Unicode MS"/>
               </a:rPr>
-              <a:t>測距要問對多少反射率；外參差一度，五十公尺外差零點八七公尺。</a:t>
-            </a:r>
-            <a:r>
-              <a:rPr sz="1400" lang="zh-TW" dirty="0">
-                <a:solidFill>
-                  <a:srgbClr val="000000"/>
-                </a:solidFill>
-                <a:latin typeface="Arial Unicode MS"/>
-                <a:ea typeface="Arial Unicode MS"/>
-                <a:cs typeface="Arial Unicode MS"/>
-              </a:rPr>
-              <a:t>
+              <a:t>這是第六週作業 22 格的結論。我們把雷達、超音波、衛星定位、IMU 放進五個情境（校園、河內、國道、停車場、隧道）一格一格判斷：雷達 ARS 408 到了國道，150 公尺外一束有 4.2 公尺寬，比車道還寬，分不出前車在哪一道；超音波只有 5.5 公尺，只在停車場夠用；衛星定位只有開 RTK 的那一顆在校園夠準，進隧道就完全沒訊號；IMU 會漂移，最好的那一顆在隧道也只撐 34 秒，雪山隧道要 580 秒。每一種都有它贏的地方，也都有它輸的地方，所以一台車要裝好幾種。這句話就是第七週融合的起點。
 </a:t>
             </a:r>
           </a:p>
@@ -3092,11 +3180,11 @@
                 <a:spcPts val="0"/>
               </a:spcBef>
               <a:spcAft>
-                <a:spcPts val="233"/>
+                <a:spcPts val="133"/>
               </a:spcAft>
             </a:pPr>
             <a:r>
-              <a:rPr sz="1400" lang="zh-TW" dirty="0">
+              <a:rPr sz="800" b="1" lang="zh-TW" dirty="0">
                 <a:solidFill>
                   <a:srgbClr val="000000"/>
                 </a:solidFill>
@@ -3104,10 +3192,10 @@
                 <a:ea typeface="Arial Unicode MS"/>
                 <a:cs typeface="Arial Unicode MS"/>
               </a:rPr>
-              <a:t>第六週：</a:t>
-            </a:r>
-            <a:r>
-              <a:rPr sz="1400" b="1" lang="zh-TW" dirty="0">
+              <a:t>第七週：每一種都會壞；合起來的時候，比較準的多相信一點。</a:t>
+            </a:r>
+            <a:r>
+              <a:rPr sz="800" lang="zh-TW" dirty="0">
                 <a:solidFill>
                   <a:srgbClr val="000000"/>
                 </a:solidFill>
@@ -3115,10 +3203,10 @@
                 <a:ea typeface="Arial Unicode MS"/>
                 <a:cs typeface="Arial Unicode MS"/>
               </a:rPr>
-              <a:t>沒有一種感測器五個情境都贏。</a:t>
-            </a:r>
-            <a:r>
-              <a:rPr sz="1400" lang="zh-TW" dirty="0">
+              <a:t>失效對照表上，</a:t>
+            </a:r>
+            <a:r>
+              <a:rPr sz="800" b="1" lang="zh-TW" dirty="0">
                 <a:solidFill>
                   <a:srgbClr val="000000"/>
                 </a:solidFill>
@@ -3126,7 +3214,40 @@
                 <a:ea typeface="Arial Unicode MS"/>
                 <a:cs typeface="Arial Unicode MS"/>
               </a:rPr>
-              <a:t>
+              <a:t>沒有一欄全是勾</a:t>
+            </a:r>
+            <a:r>
+              <a:rPr sz="800" lang="zh-TW" dirty="0">
+                <a:solidFill>
+                  <a:srgbClr val="000000"/>
+                </a:solidFill>
+                <a:latin typeface="Arial Unicode MS"/>
+                <a:ea typeface="Arial Unicode MS"/>
+                <a:cs typeface="Arial Unicode MS"/>
+              </a:rPr>
+              <a:t>：雨害相機，遠處的行人害雷達，隧道害衛星定位。壞法有三種，最危險的是「看不到卻說沒事」，就像油表壞了卻一直顯示滿格。既然每一種都會壞，就要合起來，叫融合。合的時候不是平均，而是</a:t>
+            </a:r>
+            <a:r>
+              <a:rPr sz="800" b="1" lang="zh-TW" dirty="0">
+                <a:solidFill>
+                  <a:srgbClr val="000000"/>
+                </a:solidFill>
+                <a:latin typeface="Arial Unicode MS"/>
+                <a:ea typeface="Arial Unicode MS"/>
+                <a:cs typeface="Arial Unicode MS"/>
+              </a:rPr>
+              <a:t>比較準的多相信一點</a:t>
+            </a:r>
+            <a:r>
+              <a:rPr sz="800" lang="zh-TW" dirty="0">
+                <a:solidFill>
+                  <a:srgbClr val="000000"/>
+                </a:solidFill>
+                <a:latin typeface="Arial Unicode MS"/>
+                <a:ea typeface="Arial Unicode MS"/>
+                <a:cs typeface="Arial Unicode MS"/>
+              </a:rPr>
+              <a:t>：IMU 說 120 公尺（誤差 1），GPS 說 118 公尺（誤差 3），誤差差 3 倍，信任差 9 倍，合起來是 119.8 公尺。就像問路，問到兩個人，一個是住在附近的、一個是剛來的觀光客，你會比較相信住在附近的那個，但也不會完全不聽觀光客的。
 </a:t>
             </a:r>
           </a:p>
@@ -3136,11 +3257,11 @@
                 <a:spcPts val="0"/>
               </a:spcBef>
               <a:spcAft>
-                <a:spcPts val="233"/>
+                <a:spcPts val="133"/>
               </a:spcAft>
             </a:pPr>
             <a:r>
-              <a:rPr sz="1400" lang="zh-TW" dirty="0">
+              <a:rPr sz="800" b="1" lang="zh-TW" dirty="0">
                 <a:solidFill>
                   <a:srgbClr val="000000"/>
                 </a:solidFill>
@@ -3148,10 +3269,10 @@
                 <a:ea typeface="Arial Unicode MS"/>
                 <a:cs typeface="Arial Unicode MS"/>
               </a:rPr>
-              <a:t>第七週：</a:t>
-            </a:r>
-            <a:r>
-              <a:rPr sz="1400" b="1" lang="zh-TW" dirty="0">
+              <a:t>第八週：模型從例子學；給框、類別、分數；一遠、一暗就漏。</a:t>
+            </a:r>
+            <a:r>
+              <a:rPr sz="800" lang="zh-TW" dirty="0">
                 <a:solidFill>
                   <a:srgbClr val="000000"/>
                 </a:solidFill>
@@ -3159,10 +3280,10 @@
                 <a:ea typeface="Arial Unicode MS"/>
                 <a:cs typeface="Arial Unicode MS"/>
               </a:rPr>
-              <a:t>每一種都會壞；合起來的時候，比較準的多相信一點。</a:t>
-            </a:r>
-            <a:r>
-              <a:rPr sz="1400" lang="zh-TW" dirty="0">
+              <a:t>電腦認車、認人，不是靠人寫規則，是看很多有標準答案的照片學出來的：猜、對答案、改一點點，重複很多次。所以標準答案，也就是標註，非常重要。學好的偵測模型，對每個東西給三樣：</a:t>
+            </a:r>
+            <a:r>
+              <a:rPr sz="800" b="1" lang="zh-TW" dirty="0">
                 <a:solidFill>
                   <a:srgbClr val="000000"/>
                 </a:solidFill>
@@ -3170,7 +3291,62 @@
                 <a:ea typeface="Arial Unicode MS"/>
                 <a:cs typeface="Arial Unicode MS"/>
               </a:rPr>
-              <a:t>
+              <a:t>框</a:t>
+            </a:r>
+            <a:r>
+              <a:rPr sz="800" lang="zh-TW" dirty="0">
+                <a:solidFill>
+                  <a:srgbClr val="000000"/>
+                </a:solidFill>
+                <a:latin typeface="Arial Unicode MS"/>
+                <a:ea typeface="Arial Unicode MS"/>
+                <a:cs typeface="Arial Unicode MS"/>
+              </a:rPr>
+              <a:t>（在照片的哪裡）、</a:t>
+            </a:r>
+            <a:r>
+              <a:rPr sz="800" b="1" lang="zh-TW" dirty="0">
+                <a:solidFill>
+                  <a:srgbClr val="000000"/>
+                </a:solidFill>
+                <a:latin typeface="Arial Unicode MS"/>
+                <a:ea typeface="Arial Unicode MS"/>
+                <a:cs typeface="Arial Unicode MS"/>
+              </a:rPr>
+              <a:t>類別</a:t>
+            </a:r>
+            <a:r>
+              <a:rPr sz="800" lang="zh-TW" dirty="0">
+                <a:solidFill>
+                  <a:srgbClr val="000000"/>
+                </a:solidFill>
+                <a:latin typeface="Arial Unicode MS"/>
+                <a:ea typeface="Arial Unicode MS"/>
+                <a:cs typeface="Arial Unicode MS"/>
+              </a:rPr>
+              <a:t>（是什麼）、</a:t>
+            </a:r>
+            <a:r>
+              <a:rPr sz="800" b="1" lang="zh-TW" dirty="0">
+                <a:solidFill>
+                  <a:srgbClr val="000000"/>
+                </a:solidFill>
+                <a:latin typeface="Arial Unicode MS"/>
+                <a:ea typeface="Arial Unicode MS"/>
+                <a:cs typeface="Arial Unicode MS"/>
+              </a:rPr>
+              <a:t>分數</a:t>
+            </a:r>
+            <a:r>
+              <a:rPr sz="800" lang="zh-TW" dirty="0">
+                <a:solidFill>
+                  <a:srgbClr val="000000"/>
+                </a:solidFill>
+                <a:latin typeface="Arial Unicode MS"/>
+                <a:ea typeface="Arial Unicode MS"/>
+                <a:cs typeface="Arial Unicode MS"/>
+              </a:rPr>
+              <a:t>（多有把握）。分數拿來設門檻：門檻低就多報，門檻高就漏掉。而且它一遠、一暗就漏：行人在十公尺內抓到 82%，四十到五十公尺只剩 3%；晚上十到二十公尺的行人，從白天的 66% 掉到 49%。這跟前幾週的感測器一樣，沒有一種是完美的。
 </a:t>
             </a:r>
           </a:p>
@@ -3180,11 +3356,11 @@
                 <a:spcPts val="0"/>
               </a:spcBef>
               <a:spcAft>
-                <a:spcPts val="233"/>
+                <a:spcPts val="133"/>
               </a:spcAft>
             </a:pPr>
             <a:r>
-              <a:rPr sz="1400" lang="zh-TW" dirty="0">
+              <a:rPr sz="800" lang="zh-TW" dirty="0">
                 <a:solidFill>
                   <a:srgbClr val="000000"/>
                 </a:solidFill>
@@ -3192,51 +3368,7 @@
                 <a:ea typeface="Arial Unicode MS"/>
                 <a:cs typeface="Arial Unicode MS"/>
               </a:rPr>
-              <a:t>第八週：</a:t>
-            </a:r>
-            <a:r>
-              <a:rPr sz="1400" b="1" lang="zh-TW" dirty="0">
-                <a:solidFill>
-                  <a:srgbClr val="000000"/>
-                </a:solidFill>
-                <a:latin typeface="Arial Unicode MS"/>
-                <a:ea typeface="Arial Unicode MS"/>
-                <a:cs typeface="Arial Unicode MS"/>
-              </a:rPr>
-              <a:t>模型從例子學，給框、類別、分數；一遠、一暗就漏。</a:t>
-            </a:r>
-            <a:r>
-              <a:rPr sz="1400" lang="zh-TW" dirty="0">
-                <a:solidFill>
-                  <a:srgbClr val="000000"/>
-                </a:solidFill>
-                <a:latin typeface="Arial Unicode MS"/>
-                <a:ea typeface="Arial Unicode MS"/>
-                <a:cs typeface="Arial Unicode MS"/>
-              </a:rPr>
-              <a:t>
-</a:t>
-            </a:r>
-          </a:p>
-          <a:p>
-            <a:pPr algn="l">
-              <a:spcBef>
-                <a:spcPts val="0"/>
-              </a:spcBef>
-              <a:spcAft>
-                <a:spcPts val="233"/>
-              </a:spcAft>
-            </a:pPr>
-            <a:r>
-              <a:rPr sz="1400" lang="zh-TW" dirty="0">
-                <a:solidFill>
-                  <a:srgbClr val="000000"/>
-                </a:solidFill>
-                <a:latin typeface="Arial Unicode MS"/>
-                <a:ea typeface="Arial Unicode MS"/>
-                <a:cs typeface="Arial Unicode MS"/>
-              </a:rPr>
-              <a:t>這八句話如果都說得出來，期中考就有一半的把握了。接下來一週一週看細節。</a:t>
+              <a:t>這八句話如果都說得出來，而且說得出例子和數字，期中考就有一半的把握了。接下來一週一週看細節。</a:t>
             </a:r>
           </a:p>
         </p:txBody>

--- a/第八週(10-29)/第八週_第3節_簡報.pptx
+++ b/第八週(10-29)/第八週_第3節_簡報.pptx
@@ -2939,7 +2939,7 @@
                 <a:ea typeface="Arial Unicode MS"/>
                 <a:cs typeface="Arial Unicode MS"/>
               </a:rPr>
-              <a:t>第二週：「至少」是下限；雷達量的是朝自己那一段的速度。</a:t>
+              <a:t>第二週：「至少」是下限；光達用來回時間算距離；雷達只量朝自己的那一段速度。</a:t>
             </a:r>
             <a:r>
               <a:rPr sz="800" lang="zh-TW" dirty="0">
@@ -2950,7 +2950,7 @@
                 <a:ea typeface="Arial Unicode MS"/>
                 <a:cs typeface="Arial Unicode MS"/>
               </a:rPr>
-              <a:t>這句話講兩件事。第一件是讀 ODD 條件。「照度至少 20 lx」，意思是低於 20 就出了 ODD；現場 5 lx，不能說「5 比 20 小，沒超過，所以符合」，方向看反了。單位也要看清楚：mm/h 是雨下多大，lx 是亮不亮。第二件是雷達量速度的方式。雷達用都卜勒效應，只量得到東西</a:t>
+              <a:t>這一週講兩件事：怎麼讀 ODD 條件，和三種感測器怎麼量東西。先講 ODD。「照度至少 20 lx」是下限，低於 20 就出了 ODD；現場 5 lx，不能說「5 比 20 小，沒超過，所以符合」，方向看反了，開慢一點也不會變回符合。單位也要看清楚：mm/h 是雨下多大，不是積水多深；lx 是亮不亮。再講感測器原理。</a:t>
             </a:r>
             <a:r>
               <a:rPr sz="800" b="1" lang="zh-TW" dirty="0">
@@ -2961,7 +2961,7 @@
                 <a:ea typeface="Arial Unicode MS"/>
                 <a:cs typeface="Arial Unicode MS"/>
               </a:rPr>
-              <a:t>朝自己靠近或遠離</a:t>
+              <a:t>相機</a:t>
             </a:r>
             <a:r>
               <a:rPr sz="800" lang="zh-TW" dirty="0">
@@ -2972,7 +2972,73 @@
                 <a:ea typeface="Arial Unicode MS"/>
                 <a:cs typeface="Arial Unicode MS"/>
               </a:rPr>
-              <a:t>的那一段速度。一台車從正前方橫著開過去，雷達量到的接近 0；上週觀察台那台黑色轎車，其實時速 22，雷達量到 ≈0，就是這個原因。
+              <a:t>給的是顏色、文字、外觀，畫面上的框是程式加上去的，不是相機量的。</a:t>
+            </a:r>
+            <a:r>
+              <a:rPr sz="800" b="1" lang="zh-TW" dirty="0">
+                <a:solidFill>
+                  <a:srgbClr val="000000"/>
+                </a:solidFill>
+                <a:latin typeface="Arial Unicode MS"/>
+                <a:ea typeface="Arial Unicode MS"/>
+                <a:cs typeface="Arial Unicode MS"/>
+              </a:rPr>
+              <a:t>光達</a:t>
+            </a:r>
+            <a:r>
+              <a:rPr sz="800" lang="zh-TW" dirty="0">
+                <a:solidFill>
+                  <a:srgbClr val="000000"/>
+                </a:solidFill>
+                <a:latin typeface="Arial Unicode MS"/>
+                <a:ea typeface="Arial Unicode MS"/>
+                <a:cs typeface="Arial Unicode MS"/>
+              </a:rPr>
+              <a:t>像對著山谷喊一聲、等回音：雷射打出去，等它彈回來，距離＝光速×來回時間÷2，要除以 2 是因為光走了一去一回；來回 100 奈秒就是 15 公尺。</a:t>
+            </a:r>
+            <a:r>
+              <a:rPr sz="800" b="1" lang="zh-TW" dirty="0">
+                <a:solidFill>
+                  <a:srgbClr val="000000"/>
+                </a:solidFill>
+                <a:latin typeface="Arial Unicode MS"/>
+                <a:ea typeface="Arial Unicode MS"/>
+                <a:cs typeface="Arial Unicode MS"/>
+              </a:rPr>
+              <a:t>雷達</a:t>
+            </a:r>
+            <a:r>
+              <a:rPr sz="800" lang="zh-TW" dirty="0">
+                <a:solidFill>
+                  <a:srgbClr val="000000"/>
+                </a:solidFill>
+                <a:latin typeface="Arial Unicode MS"/>
+                <a:ea typeface="Arial Unicode MS"/>
+                <a:cs typeface="Arial Unicode MS"/>
+              </a:rPr>
+              <a:t>有兩個本事：比較發出去和收回來的頻率差，算出距離；再用都卜勒效應量速度，就像救護車開過來時鳴笛聲變尖、開走時變低。可是它只量得到東西</a:t>
+            </a:r>
+            <a:r>
+              <a:rPr sz="800" b="1" lang="zh-TW" dirty="0">
+                <a:solidFill>
+                  <a:srgbClr val="000000"/>
+                </a:solidFill>
+                <a:latin typeface="Arial Unicode MS"/>
+                <a:ea typeface="Arial Unicode MS"/>
+                <a:cs typeface="Arial Unicode MS"/>
+              </a:rPr>
+              <a:t>朝自己靠近或遠離</a:t>
+            </a:r>
+            <a:r>
+              <a:rPr sz="800" lang="zh-TW" dirty="0">
+                <a:solidFill>
+                  <a:srgbClr val="000000"/>
+                </a:solidFill>
+                <a:latin typeface="Arial Unicode MS"/>
+                <a:ea typeface="Arial Unicode MS"/>
+                <a:cs typeface="Arial Unicode MS"/>
+              </a:rPr>
+              <a:t>的那一段速度：一台車從正前方橫著開過去，雷達量到的接近 0。上週觀察台那台黑色轎車，其實時速約 22，朝我們的那一段只有約 5，雷達量到 ≈0，就是這個原因。還有一個數字：77 GHz 雷達的波長約 3.9 毫米，是光達的四千多倍，所以霧對雷達的影響比較小。
 </a:t>
             </a:r>
           </a:p>
@@ -4434,11 +4500,11 @@
                 <a:spcPts val="0"/>
               </a:spcBef>
               <a:spcAft>
-                <a:spcPts val="267"/>
+                <a:spcPts val="225"/>
               </a:spcAft>
             </a:pPr>
             <a:r>
-              <a:rPr sz="1600" b="1" lang="zh-TW" dirty="0">
+              <a:rPr sz="1350" b="1" lang="zh-TW" dirty="0">
                 <a:solidFill>
                   <a:srgbClr val="000000"/>
                 </a:solidFill>
@@ -4449,7 +4515,7 @@
               <a:t>這一張的目的：</a:t>
             </a:r>
             <a:r>
-              <a:rPr sz="1600" lang="zh-TW" dirty="0">
+              <a:rPr sz="1350" lang="zh-TW" dirty="0">
                 <a:solidFill>
                   <a:srgbClr val="000000"/>
                 </a:solidFill>
@@ -4467,11 +4533,11 @@
                 <a:spcPts val="0"/>
               </a:spcBef>
               <a:spcAft>
-                <a:spcPts val="267"/>
+                <a:spcPts val="225"/>
               </a:spcAft>
             </a:pPr>
             <a:r>
-              <a:rPr sz="1600" lang="zh-TW" dirty="0">
+              <a:rPr sz="1350" lang="zh-TW" dirty="0">
                 <a:solidFill>
                   <a:srgbClr val="000000"/>
                 </a:solidFill>
@@ -4489,11 +4555,11 @@
                 <a:spcPts val="0"/>
               </a:spcBef>
               <a:spcAft>
-                <a:spcPts val="267"/>
+                <a:spcPts val="225"/>
               </a:spcAft>
             </a:pPr>
             <a:r>
-              <a:rPr sz="1600" lang="zh-TW" dirty="0">
+              <a:rPr sz="1350" lang="zh-TW" dirty="0">
                 <a:solidFill>
                   <a:srgbClr val="000000"/>
                 </a:solidFill>
@@ -4504,7 +4570,7 @@
               <a:t>看表。前六列是第三週那張表。相機直接量的是角度和亮度，</a:t>
             </a:r>
             <a:r>
-              <a:rPr sz="1600" b="1" lang="zh-TW" dirty="0">
+              <a:rPr sz="1350" b="1" lang="zh-TW" dirty="0">
                 <a:solidFill>
                   <a:srgbClr val="000000"/>
                 </a:solidFill>
@@ -4515,7 +4581,7 @@
               <a:t>它是唯一讀得出顏色和文字的</a:t>
             </a:r>
             <a:r>
-              <a:rPr sz="1600" lang="zh-TW" dirty="0">
+              <a:rPr sz="1350" lang="zh-TW" dirty="0">
                 <a:solidFill>
                   <a:srgbClr val="000000"/>
                 </a:solidFill>
@@ -4533,11 +4599,11 @@
                 <a:spcPts val="0"/>
               </a:spcBef>
               <a:spcAft>
-                <a:spcPts val="267"/>
+                <a:spcPts val="225"/>
               </a:spcAft>
             </a:pPr>
             <a:r>
-              <a:rPr sz="1600" lang="zh-TW" dirty="0">
+              <a:rPr sz="1350" lang="zh-TW" dirty="0">
                 <a:solidFill>
                   <a:srgbClr val="000000"/>
                 </a:solidFill>
@@ -4548,7 +4614,7 @@
               <a:t>最後一列 </a:t>
             </a:r>
             <a:r>
-              <a:rPr sz="1600" b="1" lang="zh-TW" dirty="0">
+              <a:rPr sz="1350" b="1" lang="zh-TW" dirty="0">
                 <a:solidFill>
                   <a:srgbClr val="000000"/>
                 </a:solidFill>
@@ -4559,7 +4625,7 @@
               <a:t>IMU</a:t>
             </a:r>
             <a:r>
-              <a:rPr sz="1600" lang="zh-TW" dirty="0">
+              <a:rPr sz="1350" lang="zh-TW" dirty="0">
                 <a:solidFill>
                   <a:srgbClr val="000000"/>
                 </a:solidFill>
@@ -4570,7 +4636,7 @@
               <a:t> 是第六週加的：它裡面有加速度計和陀螺儀，直接量的是</a:t>
             </a:r>
             <a:r>
-              <a:rPr sz="1600" b="1" lang="zh-TW" dirty="0">
+              <a:rPr sz="1350" b="1" lang="zh-TW" dirty="0">
                 <a:solidFill>
                   <a:srgbClr val="000000"/>
                 </a:solidFill>
@@ -4581,7 +4647,7 @@
               <a:t>自己</a:t>
             </a:r>
             <a:r>
-              <a:rPr sz="1600" lang="zh-TW" dirty="0">
+              <a:rPr sz="1350" lang="zh-TW" dirty="0">
                 <a:solidFill>
                   <a:srgbClr val="000000"/>
                 </a:solidFill>
@@ -4592,7 +4658,7 @@
               <a:t>加速多少、轉得多快，把這些一路加起來，推算自己走到哪裡。它最大的弱點是</a:t>
             </a:r>
             <a:r>
-              <a:rPr sz="1600" b="1" lang="zh-TW" dirty="0">
+              <a:rPr sz="1350" b="1" lang="zh-TW" dirty="0">
                 <a:solidFill>
                   <a:srgbClr val="000000"/>
                 </a:solidFill>
@@ -4603,7 +4669,7 @@
               <a:t>漂移</a:t>
             </a:r>
             <a:r>
-              <a:rPr sz="1600" lang="zh-TW" dirty="0">
+              <a:rPr sz="1350" lang="zh-TW" dirty="0">
                 <a:solidFill>
                   <a:srgbClr val="000000"/>
                 </a:solidFill>
@@ -4614,7 +4680,7 @@
               <a:t>：小小的誤差一直累加，橫向誤差跟時間的平方成正比，所以 IMU 只能補衛星定位短短的空檔，不能單獨用。注意表上有兩種感測器量的是「自己」，不是外面的東西：</a:t>
             </a:r>
             <a:r>
-              <a:rPr sz="1600" b="1" lang="zh-TW" dirty="0">
+              <a:rPr sz="1350" b="1" lang="zh-TW" dirty="0">
                 <a:solidFill>
                   <a:srgbClr val="000000"/>
                 </a:solidFill>
@@ -4625,7 +4691,7 @@
               <a:t>衛星定位和 IMU</a:t>
             </a:r>
             <a:r>
-              <a:rPr sz="1600" lang="zh-TW" dirty="0">
+              <a:rPr sz="1350" lang="zh-TW" dirty="0">
                 <a:solidFill>
                   <a:srgbClr val="000000"/>
                 </a:solidFill>
@@ -4643,11 +4709,11 @@
                 <a:spcPts val="0"/>
               </a:spcBef>
               <a:spcAft>
-                <a:spcPts val="267"/>
+                <a:spcPts val="225"/>
               </a:spcAft>
             </a:pPr>
             <a:r>
-              <a:rPr sz="1600" lang="zh-TW" dirty="0">
+              <a:rPr sz="1350" lang="zh-TW" dirty="0">
                 <a:solidFill>
                   <a:srgbClr val="000000"/>
                 </a:solidFill>
@@ -4655,7 +4721,51 @@
                 <a:ea typeface="Arial Unicode MS"/>
                 <a:cs typeface="Arial Unicode MS"/>
               </a:rPr>
-              <a:t>有效距離那一欄是第三週課堂上設定的晴天值，不是某一顆產品的規格。
+              <a:t>「怎麼量的」是第二週教的，要會算：</a:t>
+            </a:r>
+            <a:r>
+              <a:rPr sz="1350" b="1" lang="zh-TW" dirty="0">
+                <a:solidFill>
+                  <a:srgbClr val="000000"/>
+                </a:solidFill>
+                <a:latin typeface="Arial Unicode MS"/>
+                <a:ea typeface="Arial Unicode MS"/>
+                <a:cs typeface="Arial Unicode MS"/>
+              </a:rPr>
+              <a:t>光達</a:t>
+            </a:r>
+            <a:r>
+              <a:rPr sz="1350" lang="zh-TW" dirty="0">
+                <a:solidFill>
+                  <a:srgbClr val="000000"/>
+                </a:solidFill>
+                <a:latin typeface="Arial Unicode MS"/>
+                <a:ea typeface="Arial Unicode MS"/>
+                <a:cs typeface="Arial Unicode MS"/>
+              </a:rPr>
+              <a:t>距離＝光速×來回時間÷2，除以 2 是因為光走了一去一回，來回 100 奈秒就是 15 公尺。</a:t>
+            </a:r>
+            <a:r>
+              <a:rPr sz="1350" b="1" lang="zh-TW" dirty="0">
+                <a:solidFill>
+                  <a:srgbClr val="000000"/>
+                </a:solidFill>
+                <a:latin typeface="Arial Unicode MS"/>
+                <a:ea typeface="Arial Unicode MS"/>
+                <a:cs typeface="Arial Unicode MS"/>
+              </a:rPr>
+              <a:t>雷達</a:t>
+            </a:r>
+            <a:r>
+              <a:rPr sz="1350" lang="zh-TW" dirty="0">
+                <a:solidFill>
+                  <a:srgbClr val="000000"/>
+                </a:solidFill>
+                <a:latin typeface="Arial Unicode MS"/>
+                <a:ea typeface="Arial Unicode MS"/>
+                <a:cs typeface="Arial Unicode MS"/>
+              </a:rPr>
+              <a:t>比較發出去和收回來的頻率差算距離，再用都卜勒量速度，但只量得到朝自己靠近或遠離的那一段，橫著開的車會量到接近 0。
 </a:t>
             </a:r>
           </a:p>
@@ -4665,11 +4775,11 @@
                 <a:spcPts val="0"/>
               </a:spcBef>
               <a:spcAft>
-                <a:spcPts val="267"/>
+                <a:spcPts val="225"/>
               </a:spcAft>
             </a:pPr>
             <a:r>
-              <a:rPr sz="1600" lang="zh-TW" dirty="0">
+              <a:rPr sz="1350" lang="zh-TW" dirty="0">
                 <a:solidFill>
                   <a:srgbClr val="000000"/>
                 </a:solidFill>
@@ -4677,10 +4787,21 @@
                 <a:ea typeface="Arial Unicode MS"/>
                 <a:cs typeface="Arial Unicode MS"/>
               </a:rPr>
-              <a:t>第三週還有兩個常考的數字：</a:t>
-            </a:r>
-            <a:r>
-              <a:rPr sz="1600" b="1" lang="zh-TW" dirty="0">
+              <a:t>有效距離那一欄是第三週課堂上設定的晴天值，不是某一顆產品的規格。
+</a:t>
+            </a:r>
+          </a:p>
+          <a:p>
+            <a:pPr algn="l">
+              <a:spcBef>
+                <a:spcPts val="0"/>
+              </a:spcBef>
+              <a:spcAft>
+                <a:spcPts val="225"/>
+              </a:spcAft>
+            </a:pPr>
+            <a:r>
+              <a:rPr sz="1350" lang="zh-TW" dirty="0">
                 <a:solidFill>
                   <a:srgbClr val="000000"/>
                 </a:solidFill>
@@ -4688,10 +4809,10 @@
                 <a:ea typeface="Arial Unicode MS"/>
                 <a:cs typeface="Arial Unicode MS"/>
               </a:rPr>
-              <a:t>相機估距誤差跟距離平方成正比</a:t>
-            </a:r>
-            <a:r>
-              <a:rPr sz="1600" lang="zh-TW" dirty="0">
+              <a:t>第三週還有兩個常考的數字：</a:t>
+            </a:r>
+            <a:r>
+              <a:rPr sz="1350" b="1" lang="zh-TW" dirty="0">
                 <a:solidFill>
                   <a:srgbClr val="000000"/>
                 </a:solidFill>
@@ -4699,10 +4820,10 @@
                 <a:ea typeface="Arial Unicode MS"/>
                 <a:cs typeface="Arial Unicode MS"/>
               </a:rPr>
-              <a:t>，距離兩倍，誤差四倍；</a:t>
-            </a:r>
-            <a:r>
-              <a:rPr sz="1600" b="1" lang="zh-TW" dirty="0">
+              <a:t>相機估距誤差跟距離平方成正比</a:t>
+            </a:r>
+            <a:r>
+              <a:rPr sz="1350" lang="zh-TW" dirty="0">
                 <a:solidFill>
                   <a:srgbClr val="000000"/>
                 </a:solidFill>
@@ -4710,10 +4831,21 @@
                 <a:ea typeface="Arial Unicode MS"/>
                 <a:cs typeface="Arial Unicode MS"/>
               </a:rPr>
+              <a:t>，距離兩倍，誤差四倍；</a:t>
+            </a:r>
+            <a:r>
+              <a:rPr sz="1350" b="1" lang="zh-TW" dirty="0">
+                <a:solidFill>
+                  <a:srgbClr val="000000"/>
+                </a:solidFill>
+                <a:latin typeface="Arial Unicode MS"/>
+                <a:ea typeface="Arial Unicode MS"/>
+                <a:cs typeface="Arial Unicode MS"/>
+              </a:rPr>
               <a:t>光達打在行人身上的點，距離兩倍，點數剩四分之一</a:t>
             </a:r>
             <a:r>
-              <a:rPr sz="1600" lang="zh-TW" dirty="0">
+              <a:rPr sz="1350" lang="zh-TW" dirty="0">
                 <a:solidFill>
                   <a:srgbClr val="000000"/>
                 </a:solidFill>
@@ -13522,7 +13654,7 @@
                           <a:ea typeface="Arial" pitchFamily="34" charset="-122"/>
                           <a:cs typeface="Arial" pitchFamily="34" charset="-120"/>
                         </a:rPr>
-                        <a:t>«Ít nhất» là giới hạn dưới; radar đo tốc độ hướng tâm.</a:t>
+                        <a:t>«Ít nhất» là giới hạn dưới; lidar: c × thời gian đi–về ÷ 2; radar chỉ đo tốc độ hướng tâm.</a:t>
                       </a:r>
                       <a:endParaRPr lang="en-US" sz="1200" dirty="0"/>
                     </a:p>
@@ -13539,7 +13671,7 @@
                           <a:ea typeface="微軟正黑體" pitchFamily="34" charset="-122"/>
                           <a:cs typeface="微軟正黑體" pitchFamily="34" charset="-120"/>
                         </a:rPr>
-                        <a:t>「至少」是下限；雷達量的是朝自己的那一段速度。</a:t>
+                        <a:t>「至少」是下限；光達：光速×來回時間÷2；雷達只量朝自己的速度。</a:t>
                       </a:r>
                       <a:endParaRPr lang="en-US" sz="1200" dirty="0"/>
                     </a:p>
@@ -18849,7 +18981,7 @@
                 <a:ea typeface="Arial" pitchFamily="34" charset="-122"/>
                 <a:cs typeface="Arial" pitchFamily="34" charset="-120"/>
               </a:rPr>
-              <a:t>Tuần 3 + tuần 6: mỗi cảm biến đo trực tiếp cái gì</a:t>
+              <a:t>Tuần 2, 3, 6: mỗi cảm biến đo trực tiếp cái gì</a:t>
             </a:r>
             <a:endParaRPr lang="en-US" sz="1910" dirty="0"/>
           </a:p>
@@ -18869,7 +19001,7 @@
                 <a:ea typeface="微軟正黑體" pitchFamily="34" charset="-122"/>
                 <a:cs typeface="微軟正黑體" pitchFamily="34" charset="-120"/>
               </a:rPr>
-              <a:t>第三週＋第六週：每種感測器直接量到什麼</a:t>
+              <a:t>第二、三、六週：每種感測器直接量到什麼</a:t>
             </a:r>
             <a:endParaRPr lang="en-US" sz="1910" dirty="0"/>
           </a:p>

--- a/第八週(10-29)/第八週_第3節_簡報.pptx
+++ b/第八週(10-29)/第八週_第3節_簡報.pptx
@@ -5,7 +5,7 @@
     <p:sldMasterId id="2147483648" r:id="rId1"/>
   </p:sldMasterIdLst>
   <p:notesMasterIdLst>
-    <p:notesMasterId r:id="rId17"/>
+    <p:notesMasterId r:id="rId18"/>
   </p:notesMasterIdLst>
   <p:sldIdLst>
     <p:sldId id="256" r:id="rId2"/>
@@ -23,6 +23,7 @@
     <p:sldId id="268" r:id="rId14"/>
     <p:sldId id="269" r:id="rId15"/>
     <p:sldId id="270" r:id="rId16"/>
+    <p:sldId id="271" r:id="rId17"/>
   </p:sldIdLst>
   <p:sldSz cx="9144000" cy="5143500"/>
   <p:notesSz cx="7560000" cy="10692000"/>
@@ -936,11 +937,11 @@
                 <a:spcPts val="0"/>
               </a:spcBef>
               <a:spcAft>
-                <a:spcPts val="250"/>
+                <a:spcPts val="217"/>
               </a:spcAft>
             </a:pPr>
             <a:r>
-              <a:rPr sz="1500" b="1" lang="zh-TW" dirty="0">
+              <a:rPr sz="1300" b="1" lang="zh-TW" dirty="0">
                 <a:solidFill>
                   <a:srgbClr val="000000"/>
                 </a:solidFill>
@@ -951,7 +952,7 @@
               <a:t>這一張的目的：</a:t>
             </a:r>
             <a:r>
-              <a:rPr sz="1500" lang="zh-TW" dirty="0">
+              <a:rPr sz="1300" lang="zh-TW" dirty="0">
                 <a:solidFill>
                   <a:srgbClr val="000000"/>
                 </a:solidFill>
@@ -959,7 +960,7 @@
                 <a:ea typeface="Arial Unicode MS"/>
                 <a:cs typeface="Arial Unicode MS"/>
               </a:rPr>
-              <a:t>讓大家把最容易講錯的八句話記下來，考試看到這種選項要小心。
+              <a:t>讓大家用六列，把今天第一節和第二節要考的東西記起來。
 </a:t>
             </a:r>
           </a:p>
@@ -969,11 +970,11 @@
                 <a:spcPts val="0"/>
               </a:spcBef>
               <a:spcAft>
-                <a:spcPts val="250"/>
+                <a:spcPts val="217"/>
               </a:spcAft>
             </a:pPr>
             <a:r>
-              <a:rPr sz="1500" lang="zh-TW" dirty="0">
+              <a:rPr sz="1300" b="1" lang="zh-TW" dirty="0">
                 <a:solidFill>
                   <a:srgbClr val="000000"/>
                 </a:solidFill>
@@ -981,7 +982,18 @@
                 <a:ea typeface="Arial Unicode MS"/>
                 <a:cs typeface="Arial Unicode MS"/>
               </a:rPr>
-              <a:t>這八句話，都是各週教材裡特別提醒過、很多人會講錯的。可以先把右邊遮住，自己說說看哪裡錯。
+              <a:t>照片是數字。</a:t>
+            </a:r>
+            <a:r>
+              <a:rPr sz="1300" lang="zh-TW" dirty="0">
+                <a:solidFill>
+                  <a:srgbClr val="000000"/>
+                </a:solidFill>
+                <a:latin typeface="Arial Unicode MS"/>
+                <a:ea typeface="Arial Unicode MS"/>
+                <a:cs typeface="Arial Unicode MS"/>
+              </a:rPr>
+              <a:t>每一個像素有三個數字，紅、綠、藍，每個從 0 到 255。三種光可以混出別的顏色：紅加綠是黃，三個都是 255 是白，三個都是 0 是黑。就像舞台上的三盞彩色燈，打在同一個地方會混出別的顏色。
 </a:t>
             </a:r>
           </a:p>
@@ -991,11 +1003,11 @@
                 <a:spcPts val="0"/>
               </a:spcBef>
               <a:spcAft>
-                <a:spcPts val="250"/>
+                <a:spcPts val="217"/>
               </a:spcAft>
             </a:pPr>
             <a:r>
-              <a:rPr sz="1500" lang="zh-TW" dirty="0">
+              <a:rPr sz="1300" b="1" lang="zh-TW" dirty="0">
                 <a:solidFill>
                   <a:srgbClr val="000000"/>
                 </a:solidFill>
@@ -1003,10 +1015,10 @@
                 <a:ea typeface="Arial Unicode MS"/>
                 <a:cs typeface="Arial Unicode MS"/>
               </a:rPr>
-              <a:t>一、</a:t>
-            </a:r>
-            <a:r>
-              <a:rPr sz="1500" b="1" lang="zh-TW" dirty="0">
+              <a:t>「學」是什麼。</a:t>
+            </a:r>
+            <a:r>
+              <a:rPr sz="1300" lang="zh-TW" dirty="0">
                 <a:solidFill>
                   <a:srgbClr val="000000"/>
                 </a:solidFill>
@@ -1014,18 +1026,7 @@
                 <a:ea typeface="Arial Unicode MS"/>
                 <a:cs typeface="Arial Unicode MS"/>
               </a:rPr>
-              <a:t>AEB 不是 L1，是 L0</a:t>
-            </a:r>
-            <a:r>
-              <a:rPr sz="1500" lang="zh-TW" dirty="0">
-                <a:solidFill>
-                  <a:srgbClr val="000000"/>
-                </a:solidFill>
-                <a:latin typeface="Arial Unicode MS"/>
-                <a:ea typeface="Arial Unicode MS"/>
-                <a:cs typeface="Arial Unicode MS"/>
-              </a:rPr>
-              <a:t>，它只是瞬間介入。
+              <a:t>電腦看很多有標準答案的例子，猜一次、對答案、改一點點，重複很多次。為什麼只改一點點？就像大霧裡下山，只摸得到腳下往哪邊斜，一次跳太遠，會跳過山谷，落到對面的山坡上；第一節那個動畫，步伐 2.5 的那一格就是一直跳來跳去。
 </a:t>
             </a:r>
           </a:p>
@@ -1035,11 +1036,11 @@
                 <a:spcPts val="0"/>
               </a:spcBef>
               <a:spcAft>
-                <a:spcPts val="250"/>
+                <a:spcPts val="217"/>
               </a:spcAft>
             </a:pPr>
             <a:r>
-              <a:rPr sz="1500" lang="zh-TW" dirty="0">
+              <a:rPr sz="1300" b="1" lang="zh-TW" dirty="0">
                 <a:solidFill>
                   <a:srgbClr val="000000"/>
                 </a:solidFill>
@@ -1047,10 +1048,10 @@
                 <a:ea typeface="Arial Unicode MS"/>
                 <a:cs typeface="Arial Unicode MS"/>
               </a:rPr>
-              <a:t>二、</a:t>
-            </a:r>
-            <a:r>
-              <a:rPr sz="1500" b="1" lang="zh-TW" dirty="0">
+              <a:t>機器學習和深度學習。</a:t>
+            </a:r>
+            <a:r>
+              <a:rPr sz="1300" lang="zh-TW" dirty="0">
                 <a:solidFill>
                   <a:srgbClr val="000000"/>
                 </a:solidFill>
@@ -1058,18 +1059,7 @@
                 <a:ea typeface="Arial Unicode MS"/>
                 <a:cs typeface="Arial Unicode MS"/>
               </a:rPr>
-              <a:t>沒有方向盤不等於 L5。</a:t>
-            </a:r>
-            <a:r>
-              <a:rPr sz="1500" lang="zh-TW" dirty="0">
-                <a:solidFill>
-                  <a:srgbClr val="000000"/>
-                </a:solidFill>
-                <a:latin typeface="Arial Unicode MS"/>
-                <a:ea typeface="Arial Unicode MS"/>
-                <a:cs typeface="Arial Unicode MS"/>
-              </a:rPr>
-              <a:t>L5 的意思是沒有 ODD 限制，目前不存在。
+              <a:t>差別在「看什麼」是誰決定的。機器學習是人決定看什麼，例如第一節我選了「框的高除以寬」，電腦只學門檻 1.03；深度學習連看什麼都自己學，YOLOX 裡面大約九百萬個數字全部自己學。兩種都要有答案的資料，深度學習要的更多，YOLOX 用了 COCO 大約十二萬張標好的照片。
 </a:t>
             </a:r>
           </a:p>
@@ -1079,11 +1069,11 @@
                 <a:spcPts val="0"/>
               </a:spcBef>
               <a:spcAft>
-                <a:spcPts val="250"/>
+                <a:spcPts val="217"/>
               </a:spcAft>
             </a:pPr>
             <a:r>
-              <a:rPr sz="1500" lang="zh-TW" dirty="0">
+              <a:rPr sz="1300" b="1" lang="zh-TW" dirty="0">
                 <a:solidFill>
                   <a:srgbClr val="000000"/>
                 </a:solidFill>
@@ -1091,10 +1081,10 @@
                 <a:ea typeface="Arial Unicode MS"/>
                 <a:cs typeface="Arial Unicode MS"/>
               </a:rPr>
-              <a:t>三、</a:t>
-            </a:r>
-            <a:r>
-              <a:rPr sz="1500" b="1" lang="zh-TW" dirty="0">
+              <a:t>偵測給什麼。</a:t>
+            </a:r>
+            <a:r>
+              <a:rPr sz="1300" lang="zh-TW" dirty="0">
                 <a:solidFill>
                   <a:srgbClr val="000000"/>
                 </a:solidFill>
@@ -1102,18 +1092,7 @@
                 <a:ea typeface="Arial Unicode MS"/>
                 <a:cs typeface="Arial Unicode MS"/>
               </a:rPr>
-              <a:t>94% 是事故鏈的最後一環</a:t>
-            </a:r>
-            <a:r>
-              <a:rPr sz="1500" lang="zh-TW" dirty="0">
-                <a:solidFill>
-                  <a:srgbClr val="000000"/>
-                </a:solidFill>
-                <a:latin typeface="Arial Unicode MS"/>
-                <a:ea typeface="Arial Unicode MS"/>
-                <a:cs typeface="Arial Unicode MS"/>
-              </a:rPr>
-              <a:t>，不是換掉人就少 94%。
+              <a:t>每個東西給三樣：框、類別、分數。分數用來設門檻：門檻低，抓得多，可是亂報的也多；門檻高，亂報的少，可是漏掉的也多。
 </a:t>
             </a:r>
           </a:p>
@@ -1123,11 +1102,11 @@
                 <a:spcPts val="0"/>
               </a:spcBef>
               <a:spcAft>
-                <a:spcPts val="250"/>
+                <a:spcPts val="217"/>
               </a:spcAft>
             </a:pPr>
             <a:r>
-              <a:rPr sz="1500" lang="zh-TW" dirty="0">
+              <a:rPr sz="1300" b="1" lang="zh-TW" dirty="0">
                 <a:solidFill>
                   <a:srgbClr val="000000"/>
                 </a:solidFill>
@@ -1135,10 +1114,10 @@
                 <a:ea typeface="Arial Unicode MS"/>
                 <a:cs typeface="Arial Unicode MS"/>
               </a:rPr>
-              <a:t>四、</a:t>
-            </a:r>
-            <a:r>
-              <a:rPr sz="1500" b="1" lang="zh-TW" dirty="0">
+              <a:t>一遠、一暗就漏。</a:t>
+            </a:r>
+            <a:r>
+              <a:rPr sz="1300" lang="zh-TW" dirty="0">
                 <a:solidFill>
                   <a:srgbClr val="000000"/>
                 </a:solidFill>
@@ -1146,18 +1125,7 @@
                 <a:ea typeface="Arial Unicode MS"/>
                 <a:cs typeface="Arial Unicode MS"/>
               </a:rPr>
-              <a:t>測距 200 公尺</a:t>
-            </a:r>
-            <a:r>
-              <a:rPr sz="1500" lang="zh-TW" dirty="0">
-                <a:solidFill>
-                  <a:srgbClr val="000000"/>
-                </a:solidFill>
-                <a:latin typeface="Arial Unicode MS"/>
-                <a:ea typeface="Arial Unicode MS"/>
-                <a:cs typeface="Arial Unicode MS"/>
-              </a:rPr>
-              <a:t>，要追問對多少反射率、偵測機率多少，不是 200 公尺內都看得到。
+              <a:t>白天的行人，十公尺內抓到 82%，四十到五十公尺剩 3%。十到二十公尺的行人，白天 66%，晚上 49%。
 </a:t>
             </a:r>
           </a:p>
@@ -1167,11 +1135,11 @@
                 <a:spcPts val="0"/>
               </a:spcBef>
               <a:spcAft>
-                <a:spcPts val="250"/>
+                <a:spcPts val="217"/>
               </a:spcAft>
             </a:pPr>
             <a:r>
-              <a:rPr sz="1500" lang="zh-TW" dirty="0">
+              <a:rPr sz="1300" b="1" lang="zh-TW" dirty="0">
                 <a:solidFill>
                   <a:srgbClr val="000000"/>
                 </a:solidFill>
@@ -1179,10 +1147,10 @@
                 <a:ea typeface="Arial Unicode MS"/>
                 <a:cs typeface="Arial Unicode MS"/>
               </a:rPr>
-              <a:t>五、</a:t>
-            </a:r>
-            <a:r>
-              <a:rPr sz="1500" b="1" lang="zh-TW" dirty="0">
+              <a:t>標註和 IoU。</a:t>
+            </a:r>
+            <a:r>
+              <a:rPr sz="1300" lang="zh-TW" dirty="0">
                 <a:solidFill>
                   <a:srgbClr val="000000"/>
                 </a:solidFill>
@@ -1190,10 +1158,10 @@
                 <a:ea typeface="Arial Unicode MS"/>
                 <a:cs typeface="Arial Unicode MS"/>
               </a:rPr>
-              <a:t>光達會受天氣影響</a:t>
-            </a:r>
-            <a:r>
-              <a:rPr sz="1500" lang="zh-TW" dirty="0">
+              <a:t>第二節大家自己標過：nuScenes 的規則是框要貼、手腳包進去、騎士跟車同一個框，旁邊站的人另外框。IoU 是兩個框</a:t>
+            </a:r>
+            <a:r>
+              <a:rPr sz="1300" b="1" lang="zh-TW" dirty="0">
                 <a:solidFill>
                   <a:srgbClr val="000000"/>
                 </a:solidFill>
@@ -1201,21 +1169,10 @@
                 <a:ea typeface="Arial Unicode MS"/>
                 <a:cs typeface="Arial Unicode MS"/>
               </a:rPr>
-              <a:t>，比較不怕的是雷達。
-</a:t>
-            </a:r>
-          </a:p>
-          <a:p>
-            <a:pPr algn="l">
-              <a:spcBef>
-                <a:spcPts val="0"/>
-              </a:spcBef>
-              <a:spcAft>
-                <a:spcPts val="250"/>
-              </a:spcAft>
-            </a:pPr>
-            <a:r>
-              <a:rPr sz="1500" lang="zh-TW" dirty="0">
+              <a:t>重疊的面積除以合起來的面積</a:t>
+            </a:r>
+            <a:r>
+              <a:rPr sz="1300" lang="zh-TW" dirty="0">
                 <a:solidFill>
                   <a:srgbClr val="000000"/>
                 </a:solidFill>
@@ -1223,10 +1180,10 @@
                 <a:ea typeface="Arial Unicode MS"/>
                 <a:cs typeface="Arial Unicode MS"/>
               </a:rPr>
-              <a:t>六、</a:t>
-            </a:r>
-            <a:r>
-              <a:rPr sz="1500" b="1" lang="zh-TW" dirty="0">
+              <a:t>，量兩個框有多像：1 是完全一樣，0 是完全沒碰到。算一次：兩個框各 50，重疊 20，合起來是 50 加 50 減 20，等於 80，IoU 是 20 除以 80，等於 0.25。合起來那一步要</a:t>
+            </a:r>
+            <a:r>
+              <a:rPr sz="1300" b="1" lang="zh-TW" dirty="0">
                 <a:solidFill>
                   <a:srgbClr val="000000"/>
                 </a:solidFill>
@@ -1234,10 +1191,10 @@
                 <a:ea typeface="Arial Unicode MS"/>
                 <a:cs typeface="Arial Unicode MS"/>
               </a:rPr>
-              <a:t>雷達不是不能看人</a:t>
-            </a:r>
-            <a:r>
-              <a:rPr sz="1500" lang="zh-TW" dirty="0">
+              <a:t>減掉重疊</a:t>
+            </a:r>
+            <a:r>
+              <a:rPr sz="1300" lang="zh-TW" dirty="0">
                 <a:solidFill>
                   <a:srgbClr val="000000"/>
                 </a:solidFill>
@@ -1245,95 +1202,7 @@
                 <a:ea typeface="Arial Unicode MS"/>
                 <a:cs typeface="Arial Unicode MS"/>
               </a:rPr>
-              <a:t>，是看得到但抓不穩，不能單獨用。
-</a:t>
-            </a:r>
-          </a:p>
-          <a:p>
-            <a:pPr algn="l">
-              <a:spcBef>
-                <a:spcPts val="0"/>
-              </a:spcBef>
-              <a:spcAft>
-                <a:spcPts val="250"/>
-              </a:spcAft>
-            </a:pPr>
-            <a:r>
-              <a:rPr sz="1500" lang="zh-TW" dirty="0">
-                <a:solidFill>
-                  <a:srgbClr val="000000"/>
-                </a:solidFill>
-                <a:latin typeface="Arial Unicode MS"/>
-                <a:ea typeface="Arial Unicode MS"/>
-                <a:cs typeface="Arial Unicode MS"/>
-              </a:rPr>
-              <a:t>七、</a:t>
-            </a:r>
-            <a:r>
-              <a:rPr sz="1500" b="1" lang="zh-TW" dirty="0">
-                <a:solidFill>
-                  <a:srgbClr val="000000"/>
-                </a:solidFill>
-                <a:latin typeface="Arial Unicode MS"/>
-                <a:ea typeface="Arial Unicode MS"/>
-                <a:cs typeface="Arial Unicode MS"/>
-              </a:rPr>
-              <a:t>兩顆好的合起來不一定好</a:t>
-            </a:r>
-            <a:r>
-              <a:rPr sz="1500" lang="zh-TW" dirty="0">
-                <a:solidFill>
-                  <a:srgbClr val="000000"/>
-                </a:solidFill>
-                <a:latin typeface="Arial Unicode MS"/>
-                <a:ea typeface="Arial Unicode MS"/>
-                <a:cs typeface="Arial Unicode MS"/>
-              </a:rPr>
-              <a:t>，沒標定、沒同步，一樣錯。
-</a:t>
-            </a:r>
-          </a:p>
-          <a:p>
-            <a:pPr algn="l">
-              <a:spcBef>
-                <a:spcPts val="0"/>
-              </a:spcBef>
-              <a:spcAft>
-                <a:spcPts val="250"/>
-              </a:spcAft>
-            </a:pPr>
-            <a:r>
-              <a:rPr sz="1500" lang="zh-TW" dirty="0">
-                <a:solidFill>
-                  <a:srgbClr val="000000"/>
-                </a:solidFill>
-                <a:latin typeface="Arial Unicode MS"/>
-                <a:ea typeface="Arial Unicode MS"/>
-                <a:cs typeface="Arial Unicode MS"/>
-              </a:rPr>
-              <a:t>八、</a:t>
-            </a:r>
-            <a:r>
-              <a:rPr sz="1500" b="1" lang="zh-TW" dirty="0">
-                <a:solidFill>
-                  <a:srgbClr val="000000"/>
-                </a:solidFill>
-                <a:latin typeface="Arial Unicode MS"/>
-                <a:ea typeface="Arial Unicode MS"/>
-                <a:cs typeface="Arial Unicode MS"/>
-              </a:rPr>
-              <a:t>分數 0.91 不是百分之九十一一定對</a:t>
-            </a:r>
-            <a:r>
-              <a:rPr sz="1500" lang="zh-TW" dirty="0">
-                <a:solidFill>
-                  <a:srgbClr val="000000"/>
-                </a:solidFill>
-                <a:latin typeface="Arial Unicode MS"/>
-                <a:ea typeface="Arial Unicode MS"/>
-                <a:cs typeface="Arial Unicode MS"/>
-              </a:rPr>
-              <a:t>，是拿來排序、設門檻的。</a:t>
+              <a:t>，不然重疊的部分算了兩次，這是最常錯的地方。今天練習台用 IoU 至少 0.3、而且類別對，算框到。</a:t>
             </a:r>
           </a:p>
         </p:txBody>
@@ -1442,11 +1311,11 @@
                 <a:spcPts val="0"/>
               </a:spcBef>
               <a:spcAft>
-                <a:spcPts val="267"/>
+                <a:spcPts val="250"/>
               </a:spcAft>
             </a:pPr>
             <a:r>
-              <a:rPr sz="1600" b="1" lang="zh-TW" dirty="0">
+              <a:rPr sz="1500" b="1" lang="zh-TW" dirty="0">
                 <a:solidFill>
                   <a:srgbClr val="000000"/>
                 </a:solidFill>
@@ -1457,7 +1326,7 @@
               <a:t>這一張的目的：</a:t>
             </a:r>
             <a:r>
-              <a:rPr sz="1600" lang="zh-TW" dirty="0">
+              <a:rPr sz="1500" lang="zh-TW" dirty="0">
                 <a:solidFill>
                   <a:srgbClr val="000000"/>
                 </a:solidFill>
@@ -1465,7 +1334,7 @@
                 <a:ea typeface="Arial Unicode MS"/>
                 <a:cs typeface="Arial Unicode MS"/>
               </a:rPr>
-              <a:t>讓大家有一套讀圖、讀表的固定步驟，考試碰到沒看過的圖也知道從哪裡下手。
+              <a:t>讓大家把最容易講錯的八句話記下來，考試看到這種選項要小心。
 </a:t>
             </a:r>
           </a:p>
@@ -1475,11 +1344,11 @@
                 <a:spcPts val="0"/>
               </a:spcBef>
               <a:spcAft>
-                <a:spcPts val="267"/>
+                <a:spcPts val="250"/>
               </a:spcAft>
             </a:pPr>
             <a:r>
-              <a:rPr sz="1600" lang="zh-TW" dirty="0">
+              <a:rPr sz="1500" lang="zh-TW" dirty="0">
                 <a:solidFill>
                   <a:srgbClr val="000000"/>
                 </a:solidFill>
@@ -1487,7 +1356,7 @@
                 <a:ea typeface="Arial Unicode MS"/>
                 <a:cs typeface="Arial Unicode MS"/>
               </a:rPr>
-              <a:t>圖表判讀題，最怕一看到圖就急著找答案。給大家四個步驟，像看電費單一樣：先看單位和期間，再比多少。
+              <a:t>這八句話，都是各週教材裡特別提醒過、很多人會講錯的。可以先把右邊遮住，自己說說看哪裡錯。
 </a:t>
             </a:r>
           </a:p>
@@ -1497,11 +1366,11 @@
                 <a:spcPts val="0"/>
               </a:spcBef>
               <a:spcAft>
-                <a:spcPts val="267"/>
+                <a:spcPts val="250"/>
               </a:spcAft>
             </a:pPr>
             <a:r>
-              <a:rPr sz="1600" b="1" lang="zh-TW" dirty="0">
+              <a:rPr sz="1500" lang="zh-TW" dirty="0">
                 <a:solidFill>
                   <a:srgbClr val="000000"/>
                 </a:solidFill>
@@ -1509,10 +1378,10 @@
                 <a:ea typeface="Arial Unicode MS"/>
                 <a:cs typeface="Arial Unicode MS"/>
               </a:rPr>
-              <a:t>第一步，看標題和單位。</a:t>
-            </a:r>
-            <a:r>
-              <a:rPr sz="1600" lang="zh-TW" dirty="0">
+              <a:t>一、</a:t>
+            </a:r>
+            <a:r>
+              <a:rPr sz="1500" b="1" lang="zh-TW" dirty="0">
                 <a:solidFill>
                   <a:srgbClr val="000000"/>
                 </a:solidFill>
@@ -1520,7 +1389,18 @@
                 <a:ea typeface="Arial Unicode MS"/>
                 <a:cs typeface="Arial Unicode MS"/>
               </a:rPr>
-              <a:t>這張圖講的是「抓到的比例」，單位是百分比。
+              <a:t>AEB 不是 L1，是 L0</a:t>
+            </a:r>
+            <a:r>
+              <a:rPr sz="1500" lang="zh-TW" dirty="0">
+                <a:solidFill>
+                  <a:srgbClr val="000000"/>
+                </a:solidFill>
+                <a:latin typeface="Arial Unicode MS"/>
+                <a:ea typeface="Arial Unicode MS"/>
+                <a:cs typeface="Arial Unicode MS"/>
+              </a:rPr>
+              <a:t>，它只是瞬間介入。
 </a:t>
             </a:r>
           </a:p>
@@ -1530,11 +1410,11 @@
                 <a:spcPts val="0"/>
               </a:spcBef>
               <a:spcAft>
-                <a:spcPts val="267"/>
+                <a:spcPts val="250"/>
               </a:spcAft>
             </a:pPr>
             <a:r>
-              <a:rPr sz="1600" b="1" lang="zh-TW" dirty="0">
+              <a:rPr sz="1500" lang="zh-TW" dirty="0">
                 <a:solidFill>
                   <a:srgbClr val="000000"/>
                 </a:solidFill>
@@ -1542,10 +1422,10 @@
                 <a:ea typeface="Arial Unicode MS"/>
                 <a:cs typeface="Arial Unicode MS"/>
               </a:rPr>
-              <a:t>第二步，看軸。</a:t>
-            </a:r>
-            <a:r>
-              <a:rPr sz="1600" lang="zh-TW" dirty="0">
+              <a:t>二、</a:t>
+            </a:r>
+            <a:r>
+              <a:rPr sz="1500" b="1" lang="zh-TW" dirty="0">
                 <a:solidFill>
                   <a:srgbClr val="000000"/>
                 </a:solidFill>
@@ -1553,7 +1433,18 @@
                 <a:ea typeface="Arial Unicode MS"/>
                 <a:cs typeface="Arial Unicode MS"/>
               </a:rPr>
-              <a:t>橫軸是距離，每十公尺一組；縱軸是抓到的百分比。三種顏色是三種物體。
+              <a:t>沒有方向盤不等於 L5。</a:t>
+            </a:r>
+            <a:r>
+              <a:rPr sz="1500" lang="zh-TW" dirty="0">
+                <a:solidFill>
+                  <a:srgbClr val="000000"/>
+                </a:solidFill>
+                <a:latin typeface="Arial Unicode MS"/>
+                <a:ea typeface="Arial Unicode MS"/>
+                <a:cs typeface="Arial Unicode MS"/>
+              </a:rPr>
+              <a:t>L5 的意思是沒有 ODD 限制，目前不存在。
 </a:t>
             </a:r>
           </a:p>
@@ -1563,11 +1454,11 @@
                 <a:spcPts val="0"/>
               </a:spcBef>
               <a:spcAft>
-                <a:spcPts val="267"/>
+                <a:spcPts val="250"/>
               </a:spcAft>
             </a:pPr>
             <a:r>
-              <a:rPr sz="1600" b="1" lang="zh-TW" dirty="0">
+              <a:rPr sz="1500" lang="zh-TW" dirty="0">
                 <a:solidFill>
                   <a:srgbClr val="000000"/>
                 </a:solidFill>
@@ -1575,10 +1466,10 @@
                 <a:ea typeface="Arial Unicode MS"/>
                 <a:cs typeface="Arial Unicode MS"/>
               </a:rPr>
-              <a:t>第三步，找前提條件。</a:t>
-            </a:r>
-            <a:r>
-              <a:rPr sz="1600" lang="zh-TW" dirty="0">
+              <a:t>三、</a:t>
+            </a:r>
+            <a:r>
+              <a:rPr sz="1500" b="1" lang="zh-TW" dirty="0">
                 <a:solidFill>
                   <a:srgbClr val="000000"/>
                 </a:solidFill>
@@ -1586,7 +1477,18 @@
                 <a:ea typeface="Arial Unicode MS"/>
                 <a:cs typeface="Arial Unicode MS"/>
               </a:rPr>
-              <a:t>圖下面那行小字：白天、看得到六成以上、門檻 0.3。換一個條件，數字就不一樣，例如晚上會更低。很多題目的陷阱就藏在條件裡，就像第五週的「對 10% 反射率」。
+              <a:t>94% 是事故鏈的最後一環</a:t>
+            </a:r>
+            <a:r>
+              <a:rPr sz="1500" lang="zh-TW" dirty="0">
+                <a:solidFill>
+                  <a:srgbClr val="000000"/>
+                </a:solidFill>
+                <a:latin typeface="Arial Unicode MS"/>
+                <a:ea typeface="Arial Unicode MS"/>
+                <a:cs typeface="Arial Unicode MS"/>
+              </a:rPr>
+              <a:t>，不是換掉人就少 94%。
 </a:t>
             </a:r>
           </a:p>
@@ -1596,11 +1498,11 @@
                 <a:spcPts val="0"/>
               </a:spcBef>
               <a:spcAft>
-                <a:spcPts val="267"/>
+                <a:spcPts val="250"/>
               </a:spcAft>
             </a:pPr>
             <a:r>
-              <a:rPr sz="1600" b="1" lang="zh-TW" dirty="0">
+              <a:rPr sz="1500" lang="zh-TW" dirty="0">
                 <a:solidFill>
                   <a:srgbClr val="000000"/>
                 </a:solidFill>
@@ -1608,10 +1510,10 @@
                 <a:ea typeface="Arial Unicode MS"/>
                 <a:cs typeface="Arial Unicode MS"/>
               </a:rPr>
-              <a:t>第四步，再比較。</a:t>
-            </a:r>
-            <a:r>
-              <a:rPr sz="1600" lang="zh-TW" dirty="0">
+              <a:t>四、</a:t>
+            </a:r>
+            <a:r>
+              <a:rPr sz="1500" b="1" lang="zh-TW" dirty="0">
                 <a:solidFill>
                   <a:srgbClr val="000000"/>
                 </a:solidFill>
@@ -1619,7 +1521,18 @@
                 <a:ea typeface="Arial Unicode MS"/>
                 <a:cs typeface="Arial Unicode MS"/>
               </a:rPr>
-              <a:t>綠色的車，從近到遠幾乎不掉；紅色的行人，從 82% 掉到 3%；黃色的機車更快掉。
+              <a:t>測距 200 公尺</a:t>
+            </a:r>
+            <a:r>
+              <a:rPr sz="1500" lang="zh-TW" dirty="0">
+                <a:solidFill>
+                  <a:srgbClr val="000000"/>
+                </a:solidFill>
+                <a:latin typeface="Arial Unicode MS"/>
+                <a:ea typeface="Arial Unicode MS"/>
+                <a:cs typeface="Arial Unicode MS"/>
+              </a:rPr>
+              <a:t>，要追問對多少反射率、偵測機率多少，不是 200 公尺內都看得到。
 </a:t>
             </a:r>
           </a:p>
@@ -1629,11 +1542,11 @@
                 <a:spcPts val="0"/>
               </a:spcBef>
               <a:spcAft>
-                <a:spcPts val="267"/>
+                <a:spcPts val="250"/>
               </a:spcAft>
             </a:pPr>
             <a:r>
-              <a:rPr sz="1600" lang="zh-TW" dirty="0">
+              <a:rPr sz="1500" lang="zh-TW" dirty="0">
                 <a:solidFill>
                   <a:srgbClr val="000000"/>
                 </a:solidFill>
@@ -1641,7 +1554,161 @@
                 <a:ea typeface="Arial Unicode MS"/>
                 <a:cs typeface="Arial Unicode MS"/>
               </a:rPr>
-              <a:t>這四步，失效對照表、煞停距離表、規格表，全部適用。</a:t>
+              <a:t>五、</a:t>
+            </a:r>
+            <a:r>
+              <a:rPr sz="1500" b="1" lang="zh-TW" dirty="0">
+                <a:solidFill>
+                  <a:srgbClr val="000000"/>
+                </a:solidFill>
+                <a:latin typeface="Arial Unicode MS"/>
+                <a:ea typeface="Arial Unicode MS"/>
+                <a:cs typeface="Arial Unicode MS"/>
+              </a:rPr>
+              <a:t>光達會受天氣影響</a:t>
+            </a:r>
+            <a:r>
+              <a:rPr sz="1500" lang="zh-TW" dirty="0">
+                <a:solidFill>
+                  <a:srgbClr val="000000"/>
+                </a:solidFill>
+                <a:latin typeface="Arial Unicode MS"/>
+                <a:ea typeface="Arial Unicode MS"/>
+                <a:cs typeface="Arial Unicode MS"/>
+              </a:rPr>
+              <a:t>，比較不怕的是雷達。
+</a:t>
+            </a:r>
+          </a:p>
+          <a:p>
+            <a:pPr algn="l">
+              <a:spcBef>
+                <a:spcPts val="0"/>
+              </a:spcBef>
+              <a:spcAft>
+                <a:spcPts val="250"/>
+              </a:spcAft>
+            </a:pPr>
+            <a:r>
+              <a:rPr sz="1500" lang="zh-TW" dirty="0">
+                <a:solidFill>
+                  <a:srgbClr val="000000"/>
+                </a:solidFill>
+                <a:latin typeface="Arial Unicode MS"/>
+                <a:ea typeface="Arial Unicode MS"/>
+                <a:cs typeface="Arial Unicode MS"/>
+              </a:rPr>
+              <a:t>六、</a:t>
+            </a:r>
+            <a:r>
+              <a:rPr sz="1500" b="1" lang="zh-TW" dirty="0">
+                <a:solidFill>
+                  <a:srgbClr val="000000"/>
+                </a:solidFill>
+                <a:latin typeface="Arial Unicode MS"/>
+                <a:ea typeface="Arial Unicode MS"/>
+                <a:cs typeface="Arial Unicode MS"/>
+              </a:rPr>
+              <a:t>雷達不是不能看人</a:t>
+            </a:r>
+            <a:r>
+              <a:rPr sz="1500" lang="zh-TW" dirty="0">
+                <a:solidFill>
+                  <a:srgbClr val="000000"/>
+                </a:solidFill>
+                <a:latin typeface="Arial Unicode MS"/>
+                <a:ea typeface="Arial Unicode MS"/>
+                <a:cs typeface="Arial Unicode MS"/>
+              </a:rPr>
+              <a:t>，是看得到但抓不穩，不能單獨用。
+</a:t>
+            </a:r>
+          </a:p>
+          <a:p>
+            <a:pPr algn="l">
+              <a:spcBef>
+                <a:spcPts val="0"/>
+              </a:spcBef>
+              <a:spcAft>
+                <a:spcPts val="250"/>
+              </a:spcAft>
+            </a:pPr>
+            <a:r>
+              <a:rPr sz="1500" lang="zh-TW" dirty="0">
+                <a:solidFill>
+                  <a:srgbClr val="000000"/>
+                </a:solidFill>
+                <a:latin typeface="Arial Unicode MS"/>
+                <a:ea typeface="Arial Unicode MS"/>
+                <a:cs typeface="Arial Unicode MS"/>
+              </a:rPr>
+              <a:t>七、</a:t>
+            </a:r>
+            <a:r>
+              <a:rPr sz="1500" b="1" lang="zh-TW" dirty="0">
+                <a:solidFill>
+                  <a:srgbClr val="000000"/>
+                </a:solidFill>
+                <a:latin typeface="Arial Unicode MS"/>
+                <a:ea typeface="Arial Unicode MS"/>
+                <a:cs typeface="Arial Unicode MS"/>
+              </a:rPr>
+              <a:t>兩顆好的合起來不一定好</a:t>
+            </a:r>
+            <a:r>
+              <a:rPr sz="1500" lang="zh-TW" dirty="0">
+                <a:solidFill>
+                  <a:srgbClr val="000000"/>
+                </a:solidFill>
+                <a:latin typeface="Arial Unicode MS"/>
+                <a:ea typeface="Arial Unicode MS"/>
+                <a:cs typeface="Arial Unicode MS"/>
+              </a:rPr>
+              <a:t>，沒標定、沒同步，一樣錯。
+</a:t>
+            </a:r>
+          </a:p>
+          <a:p>
+            <a:pPr algn="l">
+              <a:spcBef>
+                <a:spcPts val="0"/>
+              </a:spcBef>
+              <a:spcAft>
+                <a:spcPts val="250"/>
+              </a:spcAft>
+            </a:pPr>
+            <a:r>
+              <a:rPr sz="1500" lang="zh-TW" dirty="0">
+                <a:solidFill>
+                  <a:srgbClr val="000000"/>
+                </a:solidFill>
+                <a:latin typeface="Arial Unicode MS"/>
+                <a:ea typeface="Arial Unicode MS"/>
+                <a:cs typeface="Arial Unicode MS"/>
+              </a:rPr>
+              <a:t>八、</a:t>
+            </a:r>
+            <a:r>
+              <a:rPr sz="1500" b="1" lang="zh-TW" dirty="0">
+                <a:solidFill>
+                  <a:srgbClr val="000000"/>
+                </a:solidFill>
+                <a:latin typeface="Arial Unicode MS"/>
+                <a:ea typeface="Arial Unicode MS"/>
+                <a:cs typeface="Arial Unicode MS"/>
+              </a:rPr>
+              <a:t>分數 0.91 不是百分之九十一一定對</a:t>
+            </a:r>
+            <a:r>
+              <a:rPr sz="1500" lang="zh-TW" dirty="0">
+                <a:solidFill>
+                  <a:srgbClr val="000000"/>
+                </a:solidFill>
+                <a:latin typeface="Arial Unicode MS"/>
+                <a:ea typeface="Arial Unicode MS"/>
+                <a:cs typeface="Arial Unicode MS"/>
+              </a:rPr>
+              <a:t>，是拿來排序、設門檻的。</a:t>
             </a:r>
           </a:p>
         </p:txBody>
@@ -1750,11 +1817,11 @@
                 <a:spcPts val="0"/>
               </a:spcBef>
               <a:spcAft>
-                <a:spcPts val="267"/>
+                <a:spcPts val="250"/>
               </a:spcAft>
             </a:pPr>
             <a:r>
-              <a:rPr sz="1600" b="1" lang="zh-TW" dirty="0">
+              <a:rPr sz="1500" b="1" lang="zh-TW" dirty="0">
                 <a:solidFill>
                   <a:srgbClr val="000000"/>
                 </a:solidFill>
@@ -1765,7 +1832,7 @@
               <a:t>這一張的目的：</a:t>
             </a:r>
             <a:r>
-              <a:rPr sz="1600" lang="zh-TW" dirty="0">
+              <a:rPr sz="1500" lang="zh-TW" dirty="0">
                 <a:solidFill>
                   <a:srgbClr val="000000"/>
                 </a:solidFill>
@@ -1773,7 +1840,7 @@
                 <a:ea typeface="Arial Unicode MS"/>
                 <a:cs typeface="Arial Unicode MS"/>
               </a:rPr>
-              <a:t>讓大家打開模擬考，知道怎麼做、做完看什麼。
+              <a:t>讓大家有一套讀圖、讀表的固定步驟，考試碰到沒看過的圖也知道從哪裡下手。
 </a:t>
             </a:r>
           </a:p>
@@ -1783,11 +1850,11 @@
                 <a:spcPts val="0"/>
               </a:spcBef>
               <a:spcAft>
-                <a:spcPts val="267"/>
+                <a:spcPts val="250"/>
               </a:spcAft>
             </a:pPr>
             <a:r>
-              <a:rPr sz="1600" lang="zh-TW" dirty="0">
+              <a:rPr sz="1500" lang="zh-TW" dirty="0">
                 <a:solidFill>
                   <a:srgbClr val="000000"/>
                 </a:solidFill>
@@ -1795,7 +1862,7 @@
                 <a:ea typeface="Arial Unicode MS"/>
                 <a:cs typeface="Arial Unicode MS"/>
               </a:rPr>
-              <a:t>請掃這個 QR，打開期中模擬考。
+              <a:t>圖表判讀題，最怕一看到圖就急著找答案。給大家四個步驟，像看電費單一樣：先看單位和期間，再比多少。
 </a:t>
             </a:r>
           </a:p>
@@ -1805,11 +1872,11 @@
                 <a:spcPts val="0"/>
               </a:spcBef>
               <a:spcAft>
-                <a:spcPts val="267"/>
+                <a:spcPts val="250"/>
               </a:spcAft>
             </a:pPr>
             <a:r>
-              <a:rPr sz="1600" lang="zh-TW" dirty="0">
+              <a:rPr sz="1500" b="1" lang="zh-TW" dirty="0">
                 <a:solidFill>
                   <a:srgbClr val="000000"/>
                 </a:solidFill>
@@ -1817,7 +1884,18 @@
                 <a:ea typeface="Arial Unicode MS"/>
                 <a:cs typeface="Arial Unicode MS"/>
               </a:rPr>
-              <a:t>二十八題，第一週到第八週都有。每一題上面是越南文，下面是中文對照，跟期中考一樣。右上角有一個「English」按鈕，可以再打開英文，平常不用開。
+              <a:t>第一步，看標題和單位。</a:t>
+            </a:r>
+            <a:r>
+              <a:rPr sz="1500" lang="zh-TW" dirty="0">
+                <a:solidFill>
+                  <a:srgbClr val="000000"/>
+                </a:solidFill>
+                <a:latin typeface="Arial Unicode MS"/>
+                <a:ea typeface="Arial Unicode MS"/>
+                <a:cs typeface="Arial Unicode MS"/>
+              </a:rPr>
+              <a:t>這張圖講的是「抓到的比例」，單位是百分比。
 </a:t>
             </a:r>
           </a:p>
@@ -1827,11 +1905,11 @@
                 <a:spcPts val="0"/>
               </a:spcBef>
               <a:spcAft>
-                <a:spcPts val="267"/>
+                <a:spcPts val="250"/>
               </a:spcAft>
             </a:pPr>
             <a:r>
-              <a:rPr sz="1600" lang="zh-TW" dirty="0">
+              <a:rPr sz="1500" b="1" lang="zh-TW" dirty="0">
                 <a:solidFill>
                   <a:srgbClr val="000000"/>
                 </a:solidFill>
@@ -1839,10 +1917,10 @@
                 <a:ea typeface="Arial Unicode MS"/>
                 <a:cs typeface="Arial Unicode MS"/>
               </a:rPr>
-              <a:t>全部做完，按最下面「交卷、看答案」。每一題會告訴你對錯，綠色是正確答案，下面有說明。最下面會列出每一週答對幾題，</a:t>
-            </a:r>
-            <a:r>
-              <a:rPr sz="1600" b="1" lang="zh-TW" dirty="0">
+              <a:t>第二步，看軸。</a:t>
+            </a:r>
+            <a:r>
+              <a:rPr sz="1500" lang="zh-TW" dirty="0">
                 <a:solidFill>
                   <a:srgbClr val="000000"/>
                 </a:solidFill>
@@ -1850,18 +1928,7 @@
                 <a:ea typeface="Arial Unicode MS"/>
                 <a:cs typeface="Arial Unicode MS"/>
               </a:rPr>
-              <a:t>有錯題的週次會變紅框</a:t>
-            </a:r>
-            <a:r>
-              <a:rPr sz="1600" lang="zh-TW" dirty="0">
-                <a:solidFill>
-                  <a:srgbClr val="000000"/>
-                </a:solidFill>
-                <a:latin typeface="Arial Unicode MS"/>
-                <a:ea typeface="Arial Unicode MS"/>
-                <a:cs typeface="Arial Unicode MS"/>
-              </a:rPr>
-              <a:t>，那一週的講義回去再翻一次。
+              <a:t>橫軸是距離，每十公尺一組；縱軸是抓到的百分比。三種顏色是三種物體。
 </a:t>
             </a:r>
           </a:p>
@@ -1871,11 +1938,11 @@
                 <a:spcPts val="0"/>
               </a:spcBef>
               <a:spcAft>
-                <a:spcPts val="267"/>
+                <a:spcPts val="250"/>
               </a:spcAft>
             </a:pPr>
             <a:r>
-              <a:rPr sz="1600" lang="zh-TW" dirty="0">
+              <a:rPr sz="1500" b="1" lang="zh-TW" dirty="0">
                 <a:solidFill>
                   <a:srgbClr val="000000"/>
                 </a:solidFill>
@@ -1883,7 +1950,95 @@
                 <a:ea typeface="Arial Unicode MS"/>
                 <a:cs typeface="Arial Unicode MS"/>
               </a:rPr>
-              <a:t>截圖最下面那一塊，傳到 LINE。考前在家可以再做一次，按「重做」就會清掉答案。</a:t>
+              <a:t>第三步，找前提條件。</a:t>
+            </a:r>
+            <a:r>
+              <a:rPr sz="1500" lang="zh-TW" dirty="0">
+                <a:solidFill>
+                  <a:srgbClr val="000000"/>
+                </a:solidFill>
+                <a:latin typeface="Arial Unicode MS"/>
+                <a:ea typeface="Arial Unicode MS"/>
+                <a:cs typeface="Arial Unicode MS"/>
+              </a:rPr>
+              <a:t>圖下面那行小字：白天、看得到六成以上、門檻 0.3。換一個條件，數字就不一樣，例如晚上會更低。很多題目的陷阱就藏在條件裡，就像第五週的「對 10% 反射率」。
+</a:t>
+            </a:r>
+          </a:p>
+          <a:p>
+            <a:pPr algn="l">
+              <a:spcBef>
+                <a:spcPts val="0"/>
+              </a:spcBef>
+              <a:spcAft>
+                <a:spcPts val="250"/>
+              </a:spcAft>
+            </a:pPr>
+            <a:r>
+              <a:rPr sz="1500" b="1" lang="zh-TW" dirty="0">
+                <a:solidFill>
+                  <a:srgbClr val="000000"/>
+                </a:solidFill>
+                <a:latin typeface="Arial Unicode MS"/>
+                <a:ea typeface="Arial Unicode MS"/>
+                <a:cs typeface="Arial Unicode MS"/>
+              </a:rPr>
+              <a:t>第四步，再比較。</a:t>
+            </a:r>
+            <a:r>
+              <a:rPr sz="1500" lang="zh-TW" dirty="0">
+                <a:solidFill>
+                  <a:srgbClr val="000000"/>
+                </a:solidFill>
+                <a:latin typeface="Arial Unicode MS"/>
+                <a:ea typeface="Arial Unicode MS"/>
+                <a:cs typeface="Arial Unicode MS"/>
+              </a:rPr>
+              <a:t>綠色的車，十公尺以外都在八成以上，幾乎不掉；紅色的行人，從 82% 掉到 3%；橘色的機車、腳踏車掉得更快，二十到三十公尺就只剩 21%，四十到五十公尺是 0%。
+</a:t>
+            </a:r>
+          </a:p>
+          <a:p>
+            <a:pPr algn="l">
+              <a:spcBef>
+                <a:spcPts val="0"/>
+              </a:spcBef>
+              <a:spcAft>
+                <a:spcPts val="250"/>
+              </a:spcAft>
+            </a:pPr>
+            <a:r>
+              <a:rPr sz="1500" lang="zh-TW" dirty="0">
+                <a:solidFill>
+                  <a:srgbClr val="000000"/>
+                </a:solidFill>
+                <a:latin typeface="Arial Unicode MS"/>
+                <a:ea typeface="Arial Unicode MS"/>
+                <a:cs typeface="Arial Unicode MS"/>
+              </a:rPr>
+              <a:t>比較的時候也要看例外：車在零到十公尺只有 64%，比遠處還低，不是因為看不到，而是很近的車常常被畫面邊緣切掉一半。看到怪怪的數字，先回頭找原因。
+</a:t>
+            </a:r>
+          </a:p>
+          <a:p>
+            <a:pPr algn="l">
+              <a:spcBef>
+                <a:spcPts val="0"/>
+              </a:spcBef>
+              <a:spcAft>
+                <a:spcPts val="250"/>
+              </a:spcAft>
+            </a:pPr>
+            <a:r>
+              <a:rPr sz="1500" lang="zh-TW" dirty="0">
+                <a:solidFill>
+                  <a:srgbClr val="000000"/>
+                </a:solidFill>
+                <a:latin typeface="Arial Unicode MS"/>
+                <a:ea typeface="Arial Unicode MS"/>
+                <a:cs typeface="Arial Unicode MS"/>
+              </a:rPr>
+              <a:t>這四步，失效對照表、煞停距離表、規格表，全部適用。</a:t>
             </a:r>
           </a:p>
         </p:txBody>
@@ -2015,7 +2170,7 @@
                 <a:ea typeface="Arial Unicode MS"/>
                 <a:cs typeface="Arial Unicode MS"/>
               </a:rPr>
-              <a:t>讓大家實際做一次模擬考，找出自己最弱的那一週。
+              <a:t>讓大家打開模擬考，知道怎麼做、做完看什麼。
 </a:t>
             </a:r>
           </a:p>
@@ -2037,7 +2192,7 @@
                 <a:ea typeface="Arial Unicode MS"/>
                 <a:cs typeface="Arial Unicode MS"/>
               </a:rPr>
-              <a:t>（停在這一張，讓大家做大約十分鐘。）
+              <a:t>請掃這個 QR，打開期中模擬考。
 </a:t>
             </a:r>
           </a:p>
@@ -2059,7 +2214,7 @@
                 <a:ea typeface="Arial Unicode MS"/>
                 <a:cs typeface="Arial Unicode MS"/>
               </a:rPr>
-              <a:t>做的時候，先不要翻講義，當成真的考試。沒有把握的題目，自己記一下，交卷後特別看那幾題的說明。
+              <a:t>二十八題，第一週到第八週都有。每一題上面是越南文，下面是中文對照，跟期中考一樣。右上角有一個「English」按鈕，可以再打開英文，平常不用開。
 </a:t>
             </a:r>
           </a:p>
@@ -2081,7 +2236,51 @@
                 <a:ea typeface="Arial Unicode MS"/>
                 <a:cs typeface="Arial Unicode MS"/>
               </a:rPr>
-              <a:t>（巡堂：看大家錯在哪幾題。最後三到五分鐘，挑全班錯最多的兩三題講。根據各週教材，最容易錯的是：第 1 題 AEB 是 L0、第 6 題「至少」是下限、第 19 題 CEP 是 50%、第 23 題 119.8 的算法。）</a:t>
+              <a:t>全部做完，按最下面「交卷、看答案」。每一題會告訴你對錯，綠色是正確答案，下面有說明。最下面會列出每一週答對幾題，</a:t>
+            </a:r>
+            <a:r>
+              <a:rPr sz="1600" b="1" lang="zh-TW" dirty="0">
+                <a:solidFill>
+                  <a:srgbClr val="000000"/>
+                </a:solidFill>
+                <a:latin typeface="Arial Unicode MS"/>
+                <a:ea typeface="Arial Unicode MS"/>
+                <a:cs typeface="Arial Unicode MS"/>
+              </a:rPr>
+              <a:t>有錯題的週次會變紅框</a:t>
+            </a:r>
+            <a:r>
+              <a:rPr sz="1600" lang="zh-TW" dirty="0">
+                <a:solidFill>
+                  <a:srgbClr val="000000"/>
+                </a:solidFill>
+                <a:latin typeface="Arial Unicode MS"/>
+                <a:ea typeface="Arial Unicode MS"/>
+                <a:cs typeface="Arial Unicode MS"/>
+              </a:rPr>
+              <a:t>，那一週的講義回去再翻一次。
+</a:t>
+            </a:r>
+          </a:p>
+          <a:p>
+            <a:pPr algn="l">
+              <a:spcBef>
+                <a:spcPts val="0"/>
+              </a:spcBef>
+              <a:spcAft>
+                <a:spcPts val="267"/>
+              </a:spcAft>
+            </a:pPr>
+            <a:r>
+              <a:rPr sz="1600" lang="zh-TW" dirty="0">
+                <a:solidFill>
+                  <a:srgbClr val="000000"/>
+                </a:solidFill>
+                <a:latin typeface="Arial Unicode MS"/>
+                <a:ea typeface="Arial Unicode MS"/>
+                <a:cs typeface="Arial Unicode MS"/>
+              </a:rPr>
+              <a:t>截圖最下面那一塊，傳到 LINE。考前在家可以再做一次，按「重做」就會清掉答案。</a:t>
             </a:r>
           </a:p>
         </p:txBody>
@@ -2202,7 +2401,7 @@
                 <a:ea typeface="Arial Unicode MS"/>
                 <a:cs typeface="Arial Unicode MS"/>
               </a:rPr>
-              <a:t>這一節的目的回顧：</a:t>
+              <a:t>這一張的目的：</a:t>
             </a:r>
             <a:r>
               <a:rPr sz="1600" lang="zh-TW" dirty="0">
@@ -2213,7 +2412,7 @@
                 <a:ea typeface="Arial Unicode MS"/>
                 <a:cs typeface="Arial Unicode MS"/>
               </a:rPr>
-              <a:t>考前三件事。
+              <a:t>讓大家實際做一次模擬考，找出自己最弱的那一週。
 </a:t>
             </a:r>
           </a:p>
@@ -2235,29 +2434,7 @@
                 <a:ea typeface="Arial Unicode MS"/>
                 <a:cs typeface="Arial Unicode MS"/>
               </a:rPr>
-              <a:t>第一，</a:t>
-            </a:r>
-            <a:r>
-              <a:rPr sz="1600" b="1" lang="zh-TW" dirty="0">
-                <a:solidFill>
-                  <a:srgbClr val="000000"/>
-                </a:solidFill>
-                <a:latin typeface="Arial Unicode MS"/>
-                <a:ea typeface="Arial Unicode MS"/>
-                <a:cs typeface="Arial Unicode MS"/>
-              </a:rPr>
-              <a:t>把「八週地圖」看一遍</a:t>
-            </a:r>
-            <a:r>
-              <a:rPr sz="1600" lang="zh-TW" dirty="0">
-                <a:solidFill>
-                  <a:srgbClr val="000000"/>
-                </a:solidFill>
-                <a:latin typeface="Arial Unicode MS"/>
-                <a:ea typeface="Arial Unicode MS"/>
-                <a:cs typeface="Arial Unicode MS"/>
-              </a:rPr>
-              <a:t>，每週一句話，八句都說得出來。
+              <a:t>（停在這一張，讓大家做大約九分鐘，最後三分鐘講題。）
 </a:t>
             </a:r>
           </a:p>
@@ -2279,29 +2456,7 @@
                 <a:ea typeface="Arial Unicode MS"/>
                 <a:cs typeface="Arial Unicode MS"/>
               </a:rPr>
-              <a:t>第二，</a:t>
-            </a:r>
-            <a:r>
-              <a:rPr sz="1600" b="1" lang="zh-TW" dirty="0">
-                <a:solidFill>
-                  <a:srgbClr val="000000"/>
-                </a:solidFill>
-                <a:latin typeface="Arial Unicode MS"/>
-                <a:ea typeface="Arial Unicode MS"/>
-                <a:cs typeface="Arial Unicode MS"/>
-              </a:rPr>
-              <a:t>模擬考紅框的那幾週</a:t>
-            </a:r>
-            <a:r>
-              <a:rPr sz="1600" lang="zh-TW" dirty="0">
-                <a:solidFill>
-                  <a:srgbClr val="000000"/>
-                </a:solidFill>
-                <a:latin typeface="Arial Unicode MS"/>
-                <a:ea typeface="Arial Unicode MS"/>
-                <a:cs typeface="Arial Unicode MS"/>
-              </a:rPr>
-              <a:t>，講義再讀一次。模擬考可以在家再做，題目不會變，可是不要背答案，要看懂說明。
+              <a:t>做的時候，先不要翻講義，當成真的考試。沒有把握的題目，自己記一下，交卷後特別看那幾題的說明。
 </a:t>
             </a:r>
           </a:p>
@@ -2323,51 +2478,7 @@
                 <a:ea typeface="Arial Unicode MS"/>
                 <a:cs typeface="Arial Unicode MS"/>
               </a:rPr>
-              <a:t>第三，</a:t>
-            </a:r>
-            <a:r>
-              <a:rPr sz="1600" b="1" lang="zh-TW" dirty="0">
-                <a:solidFill>
-                  <a:srgbClr val="000000"/>
-                </a:solidFill>
-                <a:latin typeface="Arial Unicode MS"/>
-                <a:ea typeface="Arial Unicode MS"/>
-                <a:cs typeface="Arial Unicode MS"/>
-              </a:rPr>
-              <a:t>圖和表照四步驟讀</a:t>
-            </a:r>
-            <a:r>
-              <a:rPr sz="1600" lang="zh-TW" dirty="0">
-                <a:solidFill>
-                  <a:srgbClr val="000000"/>
-                </a:solidFill>
-                <a:latin typeface="Arial Unicode MS"/>
-                <a:ea typeface="Arial Unicode MS"/>
-                <a:cs typeface="Arial Unicode MS"/>
-              </a:rPr>
-              <a:t>：標題和單位、軸、前提條件，最後才比較。
-</a:t>
-            </a:r>
-          </a:p>
-          <a:p>
-            <a:pPr algn="l">
-              <a:spcBef>
-                <a:spcPts val="0"/>
-              </a:spcBef>
-              <a:spcAft>
-                <a:spcPts val="267"/>
-              </a:spcAft>
-            </a:pPr>
-            <a:r>
-              <a:rPr sz="1600" lang="zh-TW" dirty="0">
-                <a:solidFill>
-                  <a:srgbClr val="000000"/>
-                </a:solidFill>
-                <a:latin typeface="Arial Unicode MS"/>
-                <a:ea typeface="Arial Unicode MS"/>
-                <a:cs typeface="Arial Unicode MS"/>
-              </a:rPr>
-              <a:t>下週四，十一月五日，上課時間考試。祝大家考試順利。</a:t>
+              <a:t>（巡堂：看大家錯在哪幾題。最後三分鐘，挑全班錯最多的兩三題講。根據各週教材，最容易錯的是：第 1 題 AEB 是 L0、第 6 題「至少」是下限、第 19 題 CEP 是 50%、第 23 題 119.8 的算法。）</a:t>
             </a:r>
           </a:p>
         </p:txBody>
@@ -2410,6 +2521,292 @@
                 <a:cs typeface="Arial Unicode MS"/>
               </a:rPr>
               <a:t>15</a:t>
+            </a:r>
+          </a:p>
+        </p:txBody>
+      </p:sp>
+    </p:spTree>
+  </p:cSld>
+  <p:clrMapOvr>
+    <a:masterClrMapping/>
+  </p:clrMapOvr>
+</p:notes>
+</file>
+
+<file path=ppt/notesSlides/notesSlide16.xml><?xml version="1.0" encoding="utf-8"?>
+<p:notes xmlns:a="http://schemas.openxmlformats.org/drawingml/2006/main" xmlns:p="http://schemas.openxmlformats.org/presentationml/2006/main">
+  <p:cSld>
+    <p:spTree>
+      <p:nvGrpSpPr>
+        <p:cNvPr id="1" name=""/>
+        <p:cNvGrpSpPr/>
+        <p:nvPr/>
+      </p:nvGrpSpPr>
+      <p:grpSpPr>
+        <a:xfrm/>
+      </p:grpSpPr>
+      <p:sp>
+        <p:nvSpPr>
+          <p:cNvPr id="2" name="Slide Image Placeholder 1"/>
+          <p:cNvSpPr>
+            <a:spLocks noGrp="1"/>
+          </p:cNvSpPr>
+          <p:nvPr>
+            <p:ph type="sldImg" idx="2"/>
+          </p:nvPr>
+        </p:nvSpPr>
+        <p:spPr>
+          <a:xfrm>
+            <a:off x="1620000" y="380000"/>
+            <a:ext cx="4320000" cy="2430000"/>
+          </a:xfrm>
+        </p:spPr>
+      </p:sp>
+      <p:sp>
+        <p:nvSpPr>
+          <p:cNvPr id="3" name="Notes Placeholder 2"/>
+          <p:cNvSpPr>
+            <a:spLocks noGrp="1"/>
+          </p:cNvSpPr>
+          <p:nvPr>
+            <p:ph type="body" idx="3"/>
+          </p:nvPr>
+        </p:nvSpPr>
+        <p:spPr>
+          <a:xfrm>
+            <a:off x="540000" y="2990000"/>
+            <a:ext cx="6480000" cy="7060000"/>
+          </a:xfrm>
+        </p:spPr>
+        <p:txBody>
+          <a:bodyPr vert="horz" wrap="square" anchor="t" lIns="91440" rIns="91440" tIns="45720" bIns="45720"/>
+          <a:lstStyle/>
+          <a:p>
+            <a:pPr algn="l">
+              <a:spcBef>
+                <a:spcPts val="0"/>
+              </a:spcBef>
+              <a:spcAft>
+                <a:spcPts val="267"/>
+              </a:spcAft>
+            </a:pPr>
+            <a:r>
+              <a:rPr sz="1600" b="1" lang="zh-TW" dirty="0">
+                <a:solidFill>
+                  <a:srgbClr val="000000"/>
+                </a:solidFill>
+                <a:latin typeface="Arial Unicode MS"/>
+                <a:ea typeface="Arial Unicode MS"/>
+                <a:cs typeface="Arial Unicode MS"/>
+              </a:rPr>
+              <a:t>這一節的目的回顧：</a:t>
+            </a:r>
+            <a:r>
+              <a:rPr sz="1600" lang="zh-TW" dirty="0">
+                <a:solidFill>
+                  <a:srgbClr val="000000"/>
+                </a:solidFill>
+                <a:latin typeface="Arial Unicode MS"/>
+                <a:ea typeface="Arial Unicode MS"/>
+                <a:cs typeface="Arial Unicode MS"/>
+              </a:rPr>
+              <a:t>考前三件事。
+</a:t>
+            </a:r>
+          </a:p>
+          <a:p>
+            <a:pPr algn="l">
+              <a:spcBef>
+                <a:spcPts val="0"/>
+              </a:spcBef>
+              <a:spcAft>
+                <a:spcPts val="267"/>
+              </a:spcAft>
+            </a:pPr>
+            <a:r>
+              <a:rPr sz="1600" lang="zh-TW" dirty="0">
+                <a:solidFill>
+                  <a:srgbClr val="000000"/>
+                </a:solidFill>
+                <a:latin typeface="Arial Unicode MS"/>
+                <a:ea typeface="Arial Unicode MS"/>
+                <a:cs typeface="Arial Unicode MS"/>
+              </a:rPr>
+              <a:t>第一，</a:t>
+            </a:r>
+            <a:r>
+              <a:rPr sz="1600" b="1" lang="zh-TW" dirty="0">
+                <a:solidFill>
+                  <a:srgbClr val="000000"/>
+                </a:solidFill>
+                <a:latin typeface="Arial Unicode MS"/>
+                <a:ea typeface="Arial Unicode MS"/>
+                <a:cs typeface="Arial Unicode MS"/>
+              </a:rPr>
+              <a:t>把「八週地圖」看一遍</a:t>
+            </a:r>
+            <a:r>
+              <a:rPr sz="1600" lang="zh-TW" dirty="0">
+                <a:solidFill>
+                  <a:srgbClr val="000000"/>
+                </a:solidFill>
+                <a:latin typeface="Arial Unicode MS"/>
+                <a:ea typeface="Arial Unicode MS"/>
+                <a:cs typeface="Arial Unicode MS"/>
+              </a:rPr>
+              <a:t>，每週一句話，八句都說得出來。
+</a:t>
+            </a:r>
+          </a:p>
+          <a:p>
+            <a:pPr algn="l">
+              <a:spcBef>
+                <a:spcPts val="0"/>
+              </a:spcBef>
+              <a:spcAft>
+                <a:spcPts val="267"/>
+              </a:spcAft>
+            </a:pPr>
+            <a:r>
+              <a:rPr sz="1600" lang="zh-TW" dirty="0">
+                <a:solidFill>
+                  <a:srgbClr val="000000"/>
+                </a:solidFill>
+                <a:latin typeface="Arial Unicode MS"/>
+                <a:ea typeface="Arial Unicode MS"/>
+                <a:cs typeface="Arial Unicode MS"/>
+              </a:rPr>
+              <a:t>第二，</a:t>
+            </a:r>
+            <a:r>
+              <a:rPr sz="1600" b="1" lang="zh-TW" dirty="0">
+                <a:solidFill>
+                  <a:srgbClr val="000000"/>
+                </a:solidFill>
+                <a:latin typeface="Arial Unicode MS"/>
+                <a:ea typeface="Arial Unicode MS"/>
+                <a:cs typeface="Arial Unicode MS"/>
+              </a:rPr>
+              <a:t>模擬考紅框的那幾週</a:t>
+            </a:r>
+            <a:r>
+              <a:rPr sz="1600" lang="zh-TW" dirty="0">
+                <a:solidFill>
+                  <a:srgbClr val="000000"/>
+                </a:solidFill>
+                <a:latin typeface="Arial Unicode MS"/>
+                <a:ea typeface="Arial Unicode MS"/>
+                <a:cs typeface="Arial Unicode MS"/>
+              </a:rPr>
+              <a:t>，講義再讀一次。模擬考可以在家再做，題目不會變，可是不要背答案，要看懂說明。
+</a:t>
+            </a:r>
+          </a:p>
+          <a:p>
+            <a:pPr algn="l">
+              <a:spcBef>
+                <a:spcPts val="0"/>
+              </a:spcBef>
+              <a:spcAft>
+                <a:spcPts val="267"/>
+              </a:spcAft>
+            </a:pPr>
+            <a:r>
+              <a:rPr sz="1600" lang="zh-TW" dirty="0">
+                <a:solidFill>
+                  <a:srgbClr val="000000"/>
+                </a:solidFill>
+                <a:latin typeface="Arial Unicode MS"/>
+                <a:ea typeface="Arial Unicode MS"/>
+                <a:cs typeface="Arial Unicode MS"/>
+              </a:rPr>
+              <a:t>第三，</a:t>
+            </a:r>
+            <a:r>
+              <a:rPr sz="1600" b="1" lang="zh-TW" dirty="0">
+                <a:solidFill>
+                  <a:srgbClr val="000000"/>
+                </a:solidFill>
+                <a:latin typeface="Arial Unicode MS"/>
+                <a:ea typeface="Arial Unicode MS"/>
+                <a:cs typeface="Arial Unicode MS"/>
+              </a:rPr>
+              <a:t>圖和表照四步驟讀</a:t>
+            </a:r>
+            <a:r>
+              <a:rPr sz="1600" lang="zh-TW" dirty="0">
+                <a:solidFill>
+                  <a:srgbClr val="000000"/>
+                </a:solidFill>
+                <a:latin typeface="Arial Unicode MS"/>
+                <a:ea typeface="Arial Unicode MS"/>
+                <a:cs typeface="Arial Unicode MS"/>
+              </a:rPr>
+              <a:t>：標題和單位、軸、前提條件，最後才比較。
+</a:t>
+            </a:r>
+          </a:p>
+          <a:p>
+            <a:pPr algn="l">
+              <a:spcBef>
+                <a:spcPts val="0"/>
+              </a:spcBef>
+              <a:spcAft>
+                <a:spcPts val="267"/>
+              </a:spcAft>
+            </a:pPr>
+            <a:r>
+              <a:rPr sz="1600" lang="zh-TW" dirty="0">
+                <a:solidFill>
+                  <a:srgbClr val="000000"/>
+                </a:solidFill>
+                <a:latin typeface="Arial Unicode MS"/>
+                <a:ea typeface="Arial Unicode MS"/>
+                <a:cs typeface="Arial Unicode MS"/>
+              </a:rPr>
+              <a:t>下週四，十一月五日，上課時間考試。祝大家考試順利。</a:t>
+            </a:r>
+          </a:p>
+        </p:txBody>
+      </p:sp>
+      <p:sp>
+        <p:nvSpPr>
+          <p:cNvPr id="4" name="Slide Number Placeholder 3"/>
+          <p:cNvSpPr>
+            <a:spLocks noGrp="1"/>
+          </p:cNvSpPr>
+          <p:nvPr>
+            <p:ph type="sldNum" idx="5"/>
+          </p:nvPr>
+        </p:nvSpPr>
+        <p:spPr>
+          <a:xfrm>
+            <a:off x="6500000" y="10200000"/>
+            <a:ext cx="500000" cy="300000"/>
+          </a:xfrm>
+        </p:spPr>
+        <p:txBody>
+          <a:bodyPr vert="horz" wrap="square" anchor="t" lIns="91440" rIns="91440" tIns="45720" bIns="45720"/>
+          <a:lstStyle/>
+          <a:p>
+            <a:pPr algn="l">
+              <a:spcBef>
+                <a:spcPts val="0"/>
+              </a:spcBef>
+              <a:spcAft>
+                <a:spcPts val="167"/>
+              </a:spcAft>
+            </a:pPr>
+            <a:r>
+              <a:rPr sz="1000" lang="zh-TW" dirty="0">
+                <a:solidFill>
+                  <a:srgbClr val="000000"/>
+                </a:solidFill>
+                <a:latin typeface="Arial Unicode MS"/>
+                <a:ea typeface="Arial Unicode MS"/>
+                <a:cs typeface="Arial Unicode MS"/>
+              </a:rPr>
+              <a:t>16</a:t>
             </a:r>
           </a:p>
         </p:txBody>
@@ -2708,7 +3105,29 @@
                 <a:ea typeface="Arial Unicode MS"/>
                 <a:cs typeface="Arial Unicode MS"/>
               </a:rPr>
-              <a:t>：第一週到今天第一節，就是電腦怎麼看見車和人那一節。</a:t>
+              <a:t>：第一週到今天第二節。今天第一節是電腦怎麼看見車和人，第二節是標註練習，</a:t>
+            </a:r>
+            <a:r>
+              <a:rPr sz="1600" b="1" lang="zh-TW" dirty="0">
+                <a:solidFill>
+                  <a:srgbClr val="000000"/>
+                </a:solidFill>
+                <a:latin typeface="Arial Unicode MS"/>
+                <a:ea typeface="Arial Unicode MS"/>
+                <a:cs typeface="Arial Unicode MS"/>
+              </a:rPr>
+              <a:t>IoU 也會考</a:t>
+            </a:r>
+            <a:r>
+              <a:rPr sz="1600" lang="zh-TW" dirty="0">
+                <a:solidFill>
+                  <a:srgbClr val="000000"/>
+                </a:solidFill>
+                <a:latin typeface="Arial Unicode MS"/>
+                <a:ea typeface="Arial Unicode MS"/>
+                <a:cs typeface="Arial Unicode MS"/>
+              </a:rPr>
+              <a:t>。</a:t>
             </a:r>
           </a:p>
         </p:txBody>
@@ -4093,11 +4512,11 @@
                 <a:spcPts val="0"/>
               </a:spcBef>
               <a:spcAft>
-                <a:spcPts val="233"/>
+                <a:spcPts val="225"/>
               </a:spcAft>
             </a:pPr>
             <a:r>
-              <a:rPr sz="1400" b="1" lang="zh-TW" dirty="0">
+              <a:rPr sz="1350" b="1" lang="zh-TW" dirty="0">
                 <a:solidFill>
                   <a:srgbClr val="000000"/>
                 </a:solidFill>
@@ -4108,7 +4527,7 @@
               <a:t>這一張的目的：</a:t>
             </a:r>
             <a:r>
-              <a:rPr sz="1400" lang="zh-TW" dirty="0">
+              <a:rPr sz="1350" lang="zh-TW" dirty="0">
                 <a:solidFill>
                   <a:srgbClr val="000000"/>
                 </a:solidFill>
@@ -4126,11 +4545,11 @@
                 <a:spcPts val="0"/>
               </a:spcBef>
               <a:spcAft>
-                <a:spcPts val="233"/>
+                <a:spcPts val="225"/>
               </a:spcAft>
             </a:pPr>
             <a:r>
-              <a:rPr sz="1400" lang="zh-TW" dirty="0">
+              <a:rPr sz="1350" lang="zh-TW" dirty="0">
                 <a:solidFill>
                   <a:srgbClr val="000000"/>
                 </a:solidFill>
@@ -4141,7 +4560,7 @@
               <a:t>ODD 六格，本課的定版：</a:t>
             </a:r>
             <a:r>
-              <a:rPr sz="1400" b="1" lang="zh-TW" dirty="0">
+              <a:rPr sz="1350" b="1" lang="zh-TW" dirty="0">
                 <a:solidFill>
                   <a:srgbClr val="000000"/>
                 </a:solidFill>
@@ -4152,7 +4571,7 @@
               <a:t>道路類型、速度域、交通狀況、天候與光照、地理範圍、人的角色</a:t>
             </a:r>
             <a:r>
-              <a:rPr sz="1400" lang="zh-TW" dirty="0">
+              <a:rPr sz="1350" lang="zh-TW" dirty="0">
                 <a:solidFill>
                   <a:srgbClr val="000000"/>
                 </a:solidFill>
@@ -4160,7 +4579,7 @@
                 <a:ea typeface="Arial Unicode MS"/>
                 <a:cs typeface="Arial Unicode MS"/>
               </a:rPr>
-              <a:t>。右邊是每一格的例子，大部分是第二週學習單上的。
+              <a:t>。右邊是每一格的例子：路線、速度、交通、無雨乾燥，取自第二週講義的「校園接駁車」範例；照度那一格取自第二週學習單 D 組（駁二）；人的角色取自第一週河內的例子。
 </a:t>
             </a:r>
           </a:p>
@@ -4170,11 +4589,11 @@
                 <a:spcPts val="0"/>
               </a:spcBef>
               <a:spcAft>
-                <a:spcPts val="233"/>
+                <a:spcPts val="225"/>
               </a:spcAft>
             </a:pPr>
             <a:r>
-              <a:rPr sz="1400" lang="zh-TW" dirty="0">
+              <a:rPr sz="1350" lang="zh-TW" dirty="0">
                 <a:solidFill>
                   <a:srgbClr val="000000"/>
                 </a:solidFill>
@@ -4192,11 +4611,11 @@
                 <a:spcPts val="0"/>
               </a:spcBef>
               <a:spcAft>
-                <a:spcPts val="233"/>
+                <a:spcPts val="225"/>
               </a:spcAft>
             </a:pPr>
             <a:r>
-              <a:rPr sz="1400" lang="zh-TW" dirty="0">
+              <a:rPr sz="1350" lang="zh-TW" dirty="0">
                 <a:solidFill>
                   <a:srgbClr val="000000"/>
                 </a:solidFill>
@@ -4207,7 +4626,7 @@
               <a:t>第一，</a:t>
             </a:r>
             <a:r>
-              <a:rPr sz="1400" b="1" lang="zh-TW" dirty="0">
+              <a:rPr sz="1350" b="1" lang="zh-TW" dirty="0">
                 <a:solidFill>
                   <a:srgbClr val="000000"/>
                 </a:solidFill>
@@ -4218,7 +4637,7 @@
               <a:t>「至少」是下限</a:t>
             </a:r>
             <a:r>
-              <a:rPr sz="1400" lang="zh-TW" dirty="0">
+              <a:rPr sz="1350" lang="zh-TW" dirty="0">
                 <a:solidFill>
                   <a:srgbClr val="000000"/>
                 </a:solidFill>
@@ -4236,11 +4655,11 @@
                 <a:spcPts val="0"/>
               </a:spcBef>
               <a:spcAft>
-                <a:spcPts val="233"/>
+                <a:spcPts val="225"/>
               </a:spcAft>
             </a:pPr>
             <a:r>
-              <a:rPr sz="1400" lang="zh-TW" dirty="0">
+              <a:rPr sz="1350" lang="zh-TW" dirty="0">
                 <a:solidFill>
                   <a:srgbClr val="000000"/>
                 </a:solidFill>
@@ -4251,7 +4670,7 @@
               <a:t>第二，</a:t>
             </a:r>
             <a:r>
-              <a:rPr sz="1400" b="1" lang="zh-TW" dirty="0">
+              <a:rPr sz="1350" b="1" lang="zh-TW" dirty="0">
                 <a:solidFill>
                   <a:srgbClr val="000000"/>
                 </a:solidFill>
@@ -4262,7 +4681,7 @@
               <a:t>單位要看清楚</a:t>
             </a:r>
             <a:r>
-              <a:rPr sz="1400" lang="zh-TW" dirty="0">
+              <a:rPr sz="1350" lang="zh-TW" dirty="0">
                 <a:solidFill>
                   <a:srgbClr val="000000"/>
                 </a:solidFill>
@@ -4280,11 +4699,11 @@
                 <a:spcPts val="0"/>
               </a:spcBef>
               <a:spcAft>
-                <a:spcPts val="233"/>
+                <a:spcPts val="225"/>
               </a:spcAft>
             </a:pPr>
             <a:r>
-              <a:rPr sz="1400" b="1" lang="zh-TW" dirty="0">
+              <a:rPr sz="1350" b="1" lang="zh-TW" dirty="0">
                 <a:solidFill>
                   <a:srgbClr val="000000"/>
                 </a:solidFill>
@@ -4295,7 +4714,7 @@
               <a:t>lx 是什麼？</a:t>
             </a:r>
             <a:r>
-              <a:rPr sz="1400" lang="zh-TW" dirty="0">
+              <a:rPr sz="1350" lang="zh-TW" dirty="0">
                 <a:solidFill>
                   <a:srgbClr val="000000"/>
                 </a:solidFill>
@@ -4306,7 +4725,7 @@
               <a:t>lx 是 lux 的縮寫，中文叫「勒克斯」，是</a:t>
             </a:r>
             <a:r>
-              <a:rPr sz="1400" b="1" lang="zh-TW" dirty="0">
+              <a:rPr sz="1350" b="1" lang="zh-TW" dirty="0">
                 <a:solidFill>
                   <a:srgbClr val="000000"/>
                 </a:solidFill>
@@ -4317,7 +4736,7 @@
               <a:t>照度</a:t>
             </a:r>
             <a:r>
-              <a:rPr sz="1400" lang="zh-TW" dirty="0">
+              <a:rPr sz="1350" lang="zh-TW" dirty="0">
                 <a:solidFill>
                   <a:srgbClr val="000000"/>
                 </a:solidFill>
@@ -4335,11 +4754,11 @@
                 <a:spcPts val="0"/>
               </a:spcBef>
               <a:spcAft>
-                <a:spcPts val="233"/>
+                <a:spcPts val="225"/>
               </a:spcAft>
             </a:pPr>
             <a:r>
-              <a:rPr sz="1400" lang="zh-TW" dirty="0">
+              <a:rPr sz="1350" lang="zh-TW" dirty="0">
                 <a:solidFill>
                   <a:srgbClr val="000000"/>
                 </a:solidFill>
@@ -4350,7 +4769,7 @@
               <a:t>第三，</a:t>
             </a:r>
             <a:r>
-              <a:rPr sz="1400" b="1" lang="zh-TW" dirty="0">
+              <a:rPr sz="1350" b="1" lang="zh-TW" dirty="0">
                 <a:solidFill>
                   <a:srgbClr val="000000"/>
                 </a:solidFill>
@@ -4361,7 +4780,7 @@
               <a:t>開慢一點不會讓它變回符合。</a:t>
             </a:r>
             <a:r>
-              <a:rPr sz="1400" lang="zh-TW" dirty="0">
+              <a:rPr sz="1350" lang="zh-TW" dirty="0">
                 <a:solidFill>
                   <a:srgbClr val="000000"/>
                 </a:solidFill>
@@ -4379,11 +4798,11 @@
                 <a:spcPts val="0"/>
               </a:spcBef>
               <a:spcAft>
-                <a:spcPts val="233"/>
+                <a:spcPts val="225"/>
               </a:spcAft>
             </a:pPr>
             <a:r>
-              <a:rPr sz="1400" lang="zh-TW" dirty="0">
+              <a:rPr sz="1350" lang="zh-TW" dirty="0">
                 <a:solidFill>
                   <a:srgbClr val="000000"/>
                 </a:solidFill>
@@ -4962,11 +5381,11 @@
                 <a:spcPts val="0"/>
               </a:spcBef>
               <a:spcAft>
-                <a:spcPts val="267"/>
+                <a:spcPts val="250"/>
               </a:spcAft>
             </a:pPr>
             <a:r>
-              <a:rPr sz="1600" b="1" lang="zh-TW" dirty="0">
+              <a:rPr sz="1500" b="1" lang="zh-TW" dirty="0">
                 <a:solidFill>
                   <a:srgbClr val="000000"/>
                 </a:solidFill>
@@ -4977,7 +5396,7 @@
               <a:t>這一張的目的：</a:t>
             </a:r>
             <a:r>
-              <a:rPr sz="1600" lang="zh-TW" dirty="0">
+              <a:rPr sz="1500" lang="zh-TW" dirty="0">
                 <a:solidFill>
                   <a:srgbClr val="000000"/>
                 </a:solidFill>
@@ -4995,11 +5414,11 @@
                 <a:spcPts val="0"/>
               </a:spcBef>
               <a:spcAft>
-                <a:spcPts val="267"/>
+                <a:spcPts val="250"/>
               </a:spcAft>
             </a:pPr>
             <a:r>
-              <a:rPr sz="1600" lang="zh-TW" dirty="0">
+              <a:rPr sz="1500" lang="zh-TW" dirty="0">
                 <a:solidFill>
                   <a:srgbClr val="000000"/>
                 </a:solidFill>
@@ -5017,11 +5436,11 @@
                 <a:spcPts val="0"/>
               </a:spcBef>
               <a:spcAft>
-                <a:spcPts val="267"/>
+                <a:spcPts val="250"/>
               </a:spcAft>
             </a:pPr>
             <a:r>
-              <a:rPr sz="1600" lang="zh-TW" dirty="0">
+              <a:rPr sz="1500" lang="zh-TW" dirty="0">
                 <a:solidFill>
                   <a:srgbClr val="000000"/>
                 </a:solidFill>
@@ -5039,11 +5458,11 @@
                 <a:spcPts val="0"/>
               </a:spcBef>
               <a:spcAft>
-                <a:spcPts val="267"/>
+                <a:spcPts val="250"/>
               </a:spcAft>
             </a:pPr>
             <a:r>
-              <a:rPr sz="1600" lang="zh-TW" dirty="0">
+              <a:rPr sz="1500" lang="zh-TW" dirty="0">
                 <a:solidFill>
                   <a:srgbClr val="000000"/>
                 </a:solidFill>
@@ -5061,11 +5480,99 @@
                 <a:spcPts val="0"/>
               </a:spcBef>
               <a:spcAft>
-                <a:spcPts val="267"/>
+                <a:spcPts val="250"/>
               </a:spcAft>
             </a:pPr>
             <a:r>
-              <a:rPr sz="1600" lang="zh-TW" dirty="0">
+              <a:rPr sz="1500" lang="zh-TW" dirty="0">
+                <a:solidFill>
+                  <a:srgbClr val="000000"/>
+                </a:solidFill>
+                <a:latin typeface="Arial Unicode MS"/>
+                <a:ea typeface="Arial Unicode MS"/>
+                <a:cs typeface="Arial Unicode MS"/>
+              </a:rPr>
+              <a:t>第四週第三節的</a:t>
+            </a:r>
+            <a:r>
+              <a:rPr sz="1500" b="1" lang="zh-TW" dirty="0">
+                <a:solidFill>
+                  <a:srgbClr val="000000"/>
+                </a:solidFill>
+                <a:latin typeface="Arial Unicode MS"/>
+                <a:ea typeface="Arial Unicode MS"/>
+                <a:cs typeface="Arial Unicode MS"/>
+              </a:rPr>
+              <a:t>雨天陷阱題</a:t>
+            </a:r>
+            <a:r>
+              <a:rPr sz="1500" lang="zh-TW" dirty="0">
+                <a:solidFill>
+                  <a:srgbClr val="000000"/>
+                </a:solidFill>
+                <a:latin typeface="Arial Unicode MS"/>
+                <a:ea typeface="Arial Unicode MS"/>
+                <a:cs typeface="Arial Unicode MS"/>
+              </a:rPr>
+              <a:t>也要會算：模擬器打開雨天，射線的有效長度變成 </a:t>
+            </a:r>
+            <a:r>
+              <a:rPr sz="1500" b="1" lang="zh-TW" dirty="0">
+                <a:solidFill>
+                  <a:srgbClr val="000000"/>
+                </a:solidFill>
+                <a:latin typeface="Arial Unicode MS"/>
+                <a:ea typeface="Arial Unicode MS"/>
+                <a:cs typeface="Arial Unicode MS"/>
+              </a:rPr>
+              <a:t>0.55 倍</a:t>
+            </a:r>
+            <a:r>
+              <a:rPr sz="1500" lang="zh-TW" dirty="0">
+                <a:solidFill>
+                  <a:srgbClr val="000000"/>
+                </a:solidFill>
+                <a:latin typeface="Arial Unicode MS"/>
+                <a:ea typeface="Arial Unicode MS"/>
+                <a:cs typeface="Arial Unicode MS"/>
+              </a:rPr>
+              <a:t>。舉一個例子：射線 35 公尺、時速 50。晴天 35 公尺，比 25 公尺還長，夠；下雨變成 35 乘 0.55，19.25 公尺，比煞停距離 20 公尺還短，</a:t>
+            </a:r>
+            <a:r>
+              <a:rPr sz="1500" b="1" lang="zh-TW" dirty="0">
+                <a:solidFill>
+                  <a:srgbClr val="000000"/>
+                </a:solidFill>
+                <a:latin typeface="Arial Unicode MS"/>
+                <a:ea typeface="Arial Unicode MS"/>
+                <a:cs typeface="Arial Unicode MS"/>
+              </a:rPr>
+              <a:t>就不夠了</a:t>
+            </a:r>
+            <a:r>
+              <a:rPr sz="1500" lang="zh-TW" dirty="0">
+                <a:solidFill>
+                  <a:srgbClr val="000000"/>
+                </a:solidFill>
+                <a:latin typeface="Arial Unicode MS"/>
+                <a:ea typeface="Arial Unicode MS"/>
+                <a:cs typeface="Arial Unicode MS"/>
+              </a:rPr>
+              <a:t>。射線變短了，煞停距離不會跟著變短。解法有兩個：降低車速，或把射線長度補回來。順便提醒：真的路面濕了，煞車那一段也會變長，濕柏油時速 50 要 36.4 公尺，這是另一件事。
+</a:t>
+            </a:r>
+          </a:p>
+          <a:p>
+            <a:pPr algn="l">
+              <a:spcBef>
+                <a:spcPts val="0"/>
+              </a:spcBef>
+              <a:spcAft>
+                <a:spcPts val="250"/>
+              </a:spcAft>
+            </a:pPr>
+            <a:r>
+              <a:rPr sz="1500" lang="zh-TW" dirty="0">
                 <a:solidFill>
                   <a:srgbClr val="000000"/>
                 </a:solidFill>
@@ -5182,11 +5689,11 @@
                 <a:spcPts val="0"/>
               </a:spcBef>
               <a:spcAft>
-                <a:spcPts val="250"/>
+                <a:spcPts val="208"/>
               </a:spcAft>
             </a:pPr>
             <a:r>
-              <a:rPr sz="1500" b="1" lang="zh-TW" dirty="0">
+              <a:rPr sz="1250" b="1" lang="zh-TW" dirty="0">
                 <a:solidFill>
                   <a:srgbClr val="000000"/>
                 </a:solidFill>
@@ -5197,7 +5704,7 @@
               <a:t>這一張的目的：</a:t>
             </a:r>
             <a:r>
-              <a:rPr sz="1500" lang="zh-TW" dirty="0">
+              <a:rPr sz="1250" lang="zh-TW" dirty="0">
                 <a:solidFill>
                   <a:srgbClr val="000000"/>
                 </a:solidFill>
@@ -5205,7 +5712,7 @@
                 <a:ea typeface="Arial Unicode MS"/>
                 <a:cs typeface="Arial Unicode MS"/>
               </a:rPr>
-              <a:t>讓大家記得第五、六週規格表上最常考的六個數字，以及每個數字背後的前提。
+              <a:t>讓大家記得第五、六週規格表上最常考的七個數字，以及每個數字背後的前提。
 </a:t>
             </a:r>
           </a:p>
@@ -5215,11 +5722,11 @@
                 <a:spcPts val="0"/>
               </a:spcBef>
               <a:spcAft>
-                <a:spcPts val="250"/>
+                <a:spcPts val="208"/>
               </a:spcAft>
             </a:pPr>
             <a:r>
-              <a:rPr sz="1500" lang="zh-TW" dirty="0">
+              <a:rPr sz="1250" lang="zh-TW" dirty="0">
                 <a:solidFill>
                   <a:srgbClr val="000000"/>
                 </a:solidFill>
@@ -5227,7 +5734,7 @@
                 <a:ea typeface="Arial Unicode MS"/>
                 <a:cs typeface="Arial Unicode MS"/>
               </a:rPr>
-              <a:t>第五、六週讀了好多規格表，最常考的是這六個數字。每一個都要記得它的意思，更要記得它的前提。
+              <a:t>第五、六週讀了好多規格表，最常考的是這七個數字。每一個都要記得它的意思，更要記得它的前提。
 </a:t>
             </a:r>
           </a:p>
@@ -5237,11 +5744,11 @@
                 <a:spcPts val="0"/>
               </a:spcBef>
               <a:spcAft>
-                <a:spcPts val="250"/>
+                <a:spcPts val="208"/>
               </a:spcAft>
             </a:pPr>
             <a:r>
-              <a:rPr sz="1500" b="1" lang="zh-TW" dirty="0">
+              <a:rPr sz="1250" b="1" lang="zh-TW" dirty="0">
                 <a:solidFill>
                   <a:srgbClr val="000000"/>
                 </a:solidFill>
@@ -5252,7 +5759,7 @@
               <a:t>OS1 測距 170 和 90</a:t>
             </a:r>
             <a:r>
-              <a:rPr sz="1500" lang="zh-TW" dirty="0">
+              <a:rPr sz="1250" lang="zh-TW" dirty="0">
                 <a:solidFill>
                   <a:srgbClr val="000000"/>
                 </a:solidFill>
@@ -5270,11 +5777,11 @@
                 <a:spcPts val="0"/>
               </a:spcBef>
               <a:spcAft>
-                <a:spcPts val="250"/>
+                <a:spcPts val="208"/>
               </a:spcAft>
             </a:pPr>
             <a:r>
-              <a:rPr sz="1500" b="1" lang="zh-TW" dirty="0">
+              <a:rPr sz="1250" b="1" lang="zh-TW" dirty="0">
                 <a:solidFill>
                   <a:srgbClr val="000000"/>
                 </a:solidFill>
@@ -5285,7 +5792,7 @@
               <a:t>外參差 1 度，50 公尺外差 0.87 公尺</a:t>
             </a:r>
             <a:r>
-              <a:rPr sz="1500" lang="zh-TW" dirty="0">
+              <a:rPr sz="1250" lang="zh-TW" dirty="0">
                 <a:solidFill>
                   <a:srgbClr val="000000"/>
                 </a:solidFill>
@@ -5303,11 +5810,11 @@
                 <a:spcPts val="0"/>
               </a:spcBef>
               <a:spcAft>
-                <a:spcPts val="250"/>
+                <a:spcPts val="208"/>
               </a:spcAft>
             </a:pPr>
             <a:r>
-              <a:rPr sz="1500" b="1" lang="zh-TW" dirty="0">
+              <a:rPr sz="1250" b="1" lang="zh-TW" dirty="0">
                 <a:solidFill>
                   <a:srgbClr val="000000"/>
                 </a:solidFill>
@@ -5315,10 +5822,10 @@
                 <a:ea typeface="Arial Unicode MS"/>
                 <a:cs typeface="Arial Unicode MS"/>
               </a:rPr>
-              <a:t>同一塊影像感測器，鏡頭 8 mm 視野 42 度，3.6 mm 是 81 度。</a:t>
-            </a:r>
-            <a:r>
-              <a:rPr sz="1500" lang="zh-TW" dirty="0">
+              <a:t>同一塊影像感測器，鏡頭 3.6 mm 視野 81 度，8 mm 是 42 度。</a:t>
+            </a:r>
+            <a:r>
+              <a:rPr sz="1250" lang="zh-TW" dirty="0">
                 <a:solidFill>
                   <a:srgbClr val="000000"/>
                 </a:solidFill>
@@ -5326,7 +5833,29 @@
                 <a:ea typeface="Arial Unicode MS"/>
                 <a:cs typeface="Arial Unicode MS"/>
               </a:rPr>
-              <a:t>視野不寫在感測器的規格表上，是鏡頭決定的。
+              <a:t>規則是</a:t>
+            </a:r>
+            <a:r>
+              <a:rPr sz="1250" b="1" lang="zh-TW" dirty="0">
+                <a:solidFill>
+                  <a:srgbClr val="000000"/>
+                </a:solidFill>
+                <a:latin typeface="Arial Unicode MS"/>
+                <a:ea typeface="Arial Unicode MS"/>
+                <a:cs typeface="Arial Unicode MS"/>
+              </a:rPr>
+              <a:t>焦距愈長，視野愈窄</a:t>
+            </a:r>
+            <a:r>
+              <a:rPr sz="1250" lang="zh-TW" dirty="0">
+                <a:solidFill>
+                  <a:srgbClr val="000000"/>
+                </a:solidFill>
+                <a:latin typeface="Arial Unicode MS"/>
+                <a:ea typeface="Arial Unicode MS"/>
+                <a:cs typeface="Arial Unicode MS"/>
+              </a:rPr>
+              <a:t>，就像手機相機拉近（變焦），看得遠，可是看到的範圍變小。視野不寫在影像感測器的規格表上，是鏡頭決定的。
 </a:t>
             </a:r>
           </a:p>
@@ -5336,11 +5865,11 @@
                 <a:spcPts val="0"/>
               </a:spcBef>
               <a:spcAft>
-                <a:spcPts val="250"/>
+                <a:spcPts val="208"/>
               </a:spcAft>
             </a:pPr>
             <a:r>
-              <a:rPr sz="1500" b="1" lang="zh-TW" dirty="0">
+              <a:rPr sz="1250" b="1" lang="zh-TW" dirty="0">
                 <a:solidFill>
                   <a:srgbClr val="000000"/>
                 </a:solidFill>
@@ -5348,10 +5877,10 @@
                 <a:ea typeface="Arial Unicode MS"/>
                 <a:cs typeface="Arial Unicode MS"/>
               </a:rPr>
-              <a:t>雷達角解析度 1.6 度，150 公尺外一束 4.2 公尺寬</a:t>
-            </a:r>
-            <a:r>
-              <a:rPr sz="1500" lang="zh-TW" dirty="0">
+              <a:t>雷達角解析度 1.6 度</a:t>
+            </a:r>
+            <a:r>
+              <a:rPr sz="1250" lang="zh-TW" dirty="0">
                 <a:solidFill>
                   <a:srgbClr val="000000"/>
                 </a:solidFill>
@@ -5359,7 +5888,7 @@
                 <a:ea typeface="Arial Unicode MS"/>
                 <a:cs typeface="Arial Unicode MS"/>
               </a:rPr>
-              <a:t>，比車道還寬：看得到目標，但分不出在哪一道。所以跟車的雷達要配相機。
+              <a:t>：角度固定，離得愈遠，攤開的寬度愈大。40 公尺外是 1.1 公尺，兩個東西靠得比一束還近，雷達就可能把它們當成一個目標；150 公尺外是 4.2 公尺，比車道 3.5 公尺還寬：看得到目標，但分不出在哪一道。所以跟車的雷達要配相機。
 </a:t>
             </a:r>
           </a:p>
@@ -5369,11 +5898,11 @@
                 <a:spcPts val="0"/>
               </a:spcBef>
               <a:spcAft>
-                <a:spcPts val="250"/>
+                <a:spcPts val="208"/>
               </a:spcAft>
             </a:pPr>
             <a:r>
-              <a:rPr sz="1500" b="1" lang="zh-TW" dirty="0">
+              <a:rPr sz="1250" b="1" lang="zh-TW" dirty="0">
                 <a:solidFill>
                   <a:srgbClr val="000000"/>
                 </a:solidFill>
@@ -5381,10 +5910,10 @@
                 <a:ea typeface="Arial Unicode MS"/>
                 <a:cs typeface="Arial Unicode MS"/>
               </a:rPr>
-              <a:t>衛星定位 2.5 m CEP</a:t>
-            </a:r>
-            <a:r>
-              <a:rPr sz="1500" lang="zh-TW" dirty="0">
+              <a:t>超音波 USS6 只量得到 5.5 公尺。</a:t>
+            </a:r>
+            <a:r>
+              <a:rPr sz="1250" lang="zh-TW" dirty="0">
                 <a:solidFill>
                   <a:srgbClr val="000000"/>
                 </a:solidFill>
@@ -5392,7 +5921,7 @@
                 <a:ea typeface="Arial Unicode MS"/>
                 <a:cs typeface="Arial Unicode MS"/>
               </a:rPr>
-              <a:t>：CEP 是 50%，一半的時間在 2.5 公尺內，另一半更差，不是「最多 2.5 公尺」。
+              <a:t>時速 20 的煞停距離約 4.2 公尺，再加 5 公尺的安全距離，要 9.2 公尺，超音波不夠，所以它只在停車場過關，是停車、倒車用的。注意：第三週那張表寫超音波 4.5 公尺，那是課堂設定的值；5.5 公尺是第六週那一顆產品的規格，兩個數字來源不同。
 </a:t>
             </a:r>
           </a:p>
@@ -5402,11 +5931,11 @@
                 <a:spcPts val="0"/>
               </a:spcBef>
               <a:spcAft>
-                <a:spcPts val="250"/>
+                <a:spcPts val="208"/>
               </a:spcAft>
             </a:pPr>
             <a:r>
-              <a:rPr sz="1500" b="1" lang="zh-TW" dirty="0">
+              <a:rPr sz="1250" b="1" lang="zh-TW" dirty="0">
                 <a:solidFill>
                   <a:srgbClr val="000000"/>
                 </a:solidFill>
@@ -5414,10 +5943,43 @@
                 <a:ea typeface="Arial Unicode MS"/>
                 <a:cs typeface="Arial Unicode MS"/>
               </a:rPr>
+              <a:t>衛星定位 2.5 m CEP</a:t>
+            </a:r>
+            <a:r>
+              <a:rPr sz="1250" lang="zh-TW" dirty="0">
+                <a:solidFill>
+                  <a:srgbClr val="000000"/>
+                </a:solidFill>
+                <a:latin typeface="Arial Unicode MS"/>
+                <a:ea typeface="Arial Unicode MS"/>
+                <a:cs typeface="Arial Unicode MS"/>
+              </a:rPr>
+              <a:t>：CEP 是 50%，一半的時間在 2.5 公尺內，另一半更差，不是「最多 2.5 公尺」。
+</a:t>
+            </a:r>
+          </a:p>
+          <a:p>
+            <a:pPr algn="l">
+              <a:spcBef>
+                <a:spcPts val="0"/>
+              </a:spcBef>
+              <a:spcAft>
+                <a:spcPts val="208"/>
+              </a:spcAft>
+            </a:pPr>
+            <a:r>
+              <a:rPr sz="1250" b="1" lang="zh-TW" dirty="0">
+                <a:solidFill>
+                  <a:srgbClr val="000000"/>
+                </a:solidFill>
+                <a:latin typeface="Arial Unicode MS"/>
+                <a:ea typeface="Arial Unicode MS"/>
+                <a:cs typeface="Arial Unicode MS"/>
+              </a:rPr>
               <a:t>IMU 的誤差跟時間平方成正比</a:t>
             </a:r>
             <a:r>
-              <a:rPr sz="1500" lang="zh-TW" dirty="0">
+              <a:rPr sz="1250" lang="zh-TW" dirty="0">
                 <a:solidFill>
                   <a:srgbClr val="000000"/>
                 </a:solidFill>
@@ -7602,7 +8164,7 @@
                 <a:ea typeface="Arial" pitchFamily="34" charset="-122"/>
                 <a:cs typeface="Arial" pitchFamily="34" charset="-120"/>
               </a:rPr>
-              <a:t>10 / 15</a:t>
+              <a:t>10 / 16</a:t>
             </a:r>
             <a:endParaRPr lang="en-US" sz="900" dirty="0"/>
           </a:p>
@@ -7658,6 +8220,1399 @@
 <file path=ppt/slides/slide11.xml><?xml version="1.0" encoding="utf-8"?>
 <p:sld xmlns:a="http://schemas.openxmlformats.org/drawingml/2006/main" xmlns:r="http://schemas.openxmlformats.org/officeDocument/2006/relationships" xmlns:p="http://schemas.openxmlformats.org/presentationml/2006/main">
   <p:cSld name="Slide 11">
+    <p:spTree>
+      <p:nvGrpSpPr>
+        <p:cNvPr id="1" name=""/>
+        <p:cNvGrpSpPr/>
+        <p:nvPr/>
+      </p:nvGrpSpPr>
+      <p:grpSpPr>
+        <a:xfrm>
+          <a:off x="275781" y="0"/>
+          <a:ext cx="1" cy="1"/>
+          <a:chOff x="0" y="0"/>
+          <a:chExt cx="0" cy="0"/>
+        </a:xfrm>
+      </p:grpSpPr>
+      <p:sp>
+        <p:nvSpPr>
+          <p:cNvPr id="2" name="Text 0"/>
+          <p:cNvSpPr txBox="1"/>
+          <p:nvPr/>
+        </p:nvSpPr>
+        <p:spPr>
+          <a:xfrm>
+            <a:off x="748365" y="274958"/>
+            <a:ext cx="7647270" cy="790504"/>
+          </a:xfrm>
+          <a:prstGeom prst="rect">
+            <a:avLst/>
+          </a:prstGeom>
+          <a:noFill/>
+          <a:ln/>
+        </p:spPr>
+        <p:txBody>
+          <a:bodyPr wrap="square" lIns="0" tIns="0" rIns="0" bIns="0" rtlCol="0" anchor="t"/>
+          <a:lstStyle/>
+          <a:p>
+            <a:pPr indent="0" marL="0">
+              <a:lnSpc>
+                <a:spcPct val="116000"/>
+              </a:lnSpc>
+              <a:buNone/>
+            </a:pPr>
+            <a:r>
+              <a:rPr lang="en-US" sz="2070" b="1" dirty="0">
+                <a:solidFill>
+                  <a:srgbClr val="0B1F3A"/>
+                </a:solidFill>
+                <a:latin typeface="Arial" pitchFamily="34" charset="0"/>
+                <a:ea typeface="Arial" pitchFamily="34" charset="-122"/>
+                <a:cs typeface="Arial" pitchFamily="34" charset="-120"/>
+              </a:rPr>
+              <a:t>Tuần 8: máy tính nhìn thấy, và gán nhãn</a:t>
+            </a:r>
+            <a:endParaRPr lang="en-US" sz="2070" dirty="0"/>
+          </a:p>
+          <a:p>
+            <a:pPr indent="0" marL="0">
+              <a:lnSpc>
+                <a:spcPct val="116000"/>
+              </a:lnSpc>
+              <a:buNone/>
+            </a:pPr>
+            <a:r>
+              <a:rPr lang="en-US" sz="1270" dirty="0">
+                <a:solidFill>
+                  <a:srgbClr val="5F7183"/>
+                </a:solidFill>
+                <a:latin typeface="微軟正黑體" pitchFamily="34" charset="0"/>
+                <a:ea typeface="微軟正黑體" pitchFamily="34" charset="-122"/>
+                <a:cs typeface="微軟正黑體" pitchFamily="34" charset="-120"/>
+              </a:rPr>
+              <a:t>第八週：電腦怎麼看見，和資料標註</a:t>
+            </a:r>
+            <a:endParaRPr lang="en-US" sz="2070" dirty="0"/>
+          </a:p>
+        </p:txBody>
+      </p:sp>
+      <p:graphicFrame>
+        <p:nvGraphicFramePr>
+          <p:cNvPr id="12" name="Table 0"/>
+          <p:cNvGraphicFramePr>
+            <a:graphicFrameLocks noGrp="1"/>
+          </p:cNvGraphicFramePr>
+          <p:nvPr>
+            <p:extLst>
+              <p:ext uri="{D42A27DB-BD31-4B8C-83A1-F6EECF244321}">
+                <p14:modId xmlns:p14="http://schemas.microsoft.com/office/powerpoint/2010/main" val="1579011935"/>
+              </p:ext>
+            </p:extLst>
+          </p:nvPr>
+        </p:nvGraphicFramePr>
+        <p:xfrm>
+          <a:off x="748365" y="1065462"/>
+          <a:ext cx="7647270" cy="859244"/>
+        </p:xfrm>
+        <a:graphic>
+          <a:graphicData uri="http://schemas.openxmlformats.org/drawingml/2006/table">
+            <a:tbl>
+              <a:tblPr/>
+              <a:tblGrid>
+                <a:gridCol w="1976261"/>
+                <a:gridCol w="5671009"/>
+              </a:tblGrid>
+              <a:tr h="292143">
+                <a:tc>
+                  <a:txBody>
+                    <a:bodyPr/>
+                    <a:lstStyle/>
+                    <a:p>
+                      <a:pPr algn="l" indent="0" marL="0">
+                        <a:buNone/>
+                      </a:pPr>
+                      <a:r>
+                        <a:rPr lang="en-US" sz="940" b="1" dirty="0">
+                          <a:solidFill>
+                            <a:srgbClr val="FFFFFF"/>
+                          </a:solidFill>
+                          <a:latin typeface="Arial" pitchFamily="34" charset="0"/>
+                          <a:ea typeface="Arial" pitchFamily="34" charset="-122"/>
+                          <a:cs typeface="Arial" pitchFamily="34" charset="-120"/>
+                        </a:rPr>
+                        <a:t>Chủ đề</a:t>
+                      </a:r>
+                      <a:endParaRPr lang="en-US" sz="1130" dirty="0"/>
+                    </a:p>
+                    <a:p>
+                      <a:pPr algn="l" indent="0" marL="0">
+                        <a:buNone/>
+                      </a:pPr>
+                      <a:r>
+                        <a:rPr lang="en-US" sz="800" dirty="0">
+                          <a:solidFill>
+                            <a:srgbClr val="CFE0EC"/>
+                          </a:solidFill>
+                          <a:latin typeface="微軟正黑體" pitchFamily="34" charset="0"/>
+                          <a:ea typeface="微軟正黑體" pitchFamily="34" charset="-122"/>
+                          <a:cs typeface="微軟正黑體" pitchFamily="34" charset="-120"/>
+                        </a:rPr>
+                        <a:t>主題</a:t>
+                      </a:r>
+                      <a:endParaRPr lang="en-US" sz="1130" dirty="0"/>
+                    </a:p>
+                  </a:txBody>
+                  <a:tcPr marL="63500" marR="63500" marT="38100" marB="38100" anchor="ctr">
+                    <a:lnL w="6350" cap="flat" cmpd="sng" algn="ctr">
+                      <a:solidFill>
+                        <a:srgbClr val="DBE3EA"/>
+                      </a:solidFill>
+                      <a:prstDash val="solid"/>
+                      <a:round/>
+                      <a:headEnd type="none" w="med" len="med"/>
+                      <a:tailEnd type="none" w="med" len="med"/>
+                    </a:lnL>
+                    <a:lnR w="6350" cap="flat" cmpd="sng" algn="ctr">
+                      <a:solidFill>
+                        <a:srgbClr val="DBE3EA"/>
+                      </a:solidFill>
+                      <a:prstDash val="solid"/>
+                      <a:round/>
+                      <a:headEnd type="none" w="med" len="med"/>
+                      <a:tailEnd type="none" w="med" len="med"/>
+                    </a:lnR>
+                    <a:lnT w="6350" cap="flat" cmpd="sng" algn="ctr">
+                      <a:solidFill>
+                        <a:srgbClr val="DBE3EA"/>
+                      </a:solidFill>
+                      <a:prstDash val="solid"/>
+                      <a:round/>
+                      <a:headEnd type="none" w="med" len="med"/>
+                      <a:tailEnd type="none" w="med" len="med"/>
+                    </a:lnT>
+                    <a:lnB w="6350" cap="flat" cmpd="sng" algn="ctr">
+                      <a:solidFill>
+                        <a:srgbClr val="DBE3EA"/>
+                      </a:solidFill>
+                      <a:prstDash val="solid"/>
+                      <a:round/>
+                      <a:headEnd type="none" w="med" len="med"/>
+                      <a:tailEnd type="none" w="med" len="med"/>
+                    </a:lnB>
+                    <a:solidFill>
+                      <a:srgbClr val="0B1F3A"/>
+                    </a:solidFill>
+                  </a:tcPr>
+                </a:tc>
+                <a:tc>
+                  <a:txBody>
+                    <a:bodyPr/>
+                    <a:lstStyle/>
+                    <a:p>
+                      <a:pPr algn="l" indent="0" marL="0">
+                        <a:buNone/>
+                      </a:pPr>
+                      <a:r>
+                        <a:rPr lang="en-US" sz="940" b="1" dirty="0">
+                          <a:solidFill>
+                            <a:srgbClr val="FFFFFF"/>
+                          </a:solidFill>
+                          <a:latin typeface="Arial" pitchFamily="34" charset="0"/>
+                          <a:ea typeface="Arial" pitchFamily="34" charset="-122"/>
+                          <a:cs typeface="Arial" pitchFamily="34" charset="-120"/>
+                        </a:rPr>
+                        <a:t>Cần nhớ</a:t>
+                      </a:r>
+                      <a:endParaRPr lang="en-US" sz="1130" dirty="0"/>
+                    </a:p>
+                    <a:p>
+                      <a:pPr algn="l" indent="0" marL="0">
+                        <a:buNone/>
+                      </a:pPr>
+                      <a:r>
+                        <a:rPr lang="en-US" sz="800" dirty="0">
+                          <a:solidFill>
+                            <a:srgbClr val="CFE0EC"/>
+                          </a:solidFill>
+                          <a:latin typeface="微軟正黑體" pitchFamily="34" charset="0"/>
+                          <a:ea typeface="微軟正黑體" pitchFamily="34" charset="-122"/>
+                          <a:cs typeface="微軟正黑體" pitchFamily="34" charset="-120"/>
+                        </a:rPr>
+                        <a:t>要記住的</a:t>
+                      </a:r>
+                      <a:endParaRPr lang="en-US" sz="1130" dirty="0"/>
+                    </a:p>
+                  </a:txBody>
+                  <a:tcPr marL="63500" marR="63500" marT="38100" marB="38100" anchor="ctr">
+                    <a:lnL w="6350" cap="flat" cmpd="sng" algn="ctr">
+                      <a:solidFill>
+                        <a:srgbClr val="DBE3EA"/>
+                      </a:solidFill>
+                      <a:prstDash val="solid"/>
+                      <a:round/>
+                      <a:headEnd type="none" w="med" len="med"/>
+                      <a:tailEnd type="none" w="med" len="med"/>
+                    </a:lnL>
+                    <a:lnR w="6350" cap="flat" cmpd="sng" algn="ctr">
+                      <a:solidFill>
+                        <a:srgbClr val="DBE3EA"/>
+                      </a:solidFill>
+                      <a:prstDash val="solid"/>
+                      <a:round/>
+                      <a:headEnd type="none" w="med" len="med"/>
+                      <a:tailEnd type="none" w="med" len="med"/>
+                    </a:lnR>
+                    <a:lnT w="6350" cap="flat" cmpd="sng" algn="ctr">
+                      <a:solidFill>
+                        <a:srgbClr val="DBE3EA"/>
+                      </a:solidFill>
+                      <a:prstDash val="solid"/>
+                      <a:round/>
+                      <a:headEnd type="none" w="med" len="med"/>
+                      <a:tailEnd type="none" w="med" len="med"/>
+                    </a:lnT>
+                    <a:lnB w="6350" cap="flat" cmpd="sng" algn="ctr">
+                      <a:solidFill>
+                        <a:srgbClr val="DBE3EA"/>
+                      </a:solidFill>
+                      <a:prstDash val="solid"/>
+                      <a:round/>
+                      <a:headEnd type="none" w="med" len="med"/>
+                      <a:tailEnd type="none" w="med" len="med"/>
+                    </a:lnB>
+                    <a:solidFill>
+                      <a:srgbClr val="0B1F3A"/>
+                    </a:solidFill>
+                  </a:tcPr>
+                </a:tc>
+              </a:tr>
+              <a:tr h="292143">
+                <a:tc>
+                  <a:txBody>
+                    <a:bodyPr/>
+                    <a:lstStyle/>
+                    <a:p>
+                      <a:pPr algn="l" indent="0" marL="0">
+                        <a:buNone/>
+                      </a:pPr>
+                      <a:r>
+                        <a:rPr lang="en-US" sz="940" b="1" dirty="0">
+                          <a:solidFill>
+                            <a:srgbClr val="0B1F3A"/>
+                          </a:solidFill>
+                          <a:latin typeface="Arial" pitchFamily="34" charset="0"/>
+                          <a:ea typeface="Arial" pitchFamily="34" charset="-122"/>
+                          <a:cs typeface="Arial" pitchFamily="34" charset="-120"/>
+                        </a:rPr>
+                        <a:t>Ảnh là con số</a:t>
+                      </a:r>
+                      <a:endParaRPr lang="en-US" sz="1130" dirty="0"/>
+                    </a:p>
+                    <a:p>
+                      <a:pPr algn="l" indent="0" marL="0">
+                        <a:buNone/>
+                      </a:pPr>
+                      <a:r>
+                        <a:rPr lang="en-US" sz="800" dirty="0">
+                          <a:solidFill>
+                            <a:srgbClr val="5F7183"/>
+                          </a:solidFill>
+                          <a:latin typeface="微軟正黑體" pitchFamily="34" charset="0"/>
+                          <a:ea typeface="微軟正黑體" pitchFamily="34" charset="-122"/>
+                          <a:cs typeface="微軟正黑體" pitchFamily="34" charset="-120"/>
+                        </a:rPr>
+                        <a:t>照片是數字</a:t>
+                      </a:r>
+                      <a:endParaRPr lang="en-US" sz="1130" dirty="0"/>
+                    </a:p>
+                  </a:txBody>
+                  <a:tcPr marL="63500" marR="63500" marT="38100" marB="38100" anchor="ctr">
+                    <a:lnL w="6350" cap="flat" cmpd="sng" algn="ctr">
+                      <a:solidFill>
+                        <a:srgbClr val="DBE3EA"/>
+                      </a:solidFill>
+                      <a:prstDash val="solid"/>
+                      <a:round/>
+                      <a:headEnd type="none" w="med" len="med"/>
+                      <a:tailEnd type="none" w="med" len="med"/>
+                    </a:lnL>
+                    <a:lnR w="6350" cap="flat" cmpd="sng" algn="ctr">
+                      <a:solidFill>
+                        <a:srgbClr val="DBE3EA"/>
+                      </a:solidFill>
+                      <a:prstDash val="solid"/>
+                      <a:round/>
+                      <a:headEnd type="none" w="med" len="med"/>
+                      <a:tailEnd type="none" w="med" len="med"/>
+                    </a:lnR>
+                    <a:lnT w="6350" cap="flat" cmpd="sng" algn="ctr">
+                      <a:solidFill>
+                        <a:srgbClr val="DBE3EA"/>
+                      </a:solidFill>
+                      <a:prstDash val="solid"/>
+                      <a:round/>
+                      <a:headEnd type="none" w="med" len="med"/>
+                      <a:tailEnd type="none" w="med" len="med"/>
+                    </a:lnT>
+                    <a:lnB w="6350" cap="flat" cmpd="sng" algn="ctr">
+                      <a:solidFill>
+                        <a:srgbClr val="DBE3EA"/>
+                      </a:solidFill>
+                      <a:prstDash val="solid"/>
+                      <a:round/>
+                      <a:headEnd type="none" w="med" len="med"/>
+                      <a:tailEnd type="none" w="med" len="med"/>
+                    </a:lnB>
+                  </a:tcPr>
+                </a:tc>
+                <a:tc>
+                  <a:txBody>
+                    <a:bodyPr/>
+                    <a:lstStyle/>
+                    <a:p>
+                      <a:pPr algn="l" indent="0" marL="0">
+                        <a:buNone/>
+                      </a:pPr>
+                      <a:r>
+                        <a:rPr lang="en-US" sz="940" dirty="0">
+                          <a:solidFill>
+                            <a:srgbClr val="1A2733"/>
+                          </a:solidFill>
+                          <a:latin typeface="Arial" pitchFamily="34" charset="0"/>
+                          <a:ea typeface="Arial" pitchFamily="34" charset="-122"/>
+                          <a:cs typeface="Arial" pitchFamily="34" charset="-120"/>
+                        </a:rPr>
+                        <a:t>Mỗi điểm ảnh 3 số R, G, B, mỗi số 0–255; đỏ + xanh lá = vàng; cả ba 255 là trắng</a:t>
+                      </a:r>
+                      <a:endParaRPr lang="en-US" sz="1130" dirty="0"/>
+                    </a:p>
+                    <a:p>
+                      <a:pPr algn="l" indent="0" marL="0">
+                        <a:buNone/>
+                      </a:pPr>
+                      <a:r>
+                        <a:rPr lang="en-US" sz="800" dirty="0">
+                          <a:solidFill>
+                            <a:srgbClr val="5F7183"/>
+                          </a:solidFill>
+                          <a:latin typeface="微軟正黑體" pitchFamily="34" charset="0"/>
+                          <a:ea typeface="微軟正黑體" pitchFamily="34" charset="-122"/>
+                          <a:cs typeface="微軟正黑體" pitchFamily="34" charset="-120"/>
+                        </a:rPr>
+                        <a:t>每個像素三個數字 R、G、B，各 0–255；紅＋綠＝黃，三個都 255 是白</a:t>
+                      </a:r>
+                      <a:endParaRPr lang="en-US" sz="1130" dirty="0"/>
+                    </a:p>
+                  </a:txBody>
+                  <a:tcPr marL="63500" marR="63500" marT="38100" marB="38100" anchor="ctr">
+                    <a:lnL w="6350" cap="flat" cmpd="sng" algn="ctr">
+                      <a:solidFill>
+                        <a:srgbClr val="DBE3EA"/>
+                      </a:solidFill>
+                      <a:prstDash val="solid"/>
+                      <a:round/>
+                      <a:headEnd type="none" w="med" len="med"/>
+                      <a:tailEnd type="none" w="med" len="med"/>
+                    </a:lnL>
+                    <a:lnR w="6350" cap="flat" cmpd="sng" algn="ctr">
+                      <a:solidFill>
+                        <a:srgbClr val="DBE3EA"/>
+                      </a:solidFill>
+                      <a:prstDash val="solid"/>
+                      <a:round/>
+                      <a:headEnd type="none" w="med" len="med"/>
+                      <a:tailEnd type="none" w="med" len="med"/>
+                    </a:lnR>
+                    <a:lnT w="6350" cap="flat" cmpd="sng" algn="ctr">
+                      <a:solidFill>
+                        <a:srgbClr val="DBE3EA"/>
+                      </a:solidFill>
+                      <a:prstDash val="solid"/>
+                      <a:round/>
+                      <a:headEnd type="none" w="med" len="med"/>
+                      <a:tailEnd type="none" w="med" len="med"/>
+                    </a:lnT>
+                    <a:lnB w="6350" cap="flat" cmpd="sng" algn="ctr">
+                      <a:solidFill>
+                        <a:srgbClr val="DBE3EA"/>
+                      </a:solidFill>
+                      <a:prstDash val="solid"/>
+                      <a:round/>
+                      <a:headEnd type="none" w="med" len="med"/>
+                      <a:tailEnd type="none" w="med" len="med"/>
+                    </a:lnB>
+                  </a:tcPr>
+                </a:tc>
+              </a:tr>
+              <a:tr h="292143">
+                <a:tc>
+                  <a:txBody>
+                    <a:bodyPr/>
+                    <a:lstStyle/>
+                    <a:p>
+                      <a:pPr algn="l" indent="0" marL="0">
+                        <a:buNone/>
+                      </a:pPr>
+                      <a:r>
+                        <a:rPr lang="en-US" sz="940" b="1" dirty="0">
+                          <a:solidFill>
+                            <a:srgbClr val="0B1F3A"/>
+                          </a:solidFill>
+                          <a:latin typeface="Arial" pitchFamily="34" charset="0"/>
+                          <a:ea typeface="Arial" pitchFamily="34" charset="-122"/>
+                          <a:cs typeface="Arial" pitchFamily="34" charset="-120"/>
+                        </a:rPr>
+                        <a:t>«Học» là gì</a:t>
+                      </a:r>
+                      <a:endParaRPr lang="en-US" sz="1130" dirty="0"/>
+                    </a:p>
+                    <a:p>
+                      <a:pPr algn="l" indent="0" marL="0">
+                        <a:buNone/>
+                      </a:pPr>
+                      <a:r>
+                        <a:rPr lang="en-US" sz="800" dirty="0">
+                          <a:solidFill>
+                            <a:srgbClr val="5F7183"/>
+                          </a:solidFill>
+                          <a:latin typeface="微軟正黑體" pitchFamily="34" charset="0"/>
+                          <a:ea typeface="微軟正黑體" pitchFamily="34" charset="-122"/>
+                          <a:cs typeface="微軟正黑體" pitchFamily="34" charset="-120"/>
+                        </a:rPr>
+                        <a:t>「學」是什麼</a:t>
+                      </a:r>
+                      <a:endParaRPr lang="en-US" sz="1130" dirty="0"/>
+                    </a:p>
+                  </a:txBody>
+                  <a:tcPr marL="63500" marR="63500" marT="38100" marB="38100" anchor="ctr">
+                    <a:lnL w="6350" cap="flat" cmpd="sng" algn="ctr">
+                      <a:solidFill>
+                        <a:srgbClr val="DBE3EA"/>
+                      </a:solidFill>
+                      <a:prstDash val="solid"/>
+                      <a:round/>
+                      <a:headEnd type="none" w="med" len="med"/>
+                      <a:tailEnd type="none" w="med" len="med"/>
+                    </a:lnL>
+                    <a:lnR w="6350" cap="flat" cmpd="sng" algn="ctr">
+                      <a:solidFill>
+                        <a:srgbClr val="DBE3EA"/>
+                      </a:solidFill>
+                      <a:prstDash val="solid"/>
+                      <a:round/>
+                      <a:headEnd type="none" w="med" len="med"/>
+                      <a:tailEnd type="none" w="med" len="med"/>
+                    </a:lnR>
+                    <a:lnT w="6350" cap="flat" cmpd="sng" algn="ctr">
+                      <a:solidFill>
+                        <a:srgbClr val="DBE3EA"/>
+                      </a:solidFill>
+                      <a:prstDash val="solid"/>
+                      <a:round/>
+                      <a:headEnd type="none" w="med" len="med"/>
+                      <a:tailEnd type="none" w="med" len="med"/>
+                    </a:lnT>
+                    <a:lnB w="6350" cap="flat" cmpd="sng" algn="ctr">
+                      <a:solidFill>
+                        <a:srgbClr val="DBE3EA"/>
+                      </a:solidFill>
+                      <a:prstDash val="solid"/>
+                      <a:round/>
+                      <a:headEnd type="none" w="med" len="med"/>
+                      <a:tailEnd type="none" w="med" len="med"/>
+                    </a:lnB>
+                  </a:tcPr>
+                </a:tc>
+                <a:tc>
+                  <a:txBody>
+                    <a:bodyPr/>
+                    <a:lstStyle/>
+                    <a:p>
+                      <a:pPr algn="l" indent="0" marL="0">
+                        <a:buNone/>
+                      </a:pPr>
+                      <a:r>
+                        <a:rPr lang="en-US" sz="940" dirty="0">
+                          <a:solidFill>
+                            <a:srgbClr val="1A2733"/>
+                          </a:solidFill>
+                          <a:latin typeface="Arial" pitchFamily="34" charset="0"/>
+                          <a:ea typeface="Arial" pitchFamily="34" charset="-122"/>
+                          <a:cs typeface="Arial" pitchFamily="34" charset="-120"/>
+                        </a:rPr>
+                        <a:t>Đoán, so đáp án, sửa một chút — lặp lại rất nhiều lần; bước quá lớn thì nhảy loạn</a:t>
+                      </a:r>
+                      <a:endParaRPr lang="en-US" sz="1130" dirty="0"/>
+                    </a:p>
+                    <a:p>
+                      <a:pPr algn="l" indent="0" marL="0">
+                        <a:buNone/>
+                      </a:pPr>
+                      <a:r>
+                        <a:rPr lang="en-US" sz="800" dirty="0">
+                          <a:solidFill>
+                            <a:srgbClr val="5F7183"/>
+                          </a:solidFill>
+                          <a:latin typeface="微軟正黑體" pitchFamily="34" charset="0"/>
+                          <a:ea typeface="微軟正黑體" pitchFamily="34" charset="-122"/>
+                          <a:cs typeface="微軟正黑體" pitchFamily="34" charset="-120"/>
+                        </a:rPr>
+                        <a:t>猜、對答案、改一點點，重複很多次；步伐太大會跳過頭</a:t>
+                      </a:r>
+                      <a:endParaRPr lang="en-US" sz="1130" dirty="0"/>
+                    </a:p>
+                  </a:txBody>
+                  <a:tcPr marL="63500" marR="63500" marT="38100" marB="38100" anchor="ctr">
+                    <a:lnL w="6350" cap="flat" cmpd="sng" algn="ctr">
+                      <a:solidFill>
+                        <a:srgbClr val="DBE3EA"/>
+                      </a:solidFill>
+                      <a:prstDash val="solid"/>
+                      <a:round/>
+                      <a:headEnd type="none" w="med" len="med"/>
+                      <a:tailEnd type="none" w="med" len="med"/>
+                    </a:lnL>
+                    <a:lnR w="6350" cap="flat" cmpd="sng" algn="ctr">
+                      <a:solidFill>
+                        <a:srgbClr val="DBE3EA"/>
+                      </a:solidFill>
+                      <a:prstDash val="solid"/>
+                      <a:round/>
+                      <a:headEnd type="none" w="med" len="med"/>
+                      <a:tailEnd type="none" w="med" len="med"/>
+                    </a:lnR>
+                    <a:lnT w="6350" cap="flat" cmpd="sng" algn="ctr">
+                      <a:solidFill>
+                        <a:srgbClr val="DBE3EA"/>
+                      </a:solidFill>
+                      <a:prstDash val="solid"/>
+                      <a:round/>
+                      <a:headEnd type="none" w="med" len="med"/>
+                      <a:tailEnd type="none" w="med" len="med"/>
+                    </a:lnT>
+                    <a:lnB w="6350" cap="flat" cmpd="sng" algn="ctr">
+                      <a:solidFill>
+                        <a:srgbClr val="DBE3EA"/>
+                      </a:solidFill>
+                      <a:prstDash val="solid"/>
+                      <a:round/>
+                      <a:headEnd type="none" w="med" len="med"/>
+                      <a:tailEnd type="none" w="med" len="med"/>
+                    </a:lnB>
+                  </a:tcPr>
+                </a:tc>
+              </a:tr>
+              <a:tr h="292143">
+                <a:tc>
+                  <a:txBody>
+                    <a:bodyPr/>
+                    <a:lstStyle/>
+                    <a:p>
+                      <a:pPr algn="l" indent="0" marL="0">
+                        <a:buNone/>
+                      </a:pPr>
+                      <a:r>
+                        <a:rPr lang="en-US" sz="940" b="1" dirty="0">
+                          <a:solidFill>
+                            <a:srgbClr val="0B1F3A"/>
+                          </a:solidFill>
+                          <a:latin typeface="Arial" pitchFamily="34" charset="0"/>
+                          <a:ea typeface="Arial" pitchFamily="34" charset="-122"/>
+                          <a:cs typeface="Arial" pitchFamily="34" charset="-120"/>
+                        </a:rPr>
+                        <a:t>Học máy / học sâu</a:t>
+                      </a:r>
+                      <a:endParaRPr lang="en-US" sz="1130" dirty="0"/>
+                    </a:p>
+                    <a:p>
+                      <a:pPr algn="l" indent="0" marL="0">
+                        <a:buNone/>
+                      </a:pPr>
+                      <a:r>
+                        <a:rPr lang="en-US" sz="800" dirty="0">
+                          <a:solidFill>
+                            <a:srgbClr val="5F7183"/>
+                          </a:solidFill>
+                          <a:latin typeface="微軟正黑體" pitchFamily="34" charset="0"/>
+                          <a:ea typeface="微軟正黑體" pitchFamily="34" charset="-122"/>
+                          <a:cs typeface="微軟正黑體" pitchFamily="34" charset="-120"/>
+                        </a:rPr>
+                        <a:t>機器學習／深度學習</a:t>
+                      </a:r>
+                      <a:endParaRPr lang="en-US" sz="1130" dirty="0"/>
+                    </a:p>
+                  </a:txBody>
+                  <a:tcPr marL="63500" marR="63500" marT="38100" marB="38100" anchor="ctr">
+                    <a:lnL w="6350" cap="flat" cmpd="sng" algn="ctr">
+                      <a:solidFill>
+                        <a:srgbClr val="DBE3EA"/>
+                      </a:solidFill>
+                      <a:prstDash val="solid"/>
+                      <a:round/>
+                      <a:headEnd type="none" w="med" len="med"/>
+                      <a:tailEnd type="none" w="med" len="med"/>
+                    </a:lnL>
+                    <a:lnR w="6350" cap="flat" cmpd="sng" algn="ctr">
+                      <a:solidFill>
+                        <a:srgbClr val="DBE3EA"/>
+                      </a:solidFill>
+                      <a:prstDash val="solid"/>
+                      <a:round/>
+                      <a:headEnd type="none" w="med" len="med"/>
+                      <a:tailEnd type="none" w="med" len="med"/>
+                    </a:lnR>
+                    <a:lnT w="6350" cap="flat" cmpd="sng" algn="ctr">
+                      <a:solidFill>
+                        <a:srgbClr val="DBE3EA"/>
+                      </a:solidFill>
+                      <a:prstDash val="solid"/>
+                      <a:round/>
+                      <a:headEnd type="none" w="med" len="med"/>
+                      <a:tailEnd type="none" w="med" len="med"/>
+                    </a:lnT>
+                    <a:lnB w="6350" cap="flat" cmpd="sng" algn="ctr">
+                      <a:solidFill>
+                        <a:srgbClr val="DBE3EA"/>
+                      </a:solidFill>
+                      <a:prstDash val="solid"/>
+                      <a:round/>
+                      <a:headEnd type="none" w="med" len="med"/>
+                      <a:tailEnd type="none" w="med" len="med"/>
+                    </a:lnB>
+                  </a:tcPr>
+                </a:tc>
+                <a:tc>
+                  <a:txBody>
+                    <a:bodyPr/>
+                    <a:lstStyle/>
+                    <a:p>
+                      <a:pPr algn="l" indent="0" marL="0">
+                        <a:buNone/>
+                      </a:pPr>
+                      <a:r>
+                        <a:rPr lang="en-US" sz="940" dirty="0">
+                          <a:solidFill>
+                            <a:srgbClr val="1A2733"/>
+                          </a:solidFill>
+                          <a:latin typeface="Arial" pitchFamily="34" charset="0"/>
+                          <a:ea typeface="Arial" pitchFamily="34" charset="-122"/>
+                          <a:cs typeface="Arial" pitchFamily="34" charset="-120"/>
+                        </a:rPr>
+                        <a:t>Học máy: người chọn «nhìn cái gì». Học sâu: máy tự học cả cái đó. Cả hai đều cần dữ liệu có đáp án</a:t>
+                      </a:r>
+                      <a:endParaRPr lang="en-US" sz="1130" dirty="0"/>
+                    </a:p>
+                    <a:p>
+                      <a:pPr algn="l" indent="0" marL="0">
+                        <a:buNone/>
+                      </a:pPr>
+                      <a:r>
+                        <a:rPr lang="en-US" sz="800" dirty="0">
+                          <a:solidFill>
+                            <a:srgbClr val="5F7183"/>
+                          </a:solidFill>
+                          <a:latin typeface="微軟正黑體" pitchFamily="34" charset="0"/>
+                          <a:ea typeface="微軟正黑體" pitchFamily="34" charset="-122"/>
+                          <a:cs typeface="微軟正黑體" pitchFamily="34" charset="-120"/>
+                        </a:rPr>
+                        <a:t>機器學習：人決定看什麼；深度學習：連看什麼都自己學。兩種都要有答案的資料</a:t>
+                      </a:r>
+                      <a:endParaRPr lang="en-US" sz="1130" dirty="0"/>
+                    </a:p>
+                  </a:txBody>
+                  <a:tcPr marL="63500" marR="63500" marT="38100" marB="38100" anchor="ctr">
+                    <a:lnL w="6350" cap="flat" cmpd="sng" algn="ctr">
+                      <a:solidFill>
+                        <a:srgbClr val="DBE3EA"/>
+                      </a:solidFill>
+                      <a:prstDash val="solid"/>
+                      <a:round/>
+                      <a:headEnd type="none" w="med" len="med"/>
+                      <a:tailEnd type="none" w="med" len="med"/>
+                    </a:lnL>
+                    <a:lnR w="6350" cap="flat" cmpd="sng" algn="ctr">
+                      <a:solidFill>
+                        <a:srgbClr val="DBE3EA"/>
+                      </a:solidFill>
+                      <a:prstDash val="solid"/>
+                      <a:round/>
+                      <a:headEnd type="none" w="med" len="med"/>
+                      <a:tailEnd type="none" w="med" len="med"/>
+                    </a:lnR>
+                    <a:lnT w="6350" cap="flat" cmpd="sng" algn="ctr">
+                      <a:solidFill>
+                        <a:srgbClr val="DBE3EA"/>
+                      </a:solidFill>
+                      <a:prstDash val="solid"/>
+                      <a:round/>
+                      <a:headEnd type="none" w="med" len="med"/>
+                      <a:tailEnd type="none" w="med" len="med"/>
+                    </a:lnT>
+                    <a:lnB w="6350" cap="flat" cmpd="sng" algn="ctr">
+                      <a:solidFill>
+                        <a:srgbClr val="DBE3EA"/>
+                      </a:solidFill>
+                      <a:prstDash val="solid"/>
+                      <a:round/>
+                      <a:headEnd type="none" w="med" len="med"/>
+                      <a:tailEnd type="none" w="med" len="med"/>
+                    </a:lnB>
+                  </a:tcPr>
+                </a:tc>
+              </a:tr>
+              <a:tr h="292143">
+                <a:tc>
+                  <a:txBody>
+                    <a:bodyPr/>
+                    <a:lstStyle/>
+                    <a:p>
+                      <a:pPr algn="l" indent="0" marL="0">
+                        <a:buNone/>
+                      </a:pPr>
+                      <a:r>
+                        <a:rPr lang="en-US" sz="940" b="1" dirty="0">
+                          <a:solidFill>
+                            <a:srgbClr val="0B1F3A"/>
+                          </a:solidFill>
+                          <a:latin typeface="Arial" pitchFamily="34" charset="0"/>
+                          <a:ea typeface="Arial" pitchFamily="34" charset="-122"/>
+                          <a:cs typeface="Arial" pitchFamily="34" charset="-120"/>
+                        </a:rPr>
+                        <a:t>Phát hiện cho ra gì</a:t>
+                      </a:r>
+                      <a:endParaRPr lang="en-US" sz="1130" dirty="0"/>
+                    </a:p>
+                    <a:p>
+                      <a:pPr algn="l" indent="0" marL="0">
+                        <a:buNone/>
+                      </a:pPr>
+                      <a:r>
+                        <a:rPr lang="en-US" sz="800" dirty="0">
+                          <a:solidFill>
+                            <a:srgbClr val="5F7183"/>
+                          </a:solidFill>
+                          <a:latin typeface="微軟正黑體" pitchFamily="34" charset="0"/>
+                          <a:ea typeface="微軟正黑體" pitchFamily="34" charset="-122"/>
+                          <a:cs typeface="微軟正黑體" pitchFamily="34" charset="-120"/>
+                        </a:rPr>
+                        <a:t>偵測給什麼</a:t>
+                      </a:r>
+                      <a:endParaRPr lang="en-US" sz="1130" dirty="0"/>
+                    </a:p>
+                  </a:txBody>
+                  <a:tcPr marL="63500" marR="63500" marT="38100" marB="38100" anchor="ctr">
+                    <a:lnL w="6350" cap="flat" cmpd="sng" algn="ctr">
+                      <a:solidFill>
+                        <a:srgbClr val="DBE3EA"/>
+                      </a:solidFill>
+                      <a:prstDash val="solid"/>
+                      <a:round/>
+                      <a:headEnd type="none" w="med" len="med"/>
+                      <a:tailEnd type="none" w="med" len="med"/>
+                    </a:lnL>
+                    <a:lnR w="6350" cap="flat" cmpd="sng" algn="ctr">
+                      <a:solidFill>
+                        <a:srgbClr val="DBE3EA"/>
+                      </a:solidFill>
+                      <a:prstDash val="solid"/>
+                      <a:round/>
+                      <a:headEnd type="none" w="med" len="med"/>
+                      <a:tailEnd type="none" w="med" len="med"/>
+                    </a:lnR>
+                    <a:lnT w="6350" cap="flat" cmpd="sng" algn="ctr">
+                      <a:solidFill>
+                        <a:srgbClr val="DBE3EA"/>
+                      </a:solidFill>
+                      <a:prstDash val="solid"/>
+                      <a:round/>
+                      <a:headEnd type="none" w="med" len="med"/>
+                      <a:tailEnd type="none" w="med" len="med"/>
+                    </a:lnT>
+                    <a:lnB w="6350" cap="flat" cmpd="sng" algn="ctr">
+                      <a:solidFill>
+                        <a:srgbClr val="DBE3EA"/>
+                      </a:solidFill>
+                      <a:prstDash val="solid"/>
+                      <a:round/>
+                      <a:headEnd type="none" w="med" len="med"/>
+                      <a:tailEnd type="none" w="med" len="med"/>
+                    </a:lnB>
+                  </a:tcPr>
+                </a:tc>
+                <a:tc>
+                  <a:txBody>
+                    <a:bodyPr/>
+                    <a:lstStyle/>
+                    <a:p>
+                      <a:pPr algn="l" indent="0" marL="0">
+                        <a:buNone/>
+                      </a:pPr>
+                      <a:r>
+                        <a:rPr lang="en-US" sz="940" dirty="0">
+                          <a:solidFill>
+                            <a:srgbClr val="1A2733"/>
+                          </a:solidFill>
+                          <a:latin typeface="Arial" pitchFamily="34" charset="0"/>
+                          <a:ea typeface="Arial" pitchFamily="34" charset="-122"/>
+                          <a:cs typeface="Arial" pitchFamily="34" charset="-120"/>
+                        </a:rPr>
+                        <a:t>Khung + loại + điểm. Ngưỡng thấp: báo nhiều; ngưỡng cao: sót nhiều</a:t>
+                      </a:r>
+                      <a:endParaRPr lang="en-US" sz="1130" dirty="0"/>
+                    </a:p>
+                    <a:p>
+                      <a:pPr algn="l" indent="0" marL="0">
+                        <a:buNone/>
+                      </a:pPr>
+                      <a:r>
+                        <a:rPr lang="en-US" sz="800" dirty="0">
+                          <a:solidFill>
+                            <a:srgbClr val="5F7183"/>
+                          </a:solidFill>
+                          <a:latin typeface="微軟正黑體" pitchFamily="34" charset="0"/>
+                          <a:ea typeface="微軟正黑體" pitchFamily="34" charset="-122"/>
+                          <a:cs typeface="微軟正黑體" pitchFamily="34" charset="-120"/>
+                        </a:rPr>
+                        <a:t>框＋類別＋分數。門檻低就多報，門檻高就漏掉</a:t>
+                      </a:r>
+                      <a:endParaRPr lang="en-US" sz="1130" dirty="0"/>
+                    </a:p>
+                  </a:txBody>
+                  <a:tcPr marL="63500" marR="63500" marT="38100" marB="38100" anchor="ctr">
+                    <a:lnL w="6350" cap="flat" cmpd="sng" algn="ctr">
+                      <a:solidFill>
+                        <a:srgbClr val="DBE3EA"/>
+                      </a:solidFill>
+                      <a:prstDash val="solid"/>
+                      <a:round/>
+                      <a:headEnd type="none" w="med" len="med"/>
+                      <a:tailEnd type="none" w="med" len="med"/>
+                    </a:lnL>
+                    <a:lnR w="6350" cap="flat" cmpd="sng" algn="ctr">
+                      <a:solidFill>
+                        <a:srgbClr val="DBE3EA"/>
+                      </a:solidFill>
+                      <a:prstDash val="solid"/>
+                      <a:round/>
+                      <a:headEnd type="none" w="med" len="med"/>
+                      <a:tailEnd type="none" w="med" len="med"/>
+                    </a:lnR>
+                    <a:lnT w="6350" cap="flat" cmpd="sng" algn="ctr">
+                      <a:solidFill>
+                        <a:srgbClr val="DBE3EA"/>
+                      </a:solidFill>
+                      <a:prstDash val="solid"/>
+                      <a:round/>
+                      <a:headEnd type="none" w="med" len="med"/>
+                      <a:tailEnd type="none" w="med" len="med"/>
+                    </a:lnT>
+                    <a:lnB w="6350" cap="flat" cmpd="sng" algn="ctr">
+                      <a:solidFill>
+                        <a:srgbClr val="DBE3EA"/>
+                      </a:solidFill>
+                      <a:prstDash val="solid"/>
+                      <a:round/>
+                      <a:headEnd type="none" w="med" len="med"/>
+                      <a:tailEnd type="none" w="med" len="med"/>
+                    </a:lnB>
+                  </a:tcPr>
+                </a:tc>
+              </a:tr>
+              <a:tr h="292143">
+                <a:tc>
+                  <a:txBody>
+                    <a:bodyPr/>
+                    <a:lstStyle/>
+                    <a:p>
+                      <a:pPr algn="l" indent="0" marL="0">
+                        <a:buNone/>
+                      </a:pPr>
+                      <a:r>
+                        <a:rPr lang="en-US" sz="940" b="1" dirty="0">
+                          <a:solidFill>
+                            <a:srgbClr val="0B1F3A"/>
+                          </a:solidFill>
+                          <a:latin typeface="Arial" pitchFamily="34" charset="0"/>
+                          <a:ea typeface="Arial" pitchFamily="34" charset="-122"/>
+                          <a:cs typeface="Arial" pitchFamily="34" charset="-120"/>
+                        </a:rPr>
+                        <a:t>Xa, tối thì sót</a:t>
+                      </a:r>
+                      <a:endParaRPr lang="en-US" sz="1130" dirty="0"/>
+                    </a:p>
+                    <a:p>
+                      <a:pPr algn="l" indent="0" marL="0">
+                        <a:buNone/>
+                      </a:pPr>
+                      <a:r>
+                        <a:rPr lang="en-US" sz="800" dirty="0">
+                          <a:solidFill>
+                            <a:srgbClr val="5F7183"/>
+                          </a:solidFill>
+                          <a:latin typeface="微軟正黑體" pitchFamily="34" charset="0"/>
+                          <a:ea typeface="微軟正黑體" pitchFamily="34" charset="-122"/>
+                          <a:cs typeface="微軟正黑體" pitchFamily="34" charset="-120"/>
+                        </a:rPr>
+                        <a:t>一遠、一暗就漏</a:t>
+                      </a:r>
+                      <a:endParaRPr lang="en-US" sz="1130" dirty="0"/>
+                    </a:p>
+                  </a:txBody>
+                  <a:tcPr marL="63500" marR="63500" marT="38100" marB="38100" anchor="ctr">
+                    <a:lnL w="6350" cap="flat" cmpd="sng" algn="ctr">
+                      <a:solidFill>
+                        <a:srgbClr val="DBE3EA"/>
+                      </a:solidFill>
+                      <a:prstDash val="solid"/>
+                      <a:round/>
+                      <a:headEnd type="none" w="med" len="med"/>
+                      <a:tailEnd type="none" w="med" len="med"/>
+                    </a:lnL>
+                    <a:lnR w="6350" cap="flat" cmpd="sng" algn="ctr">
+                      <a:solidFill>
+                        <a:srgbClr val="DBE3EA"/>
+                      </a:solidFill>
+                      <a:prstDash val="solid"/>
+                      <a:round/>
+                      <a:headEnd type="none" w="med" len="med"/>
+                      <a:tailEnd type="none" w="med" len="med"/>
+                    </a:lnR>
+                    <a:lnT w="6350" cap="flat" cmpd="sng" algn="ctr">
+                      <a:solidFill>
+                        <a:srgbClr val="DBE3EA"/>
+                      </a:solidFill>
+                      <a:prstDash val="solid"/>
+                      <a:round/>
+                      <a:headEnd type="none" w="med" len="med"/>
+                      <a:tailEnd type="none" w="med" len="med"/>
+                    </a:lnT>
+                    <a:lnB w="6350" cap="flat" cmpd="sng" algn="ctr">
+                      <a:solidFill>
+                        <a:srgbClr val="DBE3EA"/>
+                      </a:solidFill>
+                      <a:prstDash val="solid"/>
+                      <a:round/>
+                      <a:headEnd type="none" w="med" len="med"/>
+                      <a:tailEnd type="none" w="med" len="med"/>
+                    </a:lnB>
+                  </a:tcPr>
+                </a:tc>
+                <a:tc>
+                  <a:txBody>
+                    <a:bodyPr/>
+                    <a:lstStyle/>
+                    <a:p>
+                      <a:pPr algn="l" indent="0" marL="0">
+                        <a:buNone/>
+                      </a:pPr>
+                      <a:r>
+                        <a:rPr lang="en-US" sz="940" dirty="0">
+                          <a:solidFill>
+                            <a:srgbClr val="1A2733"/>
+                          </a:solidFill>
+                          <a:latin typeface="Arial" pitchFamily="34" charset="0"/>
+                          <a:ea typeface="Arial" pitchFamily="34" charset="-122"/>
+                          <a:cs typeface="Arial" pitchFamily="34" charset="-120"/>
+                        </a:rPr>
+                        <a:t>Người 0–10 m 82%, 40–50 m 3%; người 10–20 m: ngày 66%, đêm 49%</a:t>
+                      </a:r>
+                      <a:endParaRPr lang="en-US" sz="1130" dirty="0"/>
+                    </a:p>
+                    <a:p>
+                      <a:pPr algn="l" indent="0" marL="0">
+                        <a:buNone/>
+                      </a:pPr>
+                      <a:r>
+                        <a:rPr lang="en-US" sz="800" dirty="0">
+                          <a:solidFill>
+                            <a:srgbClr val="5F7183"/>
+                          </a:solidFill>
+                          <a:latin typeface="微軟正黑體" pitchFamily="34" charset="0"/>
+                          <a:ea typeface="微軟正黑體" pitchFamily="34" charset="-122"/>
+                          <a:cs typeface="微軟正黑體" pitchFamily="34" charset="-120"/>
+                        </a:rPr>
+                        <a:t>行人 0–10 m 82%、40–50 m 3%；10–20 m 的行人：白天 66%、晚上 49%</a:t>
+                      </a:r>
+                      <a:endParaRPr lang="en-US" sz="1130" dirty="0"/>
+                    </a:p>
+                  </a:txBody>
+                  <a:tcPr marL="63500" marR="63500" marT="38100" marB="38100" anchor="ctr">
+                    <a:lnL w="6350" cap="flat" cmpd="sng" algn="ctr">
+                      <a:solidFill>
+                        <a:srgbClr val="DBE3EA"/>
+                      </a:solidFill>
+                      <a:prstDash val="solid"/>
+                      <a:round/>
+                      <a:headEnd type="none" w="med" len="med"/>
+                      <a:tailEnd type="none" w="med" len="med"/>
+                    </a:lnL>
+                    <a:lnR w="6350" cap="flat" cmpd="sng" algn="ctr">
+                      <a:solidFill>
+                        <a:srgbClr val="DBE3EA"/>
+                      </a:solidFill>
+                      <a:prstDash val="solid"/>
+                      <a:round/>
+                      <a:headEnd type="none" w="med" len="med"/>
+                      <a:tailEnd type="none" w="med" len="med"/>
+                    </a:lnR>
+                    <a:lnT w="6350" cap="flat" cmpd="sng" algn="ctr">
+                      <a:solidFill>
+                        <a:srgbClr val="DBE3EA"/>
+                      </a:solidFill>
+                      <a:prstDash val="solid"/>
+                      <a:round/>
+                      <a:headEnd type="none" w="med" len="med"/>
+                      <a:tailEnd type="none" w="med" len="med"/>
+                    </a:lnT>
+                    <a:lnB w="6350" cap="flat" cmpd="sng" algn="ctr">
+                      <a:solidFill>
+                        <a:srgbClr val="DBE3EA"/>
+                      </a:solidFill>
+                      <a:prstDash val="solid"/>
+                      <a:round/>
+                      <a:headEnd type="none" w="med" len="med"/>
+                      <a:tailEnd type="none" w="med" len="med"/>
+                    </a:lnB>
+                  </a:tcPr>
+                </a:tc>
+              </a:tr>
+              <a:tr h="292143">
+                <a:tc>
+                  <a:txBody>
+                    <a:bodyPr/>
+                    <a:lstStyle/>
+                    <a:p>
+                      <a:pPr algn="l" indent="0" marL="0">
+                        <a:buNone/>
+                      </a:pPr>
+                      <a:r>
+                        <a:rPr lang="en-US" sz="940" b="1" dirty="0">
+                          <a:solidFill>
+                            <a:srgbClr val="0B1F3A"/>
+                          </a:solidFill>
+                          <a:latin typeface="Arial" pitchFamily="34" charset="0"/>
+                          <a:ea typeface="Arial" pitchFamily="34" charset="-122"/>
+                          <a:cs typeface="Arial" pitchFamily="34" charset="-120"/>
+                        </a:rPr>
+                        <a:t>Gán nhãn, IoU</a:t>
+                      </a:r>
+                      <a:endParaRPr lang="en-US" sz="1130" dirty="0"/>
+                    </a:p>
+                    <a:p>
+                      <a:pPr algn="l" indent="0" marL="0">
+                        <a:buNone/>
+                      </a:pPr>
+                      <a:r>
+                        <a:rPr lang="en-US" sz="800" dirty="0">
+                          <a:solidFill>
+                            <a:srgbClr val="5F7183"/>
+                          </a:solidFill>
+                          <a:latin typeface="微軟正黑體" pitchFamily="34" charset="0"/>
+                          <a:ea typeface="微軟正黑體" pitchFamily="34" charset="-122"/>
+                          <a:cs typeface="微軟正黑體" pitchFamily="34" charset="-120"/>
+                        </a:rPr>
+                        <a:t>標註、IoU</a:t>
+                      </a:r>
+                      <a:endParaRPr lang="en-US" sz="1130" dirty="0"/>
+                    </a:p>
+                  </a:txBody>
+                  <a:tcPr marL="63500" marR="63500" marT="38100" marB="38100" anchor="ctr">
+                    <a:lnL w="6350" cap="flat" cmpd="sng" algn="ctr">
+                      <a:solidFill>
+                        <a:srgbClr val="DBE3EA"/>
+                      </a:solidFill>
+                      <a:prstDash val="solid"/>
+                      <a:round/>
+                      <a:headEnd type="none" w="med" len="med"/>
+                      <a:tailEnd type="none" w="med" len="med"/>
+                    </a:lnL>
+                    <a:lnR w="6350" cap="flat" cmpd="sng" algn="ctr">
+                      <a:solidFill>
+                        <a:srgbClr val="DBE3EA"/>
+                      </a:solidFill>
+                      <a:prstDash val="solid"/>
+                      <a:round/>
+                      <a:headEnd type="none" w="med" len="med"/>
+                      <a:tailEnd type="none" w="med" len="med"/>
+                    </a:lnR>
+                    <a:lnT w="6350" cap="flat" cmpd="sng" algn="ctr">
+                      <a:solidFill>
+                        <a:srgbClr val="DBE3EA"/>
+                      </a:solidFill>
+                      <a:prstDash val="solid"/>
+                      <a:round/>
+                      <a:headEnd type="none" w="med" len="med"/>
+                      <a:tailEnd type="none" w="med" len="med"/>
+                    </a:lnT>
+                    <a:lnB w="6350" cap="flat" cmpd="sng" algn="ctr">
+                      <a:solidFill>
+                        <a:srgbClr val="DBE3EA"/>
+                      </a:solidFill>
+                      <a:prstDash val="solid"/>
+                      <a:round/>
+                      <a:headEnd type="none" w="med" len="med"/>
+                      <a:tailEnd type="none" w="med" len="med"/>
+                    </a:lnB>
+                  </a:tcPr>
+                </a:tc>
+                <a:tc>
+                  <a:txBody>
+                    <a:bodyPr/>
+                    <a:lstStyle/>
+                    <a:p>
+                      <a:pPr algn="l" indent="0" marL="0">
+                        <a:buNone/>
+                      </a:pPr>
+                      <a:r>
+                        <a:rPr lang="en-US" sz="940" dirty="0">
+                          <a:solidFill>
+                            <a:srgbClr val="1A2733"/>
+                          </a:solidFill>
+                          <a:latin typeface="Arial" pitchFamily="34" charset="0"/>
+                          <a:ea typeface="Arial" pitchFamily="34" charset="-122"/>
+                          <a:cs typeface="Arial" pitchFamily="34" charset="-120"/>
+                        </a:rPr>
+                        <a:t>Khung sát, gồm tay chân, người lái chung khung với xe. IoU = chồng lên ÷ gộp lại: 1 là trùng khít, 0 là không chạm</a:t>
+                      </a:r>
+                      <a:endParaRPr lang="en-US" sz="1130" dirty="0"/>
+                    </a:p>
+                    <a:p>
+                      <a:pPr algn="l" indent="0" marL="0">
+                        <a:buNone/>
+                      </a:pPr>
+                      <a:r>
+                        <a:rPr lang="en-US" sz="800" dirty="0">
+                          <a:solidFill>
+                            <a:srgbClr val="5F7183"/>
+                          </a:solidFill>
+                          <a:latin typeface="微軟正黑體" pitchFamily="34" charset="0"/>
+                          <a:ea typeface="微軟正黑體" pitchFamily="34" charset="-122"/>
+                          <a:cs typeface="微軟正黑體" pitchFamily="34" charset="-120"/>
+                        </a:rPr>
+                        <a:t>框要貼、手腳包進去、騎士跟車同一個框。IoU＝重疊÷合起來：1 是完全一樣，0 是沒碰到</a:t>
+                      </a:r>
+                      <a:endParaRPr lang="en-US" sz="1130" dirty="0"/>
+                    </a:p>
+                  </a:txBody>
+                  <a:tcPr marL="63500" marR="63500" marT="38100" marB="38100" anchor="ctr">
+                    <a:lnL w="6350" cap="flat" cmpd="sng" algn="ctr">
+                      <a:solidFill>
+                        <a:srgbClr val="DBE3EA"/>
+                      </a:solidFill>
+                      <a:prstDash val="solid"/>
+                      <a:round/>
+                      <a:headEnd type="none" w="med" len="med"/>
+                      <a:tailEnd type="none" w="med" len="med"/>
+                    </a:lnL>
+                    <a:lnR w="6350" cap="flat" cmpd="sng" algn="ctr">
+                      <a:solidFill>
+                        <a:srgbClr val="DBE3EA"/>
+                      </a:solidFill>
+                      <a:prstDash val="solid"/>
+                      <a:round/>
+                      <a:headEnd type="none" w="med" len="med"/>
+                      <a:tailEnd type="none" w="med" len="med"/>
+                    </a:lnR>
+                    <a:lnT w="6350" cap="flat" cmpd="sng" algn="ctr">
+                      <a:solidFill>
+                        <a:srgbClr val="DBE3EA"/>
+                      </a:solidFill>
+                      <a:prstDash val="solid"/>
+                      <a:round/>
+                      <a:headEnd type="none" w="med" len="med"/>
+                      <a:tailEnd type="none" w="med" len="med"/>
+                    </a:lnT>
+                    <a:lnB w="6350" cap="flat" cmpd="sng" algn="ctr">
+                      <a:solidFill>
+                        <a:srgbClr val="DBE3EA"/>
+                      </a:solidFill>
+                      <a:prstDash val="solid"/>
+                      <a:round/>
+                      <a:headEnd type="none" w="med" len="med"/>
+                      <a:tailEnd type="none" w="med" len="med"/>
+                    </a:lnB>
+                  </a:tcPr>
+                </a:tc>
+              </a:tr>
+            </a:tbl>
+          </a:graphicData>
+        </a:graphic>
+      </p:graphicFrame>
+      <p:sp>
+        <p:nvSpPr>
+          <p:cNvPr id="4" name="Text 1"/>
+          <p:cNvSpPr txBox="1"/>
+          <p:nvPr/>
+        </p:nvSpPr>
+        <p:spPr>
+          <a:xfrm>
+            <a:off x="748365" y="4199528"/>
+            <a:ext cx="7647270" cy="429622"/>
+          </a:xfrm>
+          <a:prstGeom prst="rect">
+            <a:avLst/>
+          </a:prstGeom>
+          <a:noFill/>
+          <a:ln/>
+        </p:spPr>
+        <p:txBody>
+          <a:bodyPr wrap="square" lIns="0" tIns="0" rIns="0" bIns="0" rtlCol="0" anchor="t"/>
+          <a:lstStyle/>
+          <a:p>
+            <a:pPr indent="0" marL="0">
+              <a:lnSpc>
+                <a:spcPct val="116000"/>
+              </a:lnSpc>
+              <a:buNone/>
+            </a:pPr>
+            <a:r>
+              <a:rPr lang="en-US" sz="1130" b="1" dirty="0">
+                <a:solidFill>
+                  <a:srgbClr val="007F72"/>
+                </a:solidFill>
+                <a:latin typeface="Arial" pitchFamily="34" charset="0"/>
+                <a:ea typeface="Arial" pitchFamily="34" charset="-122"/>
+                <a:cs typeface="Arial" pitchFamily="34" charset="-120"/>
+              </a:rPr>
+              <a:t>Dữ liệu gán nhãn là sách giáo khoa của mô hình: thiếu, sai thì mô hình học sai.</a:t>
+            </a:r>
+            <a:endParaRPr lang="en-US" sz="1130" dirty="0"/>
+          </a:p>
+          <a:p>
+            <a:pPr indent="0" marL="0">
+              <a:lnSpc>
+                <a:spcPct val="116000"/>
+              </a:lnSpc>
+              <a:buNone/>
+            </a:pPr>
+            <a:r>
+              <a:rPr lang="en-US" sz="1030" dirty="0">
+                <a:solidFill>
+                  <a:srgbClr val="007F72"/>
+                </a:solidFill>
+                <a:latin typeface="微軟正黑體" pitchFamily="34" charset="0"/>
+                <a:ea typeface="微軟正黑體" pitchFamily="34" charset="-122"/>
+                <a:cs typeface="微軟正黑體" pitchFamily="34" charset="-120"/>
+              </a:rPr>
+              <a:t>標註資料是模型的課本：漏標、標錯，模型就學錯。</a:t>
+            </a:r>
+            <a:endParaRPr lang="en-US" sz="1130" dirty="0"/>
+          </a:p>
+        </p:txBody>
+      </p:sp>
+      <p:pic>
+        <p:nvPicPr>
+          <p:cNvPr id="6" name="Image 0" descr="/Users/tsengchenghsun/Class/carClass/Claude outputs/第八週(10-29)/src/logo.png">    </p:cNvPr>
+          <p:cNvPicPr>
+            <a:picLocks noChangeAspect="1"/>
+          </p:cNvPicPr>
+          <p:nvPr/>
+        </p:nvPicPr>
+        <p:blipFill>
+          <a:blip r:embed="rId1"/>
+          <a:stretch>
+            <a:fillRect/>
+          </a:stretch>
+        </p:blipFill>
+        <p:spPr>
+          <a:xfrm>
+            <a:off x="7882128" y="109728"/>
+            <a:ext cx="1097280" cy="242439"/>
+          </a:xfrm>
+          <a:prstGeom prst="rect">
+            <a:avLst/>
+          </a:prstGeom>
+        </p:spPr>
+      </p:pic>
+      <p:sp>
+        <p:nvSpPr>
+          <p:cNvPr id="7" name="Text 2"/>
+          <p:cNvSpPr txBox="1"/>
+          <p:nvPr/>
+        </p:nvSpPr>
+        <p:spPr>
+          <a:xfrm>
+            <a:off x="378890" y="120294"/>
+            <a:ext cx="773319" cy="240588"/>
+          </a:xfrm>
+          <a:prstGeom prst="rect">
+            <a:avLst/>
+          </a:prstGeom>
+          <a:noFill/>
+          <a:ln/>
+        </p:spPr>
+        <p:txBody>
+          <a:bodyPr wrap="square" lIns="0" tIns="0" rIns="0" bIns="0" rtlCol="0" anchor="ctr"/>
+          <a:lstStyle/>
+          <a:p>
+            <a:pPr indent="0" marL="0">
+              <a:buNone/>
+            </a:pPr>
+            <a:r>
+              <a:rPr lang="en-US" sz="850" dirty="0">
+                <a:solidFill>
+                  <a:srgbClr val="5F7183"/>
+                </a:solidFill>
+                <a:latin typeface="Arial" pitchFamily="34" charset="0"/>
+                <a:ea typeface="Arial" pitchFamily="34" charset="-122"/>
+                <a:cs typeface="Arial" pitchFamily="34" charset="-120"/>
+              </a:rPr>
+              <a:t>11 / 16</a:t>
+            </a:r>
+            <a:endParaRPr lang="en-US" sz="850" dirty="0"/>
+          </a:p>
+        </p:txBody>
+      </p:sp>
+      <p:sp>
+        <p:nvSpPr>
+          <p:cNvPr id="8" name="Text 3"/>
+          <p:cNvSpPr txBox="1"/>
+          <p:nvPr/>
+        </p:nvSpPr>
+        <p:spPr>
+          <a:xfrm>
+            <a:off x="1177987" y="120294"/>
+            <a:ext cx="1890336" cy="240588"/>
+          </a:xfrm>
+          <a:prstGeom prst="rect">
+            <a:avLst/>
+          </a:prstGeom>
+          <a:noFill/>
+          <a:ln/>
+        </p:spPr>
+        <p:txBody>
+          <a:bodyPr wrap="square" lIns="0" tIns="0" rIns="0" bIns="0" rtlCol="0" anchor="ctr"/>
+          <a:lstStyle/>
+          <a:p>
+            <a:pPr indent="0" marL="0">
+              <a:buNone/>
+            </a:pPr>
+            <a:r>
+              <a:rPr lang="en-US" sz="850" dirty="0">
+                <a:solidFill>
+                  <a:srgbClr val="5F7183"/>
+                </a:solidFill>
+                <a:latin typeface="Arial" pitchFamily="34" charset="0"/>
+                <a:ea typeface="Arial" pitchFamily="34" charset="-122"/>
+                <a:cs typeface="Arial" pitchFamily="34" charset="-120"/>
+              </a:rPr>
+              <a:t>Tiết 3 · 第 3 節</a:t>
+            </a:r>
+            <a:endParaRPr lang="en-US" sz="850" dirty="0"/>
+          </a:p>
+        </p:txBody>
+      </p:sp>
+    </p:spTree>
+  </p:cSld>
+  <p:clrMapOvr>
+    <a:masterClrMapping/>
+  </p:clrMapOvr>
+</p:sld>
+</file>
+
+<file path=ppt/slides/slide12.xml><?xml version="1.0" encoding="utf-8"?>
+<p:sld xmlns:a="http://schemas.openxmlformats.org/drawingml/2006/main" xmlns:r="http://schemas.openxmlformats.org/officeDocument/2006/relationships" xmlns:p="http://schemas.openxmlformats.org/presentationml/2006/main">
+  <p:cSld name="Slide 12">
     <p:spTree>
       <p:nvGrpSpPr>
         <p:cNvPr id="1" name=""/>
@@ -7736,7 +9691,7 @@
       </p:sp>
       <p:graphicFrame>
         <p:nvGraphicFramePr>
-          <p:cNvPr id="12" name="Table 0"/>
+          <p:cNvPr id="13" name="Table 0"/>
           <p:cNvGraphicFramePr>
             <a:graphicFrameLocks noGrp="1"/>
           </p:cNvGraphicFramePr>
@@ -9249,7 +11204,7 @@
                 <a:ea typeface="Arial" pitchFamily="34" charset="-122"/>
                 <a:cs typeface="Arial" pitchFamily="34" charset="-120"/>
               </a:rPr>
-              <a:t>11 / 15</a:t>
+              <a:t>12 / 16</a:t>
             </a:r>
             <a:endParaRPr lang="en-US" sz="900" dirty="0"/>
           </a:p>
@@ -9302,9 +11257,9 @@
 </p:sld>
 </file>
 
-<file path=ppt/slides/slide12.xml><?xml version="1.0" encoding="utf-8"?>
+<file path=ppt/slides/slide13.xml><?xml version="1.0" encoding="utf-8"?>
 <p:sld xmlns:a="http://schemas.openxmlformats.org/drawingml/2006/main" xmlns:r="http://schemas.openxmlformats.org/officeDocument/2006/relationships" xmlns:p="http://schemas.openxmlformats.org/presentationml/2006/main">
-  <p:cSld name="Slide 12">
+  <p:cSld name="Slide 13">
     <p:spTree>
       <p:nvGrpSpPr>
         <p:cNvPr id="1" name=""/>
@@ -9527,7 +11482,7 @@
                 <a:ea typeface="Arial" pitchFamily="34" charset="-122"/>
                 <a:cs typeface="Arial" pitchFamily="34" charset="-120"/>
               </a:rPr>
-              <a:t>Biểu đồ này: % bắt được theo khoảng cách. Điều kiện: ban ngày, ngưỡng 0,3. Xe giảm ít nhất, người giảm nhiều nhất.</a:t>
+              <a:t>Biểu đồ này: % bắt được theo khoảng cách. Điều kiện: ban ngày, ngưỡng 0,3. Xe giảm ít nhất; người và xe 2 bánh ở xa gần như mất hết.</a:t>
             </a:r>
             <a:endParaRPr lang="en-US" sz="2300" dirty="0"/>
           </a:p>
@@ -9547,7 +11502,7 @@
                 <a:ea typeface="微軟正黑體" pitchFamily="34" charset="-122"/>
                 <a:cs typeface="微軟正黑體" pitchFamily="34" charset="-120"/>
               </a:rPr>
-              <a:t>這張圖：抓到的比例對距離。條件：白天、門檻 0.3。車掉最少，行人掉最多。</a:t>
+              <a:t>這張圖：抓到的比例對距離。條件：白天、門檻 0.3。車掉最少；行人、機車一遠就幾乎掉光。</a:t>
             </a:r>
             <a:endParaRPr lang="en-US" sz="2300" dirty="0"/>
           </a:p>
@@ -9733,7 +11688,7 @@
                 <a:ea typeface="Arial" pitchFamily="34" charset="-122"/>
                 <a:cs typeface="Arial" pitchFamily="34" charset="-120"/>
               </a:rPr>
-              <a:t>12 / 15</a:t>
+              <a:t>13 / 16</a:t>
             </a:r>
             <a:endParaRPr lang="en-US" sz="900" dirty="0"/>
           </a:p>
@@ -9786,9 +11741,9 @@
 </p:sld>
 </file>
 
-<file path=ppt/slides/slide13.xml><?xml version="1.0" encoding="utf-8"?>
+<file path=ppt/slides/slide14.xml><?xml version="1.0" encoding="utf-8"?>
 <p:sld xmlns:a="http://schemas.openxmlformats.org/drawingml/2006/main" xmlns:r="http://schemas.openxmlformats.org/officeDocument/2006/relationships" xmlns:p="http://schemas.openxmlformats.org/presentationml/2006/main">
-  <p:cSld name="Slide 13">
+  <p:cSld name="Slide 14">
     <p:spTree>
       <p:nvGrpSpPr>
         <p:cNvPr id="1" name=""/>
@@ -10582,7 +12537,7 @@
                 <a:ea typeface="Arial" pitchFamily="34" charset="-122"/>
                 <a:cs typeface="Arial" pitchFamily="34" charset="-120"/>
               </a:rPr>
-              <a:t>13 / 15</a:t>
+              <a:t>14 / 16</a:t>
             </a:r>
             <a:endParaRPr lang="en-US" sz="900" dirty="0"/>
           </a:p>
@@ -10616,755 +12571,6 @@
               <a:rPr lang="en-US" sz="900" dirty="0">
                 <a:solidFill>
                   <a:srgbClr val="5F7183"/>
-                </a:solidFill>
-                <a:latin typeface="Arial" pitchFamily="34" charset="0"/>
-                <a:ea typeface="Arial" pitchFamily="34" charset="-122"/>
-                <a:cs typeface="Arial" pitchFamily="34" charset="-120"/>
-              </a:rPr>
-              <a:t>Tiết 3 · 第 3 節</a:t>
-            </a:r>
-            <a:endParaRPr lang="en-US" sz="900" dirty="0"/>
-          </a:p>
-        </p:txBody>
-      </p:sp>
-    </p:spTree>
-  </p:cSld>
-  <p:clrMapOvr>
-    <a:masterClrMapping/>
-  </p:clrMapOvr>
-</p:sld>
-</file>
-
-<file path=ppt/slides/slide14.xml><?xml version="1.0" encoding="utf-8"?>
-<p:sld xmlns:a="http://schemas.openxmlformats.org/drawingml/2006/main" xmlns:r="http://schemas.openxmlformats.org/officeDocument/2006/relationships" xmlns:p="http://schemas.openxmlformats.org/presentationml/2006/main">
-  <p:cSld name="Slide 14">
-    <p:bg>
-      <p:bgPr>
-        <a:solidFill>
-          <a:srgbClr val="0B1F3A"/>
-        </a:solidFill>
-      </p:bgPr>
-    </p:bg>
-    <p:spTree>
-      <p:nvGrpSpPr>
-        <p:cNvPr id="1" name=""/>
-        <p:cNvGrpSpPr/>
-        <p:nvPr/>
-      </p:nvGrpSpPr>
-      <p:grpSpPr>
-        <a:xfrm>
-          <a:off x="0" y="0"/>
-          <a:ext cx="1" cy="1"/>
-          <a:chOff x="0" y="0"/>
-          <a:chExt cx="0" cy="0"/>
-        </a:xfrm>
-      </p:grpSpPr>
-      <p:sp>
-        <p:nvSpPr>
-          <p:cNvPr id="2" name="Shape 0"/>
-          <p:cNvSpPr/>
-          <p:nvPr/>
-        </p:nvSpPr>
-        <p:spPr>
-          <a:xfrm>
-            <a:off x="6766560" y="-1371600"/>
-            <a:ext cx="4206240" cy="4206240"/>
-          </a:xfrm>
-          <a:prstGeom prst="ellipse">
-            <a:avLst/>
-          </a:prstGeom>
-          <a:solidFill>
-            <a:srgbClr val="13314F"/>
-          </a:solidFill>
-          <a:ln w="12700">
-            <a:solidFill>
-              <a:srgbClr val="13314F"/>
-            </a:solidFill>
-            <a:prstDash val="solid"/>
-          </a:ln>
-        </p:spPr>
-      </p:sp>
-      <p:sp>
-        <p:nvSpPr>
-          <p:cNvPr id="3" name="Shape 1"/>
-          <p:cNvSpPr/>
-          <p:nvPr/>
-        </p:nvSpPr>
-        <p:spPr>
-          <a:xfrm>
-            <a:off x="8138160" y="2103120"/>
-            <a:ext cx="2377440" cy="2377440"/>
-          </a:xfrm>
-          <a:prstGeom prst="ellipse">
-            <a:avLst/>
-          </a:prstGeom>
-          <a:solidFill>
-            <a:srgbClr val="007F72">
-              <a:alpha val="28000"/>
-            </a:srgbClr>
-          </a:solidFill>
-          <a:ln/>
-        </p:spPr>
-      </p:sp>
-      <p:sp>
-        <p:nvSpPr>
-          <p:cNvPr id="4" name="Text 2"/>
-          <p:cNvSpPr txBox="1"/>
-          <p:nvPr/>
-        </p:nvSpPr>
-        <p:spPr>
-          <a:xfrm>
-            <a:off x="502920" y="475488"/>
-            <a:ext cx="6766560" cy="274320"/>
-          </a:xfrm>
-          <a:prstGeom prst="rect">
-            <a:avLst/>
-          </a:prstGeom>
-          <a:noFill/>
-          <a:ln/>
-        </p:spPr>
-        <p:txBody>
-          <a:bodyPr wrap="square" lIns="0" tIns="0" rIns="0" bIns="0" rtlCol="0" anchor="ctr"/>
-          <a:lstStyle/>
-          <a:p>
-            <a:pPr indent="0" marL="0">
-              <a:buNone/>
-            </a:pPr>
-            <a:r>
-              <a:rPr lang="en-US" sz="1250" b="1" dirty="0">
-                <a:solidFill>
-                  <a:srgbClr val="FFB020"/>
-                </a:solidFill>
-                <a:latin typeface="Arial" pitchFamily="34" charset="0"/>
-                <a:ea typeface="Arial" pitchFamily="34" charset="-122"/>
-                <a:cs typeface="Arial" pitchFamily="34" charset="-120"/>
-              </a:rPr>
-              <a:t>Thi thử · 模擬考</a:t>
-            </a:r>
-            <a:endParaRPr lang="en-US" sz="1250" dirty="0"/>
-          </a:p>
-        </p:txBody>
-      </p:sp>
-      <p:sp>
-        <p:nvSpPr>
-          <p:cNvPr id="5" name="Text 3"/>
-          <p:cNvSpPr txBox="1"/>
-          <p:nvPr/>
-        </p:nvSpPr>
-        <p:spPr>
-          <a:xfrm>
-            <a:off x="502920" y="786384"/>
-            <a:ext cx="8046720" cy="1225296"/>
-          </a:xfrm>
-          <a:prstGeom prst="rect">
-            <a:avLst/>
-          </a:prstGeom>
-          <a:noFill/>
-          <a:ln/>
-        </p:spPr>
-        <p:txBody>
-          <a:bodyPr wrap="square" lIns="0" tIns="0" rIns="0" bIns="0" rtlCol="0" anchor="t"/>
-          <a:lstStyle/>
-          <a:p>
-            <a:pPr indent="0" marL="0">
-              <a:lnSpc>
-                <a:spcPct val="120000"/>
-              </a:lnSpc>
-              <a:buNone/>
-            </a:pPr>
-            <a:r>
-              <a:rPr lang="en-US" sz="2300" b="1" dirty="0">
-                <a:solidFill>
-                  <a:srgbClr val="FFFFFF"/>
-                </a:solidFill>
-                <a:latin typeface="Arial" pitchFamily="34" charset="0"/>
-                <a:ea typeface="Arial" pitchFamily="34" charset="-122"/>
-                <a:cs typeface="Arial" pitchFamily="34" charset="-120"/>
-              </a:rPr>
-              <a:t>28 câu trong 12 phút: tuần nào bạn sai nhiều nhất?</a:t>
-            </a:r>
-            <a:endParaRPr lang="en-US" sz="2300" dirty="0"/>
-          </a:p>
-          <a:p>
-            <a:pPr indent="0" marL="0">
-              <a:lnSpc>
-                <a:spcPct val="120000"/>
-              </a:lnSpc>
-              <a:buNone/>
-            </a:pPr>
-            <a:r>
-              <a:rPr lang="en-US" sz="1500" dirty="0">
-                <a:solidFill>
-                  <a:srgbClr val="AFC3D4"/>
-                </a:solidFill>
-                <a:latin typeface="微軟正黑體" pitchFamily="34" charset="0"/>
-                <a:ea typeface="微軟正黑體" pitchFamily="34" charset="-122"/>
-                <a:cs typeface="微軟正黑體" pitchFamily="34" charset="-120"/>
-              </a:rPr>
-              <a:t>12 分鐘 28 題：你哪一週錯得最多？</a:t>
-            </a:r>
-            <a:endParaRPr lang="en-US" sz="2300" dirty="0"/>
-          </a:p>
-        </p:txBody>
-      </p:sp>
-      <p:sp>
-        <p:nvSpPr>
-          <p:cNvPr id="6" name="Shape 4"/>
-          <p:cNvSpPr/>
-          <p:nvPr/>
-        </p:nvSpPr>
-        <p:spPr>
-          <a:xfrm>
-            <a:off x="502920" y="1737360"/>
-            <a:ext cx="8138160" cy="621792"/>
-          </a:xfrm>
-          <a:prstGeom prst="roundRect">
-            <a:avLst>
-              <a:gd name="adj" fmla="val 11765"/>
-            </a:avLst>
-          </a:prstGeom>
-          <a:solidFill>
-            <a:srgbClr val="13314F"/>
-          </a:solidFill>
-          <a:ln/>
-        </p:spPr>
-      </p:sp>
-      <p:sp>
-        <p:nvSpPr>
-          <p:cNvPr id="7" name="Shape 5"/>
-          <p:cNvSpPr/>
-          <p:nvPr/>
-        </p:nvSpPr>
-        <p:spPr>
-          <a:xfrm>
-            <a:off x="667512" y="1883664"/>
-            <a:ext cx="329184" cy="329184"/>
-          </a:xfrm>
-          <a:prstGeom prst="ellipse">
-            <a:avLst/>
-          </a:prstGeom>
-          <a:solidFill>
-            <a:srgbClr val="00A896"/>
-          </a:solidFill>
-          <a:ln/>
-        </p:spPr>
-      </p:sp>
-      <p:sp>
-        <p:nvSpPr>
-          <p:cNvPr id="8" name="Text 6"/>
-          <p:cNvSpPr txBox="1"/>
-          <p:nvPr/>
-        </p:nvSpPr>
-        <p:spPr>
-          <a:xfrm>
-            <a:off x="667512" y="1911096"/>
-            <a:ext cx="329184" cy="274320"/>
-          </a:xfrm>
-          <a:prstGeom prst="rect">
-            <a:avLst/>
-          </a:prstGeom>
-          <a:noFill/>
-          <a:ln/>
-        </p:spPr>
-        <p:txBody>
-          <a:bodyPr wrap="square" lIns="0" tIns="0" rIns="0" bIns="0" rtlCol="0" anchor="ctr"/>
-          <a:lstStyle/>
-          <a:p>
-            <a:pPr algn="ctr" indent="0" marL="0">
-              <a:buNone/>
-            </a:pPr>
-            <a:r>
-              <a:rPr lang="en-US" sz="1200" b="1" dirty="0">
-                <a:solidFill>
-                  <a:srgbClr val="FFFFFF"/>
-                </a:solidFill>
-                <a:latin typeface="Arial" pitchFamily="34" charset="0"/>
-                <a:ea typeface="Arial" pitchFamily="34" charset="-122"/>
-                <a:cs typeface="Arial" pitchFamily="34" charset="-120"/>
-              </a:rPr>
-              <a:t>1</a:t>
-            </a:r>
-            <a:endParaRPr lang="en-US" sz="1200" dirty="0"/>
-          </a:p>
-        </p:txBody>
-      </p:sp>
-      <p:sp>
-        <p:nvSpPr>
-          <p:cNvPr id="9" name="Text 7"/>
-          <p:cNvSpPr txBox="1"/>
-          <p:nvPr/>
-        </p:nvSpPr>
-        <p:spPr>
-          <a:xfrm>
-            <a:off x="1161288" y="1783080"/>
-            <a:ext cx="7296912" cy="548640"/>
-          </a:xfrm>
-          <a:prstGeom prst="rect">
-            <a:avLst/>
-          </a:prstGeom>
-          <a:noFill/>
-          <a:ln/>
-        </p:spPr>
-        <p:txBody>
-          <a:bodyPr wrap="square" lIns="0" tIns="0" rIns="0" bIns="0" rtlCol="0" anchor="t"/>
-          <a:lstStyle/>
-          <a:p>
-            <a:pPr indent="0" marL="0">
-              <a:lnSpc>
-                <a:spcPct val="114000"/>
-              </a:lnSpc>
-              <a:buNone/>
-            </a:pPr>
-            <a:r>
-              <a:rPr lang="en-US" sz="1250" b="1" dirty="0">
-                <a:solidFill>
-                  <a:srgbClr val="FFFFFF"/>
-                </a:solidFill>
-                <a:latin typeface="Arial" pitchFamily="34" charset="0"/>
-                <a:ea typeface="Arial" pitchFamily="34" charset="-122"/>
-                <a:cs typeface="Arial" pitchFamily="34" charset="-120"/>
-              </a:rPr>
-              <a:t>Làm hết trước, không tra tài liệu. Câu nào không chắc thì đánh dấu trong đầu.</a:t>
-            </a:r>
-            <a:endParaRPr lang="en-US" sz="1250" dirty="0"/>
-          </a:p>
-          <a:p>
-            <a:pPr indent="0" marL="0">
-              <a:lnSpc>
-                <a:spcPct val="114000"/>
-              </a:lnSpc>
-              <a:buNone/>
-            </a:pPr>
-            <a:r>
-              <a:rPr lang="en-US" sz="1150" dirty="0">
-                <a:solidFill>
-                  <a:srgbClr val="AFC3D4"/>
-                </a:solidFill>
-                <a:latin typeface="微軟正黑體" pitchFamily="34" charset="0"/>
-                <a:ea typeface="微軟正黑體" pitchFamily="34" charset="-122"/>
-                <a:cs typeface="微軟正黑體" pitchFamily="34" charset="-120"/>
-              </a:rPr>
-              <a:t>先全部做完，不翻講義。沒把握的題目自己記一下。</a:t>
-            </a:r>
-            <a:endParaRPr lang="en-US" sz="1250" dirty="0"/>
-          </a:p>
-        </p:txBody>
-      </p:sp>
-      <p:sp>
-        <p:nvSpPr>
-          <p:cNvPr id="10" name="Shape 8"/>
-          <p:cNvSpPr/>
-          <p:nvPr/>
-        </p:nvSpPr>
-        <p:spPr>
-          <a:xfrm>
-            <a:off x="502920" y="2450592"/>
-            <a:ext cx="8138160" cy="621792"/>
-          </a:xfrm>
-          <a:prstGeom prst="roundRect">
-            <a:avLst>
-              <a:gd name="adj" fmla="val 11765"/>
-            </a:avLst>
-          </a:prstGeom>
-          <a:solidFill>
-            <a:srgbClr val="13314F"/>
-          </a:solidFill>
-          <a:ln/>
-        </p:spPr>
-      </p:sp>
-      <p:sp>
-        <p:nvSpPr>
-          <p:cNvPr id="11" name="Shape 9"/>
-          <p:cNvSpPr/>
-          <p:nvPr/>
-        </p:nvSpPr>
-        <p:spPr>
-          <a:xfrm>
-            <a:off x="667512" y="2596896"/>
-            <a:ext cx="329184" cy="329184"/>
-          </a:xfrm>
-          <a:prstGeom prst="ellipse">
-            <a:avLst/>
-          </a:prstGeom>
-          <a:solidFill>
-            <a:srgbClr val="00A896"/>
-          </a:solidFill>
-          <a:ln/>
-        </p:spPr>
-      </p:sp>
-      <p:sp>
-        <p:nvSpPr>
-          <p:cNvPr id="12" name="Text 10"/>
-          <p:cNvSpPr txBox="1"/>
-          <p:nvPr/>
-        </p:nvSpPr>
-        <p:spPr>
-          <a:xfrm>
-            <a:off x="667512" y="2624328"/>
-            <a:ext cx="329184" cy="274320"/>
-          </a:xfrm>
-          <a:prstGeom prst="rect">
-            <a:avLst/>
-          </a:prstGeom>
-          <a:noFill/>
-          <a:ln/>
-        </p:spPr>
-        <p:txBody>
-          <a:bodyPr wrap="square" lIns="0" tIns="0" rIns="0" bIns="0" rtlCol="0" anchor="ctr"/>
-          <a:lstStyle/>
-          <a:p>
-            <a:pPr algn="ctr" indent="0" marL="0">
-              <a:buNone/>
-            </a:pPr>
-            <a:r>
-              <a:rPr lang="en-US" sz="1200" b="1" dirty="0">
-                <a:solidFill>
-                  <a:srgbClr val="FFFFFF"/>
-                </a:solidFill>
-                <a:latin typeface="Arial" pitchFamily="34" charset="0"/>
-                <a:ea typeface="Arial" pitchFamily="34" charset="-122"/>
-                <a:cs typeface="Arial" pitchFamily="34" charset="-120"/>
-              </a:rPr>
-              <a:t>2</a:t>
-            </a:r>
-            <a:endParaRPr lang="en-US" sz="1200" dirty="0"/>
-          </a:p>
-        </p:txBody>
-      </p:sp>
-      <p:sp>
-        <p:nvSpPr>
-          <p:cNvPr id="13" name="Text 11"/>
-          <p:cNvSpPr txBox="1"/>
-          <p:nvPr/>
-        </p:nvSpPr>
-        <p:spPr>
-          <a:xfrm>
-            <a:off x="1161288" y="2496312"/>
-            <a:ext cx="7296912" cy="548640"/>
-          </a:xfrm>
-          <a:prstGeom prst="rect">
-            <a:avLst/>
-          </a:prstGeom>
-          <a:noFill/>
-          <a:ln/>
-        </p:spPr>
-        <p:txBody>
-          <a:bodyPr wrap="square" lIns="0" tIns="0" rIns="0" bIns="0" rtlCol="0" anchor="t"/>
-          <a:lstStyle/>
-          <a:p>
-            <a:pPr indent="0" marL="0">
-              <a:lnSpc>
-                <a:spcPct val="114000"/>
-              </a:lnSpc>
-              <a:buNone/>
-            </a:pPr>
-            <a:r>
-              <a:rPr lang="en-US" sz="1250" b="1" dirty="0">
-                <a:solidFill>
-                  <a:srgbClr val="FFFFFF"/>
-                </a:solidFill>
-                <a:latin typeface="Arial" pitchFamily="34" charset="0"/>
-                <a:ea typeface="Arial" pitchFamily="34" charset="-122"/>
-                <a:cs typeface="Arial" pitchFamily="34" charset="-120"/>
-              </a:rPr>
-              <a:t>Nộp bài, đọc giải thích của từng câu sai. Ghi lại tuần có khung đỏ.</a:t>
-            </a:r>
-            <a:endParaRPr lang="en-US" sz="1250" dirty="0"/>
-          </a:p>
-          <a:p>
-            <a:pPr indent="0" marL="0">
-              <a:lnSpc>
-                <a:spcPct val="114000"/>
-              </a:lnSpc>
-              <a:buNone/>
-            </a:pPr>
-            <a:r>
-              <a:rPr lang="en-US" sz="1150" dirty="0">
-                <a:solidFill>
-                  <a:srgbClr val="AFC3D4"/>
-                </a:solidFill>
-                <a:latin typeface="微軟正黑體" pitchFamily="34" charset="0"/>
-                <a:ea typeface="微軟正黑體" pitchFamily="34" charset="-122"/>
-                <a:cs typeface="微軟正黑體" pitchFamily="34" charset="-120"/>
-              </a:rPr>
-              <a:t>交卷後，每一題錯的都看說明。記下哪幾週是紅框。</a:t>
-            </a:r>
-            <a:endParaRPr lang="en-US" sz="1250" dirty="0"/>
-          </a:p>
-        </p:txBody>
-      </p:sp>
-      <p:sp>
-        <p:nvSpPr>
-          <p:cNvPr id="14" name="Shape 12"/>
-          <p:cNvSpPr/>
-          <p:nvPr/>
-        </p:nvSpPr>
-        <p:spPr>
-          <a:xfrm>
-            <a:off x="502920" y="3163824"/>
-            <a:ext cx="8138160" cy="621792"/>
-          </a:xfrm>
-          <a:prstGeom prst="roundRect">
-            <a:avLst>
-              <a:gd name="adj" fmla="val 11765"/>
-            </a:avLst>
-          </a:prstGeom>
-          <a:solidFill>
-            <a:srgbClr val="13314F"/>
-          </a:solidFill>
-          <a:ln/>
-        </p:spPr>
-      </p:sp>
-      <p:sp>
-        <p:nvSpPr>
-          <p:cNvPr id="15" name="Shape 13"/>
-          <p:cNvSpPr/>
-          <p:nvPr/>
-        </p:nvSpPr>
-        <p:spPr>
-          <a:xfrm>
-            <a:off x="667512" y="3310128"/>
-            <a:ext cx="329184" cy="329184"/>
-          </a:xfrm>
-          <a:prstGeom prst="ellipse">
-            <a:avLst/>
-          </a:prstGeom>
-          <a:solidFill>
-            <a:srgbClr val="00A896"/>
-          </a:solidFill>
-          <a:ln/>
-        </p:spPr>
-      </p:sp>
-      <p:sp>
-        <p:nvSpPr>
-          <p:cNvPr id="16" name="Text 14"/>
-          <p:cNvSpPr txBox="1"/>
-          <p:nvPr/>
-        </p:nvSpPr>
-        <p:spPr>
-          <a:xfrm>
-            <a:off x="667512" y="3337560"/>
-            <a:ext cx="329184" cy="274320"/>
-          </a:xfrm>
-          <a:prstGeom prst="rect">
-            <a:avLst/>
-          </a:prstGeom>
-          <a:noFill/>
-          <a:ln/>
-        </p:spPr>
-        <p:txBody>
-          <a:bodyPr wrap="square" lIns="0" tIns="0" rIns="0" bIns="0" rtlCol="0" anchor="ctr"/>
-          <a:lstStyle/>
-          <a:p>
-            <a:pPr algn="ctr" indent="0" marL="0">
-              <a:buNone/>
-            </a:pPr>
-            <a:r>
-              <a:rPr lang="en-US" sz="1200" b="1" dirty="0">
-                <a:solidFill>
-                  <a:srgbClr val="FFFFFF"/>
-                </a:solidFill>
-                <a:latin typeface="Arial" pitchFamily="34" charset="0"/>
-                <a:ea typeface="Arial" pitchFamily="34" charset="-122"/>
-                <a:cs typeface="Arial" pitchFamily="34" charset="-120"/>
-              </a:rPr>
-              <a:t>3</a:t>
-            </a:r>
-            <a:endParaRPr lang="en-US" sz="1200" dirty="0"/>
-          </a:p>
-        </p:txBody>
-      </p:sp>
-      <p:sp>
-        <p:nvSpPr>
-          <p:cNvPr id="17" name="Text 15"/>
-          <p:cNvSpPr txBox="1"/>
-          <p:nvPr/>
-        </p:nvSpPr>
-        <p:spPr>
-          <a:xfrm>
-            <a:off x="1161288" y="3209544"/>
-            <a:ext cx="7296912" cy="548640"/>
-          </a:xfrm>
-          <a:prstGeom prst="rect">
-            <a:avLst/>
-          </a:prstGeom>
-          <a:noFill/>
-          <a:ln/>
-        </p:spPr>
-        <p:txBody>
-          <a:bodyPr wrap="square" lIns="0" tIns="0" rIns="0" bIns="0" rtlCol="0" anchor="t"/>
-          <a:lstStyle/>
-          <a:p>
-            <a:pPr indent="0" marL="0">
-              <a:lnSpc>
-                <a:spcPct val="114000"/>
-              </a:lnSpc>
-              <a:buNone/>
-            </a:pPr>
-            <a:r>
-              <a:rPr lang="en-US" sz="1250" b="1" dirty="0">
-                <a:solidFill>
-                  <a:srgbClr val="FFFFFF"/>
-                </a:solidFill>
-                <a:latin typeface="Arial" pitchFamily="34" charset="0"/>
-                <a:ea typeface="Arial" pitchFamily="34" charset="-122"/>
-                <a:cs typeface="Arial" pitchFamily="34" charset="-120"/>
-              </a:rPr>
-              <a:t>Chụp phần kết quả cuối trang, gửi LINE.</a:t>
-            </a:r>
-            <a:endParaRPr lang="en-US" sz="1250" dirty="0"/>
-          </a:p>
-          <a:p>
-            <a:pPr indent="0" marL="0">
-              <a:lnSpc>
-                <a:spcPct val="114000"/>
-              </a:lnSpc>
-              <a:buNone/>
-            </a:pPr>
-            <a:r>
-              <a:rPr lang="en-US" sz="1150" dirty="0">
-                <a:solidFill>
-                  <a:srgbClr val="AFC3D4"/>
-                </a:solidFill>
-                <a:latin typeface="微軟正黑體" pitchFamily="34" charset="0"/>
-                <a:ea typeface="微軟正黑體" pitchFamily="34" charset="-122"/>
-                <a:cs typeface="微軟正黑體" pitchFamily="34" charset="-120"/>
-              </a:rPr>
-              <a:t>截圖最下面的成績，傳 LINE。</a:t>
-            </a:r>
-            <a:endParaRPr lang="en-US" sz="1250" dirty="0"/>
-          </a:p>
-        </p:txBody>
-      </p:sp>
-      <p:sp>
-        <p:nvSpPr>
-          <p:cNvPr id="18" name="Text 16"/>
-          <p:cNvSpPr txBox="1"/>
-          <p:nvPr/>
-        </p:nvSpPr>
-        <p:spPr>
-          <a:xfrm>
-            <a:off x="502920" y="3913632"/>
-            <a:ext cx="8046720" cy="457200"/>
-          </a:xfrm>
-          <a:prstGeom prst="rect">
-            <a:avLst/>
-          </a:prstGeom>
-          <a:noFill/>
-          <a:ln/>
-        </p:spPr>
-        <p:txBody>
-          <a:bodyPr wrap="square" lIns="0" tIns="0" rIns="0" bIns="0" rtlCol="0" anchor="t"/>
-          <a:lstStyle/>
-          <a:p>
-            <a:pPr indent="0" marL="0">
-              <a:lnSpc>
-                <a:spcPct val="116000"/>
-              </a:lnSpc>
-              <a:buNone/>
-            </a:pPr>
-            <a:r>
-              <a:rPr lang="en-US" sz="1250" b="1" dirty="0">
-                <a:solidFill>
-                  <a:srgbClr val="FFB020"/>
-                </a:solidFill>
-                <a:latin typeface="Arial" pitchFamily="34" charset="0"/>
-                <a:ea typeface="Arial" pitchFamily="34" charset="-122"/>
-                <a:cs typeface="Arial" pitchFamily="34" charset="-120"/>
-              </a:rPr>
-              <a:t>Câu đọc biểu đồ: dùng bốn bước vừa học.</a:t>
-            </a:r>
-            <a:endParaRPr lang="en-US" sz="1250" dirty="0"/>
-          </a:p>
-          <a:p>
-            <a:pPr indent="0" marL="0">
-              <a:lnSpc>
-                <a:spcPct val="116000"/>
-              </a:lnSpc>
-              <a:buNone/>
-            </a:pPr>
-            <a:r>
-              <a:rPr lang="en-US" sz="1150" dirty="0">
-                <a:solidFill>
-                  <a:srgbClr val="FFB020"/>
-                </a:solidFill>
-                <a:latin typeface="微軟正黑體" pitchFamily="34" charset="0"/>
-                <a:ea typeface="微軟正黑體" pitchFamily="34" charset="-122"/>
-                <a:cs typeface="微軟正黑體" pitchFamily="34" charset="-120"/>
-              </a:rPr>
-              <a:t>圖表題：用剛剛那四個步驟。</a:t>
-            </a:r>
-            <a:endParaRPr lang="en-US" sz="1250" dirty="0"/>
-          </a:p>
-        </p:txBody>
-      </p:sp>
-      <p:sp>
-        <p:nvSpPr>
-          <p:cNvPr id="20" name="Text 17"/>
-          <p:cNvSpPr txBox="1"/>
-          <p:nvPr/>
-        </p:nvSpPr>
-        <p:spPr>
-          <a:xfrm>
-            <a:off x="109728" y="128016"/>
-            <a:ext cx="822960" cy="256032"/>
-          </a:xfrm>
-          <a:prstGeom prst="rect">
-            <a:avLst/>
-          </a:prstGeom>
-          <a:noFill/>
-          <a:ln/>
-        </p:spPr>
-        <p:txBody>
-          <a:bodyPr wrap="square" lIns="0" tIns="0" rIns="0" bIns="0" rtlCol="0" anchor="ctr"/>
-          <a:lstStyle/>
-          <a:p>
-            <a:pPr indent="0" marL="0">
-              <a:buNone/>
-            </a:pPr>
-            <a:r>
-              <a:rPr lang="en-US" sz="900" dirty="0">
-                <a:solidFill>
-                  <a:srgbClr val="9FB3C8"/>
-                </a:solidFill>
-                <a:latin typeface="Arial" pitchFamily="34" charset="0"/>
-                <a:ea typeface="Arial" pitchFamily="34" charset="-122"/>
-                <a:cs typeface="Arial" pitchFamily="34" charset="-120"/>
-              </a:rPr>
-              <a:t>14 / 15</a:t>
-            </a:r>
-            <a:endParaRPr lang="en-US" sz="900" dirty="0"/>
-          </a:p>
-        </p:txBody>
-      </p:sp>
-      <p:sp>
-        <p:nvSpPr>
-          <p:cNvPr id="21" name="Text 18"/>
-          <p:cNvSpPr txBox="1"/>
-          <p:nvPr/>
-        </p:nvSpPr>
-        <p:spPr>
-          <a:xfrm>
-            <a:off x="960120" y="128016"/>
-            <a:ext cx="2011680" cy="256032"/>
-          </a:xfrm>
-          <a:prstGeom prst="rect">
-            <a:avLst/>
-          </a:prstGeom>
-          <a:noFill/>
-          <a:ln/>
-        </p:spPr>
-        <p:txBody>
-          <a:bodyPr wrap="square" lIns="0" tIns="0" rIns="0" bIns="0" rtlCol="0" anchor="ctr"/>
-          <a:lstStyle/>
-          <a:p>
-            <a:pPr indent="0" marL="0">
-              <a:buNone/>
-            </a:pPr>
-            <a:r>
-              <a:rPr lang="en-US" sz="900" dirty="0">
-                <a:solidFill>
-                  <a:srgbClr val="9FB3C8"/>
                 </a:solidFill>
                 <a:latin typeface="Arial" pitchFamily="34" charset="0"/>
                 <a:ea typeface="Arial" pitchFamily="34" charset="-122"/>
@@ -11488,6 +12694,755 @@
                 <a:ea typeface="Arial" pitchFamily="34" charset="-122"/>
                 <a:cs typeface="Arial" pitchFamily="34" charset="-120"/>
               </a:rPr>
+              <a:t>Thi thử · 模擬考</a:t>
+            </a:r>
+            <a:endParaRPr lang="en-US" sz="1250" dirty="0"/>
+          </a:p>
+        </p:txBody>
+      </p:sp>
+      <p:sp>
+        <p:nvSpPr>
+          <p:cNvPr id="5" name="Text 3"/>
+          <p:cNvSpPr txBox="1"/>
+          <p:nvPr/>
+        </p:nvSpPr>
+        <p:spPr>
+          <a:xfrm>
+            <a:off x="502920" y="786384"/>
+            <a:ext cx="8046720" cy="1225296"/>
+          </a:xfrm>
+          <a:prstGeom prst="rect">
+            <a:avLst/>
+          </a:prstGeom>
+          <a:noFill/>
+          <a:ln/>
+        </p:spPr>
+        <p:txBody>
+          <a:bodyPr wrap="square" lIns="0" tIns="0" rIns="0" bIns="0" rtlCol="0" anchor="t"/>
+          <a:lstStyle/>
+          <a:p>
+            <a:pPr indent="0" marL="0">
+              <a:lnSpc>
+                <a:spcPct val="120000"/>
+              </a:lnSpc>
+              <a:buNone/>
+            </a:pPr>
+            <a:r>
+              <a:rPr lang="en-US" sz="2300" b="1" dirty="0">
+                <a:solidFill>
+                  <a:srgbClr val="FFFFFF"/>
+                </a:solidFill>
+                <a:latin typeface="Arial" pitchFamily="34" charset="0"/>
+                <a:ea typeface="Arial" pitchFamily="34" charset="-122"/>
+                <a:cs typeface="Arial" pitchFamily="34" charset="-120"/>
+              </a:rPr>
+              <a:t>28 câu trong 12 phút: tuần nào bạn sai nhiều nhất?</a:t>
+            </a:r>
+            <a:endParaRPr lang="en-US" sz="2300" dirty="0"/>
+          </a:p>
+          <a:p>
+            <a:pPr indent="0" marL="0">
+              <a:lnSpc>
+                <a:spcPct val="120000"/>
+              </a:lnSpc>
+              <a:buNone/>
+            </a:pPr>
+            <a:r>
+              <a:rPr lang="en-US" sz="1500" dirty="0">
+                <a:solidFill>
+                  <a:srgbClr val="AFC3D4"/>
+                </a:solidFill>
+                <a:latin typeface="微軟正黑體" pitchFamily="34" charset="0"/>
+                <a:ea typeface="微軟正黑體" pitchFamily="34" charset="-122"/>
+                <a:cs typeface="微軟正黑體" pitchFamily="34" charset="-120"/>
+              </a:rPr>
+              <a:t>12 分鐘 28 題：你哪一週錯得最多？</a:t>
+            </a:r>
+            <a:endParaRPr lang="en-US" sz="2300" dirty="0"/>
+          </a:p>
+        </p:txBody>
+      </p:sp>
+      <p:sp>
+        <p:nvSpPr>
+          <p:cNvPr id="6" name="Shape 4"/>
+          <p:cNvSpPr/>
+          <p:nvPr/>
+        </p:nvSpPr>
+        <p:spPr>
+          <a:xfrm>
+            <a:off x="502920" y="1737360"/>
+            <a:ext cx="8138160" cy="621792"/>
+          </a:xfrm>
+          <a:prstGeom prst="roundRect">
+            <a:avLst>
+              <a:gd name="adj" fmla="val 11765"/>
+            </a:avLst>
+          </a:prstGeom>
+          <a:solidFill>
+            <a:srgbClr val="13314F"/>
+          </a:solidFill>
+          <a:ln/>
+        </p:spPr>
+      </p:sp>
+      <p:sp>
+        <p:nvSpPr>
+          <p:cNvPr id="7" name="Shape 5"/>
+          <p:cNvSpPr/>
+          <p:nvPr/>
+        </p:nvSpPr>
+        <p:spPr>
+          <a:xfrm>
+            <a:off x="667512" y="1883664"/>
+            <a:ext cx="329184" cy="329184"/>
+          </a:xfrm>
+          <a:prstGeom prst="ellipse">
+            <a:avLst/>
+          </a:prstGeom>
+          <a:solidFill>
+            <a:srgbClr val="00A896"/>
+          </a:solidFill>
+          <a:ln/>
+        </p:spPr>
+      </p:sp>
+      <p:sp>
+        <p:nvSpPr>
+          <p:cNvPr id="8" name="Text 6"/>
+          <p:cNvSpPr txBox="1"/>
+          <p:nvPr/>
+        </p:nvSpPr>
+        <p:spPr>
+          <a:xfrm>
+            <a:off x="667512" y="1911096"/>
+            <a:ext cx="329184" cy="274320"/>
+          </a:xfrm>
+          <a:prstGeom prst="rect">
+            <a:avLst/>
+          </a:prstGeom>
+          <a:noFill/>
+          <a:ln/>
+        </p:spPr>
+        <p:txBody>
+          <a:bodyPr wrap="square" lIns="0" tIns="0" rIns="0" bIns="0" rtlCol="0" anchor="ctr"/>
+          <a:lstStyle/>
+          <a:p>
+            <a:pPr algn="ctr" indent="0" marL="0">
+              <a:buNone/>
+            </a:pPr>
+            <a:r>
+              <a:rPr lang="en-US" sz="1200" b="1" dirty="0">
+                <a:solidFill>
+                  <a:srgbClr val="FFFFFF"/>
+                </a:solidFill>
+                <a:latin typeface="Arial" pitchFamily="34" charset="0"/>
+                <a:ea typeface="Arial" pitchFamily="34" charset="-122"/>
+                <a:cs typeface="Arial" pitchFamily="34" charset="-120"/>
+              </a:rPr>
+              <a:t>1</a:t>
+            </a:r>
+            <a:endParaRPr lang="en-US" sz="1200" dirty="0"/>
+          </a:p>
+        </p:txBody>
+      </p:sp>
+      <p:sp>
+        <p:nvSpPr>
+          <p:cNvPr id="9" name="Text 7"/>
+          <p:cNvSpPr txBox="1"/>
+          <p:nvPr/>
+        </p:nvSpPr>
+        <p:spPr>
+          <a:xfrm>
+            <a:off x="1161288" y="1783080"/>
+            <a:ext cx="7296912" cy="548640"/>
+          </a:xfrm>
+          <a:prstGeom prst="rect">
+            <a:avLst/>
+          </a:prstGeom>
+          <a:noFill/>
+          <a:ln/>
+        </p:spPr>
+        <p:txBody>
+          <a:bodyPr wrap="square" lIns="0" tIns="0" rIns="0" bIns="0" rtlCol="0" anchor="t"/>
+          <a:lstStyle/>
+          <a:p>
+            <a:pPr indent="0" marL="0">
+              <a:lnSpc>
+                <a:spcPct val="114000"/>
+              </a:lnSpc>
+              <a:buNone/>
+            </a:pPr>
+            <a:r>
+              <a:rPr lang="en-US" sz="1250" b="1" dirty="0">
+                <a:solidFill>
+                  <a:srgbClr val="FFFFFF"/>
+                </a:solidFill>
+                <a:latin typeface="Arial" pitchFamily="34" charset="0"/>
+                <a:ea typeface="Arial" pitchFamily="34" charset="-122"/>
+                <a:cs typeface="Arial" pitchFamily="34" charset="-120"/>
+              </a:rPr>
+              <a:t>Làm hết trước, không tra tài liệu. Câu nào không chắc thì đánh dấu trong đầu.</a:t>
+            </a:r>
+            <a:endParaRPr lang="en-US" sz="1250" dirty="0"/>
+          </a:p>
+          <a:p>
+            <a:pPr indent="0" marL="0">
+              <a:lnSpc>
+                <a:spcPct val="114000"/>
+              </a:lnSpc>
+              <a:buNone/>
+            </a:pPr>
+            <a:r>
+              <a:rPr lang="en-US" sz="1150" dirty="0">
+                <a:solidFill>
+                  <a:srgbClr val="AFC3D4"/>
+                </a:solidFill>
+                <a:latin typeface="微軟正黑體" pitchFamily="34" charset="0"/>
+                <a:ea typeface="微軟正黑體" pitchFamily="34" charset="-122"/>
+                <a:cs typeface="微軟正黑體" pitchFamily="34" charset="-120"/>
+              </a:rPr>
+              <a:t>先全部做完，不翻講義。沒把握的題目自己記一下。</a:t>
+            </a:r>
+            <a:endParaRPr lang="en-US" sz="1250" dirty="0"/>
+          </a:p>
+        </p:txBody>
+      </p:sp>
+      <p:sp>
+        <p:nvSpPr>
+          <p:cNvPr id="10" name="Shape 8"/>
+          <p:cNvSpPr/>
+          <p:nvPr/>
+        </p:nvSpPr>
+        <p:spPr>
+          <a:xfrm>
+            <a:off x="502920" y="2450592"/>
+            <a:ext cx="8138160" cy="621792"/>
+          </a:xfrm>
+          <a:prstGeom prst="roundRect">
+            <a:avLst>
+              <a:gd name="adj" fmla="val 11765"/>
+            </a:avLst>
+          </a:prstGeom>
+          <a:solidFill>
+            <a:srgbClr val="13314F"/>
+          </a:solidFill>
+          <a:ln/>
+        </p:spPr>
+      </p:sp>
+      <p:sp>
+        <p:nvSpPr>
+          <p:cNvPr id="11" name="Shape 9"/>
+          <p:cNvSpPr/>
+          <p:nvPr/>
+        </p:nvSpPr>
+        <p:spPr>
+          <a:xfrm>
+            <a:off x="667512" y="2596896"/>
+            <a:ext cx="329184" cy="329184"/>
+          </a:xfrm>
+          <a:prstGeom prst="ellipse">
+            <a:avLst/>
+          </a:prstGeom>
+          <a:solidFill>
+            <a:srgbClr val="00A896"/>
+          </a:solidFill>
+          <a:ln/>
+        </p:spPr>
+      </p:sp>
+      <p:sp>
+        <p:nvSpPr>
+          <p:cNvPr id="12" name="Text 10"/>
+          <p:cNvSpPr txBox="1"/>
+          <p:nvPr/>
+        </p:nvSpPr>
+        <p:spPr>
+          <a:xfrm>
+            <a:off x="667512" y="2624328"/>
+            <a:ext cx="329184" cy="274320"/>
+          </a:xfrm>
+          <a:prstGeom prst="rect">
+            <a:avLst/>
+          </a:prstGeom>
+          <a:noFill/>
+          <a:ln/>
+        </p:spPr>
+        <p:txBody>
+          <a:bodyPr wrap="square" lIns="0" tIns="0" rIns="0" bIns="0" rtlCol="0" anchor="ctr"/>
+          <a:lstStyle/>
+          <a:p>
+            <a:pPr algn="ctr" indent="0" marL="0">
+              <a:buNone/>
+            </a:pPr>
+            <a:r>
+              <a:rPr lang="en-US" sz="1200" b="1" dirty="0">
+                <a:solidFill>
+                  <a:srgbClr val="FFFFFF"/>
+                </a:solidFill>
+                <a:latin typeface="Arial" pitchFamily="34" charset="0"/>
+                <a:ea typeface="Arial" pitchFamily="34" charset="-122"/>
+                <a:cs typeface="Arial" pitchFamily="34" charset="-120"/>
+              </a:rPr>
+              <a:t>2</a:t>
+            </a:r>
+            <a:endParaRPr lang="en-US" sz="1200" dirty="0"/>
+          </a:p>
+        </p:txBody>
+      </p:sp>
+      <p:sp>
+        <p:nvSpPr>
+          <p:cNvPr id="13" name="Text 11"/>
+          <p:cNvSpPr txBox="1"/>
+          <p:nvPr/>
+        </p:nvSpPr>
+        <p:spPr>
+          <a:xfrm>
+            <a:off x="1161288" y="2496312"/>
+            <a:ext cx="7296912" cy="548640"/>
+          </a:xfrm>
+          <a:prstGeom prst="rect">
+            <a:avLst/>
+          </a:prstGeom>
+          <a:noFill/>
+          <a:ln/>
+        </p:spPr>
+        <p:txBody>
+          <a:bodyPr wrap="square" lIns="0" tIns="0" rIns="0" bIns="0" rtlCol="0" anchor="t"/>
+          <a:lstStyle/>
+          <a:p>
+            <a:pPr indent="0" marL="0">
+              <a:lnSpc>
+                <a:spcPct val="114000"/>
+              </a:lnSpc>
+              <a:buNone/>
+            </a:pPr>
+            <a:r>
+              <a:rPr lang="en-US" sz="1250" b="1" dirty="0">
+                <a:solidFill>
+                  <a:srgbClr val="FFFFFF"/>
+                </a:solidFill>
+                <a:latin typeface="Arial" pitchFamily="34" charset="0"/>
+                <a:ea typeface="Arial" pitchFamily="34" charset="-122"/>
+                <a:cs typeface="Arial" pitchFamily="34" charset="-120"/>
+              </a:rPr>
+              <a:t>Nộp bài, đọc giải thích của từng câu sai. Ghi lại tuần có khung đỏ.</a:t>
+            </a:r>
+            <a:endParaRPr lang="en-US" sz="1250" dirty="0"/>
+          </a:p>
+          <a:p>
+            <a:pPr indent="0" marL="0">
+              <a:lnSpc>
+                <a:spcPct val="114000"/>
+              </a:lnSpc>
+              <a:buNone/>
+            </a:pPr>
+            <a:r>
+              <a:rPr lang="en-US" sz="1150" dirty="0">
+                <a:solidFill>
+                  <a:srgbClr val="AFC3D4"/>
+                </a:solidFill>
+                <a:latin typeface="微軟正黑體" pitchFamily="34" charset="0"/>
+                <a:ea typeface="微軟正黑體" pitchFamily="34" charset="-122"/>
+                <a:cs typeface="微軟正黑體" pitchFamily="34" charset="-120"/>
+              </a:rPr>
+              <a:t>交卷後，每一題錯的都看說明。記下哪幾週是紅框。</a:t>
+            </a:r>
+            <a:endParaRPr lang="en-US" sz="1250" dirty="0"/>
+          </a:p>
+        </p:txBody>
+      </p:sp>
+      <p:sp>
+        <p:nvSpPr>
+          <p:cNvPr id="14" name="Shape 12"/>
+          <p:cNvSpPr/>
+          <p:nvPr/>
+        </p:nvSpPr>
+        <p:spPr>
+          <a:xfrm>
+            <a:off x="502920" y="3163824"/>
+            <a:ext cx="8138160" cy="621792"/>
+          </a:xfrm>
+          <a:prstGeom prst="roundRect">
+            <a:avLst>
+              <a:gd name="adj" fmla="val 11765"/>
+            </a:avLst>
+          </a:prstGeom>
+          <a:solidFill>
+            <a:srgbClr val="13314F"/>
+          </a:solidFill>
+          <a:ln/>
+        </p:spPr>
+      </p:sp>
+      <p:sp>
+        <p:nvSpPr>
+          <p:cNvPr id="15" name="Shape 13"/>
+          <p:cNvSpPr/>
+          <p:nvPr/>
+        </p:nvSpPr>
+        <p:spPr>
+          <a:xfrm>
+            <a:off x="667512" y="3310128"/>
+            <a:ext cx="329184" cy="329184"/>
+          </a:xfrm>
+          <a:prstGeom prst="ellipse">
+            <a:avLst/>
+          </a:prstGeom>
+          <a:solidFill>
+            <a:srgbClr val="00A896"/>
+          </a:solidFill>
+          <a:ln/>
+        </p:spPr>
+      </p:sp>
+      <p:sp>
+        <p:nvSpPr>
+          <p:cNvPr id="16" name="Text 14"/>
+          <p:cNvSpPr txBox="1"/>
+          <p:nvPr/>
+        </p:nvSpPr>
+        <p:spPr>
+          <a:xfrm>
+            <a:off x="667512" y="3337560"/>
+            <a:ext cx="329184" cy="274320"/>
+          </a:xfrm>
+          <a:prstGeom prst="rect">
+            <a:avLst/>
+          </a:prstGeom>
+          <a:noFill/>
+          <a:ln/>
+        </p:spPr>
+        <p:txBody>
+          <a:bodyPr wrap="square" lIns="0" tIns="0" rIns="0" bIns="0" rtlCol="0" anchor="ctr"/>
+          <a:lstStyle/>
+          <a:p>
+            <a:pPr algn="ctr" indent="0" marL="0">
+              <a:buNone/>
+            </a:pPr>
+            <a:r>
+              <a:rPr lang="en-US" sz="1200" b="1" dirty="0">
+                <a:solidFill>
+                  <a:srgbClr val="FFFFFF"/>
+                </a:solidFill>
+                <a:latin typeface="Arial" pitchFamily="34" charset="0"/>
+                <a:ea typeface="Arial" pitchFamily="34" charset="-122"/>
+                <a:cs typeface="Arial" pitchFamily="34" charset="-120"/>
+              </a:rPr>
+              <a:t>3</a:t>
+            </a:r>
+            <a:endParaRPr lang="en-US" sz="1200" dirty="0"/>
+          </a:p>
+        </p:txBody>
+      </p:sp>
+      <p:sp>
+        <p:nvSpPr>
+          <p:cNvPr id="17" name="Text 15"/>
+          <p:cNvSpPr txBox="1"/>
+          <p:nvPr/>
+        </p:nvSpPr>
+        <p:spPr>
+          <a:xfrm>
+            <a:off x="1161288" y="3209544"/>
+            <a:ext cx="7296912" cy="548640"/>
+          </a:xfrm>
+          <a:prstGeom prst="rect">
+            <a:avLst/>
+          </a:prstGeom>
+          <a:noFill/>
+          <a:ln/>
+        </p:spPr>
+        <p:txBody>
+          <a:bodyPr wrap="square" lIns="0" tIns="0" rIns="0" bIns="0" rtlCol="0" anchor="t"/>
+          <a:lstStyle/>
+          <a:p>
+            <a:pPr indent="0" marL="0">
+              <a:lnSpc>
+                <a:spcPct val="114000"/>
+              </a:lnSpc>
+              <a:buNone/>
+            </a:pPr>
+            <a:r>
+              <a:rPr lang="en-US" sz="1250" b="1" dirty="0">
+                <a:solidFill>
+                  <a:srgbClr val="FFFFFF"/>
+                </a:solidFill>
+                <a:latin typeface="Arial" pitchFamily="34" charset="0"/>
+                <a:ea typeface="Arial" pitchFamily="34" charset="-122"/>
+                <a:cs typeface="Arial" pitchFamily="34" charset="-120"/>
+              </a:rPr>
+              <a:t>Chụp phần kết quả cuối trang, gửi LINE.</a:t>
+            </a:r>
+            <a:endParaRPr lang="en-US" sz="1250" dirty="0"/>
+          </a:p>
+          <a:p>
+            <a:pPr indent="0" marL="0">
+              <a:lnSpc>
+                <a:spcPct val="114000"/>
+              </a:lnSpc>
+              <a:buNone/>
+            </a:pPr>
+            <a:r>
+              <a:rPr lang="en-US" sz="1150" dirty="0">
+                <a:solidFill>
+                  <a:srgbClr val="AFC3D4"/>
+                </a:solidFill>
+                <a:latin typeface="微軟正黑體" pitchFamily="34" charset="0"/>
+                <a:ea typeface="微軟正黑體" pitchFamily="34" charset="-122"/>
+                <a:cs typeface="微軟正黑體" pitchFamily="34" charset="-120"/>
+              </a:rPr>
+              <a:t>截圖最下面的成績，傳 LINE。</a:t>
+            </a:r>
+            <a:endParaRPr lang="en-US" sz="1250" dirty="0"/>
+          </a:p>
+        </p:txBody>
+      </p:sp>
+      <p:sp>
+        <p:nvSpPr>
+          <p:cNvPr id="18" name="Text 16"/>
+          <p:cNvSpPr txBox="1"/>
+          <p:nvPr/>
+        </p:nvSpPr>
+        <p:spPr>
+          <a:xfrm>
+            <a:off x="502920" y="3913632"/>
+            <a:ext cx="8046720" cy="457200"/>
+          </a:xfrm>
+          <a:prstGeom prst="rect">
+            <a:avLst/>
+          </a:prstGeom>
+          <a:noFill/>
+          <a:ln/>
+        </p:spPr>
+        <p:txBody>
+          <a:bodyPr wrap="square" lIns="0" tIns="0" rIns="0" bIns="0" rtlCol="0" anchor="t"/>
+          <a:lstStyle/>
+          <a:p>
+            <a:pPr indent="0" marL="0">
+              <a:lnSpc>
+                <a:spcPct val="116000"/>
+              </a:lnSpc>
+              <a:buNone/>
+            </a:pPr>
+            <a:r>
+              <a:rPr lang="en-US" sz="1250" b="1" dirty="0">
+                <a:solidFill>
+                  <a:srgbClr val="FFB020"/>
+                </a:solidFill>
+                <a:latin typeface="Arial" pitchFamily="34" charset="0"/>
+                <a:ea typeface="Arial" pitchFamily="34" charset="-122"/>
+                <a:cs typeface="Arial" pitchFamily="34" charset="-120"/>
+              </a:rPr>
+              <a:t>Câu đọc biểu đồ: dùng bốn bước vừa học.</a:t>
+            </a:r>
+            <a:endParaRPr lang="en-US" sz="1250" dirty="0"/>
+          </a:p>
+          <a:p>
+            <a:pPr indent="0" marL="0">
+              <a:lnSpc>
+                <a:spcPct val="116000"/>
+              </a:lnSpc>
+              <a:buNone/>
+            </a:pPr>
+            <a:r>
+              <a:rPr lang="en-US" sz="1150" dirty="0">
+                <a:solidFill>
+                  <a:srgbClr val="FFB020"/>
+                </a:solidFill>
+                <a:latin typeface="微軟正黑體" pitchFamily="34" charset="0"/>
+                <a:ea typeface="微軟正黑體" pitchFamily="34" charset="-122"/>
+                <a:cs typeface="微軟正黑體" pitchFamily="34" charset="-120"/>
+              </a:rPr>
+              <a:t>圖表題：用剛剛那四個步驟。</a:t>
+            </a:r>
+            <a:endParaRPr lang="en-US" sz="1250" dirty="0"/>
+          </a:p>
+        </p:txBody>
+      </p:sp>
+      <p:sp>
+        <p:nvSpPr>
+          <p:cNvPr id="20" name="Text 17"/>
+          <p:cNvSpPr txBox="1"/>
+          <p:nvPr/>
+        </p:nvSpPr>
+        <p:spPr>
+          <a:xfrm>
+            <a:off x="109728" y="128016"/>
+            <a:ext cx="822960" cy="256032"/>
+          </a:xfrm>
+          <a:prstGeom prst="rect">
+            <a:avLst/>
+          </a:prstGeom>
+          <a:noFill/>
+          <a:ln/>
+        </p:spPr>
+        <p:txBody>
+          <a:bodyPr wrap="square" lIns="0" tIns="0" rIns="0" bIns="0" rtlCol="0" anchor="ctr"/>
+          <a:lstStyle/>
+          <a:p>
+            <a:pPr indent="0" marL="0">
+              <a:buNone/>
+            </a:pPr>
+            <a:r>
+              <a:rPr lang="en-US" sz="900" dirty="0">
+                <a:solidFill>
+                  <a:srgbClr val="9FB3C8"/>
+                </a:solidFill>
+                <a:latin typeface="Arial" pitchFamily="34" charset="0"/>
+                <a:ea typeface="Arial" pitchFamily="34" charset="-122"/>
+                <a:cs typeface="Arial" pitchFamily="34" charset="-120"/>
+              </a:rPr>
+              <a:t>15 / 16</a:t>
+            </a:r>
+            <a:endParaRPr lang="en-US" sz="900" dirty="0"/>
+          </a:p>
+        </p:txBody>
+      </p:sp>
+      <p:sp>
+        <p:nvSpPr>
+          <p:cNvPr id="21" name="Text 18"/>
+          <p:cNvSpPr txBox="1"/>
+          <p:nvPr/>
+        </p:nvSpPr>
+        <p:spPr>
+          <a:xfrm>
+            <a:off x="960120" y="128016"/>
+            <a:ext cx="2011680" cy="256032"/>
+          </a:xfrm>
+          <a:prstGeom prst="rect">
+            <a:avLst/>
+          </a:prstGeom>
+          <a:noFill/>
+          <a:ln/>
+        </p:spPr>
+        <p:txBody>
+          <a:bodyPr wrap="square" lIns="0" tIns="0" rIns="0" bIns="0" rtlCol="0" anchor="ctr"/>
+          <a:lstStyle/>
+          <a:p>
+            <a:pPr indent="0" marL="0">
+              <a:buNone/>
+            </a:pPr>
+            <a:r>
+              <a:rPr lang="en-US" sz="900" dirty="0">
+                <a:solidFill>
+                  <a:srgbClr val="9FB3C8"/>
+                </a:solidFill>
+                <a:latin typeface="Arial" pitchFamily="34" charset="0"/>
+                <a:ea typeface="Arial" pitchFamily="34" charset="-122"/>
+                <a:cs typeface="Arial" pitchFamily="34" charset="-120"/>
+              </a:rPr>
+              <a:t>Tiết 3 · 第 3 節</a:t>
+            </a:r>
+            <a:endParaRPr lang="en-US" sz="900" dirty="0"/>
+          </a:p>
+        </p:txBody>
+      </p:sp>
+    </p:spTree>
+  </p:cSld>
+  <p:clrMapOvr>
+    <a:masterClrMapping/>
+  </p:clrMapOvr>
+</p:sld>
+</file>
+
+<file path=ppt/slides/slide16.xml><?xml version="1.0" encoding="utf-8"?>
+<p:sld xmlns:a="http://schemas.openxmlformats.org/drawingml/2006/main" xmlns:r="http://schemas.openxmlformats.org/officeDocument/2006/relationships" xmlns:p="http://schemas.openxmlformats.org/presentationml/2006/main">
+  <p:cSld name="Slide 16">
+    <p:bg>
+      <p:bgPr>
+        <a:solidFill>
+          <a:srgbClr val="0B1F3A"/>
+        </a:solidFill>
+      </p:bgPr>
+    </p:bg>
+    <p:spTree>
+      <p:nvGrpSpPr>
+        <p:cNvPr id="1" name=""/>
+        <p:cNvGrpSpPr/>
+        <p:nvPr/>
+      </p:nvGrpSpPr>
+      <p:grpSpPr>
+        <a:xfrm>
+          <a:off x="0" y="0"/>
+          <a:ext cx="1" cy="1"/>
+          <a:chOff x="0" y="0"/>
+          <a:chExt cx="0" cy="0"/>
+        </a:xfrm>
+      </p:grpSpPr>
+      <p:sp>
+        <p:nvSpPr>
+          <p:cNvPr id="2" name="Shape 0"/>
+          <p:cNvSpPr/>
+          <p:nvPr/>
+        </p:nvSpPr>
+        <p:spPr>
+          <a:xfrm>
+            <a:off x="6766560" y="-1371600"/>
+            <a:ext cx="4206240" cy="4206240"/>
+          </a:xfrm>
+          <a:prstGeom prst="ellipse">
+            <a:avLst/>
+          </a:prstGeom>
+          <a:solidFill>
+            <a:srgbClr val="13314F"/>
+          </a:solidFill>
+          <a:ln w="12700">
+            <a:solidFill>
+              <a:srgbClr val="13314F"/>
+            </a:solidFill>
+            <a:prstDash val="solid"/>
+          </a:ln>
+        </p:spPr>
+      </p:sp>
+      <p:sp>
+        <p:nvSpPr>
+          <p:cNvPr id="3" name="Shape 1"/>
+          <p:cNvSpPr/>
+          <p:nvPr/>
+        </p:nvSpPr>
+        <p:spPr>
+          <a:xfrm>
+            <a:off x="8138160" y="2103120"/>
+            <a:ext cx="2377440" cy="2377440"/>
+          </a:xfrm>
+          <a:prstGeom prst="ellipse">
+            <a:avLst/>
+          </a:prstGeom>
+          <a:solidFill>
+            <a:srgbClr val="007F72">
+              <a:alpha val="28000"/>
+            </a:srgbClr>
+          </a:solidFill>
+          <a:ln/>
+        </p:spPr>
+      </p:sp>
+      <p:sp>
+        <p:nvSpPr>
+          <p:cNvPr id="4" name="Text 2"/>
+          <p:cNvSpPr txBox="1"/>
+          <p:nvPr/>
+        </p:nvSpPr>
+        <p:spPr>
+          <a:xfrm>
+            <a:off x="502920" y="475488"/>
+            <a:ext cx="6766560" cy="274320"/>
+          </a:xfrm>
+          <a:prstGeom prst="rect">
+            <a:avLst/>
+          </a:prstGeom>
+          <a:noFill/>
+          <a:ln/>
+        </p:spPr>
+        <p:txBody>
+          <a:bodyPr wrap="square" lIns="0" tIns="0" rIns="0" bIns="0" rtlCol="0" anchor="ctr"/>
+          <a:lstStyle/>
+          <a:p>
+            <a:pPr indent="0" marL="0">
+              <a:buNone/>
+            </a:pPr>
+            <a:r>
+              <a:rPr lang="en-US" sz="1250" b="1" dirty="0">
+                <a:solidFill>
+                  <a:srgbClr val="FFB020"/>
+                </a:solidFill>
+                <a:latin typeface="Arial" pitchFamily="34" charset="0"/>
+                <a:ea typeface="Arial" pitchFamily="34" charset="-122"/>
+                <a:cs typeface="Arial" pitchFamily="34" charset="-120"/>
+              </a:rPr>
               <a:t>Tóm tắt · 小結</a:t>
             </a:r>
             <a:endParaRPr lang="en-US" sz="1250" dirty="0"/>
@@ -11835,7 +13790,7 @@
                 <a:ea typeface="Arial" pitchFamily="34" charset="-122"/>
                 <a:cs typeface="Arial" pitchFamily="34" charset="-120"/>
               </a:rPr>
-              <a:t>15 / 15</a:t>
+              <a:t>16 / 16</a:t>
             </a:r>
             <a:endParaRPr lang="en-US" sz="900" dirty="0"/>
           </a:p>
@@ -12791,7 +14746,7 @@
                 <a:ea typeface="Arial" pitchFamily="34" charset="-122"/>
                 <a:cs typeface="Arial" pitchFamily="34" charset="-120"/>
               </a:rPr>
-              <a:t>Phạm vi: tuần 1 đến tiết 1 hôm nay.</a:t>
+              <a:t>Phạm vi: tuần 1 đến tiết 2 hôm nay (gán nhãn, IoU).</a:t>
             </a:r>
             <a:endParaRPr lang="en-US" sz="1250" dirty="0"/>
           </a:p>
@@ -12811,7 +14766,7 @@
                 <a:ea typeface="微軟正黑體" pitchFamily="34" charset="-122"/>
                 <a:cs typeface="微軟正黑體" pitchFamily="34" charset="-120"/>
               </a:rPr>
-              <a:t>範圍：第一週到今天第 1 節。</a:t>
+              <a:t>範圍：第一週到今天第 2 節（標註、IoU）。</a:t>
             </a:r>
             <a:endParaRPr lang="en-US" sz="1250" dirty="0"/>
           </a:p>
@@ -12874,7 +14829,7 @@
                 <a:ea typeface="Arial" pitchFamily="34" charset="-122"/>
                 <a:cs typeface="Arial" pitchFamily="34" charset="-120"/>
               </a:rPr>
-              <a:t>2 / 15</a:t>
+              <a:t>2 / 16</a:t>
             </a:r>
             <a:endParaRPr lang="en-US" sz="900" dirty="0"/>
           </a:p>
@@ -15091,7 +17046,7 @@
                 <a:ea typeface="Arial" pitchFamily="34" charset="-122"/>
                 <a:cs typeface="Arial" pitchFamily="34" charset="-120"/>
               </a:rPr>
-              <a:t>3 / 15</a:t>
+              <a:t>3 / 16</a:t>
             </a:r>
             <a:endParaRPr lang="en-US" sz="900" dirty="0"/>
           </a:p>
@@ -17482,7 +19437,7 @@
                 <a:ea typeface="Arial" pitchFamily="34" charset="-122"/>
                 <a:cs typeface="Arial" pitchFamily="34" charset="-120"/>
               </a:rPr>
-              <a:t>4 / 15</a:t>
+              <a:t>4 / 16</a:t>
             </a:r>
             <a:endParaRPr lang="en-US" sz="820" dirty="0"/>
           </a:p>
@@ -18216,7 +20171,7 @@
                           <a:ea typeface="Arial" pitchFamily="34" charset="-122"/>
                           <a:cs typeface="Arial" pitchFamily="34" charset="-120"/>
                         </a:rPr>
-                        <a:t>Không có xe máy chạy ngược chiều</a:t>
+                        <a:t>Có người đi bộ, xe đạp và xe máy</a:t>
                       </a:r>
                       <a:endParaRPr lang="en-US" sz="1180" dirty="0"/>
                     </a:p>
@@ -18233,7 +20188,7 @@
                           <a:ea typeface="微軟正黑體" pitchFamily="34" charset="-122"/>
                           <a:cs typeface="微軟正黑體" pitchFamily="34" charset="-120"/>
                         </a:rPr>
-                        <a:t>沒有逆向的機車</a:t>
+                        <a:t>包含行人、自行車與機車</a:t>
                       </a:r>
                       <a:endParaRPr lang="en-US" sz="1180" dirty="0"/>
                     </a:p>
@@ -18875,7 +20830,7 @@
                 <a:ea typeface="Arial" pitchFamily="34" charset="-122"/>
                 <a:cs typeface="Arial" pitchFamily="34" charset="-120"/>
               </a:rPr>
-              <a:t>5 / 15</a:t>
+              <a:t>5 / 16</a:t>
             </a:r>
             <a:endParaRPr lang="en-US" sz="880" dirty="0"/>
           </a:p>
@@ -21563,7 +23518,7 @@
                 <a:ea typeface="Arial" pitchFamily="34" charset="-122"/>
                 <a:cs typeface="Arial" pitchFamily="34" charset="-120"/>
               </a:rPr>
-              <a:t>6 / 15</a:t>
+              <a:t>6 / 16</a:t>
             </a:r>
             <a:endParaRPr lang="en-US" sz="780" dirty="0"/>
           </a:p>
@@ -23125,7 +25080,7 @@
                 <a:ea typeface="Arial" pitchFamily="34" charset="-122"/>
                 <a:cs typeface="Arial" pitchFamily="34" charset="-120"/>
               </a:rPr>
-              <a:t>Quãng dừng = v×0,3 + v²÷12 (v tính m/s; phản ứng 0,3 s, giảm tốc 6 m/s²). Đường ướt: 50 km/h cần 36,4 m.</a:t>
+              <a:t>Quãng dừng = v×0,3 + v²÷12 (v tính m/s; phản ứng 0,3 s, giảm tốc 6 m/s²). Mưa: tia chỉ còn 0,55 lần chiều dài.</a:t>
             </a:r>
             <a:endParaRPr lang="en-US" sz="1200" dirty="0"/>
           </a:p>
@@ -23145,7 +25100,7 @@
                 <a:ea typeface="微軟正黑體" pitchFamily="34" charset="-122"/>
                 <a:cs typeface="微軟正黑體" pitchFamily="34" charset="-120"/>
               </a:rPr>
-              <a:t>煞停距離＝v×0.3＋v²÷12（v 用 m/s；反應 0.3 秒、減速度 6）。濕路面：時速 50 要 36.4 m。</a:t>
+              <a:t>煞停距離＝v×0.3＋v²÷12（v 用 m/s；反應 0.3 秒、減速度 6）。雨天射線只剩 0.55 倍長。</a:t>
             </a:r>
             <a:endParaRPr lang="en-US" sz="1200" dirty="0"/>
           </a:p>
@@ -23208,7 +25163,7 @@
                 <a:ea typeface="Arial" pitchFamily="34" charset="-122"/>
                 <a:cs typeface="Arial" pitchFamily="34" charset="-120"/>
               </a:rPr>
-              <a:t>7 / 15</a:t>
+              <a:t>7 / 16</a:t>
             </a:r>
             <a:endParaRPr lang="en-US" sz="900" dirty="0"/>
           </a:p>
@@ -23272,7 +25227,7 @@
       </p:nvGrpSpPr>
       <p:grpSpPr>
         <a:xfrm>
-          <a:off x="76726" y="0"/>
+          <a:off x="342104" y="0"/>
           <a:ext cx="1" cy="1"/>
           <a:chOff x="0" y="0"/>
           <a:chExt cx="0" cy="0"/>
@@ -23286,8 +25241,8 @@
         </p:nvSpPr>
         <p:spPr>
           <a:xfrm>
-            <a:off x="571206" y="287698"/>
-            <a:ext cx="8001588" cy="827130"/>
+            <a:off x="807393" y="270713"/>
+            <a:ext cx="7529214" cy="778301"/>
           </a:xfrm>
           <a:prstGeom prst="rect">
             <a:avLst/>
@@ -23306,7 +25261,7 @@
               <a:buNone/>
             </a:pPr>
             <a:r>
-              <a:rPr lang="en-US" sz="2160" b="1" dirty="0">
+              <a:rPr lang="en-US" sz="2040" b="1" dirty="0">
                 <a:solidFill>
                   <a:srgbClr val="0B1F3A"/>
                 </a:solidFill>
@@ -23314,9 +25269,9 @@
                 <a:ea typeface="Arial" pitchFamily="34" charset="-122"/>
                 <a:cs typeface="Arial" pitchFamily="34" charset="-120"/>
               </a:rPr>
-              <a:t>Tuần 5–6: sáu con số hay thi khi đọc bảng thông số</a:t>
-            </a:r>
-            <a:endParaRPr lang="en-US" sz="2160" dirty="0"/>
+              <a:t>Tuần 5–6: bảy con số hay thi khi đọc bảng thông số</a:t>
+            </a:r>
+            <a:endParaRPr lang="en-US" sz="2040" dirty="0"/>
           </a:p>
           <a:p>
             <a:pPr indent="0" marL="0">
@@ -23326,7 +25281,7 @@
               <a:buNone/>
             </a:pPr>
             <a:r>
-              <a:rPr lang="en-US" sz="1330" dirty="0">
+              <a:rPr lang="en-US" sz="1250" dirty="0">
                 <a:solidFill>
                   <a:srgbClr val="5F7183"/>
                 </a:solidFill>
@@ -23334,9 +25289,9 @@
                 <a:ea typeface="微軟正黑體" pitchFamily="34" charset="-122"/>
                 <a:cs typeface="微軟正黑體" pitchFamily="34" charset="-120"/>
               </a:rPr>
-              <a:t>第五、六週：讀規格表最常考的六個數字</a:t>
-            </a:r>
-            <a:endParaRPr lang="en-US" sz="2160" dirty="0"/>
+              <a:t>第五、六週：讀規格表最常考的七個數字</a:t>
+            </a:r>
+            <a:endParaRPr lang="en-US" sz="2040" dirty="0"/>
           </a:p>
         </p:txBody>
       </p:sp>
@@ -23355,18 +25310,18 @@
           </p:nvPr>
         </p:nvGraphicFramePr>
         <p:xfrm>
-          <a:off x="571206" y="1114828"/>
-          <a:ext cx="8001588" cy="899055"/>
+          <a:off x="807393" y="1049014"/>
+          <a:ext cx="7529214" cy="845979"/>
         </p:xfrm>
         <a:graphic>
           <a:graphicData uri="http://schemas.openxmlformats.org/drawingml/2006/table">
             <a:tbl>
               <a:tblPr/>
               <a:tblGrid>
-                <a:gridCol w="2966881"/>
-                <a:gridCol w="5034707"/>
+                <a:gridCol w="2791731"/>
+                <a:gridCol w="4737483"/>
               </a:tblGrid>
-              <a:tr h="323660">
+              <a:tr h="279173">
                 <a:tc>
                   <a:txBody>
                     <a:bodyPr/>
@@ -23376,7 +25331,7 @@
                         <a:buNone/>
                       </a:pPr>
                       <a:r>
-                        <a:rPr lang="en-US" sz="1030" b="1" dirty="0">
+                        <a:rPr lang="en-US" sz="930" b="1" dirty="0">
                           <a:solidFill>
                             <a:srgbClr val="FFFFFF"/>
                           </a:solidFill>
@@ -23386,14 +25341,14 @@
                         </a:rPr>
                         <a:t>Con số</a:t>
                       </a:r>
-                      <a:endParaRPr lang="en-US" sz="1180" dirty="0"/>
-                    </a:p>
-                    <a:p>
-                      <a:pPr algn="l" indent="0" marL="0">
-                        <a:buNone/>
-                      </a:pPr>
-                      <a:r>
-                        <a:rPr lang="en-US" sz="880" dirty="0">
+                      <a:endParaRPr lang="en-US" sz="1110" dirty="0"/>
+                    </a:p>
+                    <a:p>
+                      <a:pPr algn="l" indent="0" marL="0">
+                        <a:buNone/>
+                      </a:pPr>
+                      <a:r>
+                        <a:rPr lang="en-US" sz="790" dirty="0">
                           <a:solidFill>
                             <a:srgbClr val="CFE0EC"/>
                           </a:solidFill>
@@ -23403,7 +25358,7 @@
                         </a:rPr>
                         <a:t>數字</a:t>
                       </a:r>
-                      <a:endParaRPr lang="en-US" sz="1180" dirty="0"/>
+                      <a:endParaRPr lang="en-US" sz="1110" dirty="0"/>
                     </a:p>
                   </a:txBody>
                   <a:tcPr marL="63500" marR="63500" marT="38100" marB="38100" anchor="ctr">
@@ -23457,7 +25412,7 @@
                         <a:buNone/>
                       </a:pPr>
                       <a:r>
-                        <a:rPr lang="en-US" sz="1030" b="1" dirty="0">
+                        <a:rPr lang="en-US" sz="930" b="1" dirty="0">
                           <a:solidFill>
                             <a:srgbClr val="FFFFFF"/>
                           </a:solidFill>
@@ -23467,14 +25422,14 @@
                         </a:rPr>
                         <a:t>Ý nghĩa</a:t>
                       </a:r>
-                      <a:endParaRPr lang="en-US" sz="1180" dirty="0"/>
-                    </a:p>
-                    <a:p>
-                      <a:pPr algn="l" indent="0" marL="0">
-                        <a:buNone/>
-                      </a:pPr>
-                      <a:r>
-                        <a:rPr lang="en-US" sz="880" dirty="0">
+                      <a:endParaRPr lang="en-US" sz="1110" dirty="0"/>
+                    </a:p>
+                    <a:p>
+                      <a:pPr algn="l" indent="0" marL="0">
+                        <a:buNone/>
+                      </a:pPr>
+                      <a:r>
+                        <a:rPr lang="en-US" sz="790" dirty="0">
                           <a:solidFill>
                             <a:srgbClr val="CFE0EC"/>
                           </a:solidFill>
@@ -23484,7 +25439,7 @@
                         </a:rPr>
                         <a:t>意思</a:t>
                       </a:r>
-                      <a:endParaRPr lang="en-US" sz="1180" dirty="0"/>
+                      <a:endParaRPr lang="en-US" sz="1110" dirty="0"/>
                     </a:p>
                   </a:txBody>
                   <a:tcPr marL="63500" marR="63500" marT="38100" marB="38100" anchor="ctr">
@@ -23530,7 +25485,7 @@
                   </a:tcPr>
                 </a:tc>
               </a:tr>
-              <a:tr h="323660">
+              <a:tr h="279173">
                 <a:tc>
                   <a:txBody>
                     <a:bodyPr/>
@@ -23540,7 +25495,7 @@
                         <a:buNone/>
                       </a:pPr>
                       <a:r>
-                        <a:rPr lang="en-US" sz="1030" b="1" dirty="0">
+                        <a:rPr lang="en-US" sz="930" b="1" dirty="0">
                           <a:solidFill>
                             <a:srgbClr val="0B1F3A"/>
                           </a:solidFill>
@@ -23550,14 +25505,14 @@
                         </a:rPr>
                         <a:t>OS1: 170 m (80%) / 90 m (10%)</a:t>
                       </a:r>
-                      <a:endParaRPr lang="en-US" sz="1180" dirty="0"/>
-                    </a:p>
-                    <a:p>
-                      <a:pPr algn="l" indent="0" marL="0">
-                        <a:buNone/>
-                      </a:pPr>
-                      <a:r>
-                        <a:rPr lang="en-US" sz="880" dirty="0">
+                      <a:endParaRPr lang="en-US" sz="1110" dirty="0"/>
+                    </a:p>
+                    <a:p>
+                      <a:pPr algn="l" indent="0" marL="0">
+                        <a:buNone/>
+                      </a:pPr>
+                      <a:r>
+                        <a:rPr lang="en-US" sz="790" dirty="0">
                           <a:solidFill>
                             <a:srgbClr val="5F7183"/>
                           </a:solidFill>
@@ -23567,7 +25522,7 @@
                         </a:rPr>
                         <a:t>OS1：170 m（80%）／90 m（10%）</a:t>
                       </a:r>
-                      <a:endParaRPr lang="en-US" sz="1180" dirty="0"/>
+                      <a:endParaRPr lang="en-US" sz="1110" dirty="0"/>
                     </a:p>
                   </a:txBody>
                   <a:tcPr marL="63500" marR="63500" marT="38100" marB="38100" anchor="ctr">
@@ -23618,7 +25573,7 @@
                         <a:buNone/>
                       </a:pPr>
                       <a:r>
-                        <a:rPr lang="en-US" sz="1030" dirty="0">
+                        <a:rPr lang="en-US" sz="930" dirty="0">
                           <a:solidFill>
                             <a:srgbClr val="1A2733"/>
                           </a:solidFill>
@@ -23628,14 +25583,14 @@
                         </a:rPr>
                         <a:t>Tầm đo phụ thuộc độ phản xạ; thiết kế dùng 90 m</a:t>
                       </a:r>
-                      <a:endParaRPr lang="en-US" sz="1180" dirty="0"/>
-                    </a:p>
-                    <a:p>
-                      <a:pPr algn="l" indent="0" marL="0">
-                        <a:buNone/>
-                      </a:pPr>
-                      <a:r>
-                        <a:rPr lang="en-US" sz="880" dirty="0">
+                      <a:endParaRPr lang="en-US" sz="1110" dirty="0"/>
+                    </a:p>
+                    <a:p>
+                      <a:pPr algn="l" indent="0" marL="0">
+                        <a:buNone/>
+                      </a:pPr>
+                      <a:r>
+                        <a:rPr lang="en-US" sz="790" dirty="0">
                           <a:solidFill>
                             <a:srgbClr val="5F7183"/>
                           </a:solidFill>
@@ -23645,7 +25600,7 @@
                         </a:rPr>
                         <a:t>測距看反射率；設計用 90 m</a:t>
                       </a:r>
-                      <a:endParaRPr lang="en-US" sz="1180" dirty="0"/>
+                      <a:endParaRPr lang="en-US" sz="1110" dirty="0"/>
                     </a:p>
                   </a:txBody>
                   <a:tcPr marL="63500" marR="63500" marT="38100" marB="38100" anchor="ctr">
@@ -23688,7 +25643,7 @@
                   </a:tcPr>
                 </a:tc>
               </a:tr>
-              <a:tr h="323660">
+              <a:tr h="279173">
                 <a:tc>
                   <a:txBody>
                     <a:bodyPr/>
@@ -23698,7 +25653,7 @@
                         <a:buNone/>
                       </a:pPr>
                       <a:r>
-                        <a:rPr lang="en-US" sz="1030" b="1" dirty="0">
+                        <a:rPr lang="en-US" sz="930" b="1" dirty="0">
                           <a:solidFill>
                             <a:srgbClr val="0B1F3A"/>
                           </a:solidFill>
@@ -23708,14 +25663,14 @@
                         </a:rPr>
                         <a:t>Lệch 1° → 0,87 m ở 50 m</a:t>
                       </a:r>
-                      <a:endParaRPr lang="en-US" sz="1180" dirty="0"/>
-                    </a:p>
-                    <a:p>
-                      <a:pPr algn="l" indent="0" marL="0">
-                        <a:buNone/>
-                      </a:pPr>
-                      <a:r>
-                        <a:rPr lang="en-US" sz="880" dirty="0">
+                      <a:endParaRPr lang="en-US" sz="1110" dirty="0"/>
+                    </a:p>
+                    <a:p>
+                      <a:pPr algn="l" indent="0" marL="0">
+                        <a:buNone/>
+                      </a:pPr>
+                      <a:r>
+                        <a:rPr lang="en-US" sz="790" dirty="0">
                           <a:solidFill>
                             <a:srgbClr val="5F7183"/>
                           </a:solidFill>
@@ -23725,7 +25680,7 @@
                         </a:rPr>
                         <a:t>差 1° → 50 m 外差 0.87 m</a:t>
                       </a:r>
-                      <a:endParaRPr lang="en-US" sz="1180" dirty="0"/>
+                      <a:endParaRPr lang="en-US" sz="1110" dirty="0"/>
                     </a:p>
                   </a:txBody>
                   <a:tcPr marL="63500" marR="63500" marT="38100" marB="38100" anchor="ctr">
@@ -23776,7 +25731,7 @@
                         <a:buNone/>
                       </a:pPr>
                       <a:r>
-                        <a:rPr lang="en-US" sz="1030" dirty="0">
+                        <a:rPr lang="en-US" sz="930" dirty="0">
                           <a:solidFill>
                             <a:srgbClr val="1A2733"/>
                           </a:solidFill>
@@ -23786,14 +25741,14 @@
                         </a:rPr>
                         <a:t>Tham số ngoài phải rất chuẩn</a:t>
                       </a:r>
-                      <a:endParaRPr lang="en-US" sz="1180" dirty="0"/>
-                    </a:p>
-                    <a:p>
-                      <a:pPr algn="l" indent="0" marL="0">
-                        <a:buNone/>
-                      </a:pPr>
-                      <a:r>
-                        <a:rPr lang="en-US" sz="880" dirty="0">
+                      <a:endParaRPr lang="en-US" sz="1110" dirty="0"/>
+                    </a:p>
+                    <a:p>
+                      <a:pPr algn="l" indent="0" marL="0">
+                        <a:buNone/>
+                      </a:pPr>
+                      <a:r>
+                        <a:rPr lang="en-US" sz="790" dirty="0">
                           <a:solidFill>
                             <a:srgbClr val="5F7183"/>
                           </a:solidFill>
@@ -23803,7 +25758,7 @@
                         </a:rPr>
                         <a:t>外參要很準</a:t>
                       </a:r>
-                      <a:endParaRPr lang="en-US" sz="1180" dirty="0"/>
+                      <a:endParaRPr lang="en-US" sz="1110" dirty="0"/>
                     </a:p>
                   </a:txBody>
                   <a:tcPr marL="63500" marR="63500" marT="38100" marB="38100" anchor="ctr">
@@ -23846,7 +25801,7 @@
                   </a:tcPr>
                 </a:tc>
               </a:tr>
-              <a:tr h="323660">
+              <a:tr h="279173">
                 <a:tc>
                   <a:txBody>
                     <a:bodyPr/>
@@ -23856,7 +25811,7 @@
                         <a:buNone/>
                       </a:pPr>
                       <a:r>
-                        <a:rPr lang="en-US" sz="1030" b="1" dirty="0">
+                        <a:rPr lang="en-US" sz="930" b="1" dirty="0">
                           <a:solidFill>
                             <a:srgbClr val="0B1F3A"/>
                           </a:solidFill>
@@ -23864,16 +25819,16 @@
                           <a:ea typeface="Arial" pitchFamily="34" charset="-122"/>
                           <a:cs typeface="Arial" pitchFamily="34" charset="-120"/>
                         </a:rPr>
-                        <a:t>Ống kính 8 mm 42°, 3,6 mm 81°</a:t>
-                      </a:r>
-                      <a:endParaRPr lang="en-US" sz="1180" dirty="0"/>
-                    </a:p>
-                    <a:p>
-                      <a:pPr algn="l" indent="0" marL="0">
-                        <a:buNone/>
-                      </a:pPr>
-                      <a:r>
-                        <a:rPr lang="en-US" sz="880" dirty="0">
+                        <a:t>Ống kính 3,6 mm 81°, 8 mm 42°</a:t>
+                      </a:r>
+                      <a:endParaRPr lang="en-US" sz="1110" dirty="0"/>
+                    </a:p>
+                    <a:p>
+                      <a:pPr algn="l" indent="0" marL="0">
+                        <a:buNone/>
+                      </a:pPr>
+                      <a:r>
+                        <a:rPr lang="en-US" sz="790" dirty="0">
                           <a:solidFill>
                             <a:srgbClr val="5F7183"/>
                           </a:solidFill>
@@ -23881,9 +25836,9 @@
                           <a:ea typeface="微軟正黑體" pitchFamily="34" charset="-122"/>
                           <a:cs typeface="微軟正黑體" pitchFamily="34" charset="-120"/>
                         </a:rPr>
-                        <a:t>鏡頭 8 mm 42°、3.6 mm 81°</a:t>
-                      </a:r>
-                      <a:endParaRPr lang="en-US" sz="1180" dirty="0"/>
+                        <a:t>鏡頭 3.6 mm 81°、8 mm 42°</a:t>
+                      </a:r>
+                      <a:endParaRPr lang="en-US" sz="1110" dirty="0"/>
                     </a:p>
                   </a:txBody>
                   <a:tcPr marL="63500" marR="63500" marT="38100" marB="38100" anchor="ctr">
@@ -23934,7 +25889,7 @@
                         <a:buNone/>
                       </a:pPr>
                       <a:r>
-                        <a:rPr lang="en-US" sz="1030" dirty="0">
+                        <a:rPr lang="en-US" sz="930" dirty="0">
                           <a:solidFill>
                             <a:srgbClr val="1A2733"/>
                           </a:solidFill>
@@ -23942,16 +25897,16 @@
                           <a:ea typeface="Arial" pitchFamily="34" charset="-122"/>
                           <a:cs typeface="Arial" pitchFamily="34" charset="-120"/>
                         </a:rPr>
-                        <a:t>Góc nhìn do ống kính quyết định</a:t>
-                      </a:r>
-                      <a:endParaRPr lang="en-US" sz="1180" dirty="0"/>
-                    </a:p>
-                    <a:p>
-                      <a:pPr algn="l" indent="0" marL="0">
-                        <a:buNone/>
-                      </a:pPr>
-                      <a:r>
-                        <a:rPr lang="en-US" sz="880" dirty="0">
+                        <a:t>Tiêu cự càng dài, góc nhìn càng hẹp; do ống kính quyết định</a:t>
+                      </a:r>
+                      <a:endParaRPr lang="en-US" sz="1110" dirty="0"/>
+                    </a:p>
+                    <a:p>
+                      <a:pPr algn="l" indent="0" marL="0">
+                        <a:buNone/>
+                      </a:pPr>
+                      <a:r>
+                        <a:rPr lang="en-US" sz="790" dirty="0">
                           <a:solidFill>
                             <a:srgbClr val="5F7183"/>
                           </a:solidFill>
@@ -23959,9 +25914,9 @@
                           <a:ea typeface="微軟正黑體" pitchFamily="34" charset="-122"/>
                           <a:cs typeface="微軟正黑體" pitchFamily="34" charset="-120"/>
                         </a:rPr>
-                        <a:t>視野由鏡頭決定</a:t>
-                      </a:r>
-                      <a:endParaRPr lang="en-US" sz="1180" dirty="0"/>
+                        <a:t>焦距愈長，視野愈窄；由鏡頭決定</a:t>
+                      </a:r>
+                      <a:endParaRPr lang="en-US" sz="1110" dirty="0"/>
                     </a:p>
                   </a:txBody>
                   <a:tcPr marL="63500" marR="63500" marT="38100" marB="38100" anchor="ctr">
@@ -24004,7 +25959,7 @@
                   </a:tcPr>
                 </a:tc>
               </a:tr>
-              <a:tr h="323660">
+              <a:tr h="279173">
                 <a:tc>
                   <a:txBody>
                     <a:bodyPr/>
@@ -24014,7 +25969,7 @@
                         <a:buNone/>
                       </a:pPr>
                       <a:r>
-                        <a:rPr lang="en-US" sz="1030" b="1" dirty="0">
+                        <a:rPr lang="en-US" sz="930" b="1" dirty="0">
                           <a:solidFill>
                             <a:srgbClr val="0B1F3A"/>
                           </a:solidFill>
@@ -24022,16 +25977,16 @@
                           <a:ea typeface="Arial" pitchFamily="34" charset="-122"/>
                           <a:cs typeface="Arial" pitchFamily="34" charset="-120"/>
                         </a:rPr>
-                        <a:t>Radar 1,6° → 4,2 m ở 150 m</a:t>
-                      </a:r>
-                      <a:endParaRPr lang="en-US" sz="1180" dirty="0"/>
-                    </a:p>
-                    <a:p>
-                      <a:pPr algn="l" indent="0" marL="0">
-                        <a:buNone/>
-                      </a:pPr>
-                      <a:r>
-                        <a:rPr lang="en-US" sz="880" dirty="0">
+                        <a:t>Radar 1,6° → 1,1 m ở 40 m; 4,2 m ở 150 m</a:t>
+                      </a:r>
+                      <a:endParaRPr lang="en-US" sz="1110" dirty="0"/>
+                    </a:p>
+                    <a:p>
+                      <a:pPr algn="l" indent="0" marL="0">
+                        <a:buNone/>
+                      </a:pPr>
+                      <a:r>
+                        <a:rPr lang="en-US" sz="790" dirty="0">
                           <a:solidFill>
                             <a:srgbClr val="5F7183"/>
                           </a:solidFill>
@@ -24039,9 +25994,9 @@
                           <a:ea typeface="微軟正黑體" pitchFamily="34" charset="-122"/>
                           <a:cs typeface="微軟正黑體" pitchFamily="34" charset="-120"/>
                         </a:rPr>
-                        <a:t>雷達 1.6° → 150 m 外 4.2 m</a:t>
-                      </a:r>
-                      <a:endParaRPr lang="en-US" sz="1180" dirty="0"/>
+                        <a:t>雷達 1.6° → 40 m 外 1.1 m；150 m 外 4.2 m</a:t>
+                      </a:r>
+                      <a:endParaRPr lang="en-US" sz="1110" dirty="0"/>
                     </a:p>
                   </a:txBody>
                   <a:tcPr marL="63500" marR="63500" marT="38100" marB="38100" anchor="ctr">
@@ -24092,7 +26047,7 @@
                         <a:buNone/>
                       </a:pPr>
                       <a:r>
-                        <a:rPr lang="en-US" sz="1030" dirty="0">
+                        <a:rPr lang="en-US" sz="930" dirty="0">
                           <a:solidFill>
                             <a:srgbClr val="1A2733"/>
                           </a:solidFill>
@@ -24102,14 +26057,14 @@
                         </a:rPr>
                         <a:t>Rộng hơn làn 3,5 m: không biết ở làn nào</a:t>
                       </a:r>
-                      <a:endParaRPr lang="en-US" sz="1180" dirty="0"/>
-                    </a:p>
-                    <a:p>
-                      <a:pPr algn="l" indent="0" marL="0">
-                        <a:buNone/>
-                      </a:pPr>
-                      <a:r>
-                        <a:rPr lang="en-US" sz="880" dirty="0">
+                      <a:endParaRPr lang="en-US" sz="1110" dirty="0"/>
+                    </a:p>
+                    <a:p>
+                      <a:pPr algn="l" indent="0" marL="0">
+                        <a:buNone/>
+                      </a:pPr>
+                      <a:r>
+                        <a:rPr lang="en-US" sz="790" dirty="0">
                           <a:solidFill>
                             <a:srgbClr val="5F7183"/>
                           </a:solidFill>
@@ -24119,7 +26074,7 @@
                         </a:rPr>
                         <a:t>比車道 3.5 m 寬：分不出哪一道</a:t>
                       </a:r>
-                      <a:endParaRPr lang="en-US" sz="1180" dirty="0"/>
+                      <a:endParaRPr lang="en-US" sz="1110" dirty="0"/>
                     </a:p>
                   </a:txBody>
                   <a:tcPr marL="63500" marR="63500" marT="38100" marB="38100" anchor="ctr">
@@ -24162,7 +26117,7 @@
                   </a:tcPr>
                 </a:tc>
               </a:tr>
-              <a:tr h="323660">
+              <a:tr h="279173">
                 <a:tc>
                   <a:txBody>
                     <a:bodyPr/>
@@ -24172,7 +26127,7 @@
                         <a:buNone/>
                       </a:pPr>
                       <a:r>
-                        <a:rPr lang="en-US" sz="1030" b="1" dirty="0">
+                        <a:rPr lang="en-US" sz="930" b="1" dirty="0">
                           <a:solidFill>
                             <a:srgbClr val="0B1F3A"/>
                           </a:solidFill>
@@ -24180,16 +26135,16 @@
                           <a:ea typeface="Arial" pitchFamily="34" charset="-122"/>
                           <a:cs typeface="Arial" pitchFamily="34" charset="-120"/>
                         </a:rPr>
-                        <a:t>GNSS 2,5 m CEP</a:t>
-                      </a:r>
-                      <a:endParaRPr lang="en-US" sz="1180" dirty="0"/>
-                    </a:p>
-                    <a:p>
-                      <a:pPr algn="l" indent="0" marL="0">
-                        <a:buNone/>
-                      </a:pPr>
-                      <a:r>
-                        <a:rPr lang="en-US" sz="880" dirty="0">
+                        <a:t>Siêu âm 5,5 m; 20 km/h cần 9,2 m</a:t>
+                      </a:r>
+                      <a:endParaRPr lang="en-US" sz="1110" dirty="0"/>
+                    </a:p>
+                    <a:p>
+                      <a:pPr algn="l" indent="0" marL="0">
+                        <a:buNone/>
+                      </a:pPr>
+                      <a:r>
+                        <a:rPr lang="en-US" sz="790" dirty="0">
                           <a:solidFill>
                             <a:srgbClr val="5F7183"/>
                           </a:solidFill>
@@ -24197,9 +26152,9 @@
                           <a:ea typeface="微軟正黑體" pitchFamily="34" charset="-122"/>
                           <a:cs typeface="微軟正黑體" pitchFamily="34" charset="-120"/>
                         </a:rPr>
-                        <a:t>衛星 2.5 m CEP</a:t>
-                      </a:r>
-                      <a:endParaRPr lang="en-US" sz="1180" dirty="0"/>
+                        <a:t>超音波 5.5 m；時速 20 要 9.2 m</a:t>
+                      </a:r>
+                      <a:endParaRPr lang="en-US" sz="1110" dirty="0"/>
                     </a:p>
                   </a:txBody>
                   <a:tcPr marL="63500" marR="63500" marT="38100" marB="38100" anchor="ctr">
@@ -24250,7 +26205,7 @@
                         <a:buNone/>
                       </a:pPr>
                       <a:r>
-                        <a:rPr lang="en-US" sz="1030" dirty="0">
+                        <a:rPr lang="en-US" sz="930" dirty="0">
                           <a:solidFill>
                             <a:srgbClr val="1A2733"/>
                           </a:solidFill>
@@ -24258,16 +26213,16 @@
                           <a:ea typeface="Arial" pitchFamily="34" charset="-122"/>
                           <a:cs typeface="Arial" pitchFamily="34" charset="-120"/>
                         </a:rPr>
-                        <a:t>50% thời gian trong 2,5 m, không phải tối đa</a:t>
-                      </a:r>
-                      <a:endParaRPr lang="en-US" sz="1180" dirty="0"/>
-                    </a:p>
-                    <a:p>
-                      <a:pPr algn="l" indent="0" marL="0">
-                        <a:buNone/>
-                      </a:pPr>
-                      <a:r>
-                        <a:rPr lang="en-US" sz="880" dirty="0">
+                        <a:t>Không đủ khi chạy; chỉ dùng khi đỗ xe</a:t>
+                      </a:r>
+                      <a:endParaRPr lang="en-US" sz="1110" dirty="0"/>
+                    </a:p>
+                    <a:p>
+                      <a:pPr algn="l" indent="0" marL="0">
+                        <a:buNone/>
+                      </a:pPr>
+                      <a:r>
+                        <a:rPr lang="en-US" sz="790" dirty="0">
                           <a:solidFill>
                             <a:srgbClr val="5F7183"/>
                           </a:solidFill>
@@ -24275,9 +26230,9 @@
                           <a:ea typeface="微軟正黑體" pitchFamily="34" charset="-122"/>
                           <a:cs typeface="微軟正黑體" pitchFamily="34" charset="-120"/>
                         </a:rPr>
-                        <a:t>一半時間在 2.5 m 內，不是最多 2.5 m</a:t>
-                      </a:r>
-                      <a:endParaRPr lang="en-US" sz="1180" dirty="0"/>
+                        <a:t>開車時不夠用；只在停車場夠用</a:t>
+                      </a:r>
+                      <a:endParaRPr lang="en-US" sz="1110" dirty="0"/>
                     </a:p>
                   </a:txBody>
                   <a:tcPr marL="63500" marR="63500" marT="38100" marB="38100" anchor="ctr">
@@ -24320,7 +26275,7 @@
                   </a:tcPr>
                 </a:tc>
               </a:tr>
-              <a:tr h="323660">
+              <a:tr h="279173">
                 <a:tc>
                   <a:txBody>
                     <a:bodyPr/>
@@ -24330,7 +26285,7 @@
                         <a:buNone/>
                       </a:pPr>
                       <a:r>
-                        <a:rPr lang="en-US" sz="1030" b="1" dirty="0">
+                        <a:rPr lang="en-US" sz="930" b="1" dirty="0">
                           <a:solidFill>
                             <a:srgbClr val="0B1F3A"/>
                           </a:solidFill>
@@ -24338,16 +26293,16 @@
                           <a:ea typeface="Arial" pitchFamily="34" charset="-122"/>
                           <a:cs typeface="Arial" pitchFamily="34" charset="-120"/>
                         </a:rPr>
-                        <a:t>IMU: sai số ∝ t²</a:t>
-                      </a:r>
-                      <a:endParaRPr lang="en-US" sz="1180" dirty="0"/>
-                    </a:p>
-                    <a:p>
-                      <a:pPr algn="l" indent="0" marL="0">
-                        <a:buNone/>
-                      </a:pPr>
-                      <a:r>
-                        <a:rPr lang="en-US" sz="880" dirty="0">
+                        <a:t>GNSS 2,5 m CEP</a:t>
+                      </a:r>
+                      <a:endParaRPr lang="en-US" sz="1110" dirty="0"/>
+                    </a:p>
+                    <a:p>
+                      <a:pPr algn="l" indent="0" marL="0">
+                        <a:buNone/>
+                      </a:pPr>
+                      <a:r>
+                        <a:rPr lang="en-US" sz="790" dirty="0">
                           <a:solidFill>
                             <a:srgbClr val="5F7183"/>
                           </a:solidFill>
@@ -24355,9 +26310,9 @@
                           <a:ea typeface="微軟正黑體" pitchFamily="34" charset="-122"/>
                           <a:cs typeface="微軟正黑體" pitchFamily="34" charset="-120"/>
                         </a:rPr>
-                        <a:t>IMU：誤差跟 t² 成正比</a:t>
-                      </a:r>
-                      <a:endParaRPr lang="en-US" sz="1180" dirty="0"/>
+                        <a:t>衛星 2.5 m CEP</a:t>
+                      </a:r>
+                      <a:endParaRPr lang="en-US" sz="1110" dirty="0"/>
                     </a:p>
                   </a:txBody>
                   <a:tcPr marL="63500" marR="63500" marT="38100" marB="38100" anchor="ctr">
@@ -24408,7 +26363,7 @@
                         <a:buNone/>
                       </a:pPr>
                       <a:r>
-                        <a:rPr lang="en-US" sz="1030" dirty="0">
+                        <a:rPr lang="en-US" sz="930" dirty="0">
                           <a:solidFill>
                             <a:srgbClr val="1A2733"/>
                           </a:solidFill>
@@ -24416,16 +26371,16 @@
                           <a:ea typeface="Arial" pitchFamily="34" charset="-122"/>
                           <a:cs typeface="Arial" pitchFamily="34" charset="-120"/>
                         </a:rPr>
-                        <a:t>Công nghiệp chịu ~34 s ở 80 km/h; hầm 580 s không đủ</a:t>
-                      </a:r>
-                      <a:endParaRPr lang="en-US" sz="1180" dirty="0"/>
-                    </a:p>
-                    <a:p>
-                      <a:pPr algn="l" indent="0" marL="0">
-                        <a:buNone/>
-                      </a:pPr>
-                      <a:r>
-                        <a:rPr lang="en-US" sz="880" dirty="0">
+                        <a:t>50% thời gian trong 2,5 m, không phải tối đa</a:t>
+                      </a:r>
+                      <a:endParaRPr lang="en-US" sz="1110" dirty="0"/>
+                    </a:p>
+                    <a:p>
+                      <a:pPr algn="l" indent="0" marL="0">
+                        <a:buNone/>
+                      </a:pPr>
+                      <a:r>
+                        <a:rPr lang="en-US" sz="790" dirty="0">
                           <a:solidFill>
                             <a:srgbClr val="5F7183"/>
                           </a:solidFill>
@@ -24433,9 +26388,167 @@
                           <a:ea typeface="微軟正黑體" pitchFamily="34" charset="-122"/>
                           <a:cs typeface="微軟正黑體" pitchFamily="34" charset="-120"/>
                         </a:rPr>
+                        <a:t>一半時間在 2.5 m 內，不是最多 2.5 m</a:t>
+                      </a:r>
+                      <a:endParaRPr lang="en-US" sz="1110" dirty="0"/>
+                    </a:p>
+                  </a:txBody>
+                  <a:tcPr marL="63500" marR="63500" marT="38100" marB="38100" anchor="ctr">
+                    <a:lnL w="6350" cap="flat" cmpd="sng" algn="ctr">
+                      <a:solidFill>
+                        <a:srgbClr val="DBE3EA"/>
+                      </a:solidFill>
+                      <a:prstDash val="solid"/>
+                      <a:round/>
+                      <a:headEnd type="none" w="med" len="med"/>
+                      <a:tailEnd type="none" w="med" len="med"/>
+                    </a:lnL>
+                    <a:lnR w="6350" cap="flat" cmpd="sng" algn="ctr">
+                      <a:solidFill>
+                        <a:srgbClr val="DBE3EA"/>
+                      </a:solidFill>
+                      <a:prstDash val="solid"/>
+                      <a:round/>
+                      <a:headEnd type="none" w="med" len="med"/>
+                      <a:tailEnd type="none" w="med" len="med"/>
+                    </a:lnR>
+                    <a:lnT w="6350" cap="flat" cmpd="sng" algn="ctr">
+                      <a:solidFill>
+                        <a:srgbClr val="DBE3EA"/>
+                      </a:solidFill>
+                      <a:prstDash val="solid"/>
+                      <a:round/>
+                      <a:headEnd type="none" w="med" len="med"/>
+                      <a:tailEnd type="none" w="med" len="med"/>
+                    </a:lnT>
+                    <a:lnB w="6350" cap="flat" cmpd="sng" algn="ctr">
+                      <a:solidFill>
+                        <a:srgbClr val="DBE3EA"/>
+                      </a:solidFill>
+                      <a:prstDash val="solid"/>
+                      <a:round/>
+                      <a:headEnd type="none" w="med" len="med"/>
+                      <a:tailEnd type="none" w="med" len="med"/>
+                    </a:lnB>
+                  </a:tcPr>
+                </a:tc>
+              </a:tr>
+              <a:tr h="279173">
+                <a:tc>
+                  <a:txBody>
+                    <a:bodyPr/>
+                    <a:lstStyle/>
+                    <a:p>
+                      <a:pPr algn="l" indent="0" marL="0">
+                        <a:buNone/>
+                      </a:pPr>
+                      <a:r>
+                        <a:rPr lang="en-US" sz="930" b="1" dirty="0">
+                          <a:solidFill>
+                            <a:srgbClr val="0B1F3A"/>
+                          </a:solidFill>
+                          <a:latin typeface="Arial" pitchFamily="34" charset="0"/>
+                          <a:ea typeface="Arial" pitchFamily="34" charset="-122"/>
+                          <a:cs typeface="Arial" pitchFamily="34" charset="-120"/>
+                        </a:rPr>
+                        <a:t>IMU: sai số ∝ t²</a:t>
+                      </a:r>
+                      <a:endParaRPr lang="en-US" sz="1110" dirty="0"/>
+                    </a:p>
+                    <a:p>
+                      <a:pPr algn="l" indent="0" marL="0">
+                        <a:buNone/>
+                      </a:pPr>
+                      <a:r>
+                        <a:rPr lang="en-US" sz="790" dirty="0">
+                          <a:solidFill>
+                            <a:srgbClr val="5F7183"/>
+                          </a:solidFill>
+                          <a:latin typeface="微軟正黑體" pitchFamily="34" charset="0"/>
+                          <a:ea typeface="微軟正黑體" pitchFamily="34" charset="-122"/>
+                          <a:cs typeface="微軟正黑體" pitchFamily="34" charset="-120"/>
+                        </a:rPr>
+                        <a:t>IMU：誤差跟 t² 成正比</a:t>
+                      </a:r>
+                      <a:endParaRPr lang="en-US" sz="1110" dirty="0"/>
+                    </a:p>
+                  </a:txBody>
+                  <a:tcPr marL="63500" marR="63500" marT="38100" marB="38100" anchor="ctr">
+                    <a:lnL w="6350" cap="flat" cmpd="sng" algn="ctr">
+                      <a:solidFill>
+                        <a:srgbClr val="DBE3EA"/>
+                      </a:solidFill>
+                      <a:prstDash val="solid"/>
+                      <a:round/>
+                      <a:headEnd type="none" w="med" len="med"/>
+                      <a:tailEnd type="none" w="med" len="med"/>
+                    </a:lnL>
+                    <a:lnR w="6350" cap="flat" cmpd="sng" algn="ctr">
+                      <a:solidFill>
+                        <a:srgbClr val="DBE3EA"/>
+                      </a:solidFill>
+                      <a:prstDash val="solid"/>
+                      <a:round/>
+                      <a:headEnd type="none" w="med" len="med"/>
+                      <a:tailEnd type="none" w="med" len="med"/>
+                    </a:lnR>
+                    <a:lnT w="6350" cap="flat" cmpd="sng" algn="ctr">
+                      <a:solidFill>
+                        <a:srgbClr val="DBE3EA"/>
+                      </a:solidFill>
+                      <a:prstDash val="solid"/>
+                      <a:round/>
+                      <a:headEnd type="none" w="med" len="med"/>
+                      <a:tailEnd type="none" w="med" len="med"/>
+                    </a:lnT>
+                    <a:lnB w="6350" cap="flat" cmpd="sng" algn="ctr">
+                      <a:solidFill>
+                        <a:srgbClr val="DBE3EA"/>
+                      </a:solidFill>
+                      <a:prstDash val="solid"/>
+                      <a:round/>
+                      <a:headEnd type="none" w="med" len="med"/>
+                      <a:tailEnd type="none" w="med" len="med"/>
+                    </a:lnB>
+                  </a:tcPr>
+                </a:tc>
+                <a:tc>
+                  <a:txBody>
+                    <a:bodyPr/>
+                    <a:lstStyle/>
+                    <a:p>
+                      <a:pPr algn="l" indent="0" marL="0">
+                        <a:buNone/>
+                      </a:pPr>
+                      <a:r>
+                        <a:rPr lang="en-US" sz="930" dirty="0">
+                          <a:solidFill>
+                            <a:srgbClr val="1A2733"/>
+                          </a:solidFill>
+                          <a:latin typeface="Arial" pitchFamily="34" charset="0"/>
+                          <a:ea typeface="Arial" pitchFamily="34" charset="-122"/>
+                          <a:cs typeface="Arial" pitchFamily="34" charset="-120"/>
+                        </a:rPr>
+                        <a:t>Công nghiệp chịu ~34 s ở 80 km/h; hầm 580 s không đủ</a:t>
+                      </a:r>
+                      <a:endParaRPr lang="en-US" sz="1110" dirty="0"/>
+                    </a:p>
+                    <a:p>
+                      <a:pPr algn="l" indent="0" marL="0">
+                        <a:buNone/>
+                      </a:pPr>
+                      <a:r>
+                        <a:rPr lang="en-US" sz="790" dirty="0">
+                          <a:solidFill>
+                            <a:srgbClr val="5F7183"/>
+                          </a:solidFill>
+                          <a:latin typeface="微軟正黑體" pitchFamily="34" charset="0"/>
+                          <a:ea typeface="微軟正黑體" pitchFamily="34" charset="-122"/>
+                          <a:cs typeface="微軟正黑體" pitchFamily="34" charset="-120"/>
+                        </a:rPr>
                         <a:t>工業級時速 80 撐約 34 秒；隧道 580 秒撐不住</a:t>
                       </a:r>
-                      <a:endParaRPr lang="en-US" sz="1180" dirty="0"/>
+                      <a:endParaRPr lang="en-US" sz="1110" dirty="0"/>
                     </a:p>
                   </a:txBody>
                   <a:tcPr marL="63500" marR="63500" marT="38100" marB="38100" anchor="ctr">
@@ -24490,8 +26603,8 @@
         </p:nvSpPr>
         <p:spPr>
           <a:xfrm>
-            <a:off x="571206" y="4179623"/>
-            <a:ext cx="8001588" cy="449527"/>
+            <a:off x="807393" y="4206160"/>
+            <a:ext cx="7529214" cy="422990"/>
           </a:xfrm>
           <a:prstGeom prst="rect">
             <a:avLst/>
@@ -24510,7 +26623,7 @@
               <a:buNone/>
             </a:pPr>
             <a:r>
-              <a:rPr lang="en-US" sz="1180" b="1" dirty="0">
+              <a:rPr lang="en-US" sz="1110" b="1" dirty="0">
                 <a:solidFill>
                   <a:srgbClr val="007F72"/>
                 </a:solidFill>
@@ -24520,7 +26633,7 @@
               </a:rPr>
               <a:t>Mỗi con số đều có điều kiện kèm theo. Đọc bảng: hỏi «với điều kiện gì?»</a:t>
             </a:r>
-            <a:endParaRPr lang="en-US" sz="1180" dirty="0"/>
+            <a:endParaRPr lang="en-US" sz="1110" dirty="0"/>
           </a:p>
           <a:p>
             <a:pPr indent="0" marL="0">
@@ -24530,7 +26643,7 @@
               <a:buNone/>
             </a:pPr>
             <a:r>
-              <a:rPr lang="en-US" sz="1080" dirty="0">
+              <a:rPr lang="en-US" sz="1020" dirty="0">
                 <a:solidFill>
                   <a:srgbClr val="007F72"/>
                 </a:solidFill>
@@ -24540,7 +26653,7 @@
               </a:rPr>
               <a:t>每個數字都綁著前提。讀規格表，先問「在什麼條件下？」</a:t>
             </a:r>
-            <a:endParaRPr lang="en-US" sz="1180" dirty="0"/>
+            <a:endParaRPr lang="en-US" sz="1110" dirty="0"/>
           </a:p>
         </p:txBody>
       </p:sp>
@@ -24576,8 +26689,8 @@
         </p:nvSpPr>
         <p:spPr>
           <a:xfrm>
-            <a:off x="184613" y="125868"/>
-            <a:ext cx="809149" cy="251735"/>
+            <a:off x="443622" y="118437"/>
+            <a:ext cx="761381" cy="236874"/>
           </a:xfrm>
           <a:prstGeom prst="rect">
             <a:avLst/>
@@ -24593,7 +26706,7 @@
               <a:buNone/>
             </a:pPr>
             <a:r>
-              <a:rPr lang="en-US" sz="880" dirty="0">
+              <a:rPr lang="en-US" sz="830" dirty="0">
                 <a:solidFill>
                   <a:srgbClr val="5F7183"/>
                 </a:solidFill>
@@ -24601,9 +26714,9 @@
                 <a:ea typeface="Arial" pitchFamily="34" charset="-122"/>
                 <a:cs typeface="Arial" pitchFamily="34" charset="-120"/>
               </a:rPr>
-              <a:t>8 / 15</a:t>
-            </a:r>
-            <a:endParaRPr lang="en-US" sz="880" dirty="0"/>
+              <a:t>8 / 16</a:t>
+            </a:r>
+            <a:endParaRPr lang="en-US" sz="830" dirty="0"/>
           </a:p>
         </p:txBody>
       </p:sp>
@@ -24615,8 +26728,8 @@
         </p:nvSpPr>
         <p:spPr>
           <a:xfrm>
-            <a:off x="1020734" y="125868"/>
-            <a:ext cx="1977921" cy="251735"/>
+            <a:off x="1230382" y="118437"/>
+            <a:ext cx="1861154" cy="236874"/>
           </a:xfrm>
           <a:prstGeom prst="rect">
             <a:avLst/>
@@ -24632,7 +26745,7 @@
               <a:buNone/>
             </a:pPr>
             <a:r>
-              <a:rPr lang="en-US" sz="880" dirty="0">
+              <a:rPr lang="en-US" sz="830" dirty="0">
                 <a:solidFill>
                   <a:srgbClr val="5F7183"/>
                 </a:solidFill>
@@ -24642,7 +26755,7 @@
               </a:rPr>
               <a:t>Tiết 3 · 第 3 節</a:t>
             </a:r>
-            <a:endParaRPr lang="en-US" sz="880" dirty="0"/>
+            <a:endParaRPr lang="en-US" sz="830" dirty="0"/>
           </a:p>
         </p:txBody>
       </p:sp>
@@ -29024,7 +31137,7 @@
                 <a:ea typeface="Arial" pitchFamily="34" charset="-122"/>
                 <a:cs typeface="Arial" pitchFamily="34" charset="-120"/>
               </a:rPr>
-              <a:t>9 / 15</a:t>
+              <a:t>9 / 16</a:t>
             </a:r>
             <a:endParaRPr lang="en-US" sz="790" dirty="0"/>
           </a:p>

--- a/第八週(10-29)/第八週_第3節_簡報.pptx
+++ b/第八週(10-29)/第八週_第3節_簡報.pptx
@@ -4919,11 +4919,11 @@
                 <a:spcPts val="0"/>
               </a:spcBef>
               <a:spcAft>
-                <a:spcPts val="225"/>
+                <a:spcPts val="158"/>
               </a:spcAft>
             </a:pPr>
             <a:r>
-              <a:rPr sz="1350" b="1" lang="zh-TW" dirty="0">
+              <a:rPr sz="950" b="1" lang="zh-TW" dirty="0">
                 <a:solidFill>
                   <a:srgbClr val="000000"/>
                 </a:solidFill>
@@ -4934,15 +4934,15 @@
               <a:t>這一張的目的：</a:t>
             </a:r>
             <a:r>
-              <a:rPr sz="1350" lang="zh-TW" dirty="0">
-                <a:solidFill>
-                  <a:srgbClr val="000000"/>
-                </a:solidFill>
-                <a:latin typeface="Arial Unicode MS"/>
-                <a:ea typeface="Arial Unicode MS"/>
-                <a:cs typeface="Arial Unicode MS"/>
-              </a:rPr>
-              <a:t>讓大家記得每一種感測器「直接量到的是什麼」，其他都是算出來的。
+              <a:rPr sz="950" lang="zh-TW" dirty="0">
+                <a:solidFill>
+                  <a:srgbClr val="000000"/>
+                </a:solidFill>
+                <a:latin typeface="Arial Unicode MS"/>
+                <a:ea typeface="Arial Unicode MS"/>
+                <a:cs typeface="Arial Unicode MS"/>
+              </a:rPr>
+              <a:t>讓大家記得每一種感測器「直接量到的是什麼」，其他都是算出來的；並且知道算出來的東西多了假設和步驟，比較容易錯。
 </a:t>
             </a:r>
           </a:p>
@@ -4952,11 +4952,11 @@
                 <a:spcPts val="0"/>
               </a:spcBef>
               <a:spcAft>
-                <a:spcPts val="225"/>
+                <a:spcPts val="158"/>
               </a:spcAft>
             </a:pPr>
             <a:r>
-              <a:rPr sz="1350" lang="zh-TW" dirty="0">
+              <a:rPr sz="950" lang="zh-TW" dirty="0">
                 <a:solidFill>
                   <a:srgbClr val="000000"/>
                 </a:solidFill>
@@ -4974,41 +4974,52 @@
                 <a:spcPts val="0"/>
               </a:spcBef>
               <a:spcAft>
-                <a:spcPts val="225"/>
+                <a:spcPts val="158"/>
               </a:spcAft>
             </a:pPr>
             <a:r>
-              <a:rPr sz="1350" lang="zh-TW" dirty="0">
-                <a:solidFill>
-                  <a:srgbClr val="000000"/>
-                </a:solidFill>
-                <a:latin typeface="Arial Unicode MS"/>
-                <a:ea typeface="Arial Unicode MS"/>
-                <a:cs typeface="Arial Unicode MS"/>
-              </a:rPr>
-              <a:t>看表。前六列是第三週那張表。相機直接量的是角度和亮度，</a:t>
-            </a:r>
-            <a:r>
-              <a:rPr sz="1350" b="1" lang="zh-TW" dirty="0">
-                <a:solidFill>
-                  <a:srgbClr val="000000"/>
-                </a:solidFill>
-                <a:latin typeface="Arial Unicode MS"/>
-                <a:ea typeface="Arial Unicode MS"/>
-                <a:cs typeface="Arial Unicode MS"/>
-              </a:rPr>
-              <a:t>它是唯一讀得出顏色和文字的</a:t>
-            </a:r>
-            <a:r>
-              <a:rPr sz="1350" lang="zh-TW" dirty="0">
-                <a:solidFill>
-                  <a:srgbClr val="000000"/>
-                </a:solidFill>
-                <a:latin typeface="Arial Unicode MS"/>
-                <a:ea typeface="Arial Unicode MS"/>
-                <a:cs typeface="Arial Unicode MS"/>
-              </a:rPr>
-              <a:t>，紅綠燈、路牌都靠它；距離是算出來的。光達直接量距離，可是不知道那是什麼。雷達量距離和朝自己的速度。超音波只看近處。衛星定位量的是自己的座標，不知道前面有什麼。熱像量溫度差。
+              <a:rPr sz="950" b="1" lang="zh-TW" dirty="0">
+                <a:solidFill>
+                  <a:srgbClr val="000000"/>
+                </a:solidFill>
+                <a:latin typeface="Arial Unicode MS"/>
+                <a:ea typeface="Arial Unicode MS"/>
+                <a:cs typeface="Arial Unicode MS"/>
+              </a:rPr>
+              <a:t>第一句「其他都是算出來的」是什麼意思？</a:t>
+            </a:r>
+            <a:r>
+              <a:rPr sz="950" lang="zh-TW" dirty="0">
+                <a:solidFill>
+                  <a:srgbClr val="000000"/>
+                </a:solidFill>
+                <a:latin typeface="Arial Unicode MS"/>
+                <a:ea typeface="Arial Unicode MS"/>
+                <a:cs typeface="Arial Unicode MS"/>
+              </a:rPr>
+              <a:t>「直接量到」，是感測器的硬體本身感受到的那個量，量一次就拿到。「算出來」，是拿量到的東西再去計算，而且通常要加上一些</a:t>
+            </a:r>
+            <a:r>
+              <a:rPr sz="950" b="1" lang="zh-TW" dirty="0">
+                <a:solidFill>
+                  <a:srgbClr val="000000"/>
+                </a:solidFill>
+                <a:latin typeface="Arial Unicode MS"/>
+                <a:ea typeface="Arial Unicode MS"/>
+                <a:cs typeface="Arial Unicode MS"/>
+              </a:rPr>
+              <a:t>假設</a:t>
+            </a:r>
+            <a:r>
+              <a:rPr sz="950" lang="zh-TW" dirty="0">
+                <a:solidFill>
+                  <a:srgbClr val="000000"/>
+                </a:solidFill>
+                <a:latin typeface="Arial Unicode MS"/>
+                <a:ea typeface="Arial Unicode MS"/>
+                <a:cs typeface="Arial Unicode MS"/>
+              </a:rPr>
+              <a:t>；假設不成立，算出來的就錯。舉個例子：機車的時速表，其實沒有量「速度」，它量的是輪子轉多快，再乘上輪胎一圈多長，算出時速。換一個比較小的輪胎，時速表就會不準，因為「輪胎一圈多長」這個假設變了。
 </a:t>
             </a:r>
           </a:p>
@@ -5018,107 +5029,30 @@
                 <a:spcPts val="0"/>
               </a:spcBef>
               <a:spcAft>
-                <a:spcPts val="225"/>
+                <a:spcPts val="158"/>
               </a:spcAft>
             </a:pPr>
             <a:r>
-              <a:rPr sz="1350" lang="zh-TW" dirty="0">
-                <a:solidFill>
-                  <a:srgbClr val="000000"/>
-                </a:solidFill>
-                <a:latin typeface="Arial Unicode MS"/>
-                <a:ea typeface="Arial Unicode MS"/>
-                <a:cs typeface="Arial Unicode MS"/>
-              </a:rPr>
-              <a:t>最後一列 </a:t>
-            </a:r>
-            <a:r>
-              <a:rPr sz="1350" b="1" lang="zh-TW" dirty="0">
-                <a:solidFill>
-                  <a:srgbClr val="000000"/>
-                </a:solidFill>
-                <a:latin typeface="Arial Unicode MS"/>
-                <a:ea typeface="Arial Unicode MS"/>
-                <a:cs typeface="Arial Unicode MS"/>
-              </a:rPr>
-              <a:t>IMU</a:t>
-            </a:r>
-            <a:r>
-              <a:rPr sz="1350" lang="zh-TW" dirty="0">
-                <a:solidFill>
-                  <a:srgbClr val="000000"/>
-                </a:solidFill>
-                <a:latin typeface="Arial Unicode MS"/>
-                <a:ea typeface="Arial Unicode MS"/>
-                <a:cs typeface="Arial Unicode MS"/>
-              </a:rPr>
-              <a:t> 是第六週加的：它裡面有加速度計和陀螺儀，直接量的是</a:t>
-            </a:r>
-            <a:r>
-              <a:rPr sz="1350" b="1" lang="zh-TW" dirty="0">
-                <a:solidFill>
-                  <a:srgbClr val="000000"/>
-                </a:solidFill>
-                <a:latin typeface="Arial Unicode MS"/>
-                <a:ea typeface="Arial Unicode MS"/>
-                <a:cs typeface="Arial Unicode MS"/>
-              </a:rPr>
-              <a:t>自己</a:t>
-            </a:r>
-            <a:r>
-              <a:rPr sz="1350" lang="zh-TW" dirty="0">
-                <a:solidFill>
-                  <a:srgbClr val="000000"/>
-                </a:solidFill>
-                <a:latin typeface="Arial Unicode MS"/>
-                <a:ea typeface="Arial Unicode MS"/>
-                <a:cs typeface="Arial Unicode MS"/>
-              </a:rPr>
-              <a:t>加速多少、轉得多快，把這些一路加起來，推算自己走到哪裡。它最大的弱點是</a:t>
-            </a:r>
-            <a:r>
-              <a:rPr sz="1350" b="1" lang="zh-TW" dirty="0">
-                <a:solidFill>
-                  <a:srgbClr val="000000"/>
-                </a:solidFill>
-                <a:latin typeface="Arial Unicode MS"/>
-                <a:ea typeface="Arial Unicode MS"/>
-                <a:cs typeface="Arial Unicode MS"/>
-              </a:rPr>
-              <a:t>漂移</a:t>
-            </a:r>
-            <a:r>
-              <a:rPr sz="1350" lang="zh-TW" dirty="0">
-                <a:solidFill>
-                  <a:srgbClr val="000000"/>
-                </a:solidFill>
-                <a:latin typeface="Arial Unicode MS"/>
-                <a:ea typeface="Arial Unicode MS"/>
-                <a:cs typeface="Arial Unicode MS"/>
-              </a:rPr>
-              <a:t>：小小的誤差一直累加，橫向誤差跟時間的平方成正比，所以 IMU 只能補衛星定位短短的空檔，不能單獨用。注意表上有兩種感測器量的是「自己」，不是外面的東西：</a:t>
-            </a:r>
-            <a:r>
-              <a:rPr sz="1350" b="1" lang="zh-TW" dirty="0">
-                <a:solidFill>
-                  <a:srgbClr val="000000"/>
-                </a:solidFill>
-                <a:latin typeface="Arial Unicode MS"/>
-                <a:ea typeface="Arial Unicode MS"/>
-                <a:cs typeface="Arial Unicode MS"/>
-              </a:rPr>
-              <a:t>衛星定位和 IMU</a:t>
-            </a:r>
-            <a:r>
-              <a:rPr sz="1350" lang="zh-TW" dirty="0">
-                <a:solidFill>
-                  <a:srgbClr val="000000"/>
-                </a:solidFill>
-                <a:latin typeface="Arial Unicode MS"/>
-                <a:ea typeface="Arial Unicode MS"/>
-                <a:cs typeface="Arial Unicode MS"/>
-              </a:rPr>
-              <a:t>。
+              <a:rPr sz="950" b="1" lang="zh-TW" dirty="0">
+                <a:solidFill>
+                  <a:srgbClr val="000000"/>
+                </a:solidFill>
+                <a:latin typeface="Arial Unicode MS"/>
+                <a:ea typeface="Arial Unicode MS"/>
+                <a:cs typeface="Arial Unicode MS"/>
+              </a:rPr>
+              <a:t>看表，一列一列講量到什麼、什麼是算的。</a:t>
+            </a:r>
+            <a:r>
+              <a:rPr sz="950" lang="zh-TW" dirty="0">
+                <a:solidFill>
+                  <a:srgbClr val="000000"/>
+                </a:solidFill>
+                <a:latin typeface="Arial Unicode MS"/>
+                <a:ea typeface="Arial Unicode MS"/>
+                <a:cs typeface="Arial Unicode MS"/>
+              </a:rPr>
+              <a:t>
 </a:t>
             </a:r>
           </a:p>
@@ -5128,63 +5062,118 @@
                 <a:spcPts val="0"/>
               </a:spcBef>
               <a:spcAft>
-                <a:spcPts val="225"/>
+                <a:spcPts val="158"/>
               </a:spcAft>
             </a:pPr>
             <a:r>
-              <a:rPr sz="1350" lang="zh-TW" dirty="0">
-                <a:solidFill>
-                  <a:srgbClr val="000000"/>
-                </a:solidFill>
-                <a:latin typeface="Arial Unicode MS"/>
-                <a:ea typeface="Arial Unicode MS"/>
-                <a:cs typeface="Arial Unicode MS"/>
-              </a:rPr>
-              <a:t>「怎麼量的」是第二週教的，要會算：</a:t>
-            </a:r>
-            <a:r>
-              <a:rPr sz="1350" b="1" lang="zh-TW" dirty="0">
-                <a:solidFill>
-                  <a:srgbClr val="000000"/>
-                </a:solidFill>
-                <a:latin typeface="Arial Unicode MS"/>
-                <a:ea typeface="Arial Unicode MS"/>
-                <a:cs typeface="Arial Unicode MS"/>
-              </a:rPr>
-              <a:t>光達</a:t>
-            </a:r>
-            <a:r>
-              <a:rPr sz="1350" lang="zh-TW" dirty="0">
-                <a:solidFill>
-                  <a:srgbClr val="000000"/>
-                </a:solidFill>
-                <a:latin typeface="Arial Unicode MS"/>
-                <a:ea typeface="Arial Unicode MS"/>
-                <a:cs typeface="Arial Unicode MS"/>
-              </a:rPr>
-              <a:t>距離＝光速×來回時間÷2，除以 2 是因為光走了一去一回，來回 100 奈秒就是 15 公尺。</a:t>
-            </a:r>
-            <a:r>
-              <a:rPr sz="1350" b="1" lang="zh-TW" dirty="0">
-                <a:solidFill>
-                  <a:srgbClr val="000000"/>
-                </a:solidFill>
-                <a:latin typeface="Arial Unicode MS"/>
-                <a:ea typeface="Arial Unicode MS"/>
-                <a:cs typeface="Arial Unicode MS"/>
-              </a:rPr>
-              <a:t>雷達</a:t>
-            </a:r>
-            <a:r>
-              <a:rPr sz="1350" lang="zh-TW" dirty="0">
-                <a:solidFill>
-                  <a:srgbClr val="000000"/>
-                </a:solidFill>
-                <a:latin typeface="Arial Unicode MS"/>
-                <a:ea typeface="Arial Unicode MS"/>
-                <a:cs typeface="Arial Unicode MS"/>
-              </a:rPr>
-              <a:t>比較發出去和收回來的頻率差算距離，再用都卜勒量速度，但只量得到朝自己靠近或遠離的那一段，橫著開的車會量到接近 0。
+              <a:rPr sz="950" b="1" lang="zh-TW" dirty="0">
+                <a:solidFill>
+                  <a:srgbClr val="000000"/>
+                </a:solidFill>
+                <a:latin typeface="Arial Unicode MS"/>
+                <a:ea typeface="Arial Unicode MS"/>
+                <a:cs typeface="Arial Unicode MS"/>
+              </a:rPr>
+              <a:t>相機</a:t>
+            </a:r>
+            <a:r>
+              <a:rPr sz="950" lang="zh-TW" dirty="0">
+                <a:solidFill>
+                  <a:srgbClr val="000000"/>
+                </a:solidFill>
+                <a:latin typeface="Arial Unicode MS"/>
+                <a:ea typeface="Arial Unicode MS"/>
+                <a:cs typeface="Arial Unicode MS"/>
+              </a:rPr>
+              <a:t>：每個像素量到的是</a:t>
+            </a:r>
+            <a:r>
+              <a:rPr sz="950" b="1" lang="zh-TW" dirty="0">
+                <a:solidFill>
+                  <a:srgbClr val="000000"/>
+                </a:solidFill>
+                <a:latin typeface="Arial Unicode MS"/>
+                <a:ea typeface="Arial Unicode MS"/>
+                <a:cs typeface="Arial Unicode MS"/>
+              </a:rPr>
+              <a:t>亮度</a:t>
+            </a:r>
+            <a:r>
+              <a:rPr sz="950" lang="zh-TW" dirty="0">
+                <a:solidFill>
+                  <a:srgbClr val="000000"/>
+                </a:solidFill>
+                <a:latin typeface="Arial Unicode MS"/>
+                <a:ea typeface="Arial Unicode MS"/>
+                <a:cs typeface="Arial Unicode MS"/>
+              </a:rPr>
+              <a:t>，貼了濾色片就是紅、綠、藍各多亮；像素在畫面的哪一格，代表光從哪個</a:t>
+            </a:r>
+            <a:r>
+              <a:rPr sz="950" b="1" lang="zh-TW" dirty="0">
+                <a:solidFill>
+                  <a:srgbClr val="000000"/>
+                </a:solidFill>
+                <a:latin typeface="Arial Unicode MS"/>
+                <a:ea typeface="Arial Unicode MS"/>
+                <a:cs typeface="Arial Unicode MS"/>
+              </a:rPr>
+              <a:t>角度</a:t>
+            </a:r>
+            <a:r>
+              <a:rPr sz="950" lang="zh-TW" dirty="0">
+                <a:solidFill>
+                  <a:srgbClr val="000000"/>
+                </a:solidFill>
+                <a:latin typeface="Arial Unicode MS"/>
+                <a:ea typeface="Arial Unicode MS"/>
+                <a:cs typeface="Arial Unicode MS"/>
+              </a:rPr>
+              <a:t>進來。距離是用「腳踩地的那一點在第幾列」算的，假設</a:t>
+            </a:r>
+            <a:r>
+              <a:rPr sz="950" b="1" lang="zh-TW" dirty="0">
+                <a:solidFill>
+                  <a:srgbClr val="000000"/>
+                </a:solidFill>
+                <a:latin typeface="Arial Unicode MS"/>
+                <a:ea typeface="Arial Unicode MS"/>
+                <a:cs typeface="Arial Unicode MS"/>
+              </a:rPr>
+              <a:t>路面是平的</a:t>
+            </a:r>
+            <a:r>
+              <a:rPr sz="950" lang="zh-TW" dirty="0">
+                <a:solidFill>
+                  <a:srgbClr val="000000"/>
+                </a:solidFill>
+                <a:latin typeface="Arial Unicode MS"/>
+                <a:ea typeface="Arial Unicode MS"/>
+                <a:cs typeface="Arial Unicode MS"/>
+              </a:rPr>
+              <a:t>、知道相機裝多高，遇到上坡下坡就算錯。「那是一個人」也是程式從亮度算出來的，就是第八週的偵測模型。相機也是</a:t>
+            </a:r>
+            <a:r>
+              <a:rPr sz="950" b="1" lang="zh-TW" dirty="0">
+                <a:solidFill>
+                  <a:srgbClr val="000000"/>
+                </a:solidFill>
+                <a:latin typeface="Arial Unicode MS"/>
+                <a:ea typeface="Arial Unicode MS"/>
+                <a:cs typeface="Arial Unicode MS"/>
+              </a:rPr>
+              <a:t>唯一讀得出顏色和文字的</a:t>
+            </a:r>
+            <a:r>
+              <a:rPr sz="950" lang="zh-TW" dirty="0">
+                <a:solidFill>
+                  <a:srgbClr val="000000"/>
+                </a:solidFill>
+                <a:latin typeface="Arial Unicode MS"/>
+                <a:ea typeface="Arial Unicode MS"/>
+                <a:cs typeface="Arial Unicode MS"/>
+              </a:rPr>
+              <a:t>，紅綠燈、路牌都靠它。
 </a:t>
             </a:r>
           </a:p>
@@ -5194,19 +5183,52 @@
                 <a:spcPts val="0"/>
               </a:spcBef>
               <a:spcAft>
-                <a:spcPts val="225"/>
+                <a:spcPts val="158"/>
               </a:spcAft>
             </a:pPr>
             <a:r>
-              <a:rPr sz="1350" lang="zh-TW" dirty="0">
-                <a:solidFill>
-                  <a:srgbClr val="000000"/>
-                </a:solidFill>
-                <a:latin typeface="Arial Unicode MS"/>
-                <a:ea typeface="Arial Unicode MS"/>
-                <a:cs typeface="Arial Unicode MS"/>
-              </a:rPr>
-              <a:t>有效距離那一欄是第三週課堂上設定的晴天值，不是某一顆產品的規格。
+              <a:rPr sz="950" b="1" lang="zh-TW" dirty="0">
+                <a:solidFill>
+                  <a:srgbClr val="000000"/>
+                </a:solidFill>
+                <a:latin typeface="Arial Unicode MS"/>
+                <a:ea typeface="Arial Unicode MS"/>
+                <a:cs typeface="Arial Unicode MS"/>
+              </a:rPr>
+              <a:t>光達</a:t>
+            </a:r>
+            <a:r>
+              <a:rPr sz="950" lang="zh-TW" dirty="0">
+                <a:solidFill>
+                  <a:srgbClr val="000000"/>
+                </a:solidFill>
+                <a:latin typeface="Arial Unicode MS"/>
+                <a:ea typeface="Arial Unicode MS"/>
+                <a:cs typeface="Arial Unicode MS"/>
+              </a:rPr>
+              <a:t>：量的是雷射</a:t>
+            </a:r>
+            <a:r>
+              <a:rPr sz="950" b="1" lang="zh-TW" dirty="0">
+                <a:solidFill>
+                  <a:srgbClr val="000000"/>
+                </a:solidFill>
+                <a:latin typeface="Arial Unicode MS"/>
+                <a:ea typeface="Arial Unicode MS"/>
+                <a:cs typeface="Arial Unicode MS"/>
+              </a:rPr>
+              <a:t>來回的時間</a:t>
+            </a:r>
+            <a:r>
+              <a:rPr sz="950" lang="zh-TW" dirty="0">
+                <a:solidFill>
+                  <a:srgbClr val="000000"/>
+                </a:solidFill>
+                <a:latin typeface="Arial Unicode MS"/>
+                <a:ea typeface="Arial Unicode MS"/>
+                <a:cs typeface="Arial Unicode MS"/>
+              </a:rPr>
+              <a:t>。距離＝光速×來回時間÷2，除以 2 是因為光走了一去一回；光速是固定的，所以距離幾乎等於直接量到，來回 100 奈秒就是 15 公尺。可是那一團點是什麼，它開多快，都要再算。
 </a:t>
             </a:r>
           </a:p>
@@ -5216,11 +5238,385 @@
                 <a:spcPts val="0"/>
               </a:spcBef>
               <a:spcAft>
-                <a:spcPts val="225"/>
+                <a:spcPts val="158"/>
               </a:spcAft>
             </a:pPr>
             <a:r>
-              <a:rPr sz="1350" lang="zh-TW" dirty="0">
+              <a:rPr sz="950" b="1" lang="zh-TW" dirty="0">
+                <a:solidFill>
+                  <a:srgbClr val="000000"/>
+                </a:solidFill>
+                <a:latin typeface="Arial Unicode MS"/>
+                <a:ea typeface="Arial Unicode MS"/>
+                <a:cs typeface="Arial Unicode MS"/>
+              </a:rPr>
+              <a:t>雷達</a:t>
+            </a:r>
+            <a:r>
+              <a:rPr sz="950" lang="zh-TW" dirty="0">
+                <a:solidFill>
+                  <a:srgbClr val="000000"/>
+                </a:solidFill>
+                <a:latin typeface="Arial Unicode MS"/>
+                <a:ea typeface="Arial Unicode MS"/>
+                <a:cs typeface="Arial Unicode MS"/>
+              </a:rPr>
+              <a:t>是例外，一次量兩樣：比較發出去和收回來的</a:t>
+            </a:r>
+            <a:r>
+              <a:rPr sz="950" b="1" lang="zh-TW" dirty="0">
+                <a:solidFill>
+                  <a:srgbClr val="000000"/>
+                </a:solidFill>
+                <a:latin typeface="Arial Unicode MS"/>
+                <a:ea typeface="Arial Unicode MS"/>
+                <a:cs typeface="Arial Unicode MS"/>
+              </a:rPr>
+              <a:t>頻率差</a:t>
+            </a:r>
+            <a:r>
+              <a:rPr sz="950" lang="zh-TW" dirty="0">
+                <a:solidFill>
+                  <a:srgbClr val="000000"/>
+                </a:solidFill>
+                <a:latin typeface="Arial Unicode MS"/>
+                <a:ea typeface="Arial Unicode MS"/>
+                <a:cs typeface="Arial Unicode MS"/>
+              </a:rPr>
+              <a:t>得到距離，用</a:t>
+            </a:r>
+            <a:r>
+              <a:rPr sz="950" b="1" lang="zh-TW" dirty="0">
+                <a:solidFill>
+                  <a:srgbClr val="000000"/>
+                </a:solidFill>
+                <a:latin typeface="Arial Unicode MS"/>
+                <a:ea typeface="Arial Unicode MS"/>
+                <a:cs typeface="Arial Unicode MS"/>
+              </a:rPr>
+              <a:t>都卜勒</a:t>
+            </a:r>
+            <a:r>
+              <a:rPr sz="950" lang="zh-TW" dirty="0">
+                <a:solidFill>
+                  <a:srgbClr val="000000"/>
+                </a:solidFill>
+                <a:latin typeface="Arial Unicode MS"/>
+                <a:ea typeface="Arial Unicode MS"/>
+                <a:cs typeface="Arial Unicode MS"/>
+              </a:rPr>
+              <a:t>得到朝自己的速度，就像救護車開過來鳴笛變尖、開走變低。只有朝自己的那一段量得到，橫著開的車會量到接近 0，橫向的速度還是要算。
+</a:t>
+            </a:r>
+          </a:p>
+          <a:p>
+            <a:pPr algn="l">
+              <a:spcBef>
+                <a:spcPts val="0"/>
+              </a:spcBef>
+              <a:spcAft>
+                <a:spcPts val="158"/>
+              </a:spcAft>
+            </a:pPr>
+            <a:r>
+              <a:rPr sz="950" b="1" lang="zh-TW" dirty="0">
+                <a:solidFill>
+                  <a:srgbClr val="000000"/>
+                </a:solidFill>
+                <a:latin typeface="Arial Unicode MS"/>
+                <a:ea typeface="Arial Unicode MS"/>
+                <a:cs typeface="Arial Unicode MS"/>
+              </a:rPr>
+              <a:t>超音波</a:t>
+            </a:r>
+            <a:r>
+              <a:rPr sz="950" lang="zh-TW" dirty="0">
+                <a:solidFill>
+                  <a:srgbClr val="000000"/>
+                </a:solidFill>
+                <a:latin typeface="Arial Unicode MS"/>
+                <a:ea typeface="Arial Unicode MS"/>
+                <a:cs typeface="Arial Unicode MS"/>
+              </a:rPr>
+              <a:t>：量聲音來回的時間，聲速每秒約 340 公尺，算出距離。</a:t>
+            </a:r>
+            <a:r>
+              <a:rPr sz="950" b="1" lang="zh-TW" dirty="0">
+                <a:solidFill>
+                  <a:srgbClr val="000000"/>
+                </a:solidFill>
+                <a:latin typeface="Arial Unicode MS"/>
+                <a:ea typeface="Arial Unicode MS"/>
+                <a:cs typeface="Arial Unicode MS"/>
+              </a:rPr>
+              <a:t>衛星定位</a:t>
+            </a:r>
+            <a:r>
+              <a:rPr sz="950" lang="zh-TW" dirty="0">
+                <a:solidFill>
+                  <a:srgbClr val="000000"/>
+                </a:solidFill>
+                <a:latin typeface="Arial Unicode MS"/>
+                <a:ea typeface="Arial Unicode MS"/>
+                <a:cs typeface="Arial Unicode MS"/>
+              </a:rPr>
+              <a:t>：量的是每顆衛星的訊號走了多久，乘上光速得到距離，再用四顆衛星算出自己的位置。</a:t>
+            </a:r>
+            <a:r>
+              <a:rPr sz="950" b="1" lang="zh-TW" dirty="0">
+                <a:solidFill>
+                  <a:srgbClr val="000000"/>
+                </a:solidFill>
+                <a:latin typeface="Arial Unicode MS"/>
+                <a:ea typeface="Arial Unicode MS"/>
+                <a:cs typeface="Arial Unicode MS"/>
+              </a:rPr>
+              <a:t>熱像</a:t>
+            </a:r>
+            <a:r>
+              <a:rPr sz="950" lang="zh-TW" dirty="0">
+                <a:solidFill>
+                  <a:srgbClr val="000000"/>
+                </a:solidFill>
+                <a:latin typeface="Arial Unicode MS"/>
+                <a:ea typeface="Arial Unicode MS"/>
+                <a:cs typeface="Arial Unicode MS"/>
+              </a:rPr>
+              <a:t>：量溫度差，那是人還是動物要再判斷。
+</a:t>
+            </a:r>
+          </a:p>
+          <a:p>
+            <a:pPr algn="l">
+              <a:spcBef>
+                <a:spcPts val="0"/>
+              </a:spcBef>
+              <a:spcAft>
+                <a:spcPts val="158"/>
+              </a:spcAft>
+            </a:pPr>
+            <a:r>
+              <a:rPr sz="950" b="1" lang="zh-TW" dirty="0">
+                <a:solidFill>
+                  <a:srgbClr val="000000"/>
+                </a:solidFill>
+                <a:latin typeface="Arial Unicode MS"/>
+                <a:ea typeface="Arial Unicode MS"/>
+                <a:cs typeface="Arial Unicode MS"/>
+              </a:rPr>
+              <a:t>IMU</a:t>
+            </a:r>
+            <a:r>
+              <a:rPr sz="950" lang="zh-TW" dirty="0">
+                <a:solidFill>
+                  <a:srgbClr val="000000"/>
+                </a:solidFill>
+                <a:latin typeface="Arial Unicode MS"/>
+                <a:ea typeface="Arial Unicode MS"/>
+                <a:cs typeface="Arial Unicode MS"/>
+              </a:rPr>
+              <a:t> 是第六週加的：裡面有加速度計和陀螺儀，量的是</a:t>
+            </a:r>
+            <a:r>
+              <a:rPr sz="950" b="1" lang="zh-TW" dirty="0">
+                <a:solidFill>
+                  <a:srgbClr val="000000"/>
+                </a:solidFill>
+                <a:latin typeface="Arial Unicode MS"/>
+                <a:ea typeface="Arial Unicode MS"/>
+                <a:cs typeface="Arial Unicode MS"/>
+              </a:rPr>
+              <a:t>自己</a:t>
+            </a:r>
+            <a:r>
+              <a:rPr sz="950" lang="zh-TW" dirty="0">
+                <a:solidFill>
+                  <a:srgbClr val="000000"/>
+                </a:solidFill>
+                <a:latin typeface="Arial Unicode MS"/>
+                <a:ea typeface="Arial Unicode MS"/>
+                <a:cs typeface="Arial Unicode MS"/>
+              </a:rPr>
+              <a:t>加速多少、轉得多快；位置要把這些一路加起來才算得到，小小的誤差一直累加，就是</a:t>
+            </a:r>
+            <a:r>
+              <a:rPr sz="950" b="1" lang="zh-TW" dirty="0">
+                <a:solidFill>
+                  <a:srgbClr val="000000"/>
+                </a:solidFill>
+                <a:latin typeface="Arial Unicode MS"/>
+                <a:ea typeface="Arial Unicode MS"/>
+                <a:cs typeface="Arial Unicode MS"/>
+              </a:rPr>
+              <a:t>漂移</a:t>
+            </a:r>
+            <a:r>
+              <a:rPr sz="950" lang="zh-TW" dirty="0">
+                <a:solidFill>
+                  <a:srgbClr val="000000"/>
+                </a:solidFill>
+                <a:latin typeface="Arial Unicode MS"/>
+                <a:ea typeface="Arial Unicode MS"/>
+                <a:cs typeface="Arial Unicode MS"/>
+              </a:rPr>
+              <a:t>，橫向誤差跟時間的平方成正比，所以 IMU 只能補衛星定位短短的空檔。表上有兩種量的是「自己」，不是外面的東西：</a:t>
+            </a:r>
+            <a:r>
+              <a:rPr sz="950" b="1" lang="zh-TW" dirty="0">
+                <a:solidFill>
+                  <a:srgbClr val="000000"/>
+                </a:solidFill>
+                <a:latin typeface="Arial Unicode MS"/>
+                <a:ea typeface="Arial Unicode MS"/>
+                <a:cs typeface="Arial Unicode MS"/>
+              </a:rPr>
+              <a:t>衛星定位和 IMU</a:t>
+            </a:r>
+            <a:r>
+              <a:rPr sz="950" lang="zh-TW" dirty="0">
+                <a:solidFill>
+                  <a:srgbClr val="000000"/>
+                </a:solidFill>
+                <a:latin typeface="Arial Unicode MS"/>
+                <a:ea typeface="Arial Unicode MS"/>
+                <a:cs typeface="Arial Unicode MS"/>
+              </a:rPr>
+              <a:t>。
+</a:t>
+            </a:r>
+          </a:p>
+          <a:p>
+            <a:pPr algn="l">
+              <a:spcBef>
+                <a:spcPts val="0"/>
+              </a:spcBef>
+              <a:spcAft>
+                <a:spcPts val="158"/>
+              </a:spcAft>
+            </a:pPr>
+            <a:r>
+              <a:rPr sz="950" b="1" lang="zh-TW" dirty="0">
+                <a:solidFill>
+                  <a:srgbClr val="000000"/>
+                </a:solidFill>
+                <a:latin typeface="Arial Unicode MS"/>
+                <a:ea typeface="Arial Unicode MS"/>
+                <a:cs typeface="Arial Unicode MS"/>
+              </a:rPr>
+              <a:t>為什麼要分得這麼清楚？</a:t>
+            </a:r>
+            <a:r>
+              <a:rPr sz="950" lang="zh-TW" dirty="0">
+                <a:solidFill>
+                  <a:srgbClr val="000000"/>
+                </a:solidFill>
+                <a:latin typeface="Arial Unicode MS"/>
+                <a:ea typeface="Arial Unicode MS"/>
+                <a:cs typeface="Arial Unicode MS"/>
+              </a:rPr>
+              <a:t>因為算出來的，比量出來的多了三個弱點：</a:t>
+            </a:r>
+            <a:r>
+              <a:rPr sz="950" b="1" lang="zh-TW" dirty="0">
+                <a:solidFill>
+                  <a:srgbClr val="000000"/>
+                </a:solidFill>
+                <a:latin typeface="Arial Unicode MS"/>
+                <a:ea typeface="Arial Unicode MS"/>
+                <a:cs typeface="Arial Unicode MS"/>
+              </a:rPr>
+              <a:t>假設可能不成立</a:t>
+            </a:r>
+            <a:r>
+              <a:rPr sz="950" lang="zh-TW" dirty="0">
+                <a:solidFill>
+                  <a:srgbClr val="000000"/>
+                </a:solidFill>
+                <a:latin typeface="Arial Unicode MS"/>
+                <a:ea typeface="Arial Unicode MS"/>
+                <a:cs typeface="Arial Unicode MS"/>
+              </a:rPr>
+              <a:t>，像相機遇到上坡；</a:t>
+            </a:r>
+            <a:r>
+              <a:rPr sz="950" b="1" lang="zh-TW" dirty="0">
+                <a:solidFill>
+                  <a:srgbClr val="000000"/>
+                </a:solidFill>
+                <a:latin typeface="Arial Unicode MS"/>
+                <a:ea typeface="Arial Unicode MS"/>
+                <a:cs typeface="Arial Unicode MS"/>
+              </a:rPr>
+              <a:t>會慢一拍</a:t>
+            </a:r>
+            <a:r>
+              <a:rPr sz="950" lang="zh-TW" dirty="0">
+                <a:solidFill>
+                  <a:srgbClr val="000000"/>
+                </a:solidFill>
+                <a:latin typeface="Arial Unicode MS"/>
+                <a:ea typeface="Arial Unicode MS"/>
+                <a:cs typeface="Arial Unicode MS"/>
+              </a:rPr>
+              <a:t>，速度要連續看兩次、位置相減、再除以時間，只有雷達一次就量到；</a:t>
+            </a:r>
+            <a:r>
+              <a:rPr sz="950" b="1" lang="zh-TW" dirty="0">
+                <a:solidFill>
+                  <a:srgbClr val="000000"/>
+                </a:solidFill>
+                <a:latin typeface="Arial Unicode MS"/>
+                <a:ea typeface="Arial Unicode MS"/>
+                <a:cs typeface="Arial Unicode MS"/>
+              </a:rPr>
+              <a:t>誤差會累積</a:t>
+            </a:r>
+            <a:r>
+              <a:rPr sz="950" lang="zh-TW" dirty="0">
+                <a:solidFill>
+                  <a:srgbClr val="000000"/>
+                </a:solidFill>
+                <a:latin typeface="Arial Unicode MS"/>
+                <a:ea typeface="Arial Unicode MS"/>
+                <a:cs typeface="Arial Unicode MS"/>
+              </a:rPr>
+              <a:t>，像 IMU 的漂移。所以看到一個數字，先問：它是量的還是算的？是算的，再問：靠什麼假設？
+</a:t>
+            </a:r>
+          </a:p>
+          <a:p>
+            <a:pPr algn="l">
+              <a:spcBef>
+                <a:spcPts val="0"/>
+              </a:spcBef>
+              <a:spcAft>
+                <a:spcPts val="158"/>
+              </a:spcAft>
+            </a:pPr>
+            <a:r>
+              <a:rPr sz="950" lang="zh-TW" dirty="0">
+                <a:solidFill>
+                  <a:srgbClr val="000000"/>
+                </a:solidFill>
+                <a:latin typeface="Arial Unicode MS"/>
+                <a:ea typeface="Arial Unicode MS"/>
+                <a:cs typeface="Arial Unicode MS"/>
+              </a:rPr>
+              <a:t>有效距離那一欄是第三週課堂上設定的晴天值，不是某一顆產品的規格。
+</a:t>
+            </a:r>
+          </a:p>
+          <a:p>
+            <a:pPr algn="l">
+              <a:spcBef>
+                <a:spcPts val="0"/>
+              </a:spcBef>
+              <a:spcAft>
+                <a:spcPts val="158"/>
+              </a:spcAft>
+            </a:pPr>
+            <a:r>
+              <a:rPr sz="950" lang="zh-TW" dirty="0">
                 <a:solidFill>
                   <a:srgbClr val="000000"/>
                 </a:solidFill>
@@ -5231,7 +5627,7 @@
               <a:t>第三週還有兩個常考的數字：</a:t>
             </a:r>
             <a:r>
-              <a:rPr sz="1350" b="1" lang="zh-TW" dirty="0">
+              <a:rPr sz="950" b="1" lang="zh-TW" dirty="0">
                 <a:solidFill>
                   <a:srgbClr val="000000"/>
                 </a:solidFill>
@@ -5242,7 +5638,7 @@
               <a:t>相機估距誤差跟距離平方成正比</a:t>
             </a:r>
             <a:r>
-              <a:rPr sz="1350" lang="zh-TW" dirty="0">
+              <a:rPr sz="950" lang="zh-TW" dirty="0">
                 <a:solidFill>
                   <a:srgbClr val="000000"/>
                 </a:solidFill>
@@ -5253,7 +5649,7 @@
               <a:t>，距離兩倍，誤差四倍；</a:t>
             </a:r>
             <a:r>
-              <a:rPr sz="1350" b="1" lang="zh-TW" dirty="0">
+              <a:rPr sz="950" b="1" lang="zh-TW" dirty="0">
                 <a:solidFill>
                   <a:srgbClr val="000000"/>
                 </a:solidFill>
@@ -5264,7 +5660,7 @@
               <a:t>光達打在行人身上的點，距離兩倍，點數剩四分之一</a:t>
             </a:r>
             <a:r>
-              <a:rPr sz="1350" lang="zh-TW" dirty="0">
+              <a:rPr sz="950" lang="zh-TW" dirty="0">
                 <a:solidFill>
                   <a:srgbClr val="000000"/>
                 </a:solidFill>

--- a/第八週(10-29)/第八週_第3節_簡報.pptx
+++ b/第八週(10-29)/第八週_第3節_簡報.pptx
@@ -5777,11 +5777,11 @@
                 <a:spcPts val="0"/>
               </a:spcBef>
               <a:spcAft>
-                <a:spcPts val="250"/>
+                <a:spcPts val="142"/>
               </a:spcAft>
             </a:pPr>
             <a:r>
-              <a:rPr sz="1500" b="1" lang="zh-TW" dirty="0">
+              <a:rPr sz="850" b="1" lang="zh-TW" dirty="0">
                 <a:solidFill>
                   <a:srgbClr val="000000"/>
                 </a:solidFill>
@@ -5792,7 +5792,7 @@
               <a:t>這一張的目的：</a:t>
             </a:r>
             <a:r>
-              <a:rPr sz="1500" lang="zh-TW" dirty="0">
+              <a:rPr sz="850" lang="zh-TW" dirty="0">
                 <a:solidFill>
                   <a:srgbClr val="000000"/>
                 </a:solidFill>
@@ -5810,11 +5810,11 @@
                 <a:spcPts val="0"/>
               </a:spcBef>
               <a:spcAft>
-                <a:spcPts val="250"/>
+                <a:spcPts val="142"/>
               </a:spcAft>
             </a:pPr>
             <a:r>
-              <a:rPr sz="1500" lang="zh-TW" dirty="0">
+              <a:rPr sz="850" lang="zh-TW" dirty="0">
                 <a:solidFill>
                   <a:srgbClr val="000000"/>
                 </a:solidFill>
@@ -5832,11 +5832,11 @@
                 <a:spcPts val="0"/>
               </a:spcBef>
               <a:spcAft>
-                <a:spcPts val="250"/>
+                <a:spcPts val="142"/>
               </a:spcAft>
             </a:pPr>
             <a:r>
-              <a:rPr sz="1500" lang="zh-TW" dirty="0">
+              <a:rPr sz="850" lang="zh-TW" dirty="0">
                 <a:solidFill>
                   <a:srgbClr val="000000"/>
                 </a:solidFill>
@@ -5854,11 +5854,11 @@
                 <a:spcPts val="0"/>
               </a:spcBef>
               <a:spcAft>
-                <a:spcPts val="250"/>
+                <a:spcPts val="142"/>
               </a:spcAft>
             </a:pPr>
             <a:r>
-              <a:rPr sz="1500" lang="zh-TW" dirty="0">
+              <a:rPr sz="850" lang="zh-TW" dirty="0">
                 <a:solidFill>
                   <a:srgbClr val="000000"/>
                 </a:solidFill>
@@ -5876,11 +5876,11 @@
                 <a:spcPts val="0"/>
               </a:spcBef>
               <a:spcAft>
-                <a:spcPts val="250"/>
+                <a:spcPts val="142"/>
               </a:spcAft>
             </a:pPr>
             <a:r>
-              <a:rPr sz="1500" lang="zh-TW" dirty="0">
+              <a:rPr sz="850" lang="zh-TW" dirty="0">
                 <a:solidFill>
                   <a:srgbClr val="000000"/>
                 </a:solidFill>
@@ -5891,7 +5891,7 @@
               <a:t>第四週第三節的</a:t>
             </a:r>
             <a:r>
-              <a:rPr sz="1500" b="1" lang="zh-TW" dirty="0">
+              <a:rPr sz="850" b="1" lang="zh-TW" dirty="0">
                 <a:solidFill>
                   <a:srgbClr val="000000"/>
                 </a:solidFill>
@@ -5902,7 +5902,7 @@
               <a:t>雨天陷阱題</a:t>
             </a:r>
             <a:r>
-              <a:rPr sz="1500" lang="zh-TW" dirty="0">
+              <a:rPr sz="850" lang="zh-TW" dirty="0">
                 <a:solidFill>
                   <a:srgbClr val="000000"/>
                 </a:solidFill>
@@ -5913,7 +5913,7 @@
               <a:t>也要會算：模擬器打開雨天，射線的有效長度變成 </a:t>
             </a:r>
             <a:r>
-              <a:rPr sz="1500" b="1" lang="zh-TW" dirty="0">
+              <a:rPr sz="850" b="1" lang="zh-TW" dirty="0">
                 <a:solidFill>
                   <a:srgbClr val="000000"/>
                 </a:solidFill>
@@ -5924,7 +5924,7 @@
               <a:t>0.55 倍</a:t>
             </a:r>
             <a:r>
-              <a:rPr sz="1500" lang="zh-TW" dirty="0">
+              <a:rPr sz="850" lang="zh-TW" dirty="0">
                 <a:solidFill>
                   <a:srgbClr val="000000"/>
                 </a:solidFill>
@@ -5935,7 +5935,7 @@
               <a:t>。舉一個例子：射線 35 公尺、時速 50。晴天 35 公尺，比 25 公尺還長，夠；下雨變成 35 乘 0.55，19.25 公尺，比煞停距離 20 公尺還短，</a:t>
             </a:r>
             <a:r>
-              <a:rPr sz="1500" b="1" lang="zh-TW" dirty="0">
+              <a:rPr sz="850" b="1" lang="zh-TW" dirty="0">
                 <a:solidFill>
                   <a:srgbClr val="000000"/>
                 </a:solidFill>
@@ -5946,7 +5946,7 @@
               <a:t>就不夠了</a:t>
             </a:r>
             <a:r>
-              <a:rPr sz="1500" lang="zh-TW" dirty="0">
+              <a:rPr sz="850" lang="zh-TW" dirty="0">
                 <a:solidFill>
                   <a:srgbClr val="000000"/>
                 </a:solidFill>
@@ -5964,19 +5964,382 @@
                 <a:spcPts val="0"/>
               </a:spcBef>
               <a:spcAft>
-                <a:spcPts val="250"/>
+                <a:spcPts val="142"/>
               </a:spcAft>
             </a:pPr>
             <a:r>
-              <a:rPr sz="1500" lang="zh-TW" dirty="0">
-                <a:solidFill>
-                  <a:srgbClr val="000000"/>
-                </a:solidFill>
-                <a:latin typeface="Arial Unicode MS"/>
-                <a:ea typeface="Arial Unicode MS"/>
-                <a:cs typeface="Arial Unicode MS"/>
-              </a:rPr>
-              <a:t>第四週還有幾件事：模擬和現實有三種落差，外觀、行為、物理；里程不是好的測試單位，場景才是；場景分三層：功能場景沒有數字，邏輯場景給範圍，具體場景給一個值。射線長度過了門檻就沒用，張角開太大反而攤稀。</a:t>
+              <a:rPr sz="850" lang="zh-TW" dirty="0">
+                <a:solidFill>
+                  <a:srgbClr val="000000"/>
+                </a:solidFill>
+                <a:latin typeface="Arial Unicode MS"/>
+                <a:ea typeface="Arial Unicode MS"/>
+                <a:cs typeface="Arial Unicode MS"/>
+              </a:rPr>
+              <a:t>第四週還有四件事，一件一件講。
+</a:t>
+            </a:r>
+          </a:p>
+          <a:p>
+            <a:pPr algn="l">
+              <a:spcBef>
+                <a:spcPts val="0"/>
+              </a:spcBef>
+              <a:spcAft>
+                <a:spcPts val="142"/>
+              </a:spcAft>
+            </a:pPr>
+            <a:r>
+              <a:rPr sz="850" b="1" lang="zh-TW" dirty="0">
+                <a:solidFill>
+                  <a:srgbClr val="000000"/>
+                </a:solidFill>
+                <a:latin typeface="Arial Unicode MS"/>
+                <a:ea typeface="Arial Unicode MS"/>
+                <a:cs typeface="Arial Unicode MS"/>
+              </a:rPr>
+              <a:t>一、模擬和現實有三種落差。</a:t>
+            </a:r>
+            <a:r>
+              <a:rPr sz="850" lang="zh-TW" dirty="0">
+                <a:solidFill>
+                  <a:srgbClr val="000000"/>
+                </a:solidFill>
+                <a:latin typeface="Arial Unicode MS"/>
+                <a:ea typeface="Arial Unicode MS"/>
+                <a:cs typeface="Arial Unicode MS"/>
+              </a:rPr>
+              <a:t>模擬裡不撞，不代表真車不撞，差在三個地方。</a:t>
+            </a:r>
+            <a:r>
+              <a:rPr sz="850" b="1" lang="zh-TW" dirty="0">
+                <a:solidFill>
+                  <a:srgbClr val="000000"/>
+                </a:solidFill>
+                <a:latin typeface="Arial Unicode MS"/>
+                <a:ea typeface="Arial Unicode MS"/>
+                <a:cs typeface="Arial Unicode MS"/>
+              </a:rPr>
+              <a:t>外觀</a:t>
+            </a:r>
+            <a:r>
+              <a:rPr sz="850" lang="zh-TW" dirty="0">
+                <a:solidFill>
+                  <a:srgbClr val="000000"/>
+                </a:solidFill>
+                <a:latin typeface="Arial Unicode MS"/>
+                <a:ea typeface="Arial Unicode MS"/>
+                <a:cs typeface="Arial Unicode MS"/>
+              </a:rPr>
+              <a:t>：模擬裡的紅色車是乾淨、均勻的紅；真相機拍到的紅色車有灰塵、有反光、有招牌的倒影。用乾淨的紅教電腦認車，上路遇到髒的紅就認不出來。解法叫</a:t>
+            </a:r>
+            <a:r>
+              <a:rPr sz="850" b="1" lang="zh-TW" dirty="0">
+                <a:solidFill>
+                  <a:srgbClr val="000000"/>
+                </a:solidFill>
+                <a:latin typeface="Arial Unicode MS"/>
+                <a:ea typeface="Arial Unicode MS"/>
+                <a:cs typeface="Arial Unicode MS"/>
+              </a:rPr>
+              <a:t>域隨機化</a:t>
+            </a:r>
+            <a:r>
+              <a:rPr sz="850" lang="zh-TW" dirty="0">
+                <a:solidFill>
+                  <a:srgbClr val="000000"/>
+                </a:solidFill>
+                <a:latin typeface="Arial Unicode MS"/>
+                <a:ea typeface="Arial Unicode MS"/>
+                <a:cs typeface="Arial Unicode MS"/>
+              </a:rPr>
+              <a:t>：在模擬裡故意把顏色、光線、地面一直亂改，電腦不能再靠顏色，只好學形狀，而形狀在真實世界不會變。</a:t>
+            </a:r>
+            <a:r>
+              <a:rPr sz="850" b="1" lang="zh-TW" dirty="0">
+                <a:solidFill>
+                  <a:srgbClr val="000000"/>
+                </a:solidFill>
+                <a:latin typeface="Arial Unicode MS"/>
+                <a:ea typeface="Arial Unicode MS"/>
+                <a:cs typeface="Arial Unicode MS"/>
+              </a:rPr>
+              <a:t>行為</a:t>
+            </a:r>
+            <a:r>
+              <a:rPr sz="850" lang="zh-TW" dirty="0">
+                <a:solidFill>
+                  <a:srgbClr val="000000"/>
+                </a:solidFill>
+                <a:latin typeface="Arial Unicode MS"/>
+                <a:ea typeface="Arial Unicode MS"/>
+                <a:cs typeface="Arial Unicode MS"/>
+              </a:rPr>
+              <a:t>：模擬裡的車都照規則走，待在車道中間、變道先打方向燈；真實的機車會鑽縫、紅燈前擠到最前面、路口靠眼神決定誰先走。解法是把真實道路錄到的軌跡放回模擬裡，可是河內的軌跡沒有人有，要自己去收。</a:t>
+            </a:r>
+            <a:r>
+              <a:rPr sz="850" b="1" lang="zh-TW" dirty="0">
+                <a:solidFill>
+                  <a:srgbClr val="000000"/>
+                </a:solidFill>
+                <a:latin typeface="Arial Unicode MS"/>
+                <a:ea typeface="Arial Unicode MS"/>
+                <a:cs typeface="Arial Unicode MS"/>
+              </a:rPr>
+              <a:t>物理</a:t>
+            </a:r>
+            <a:r>
+              <a:rPr sz="850" lang="zh-TW" dirty="0">
+                <a:solidFill>
+                  <a:srgbClr val="000000"/>
+                </a:solidFill>
+                <a:latin typeface="Arial Unicode MS"/>
+                <a:ea typeface="Arial Unicode MS"/>
+                <a:cs typeface="Arial Unicode MS"/>
+              </a:rPr>
+              <a:t>：輪胎、煞車在模擬裡都是估的。我們的模擬器減速度固定是 6，濕柏油大約只剩 3，時速 50 的煞停距離就從 20.3 公尺變成 36.4 公尺；反應那一段 4.2 公尺不變，變長的是煞車那一段。所以模擬是一道篩子：過不了的先淘汰，過了只是拿到上真車測試的門票。
+</a:t>
+            </a:r>
+          </a:p>
+          <a:p>
+            <a:pPr algn="l">
+              <a:spcBef>
+                <a:spcPts val="0"/>
+              </a:spcBef>
+              <a:spcAft>
+                <a:spcPts val="142"/>
+              </a:spcAft>
+            </a:pPr>
+            <a:r>
+              <a:rPr sz="850" b="1" lang="zh-TW" dirty="0">
+                <a:solidFill>
+                  <a:srgbClr val="000000"/>
+                </a:solidFill>
+                <a:latin typeface="Arial Unicode MS"/>
+                <a:ea typeface="Arial Unicode MS"/>
+                <a:cs typeface="Arial Unicode MS"/>
+              </a:rPr>
+              <a:t>二、里程不是好的測試單位，場景才是。</a:t>
+            </a:r>
+            <a:r>
+              <a:rPr sz="850" lang="zh-TW" dirty="0">
+                <a:solidFill>
+                  <a:srgbClr val="000000"/>
+                </a:solidFill>
+                <a:latin typeface="Arial Unicode MS"/>
+                <a:ea typeface="Arial Unicode MS"/>
+                <a:cs typeface="Arial Unicode MS"/>
+              </a:rPr>
+              <a:t>一台車在高速公路上直直跑一萬公里沒出事，只證明它很會走直線。決定安全的是很少發生的那幾秒：小孩從車陣衝出來、前車急煞、機車從死角鑽上來。一直跑，不保證遇得到。RAND 在 2016 年估計，要用里程證明自駕車比人安全兩成，要跑 110 億英里，一百台車全年無休要跑五百年。所以要問的不是「跑了幾公里」，而是「遇過哪些狀況」，這些狀況就叫</a:t>
+            </a:r>
+            <a:r>
+              <a:rPr sz="850" b="1" lang="zh-TW" dirty="0">
+                <a:solidFill>
+                  <a:srgbClr val="000000"/>
+                </a:solidFill>
+                <a:latin typeface="Arial Unicode MS"/>
+                <a:ea typeface="Arial Unicode MS"/>
+                <a:cs typeface="Arial Unicode MS"/>
+              </a:rPr>
+              <a:t>場景</a:t>
+            </a:r>
+            <a:r>
+              <a:rPr sz="850" lang="zh-TW" dirty="0">
+                <a:solidFill>
+                  <a:srgbClr val="000000"/>
+                </a:solidFill>
+                <a:latin typeface="Arial Unicode MS"/>
+                <a:ea typeface="Arial Unicode MS"/>
+                <a:cs typeface="Arial Unicode MS"/>
+              </a:rPr>
+              <a:t>。場景一定有一個動作，像「急煞」「切入」；靜止的一張畫面叫「場面」，不是場景。
+</a:t>
+            </a:r>
+          </a:p>
+          <a:p>
+            <a:pPr algn="l">
+              <a:spcBef>
+                <a:spcPts val="0"/>
+              </a:spcBef>
+              <a:spcAft>
+                <a:spcPts val="142"/>
+              </a:spcAft>
+            </a:pPr>
+            <a:r>
+              <a:rPr sz="850" b="1" lang="zh-TW" dirty="0">
+                <a:solidFill>
+                  <a:srgbClr val="000000"/>
+                </a:solidFill>
+                <a:latin typeface="Arial Unicode MS"/>
+                <a:ea typeface="Arial Unicode MS"/>
+                <a:cs typeface="Arial Unicode MS"/>
+              </a:rPr>
+              <a:t>三、場景分三層，從模糊到精確，每加一層就多一點數字。</a:t>
+            </a:r>
+            <a:r>
+              <a:rPr sz="850" lang="zh-TW" dirty="0">
+                <a:solidFill>
+                  <a:srgbClr val="000000"/>
+                </a:solidFill>
+                <a:latin typeface="Arial Unicode MS"/>
+                <a:ea typeface="Arial Unicode MS"/>
+                <a:cs typeface="Arial Unicode MS"/>
+              </a:rPr>
+              <a:t>就像訂便當：「我要一個便當」是第一層；「八十到一百元、要有肉」是第二層；「排骨便當、九十元」是第三層。用第四週講義的例子：</a:t>
+            </a:r>
+            <a:r>
+              <a:rPr sz="850" b="1" lang="zh-TW" dirty="0">
+                <a:solidFill>
+                  <a:srgbClr val="000000"/>
+                </a:solidFill>
+                <a:latin typeface="Arial Unicode MS"/>
+                <a:ea typeface="Arial Unicode MS"/>
+                <a:cs typeface="Arial Unicode MS"/>
+              </a:rPr>
+              <a:t>功能場景</a:t>
+            </a:r>
+            <a:r>
+              <a:rPr sz="850" lang="zh-TW" dirty="0">
+                <a:solidFill>
+                  <a:srgbClr val="000000"/>
+                </a:solidFill>
+                <a:latin typeface="Arial Unicode MS"/>
+                <a:ea typeface="Arial Unicode MS"/>
+                <a:cs typeface="Arial Unicode MS"/>
+              </a:rPr>
+              <a:t>一個數字都沒有，只寫「前車急煞」。</a:t>
+            </a:r>
+            <a:r>
+              <a:rPr sz="850" b="1" lang="zh-TW" dirty="0">
+                <a:solidFill>
+                  <a:srgbClr val="000000"/>
+                </a:solidFill>
+                <a:latin typeface="Arial Unicode MS"/>
+                <a:ea typeface="Arial Unicode MS"/>
+                <a:cs typeface="Arial Unicode MS"/>
+              </a:rPr>
+              <a:t>邏輯場景</a:t>
+            </a:r>
+            <a:r>
+              <a:rPr sz="850" lang="zh-TW" dirty="0">
+                <a:solidFill>
+                  <a:srgbClr val="000000"/>
+                </a:solidFill>
+                <a:latin typeface="Arial Unicode MS"/>
+                <a:ea typeface="Arial Unicode MS"/>
+                <a:cs typeface="Arial Unicode MS"/>
+              </a:rPr>
+              <a:t>每個參數給一個範圍：前車在 20 到 60 公尺，減速度每秒平方 3 到 8 公尺，自車時速 40 到 70。</a:t>
+            </a:r>
+            <a:r>
+              <a:rPr sz="850" b="1" lang="zh-TW" dirty="0">
+                <a:solidFill>
+                  <a:srgbClr val="000000"/>
+                </a:solidFill>
+                <a:latin typeface="Arial Unicode MS"/>
+                <a:ea typeface="Arial Unicode MS"/>
+                <a:cs typeface="Arial Unicode MS"/>
+              </a:rPr>
+              <a:t>具體場景</a:t>
+            </a:r>
+            <a:r>
+              <a:rPr sz="850" lang="zh-TW" dirty="0">
+                <a:solidFill>
+                  <a:srgbClr val="000000"/>
+                </a:solidFill>
+                <a:latin typeface="Arial Unicode MS"/>
+                <a:ea typeface="Arial Unicode MS"/>
+                <a:cs typeface="Arial Unicode MS"/>
+              </a:rPr>
+              <a:t>每個參數只有一個值：前車剛好 35 公尺、減速度剛好 6、自車剛好時速 50，這樣才跑得起來，跑一次得到一個結果，撞了或沒撞。最重要的是邏輯場景，因為電腦可以把它展開：距離每 1 公尺一個是 41 個，減速度每 0.5 一個是 11 個，時速每 5 公里一個是 7 個，41 乘 11 乘 7，等於 3157 個具體場景。全部跑一遍，就量得出「多近、多急」會開始撞，這才是模擬的用法，不是拚里程。而這只是一個功能場景展開出來的。
+</a:t>
+            </a:r>
+          </a:p>
+          <a:p>
+            <a:pPr algn="l">
+              <a:spcBef>
+                <a:spcPts val="0"/>
+              </a:spcBef>
+              <a:spcAft>
+                <a:spcPts val="142"/>
+              </a:spcAft>
+            </a:pPr>
+            <a:r>
+              <a:rPr sz="850" b="1" lang="zh-TW" dirty="0">
+                <a:solidFill>
+                  <a:srgbClr val="000000"/>
+                </a:solidFill>
+                <a:latin typeface="Arial Unicode MS"/>
+                <a:ea typeface="Arial Unicode MS"/>
+                <a:cs typeface="Arial Unicode MS"/>
+              </a:rPr>
+              <a:t>四、射線不是愈長、張角不是愈大就愈好。</a:t>
+            </a:r>
+            <a:r>
+              <a:rPr sz="850" b="1" lang="zh-TW" dirty="0">
+                <a:solidFill>
+                  <a:srgbClr val="000000"/>
+                </a:solidFill>
+                <a:latin typeface="Arial Unicode MS"/>
+                <a:ea typeface="Arial Unicode MS"/>
+                <a:cs typeface="Arial Unicode MS"/>
+              </a:rPr>
+              <a:t>長度過了門檻就沒用</a:t>
+            </a:r>
+            <a:r>
+              <a:rPr sz="850" lang="zh-TW" dirty="0">
+                <a:solidFill>
+                  <a:srgbClr val="000000"/>
+                </a:solidFill>
+                <a:latin typeface="Arial Unicode MS"/>
+                <a:ea typeface="Arial Unicode MS"/>
+                <a:cs typeface="Arial Unicode MS"/>
+              </a:rPr>
+              <a:t>：時速 40 的煞停距離是 13.6 公尺，射線 25 公尺就夠了；第四週用十六個種子實測，射線 45 公尺和 120 公尺，撐的秒數一秒不差，多出來的長度根本用不到。</a:t>
+            </a:r>
+            <a:r>
+              <a:rPr sz="850" b="1" lang="zh-TW" dirty="0">
+                <a:solidFill>
+                  <a:srgbClr val="000000"/>
+                </a:solidFill>
+                <a:latin typeface="Arial Unicode MS"/>
+                <a:ea typeface="Arial Unicode MS"/>
+                <a:cs typeface="Arial Unicode MS"/>
+              </a:rPr>
+              <a:t>張角開太大反而攤稀</a:t>
+            </a:r>
+            <a:r>
+              <a:rPr sz="850" lang="zh-TW" dirty="0">
+                <a:solidFill>
+                  <a:srgbClr val="000000"/>
+                </a:solidFill>
+                <a:latin typeface="Arial Unicode MS"/>
+                <a:ea typeface="Arial Unicode MS"/>
+                <a:cs typeface="Arial Unicode MS"/>
+              </a:rPr>
+              <a:t>：射線的條數不變，張角開得愈大，相鄰兩條射線之間的縫就愈寬。河內那一組預設九條射線、張角 120 度，每兩條差 15 度，25 公尺外的縫大約 6.5 公尺寬，一台機車才 0.8 公尺寬，整台掉進縫裡，電腦看不到它。就像張開手指去摸桌子，手指張得愈開，摸到的範圍愈大，但指縫之間漏掉的地方也愈大。實測張角開到 180 度，撐的時間從 17.5 秒掉到 15.9 秒，反而更糟。所以規格要的是</a:t>
+            </a:r>
+            <a:r>
+              <a:rPr sz="850" b="1" lang="zh-TW" dirty="0">
+                <a:solidFill>
+                  <a:srgbClr val="000000"/>
+                </a:solidFill>
+                <a:latin typeface="Arial Unicode MS"/>
+                <a:ea typeface="Arial Unicode MS"/>
+                <a:cs typeface="Arial Unicode MS"/>
+              </a:rPr>
+              <a:t>剛好跨過門檻</a:t>
+            </a:r>
+            <a:r>
+              <a:rPr sz="850" lang="zh-TW" dirty="0">
+                <a:solidFill>
+                  <a:srgbClr val="000000"/>
+                </a:solidFill>
+                <a:latin typeface="Arial Unicode MS"/>
+                <a:ea typeface="Arial Unicode MS"/>
+                <a:cs typeface="Arial Unicode MS"/>
+              </a:rPr>
+              <a:t>：先算煞停距離，射線長度夠就好，張角收在需要的範圍。</a:t>
             </a:r>
           </a:p>
         </p:txBody>

--- a/第八週(10-29)/第八週_第3節_簡報.pptx
+++ b/第八週(10-29)/第八週_第3節_簡報.pptx
@@ -6448,11 +6448,11 @@
                 <a:spcPts val="0"/>
               </a:spcBef>
               <a:spcAft>
-                <a:spcPts val="208"/>
+                <a:spcPts val="200"/>
               </a:spcAft>
             </a:pPr>
             <a:r>
-              <a:rPr sz="1250" b="1" lang="zh-TW" dirty="0">
+              <a:rPr sz="1200" b="1" lang="zh-TW" dirty="0">
                 <a:solidFill>
                   <a:srgbClr val="000000"/>
                 </a:solidFill>
@@ -6463,7 +6463,7 @@
               <a:t>這一張的目的：</a:t>
             </a:r>
             <a:r>
-              <a:rPr sz="1250" lang="zh-TW" dirty="0">
+              <a:rPr sz="1200" lang="zh-TW" dirty="0">
                 <a:solidFill>
                   <a:srgbClr val="000000"/>
                 </a:solidFill>
@@ -6481,11 +6481,11 @@
                 <a:spcPts val="0"/>
               </a:spcBef>
               <a:spcAft>
-                <a:spcPts val="208"/>
+                <a:spcPts val="200"/>
               </a:spcAft>
             </a:pPr>
             <a:r>
-              <a:rPr sz="1250" lang="zh-TW" dirty="0">
+              <a:rPr sz="1200" lang="zh-TW" dirty="0">
                 <a:solidFill>
                   <a:srgbClr val="000000"/>
                 </a:solidFill>
@@ -6503,11 +6503,11 @@
                 <a:spcPts val="0"/>
               </a:spcBef>
               <a:spcAft>
-                <a:spcPts val="208"/>
+                <a:spcPts val="200"/>
               </a:spcAft>
             </a:pPr>
             <a:r>
-              <a:rPr sz="1250" b="1" lang="zh-TW" dirty="0">
+              <a:rPr sz="1200" b="1" lang="zh-TW" dirty="0">
                 <a:solidFill>
                   <a:srgbClr val="000000"/>
                 </a:solidFill>
@@ -6518,7 +6518,7 @@
               <a:t>OS1 測距 170 和 90</a:t>
             </a:r>
             <a:r>
-              <a:rPr sz="1250" lang="zh-TW" dirty="0">
+              <a:rPr sz="1200" lang="zh-TW" dirty="0">
                 <a:solidFill>
                   <a:srgbClr val="000000"/>
                 </a:solidFill>
@@ -6536,11 +6536,11 @@
                 <a:spcPts val="0"/>
               </a:spcBef>
               <a:spcAft>
-                <a:spcPts val="208"/>
+                <a:spcPts val="200"/>
               </a:spcAft>
             </a:pPr>
             <a:r>
-              <a:rPr sz="1250" b="1" lang="zh-TW" dirty="0">
+              <a:rPr sz="1200" b="1" lang="zh-TW" dirty="0">
                 <a:solidFill>
                   <a:srgbClr val="000000"/>
                 </a:solidFill>
@@ -6551,7 +6551,7 @@
               <a:t>外參差 1 度，50 公尺外差 0.87 公尺</a:t>
             </a:r>
             <a:r>
-              <a:rPr sz="1250" lang="zh-TW" dirty="0">
+              <a:rPr sz="1200" lang="zh-TW" dirty="0">
                 <a:solidFill>
                   <a:srgbClr val="000000"/>
                 </a:solidFill>
@@ -6569,11 +6569,11 @@
                 <a:spcPts val="0"/>
               </a:spcBef>
               <a:spcAft>
-                <a:spcPts val="208"/>
+                <a:spcPts val="200"/>
               </a:spcAft>
             </a:pPr>
             <a:r>
-              <a:rPr sz="1250" b="1" lang="zh-TW" dirty="0">
+              <a:rPr sz="1200" b="1" lang="zh-TW" dirty="0">
                 <a:solidFill>
                   <a:srgbClr val="000000"/>
                 </a:solidFill>
@@ -6584,7 +6584,7 @@
               <a:t>同一塊影像感測器，鏡頭 3.6 mm 視野 81 度，8 mm 是 42 度。</a:t>
             </a:r>
             <a:r>
-              <a:rPr sz="1250" lang="zh-TW" dirty="0">
+              <a:rPr sz="1200" lang="zh-TW" dirty="0">
                 <a:solidFill>
                   <a:srgbClr val="000000"/>
                 </a:solidFill>
@@ -6595,7 +6595,7 @@
               <a:t>規則是</a:t>
             </a:r>
             <a:r>
-              <a:rPr sz="1250" b="1" lang="zh-TW" dirty="0">
+              <a:rPr sz="1200" b="1" lang="zh-TW" dirty="0">
                 <a:solidFill>
                   <a:srgbClr val="000000"/>
                 </a:solidFill>
@@ -6606,7 +6606,7 @@
               <a:t>焦距愈長，視野愈窄</a:t>
             </a:r>
             <a:r>
-              <a:rPr sz="1250" lang="zh-TW" dirty="0">
+              <a:rPr sz="1200" lang="zh-TW" dirty="0">
                 <a:solidFill>
                   <a:srgbClr val="000000"/>
                 </a:solidFill>
@@ -6624,11 +6624,11 @@
                 <a:spcPts val="0"/>
               </a:spcBef>
               <a:spcAft>
-                <a:spcPts val="208"/>
+                <a:spcPts val="200"/>
               </a:spcAft>
             </a:pPr>
             <a:r>
-              <a:rPr sz="1250" b="1" lang="zh-TW" dirty="0">
+              <a:rPr sz="1200" b="1" lang="zh-TW" dirty="0">
                 <a:solidFill>
                   <a:srgbClr val="000000"/>
                 </a:solidFill>
@@ -6639,7 +6639,7 @@
               <a:t>雷達角解析度 1.6 度</a:t>
             </a:r>
             <a:r>
-              <a:rPr sz="1250" lang="zh-TW" dirty="0">
+              <a:rPr sz="1200" lang="zh-TW" dirty="0">
                 <a:solidFill>
                   <a:srgbClr val="000000"/>
                 </a:solidFill>
@@ -6657,11 +6657,11 @@
                 <a:spcPts val="0"/>
               </a:spcBef>
               <a:spcAft>
-                <a:spcPts val="208"/>
+                <a:spcPts val="200"/>
               </a:spcAft>
             </a:pPr>
             <a:r>
-              <a:rPr sz="1250" b="1" lang="zh-TW" dirty="0">
+              <a:rPr sz="1200" b="1" lang="zh-TW" dirty="0">
                 <a:solidFill>
                   <a:srgbClr val="000000"/>
                 </a:solidFill>
@@ -6672,7 +6672,7 @@
               <a:t>超音波 USS6 只量得到 5.5 公尺。</a:t>
             </a:r>
             <a:r>
-              <a:rPr sz="1250" lang="zh-TW" dirty="0">
+              <a:rPr sz="1200" lang="zh-TW" dirty="0">
                 <a:solidFill>
                   <a:srgbClr val="000000"/>
                 </a:solidFill>
@@ -6690,11 +6690,11 @@
                 <a:spcPts val="0"/>
               </a:spcBef>
               <a:spcAft>
-                <a:spcPts val="208"/>
+                <a:spcPts val="200"/>
               </a:spcAft>
             </a:pPr>
             <a:r>
-              <a:rPr sz="1250" b="1" lang="zh-TW" dirty="0">
+              <a:rPr sz="1200" b="1" lang="zh-TW" dirty="0">
                 <a:solidFill>
                   <a:srgbClr val="000000"/>
                 </a:solidFill>
@@ -6705,15 +6705,15 @@
               <a:t>衛星定位 2.5 m CEP</a:t>
             </a:r>
             <a:r>
-              <a:rPr sz="1250" lang="zh-TW" dirty="0">
-                <a:solidFill>
-                  <a:srgbClr val="000000"/>
-                </a:solidFill>
-                <a:latin typeface="Arial Unicode MS"/>
-                <a:ea typeface="Arial Unicode MS"/>
-                <a:cs typeface="Arial Unicode MS"/>
-              </a:rPr>
-              <a:t>：CEP 是 50%，一半的時間在 2.5 公尺內，另一半更差，不是「最多 2.5 公尺」。
+              <a:rPr sz="1200" lang="zh-TW" dirty="0">
+                <a:solidFill>
+                  <a:srgbClr val="000000"/>
+                </a:solidFill>
+                <a:latin typeface="Arial Unicode MS"/>
+                <a:ea typeface="Arial Unicode MS"/>
+                <a:cs typeface="Arial Unicode MS"/>
+              </a:rPr>
+              <a:t>：CEP 是 Circular Error Probable 的縮寫，中文叫「圓概率誤差」。以真正的位置為圓心畫一個圓，定位點有一半落在圈內，這個圓的半徑就是 CEP。所以 2.5 m CEP 是一半的時間在 2.5 公尺內，另一半更差，不是「最多 2.5 公尺」。就像射飛鏢，說「一半的鏢在半徑 2.5 公分的圈內」，另一半就在圈外。
 </a:t>
             </a:r>
           </a:p>
@@ -6723,11 +6723,11 @@
                 <a:spcPts val="0"/>
               </a:spcBef>
               <a:spcAft>
-                <a:spcPts val="208"/>
+                <a:spcPts val="200"/>
               </a:spcAft>
             </a:pPr>
             <a:r>
-              <a:rPr sz="1250" b="1" lang="zh-TW" dirty="0">
+              <a:rPr sz="1200" b="1" lang="zh-TW" dirty="0">
                 <a:solidFill>
                   <a:srgbClr val="000000"/>
                 </a:solidFill>
@@ -6738,7 +6738,7 @@
               <a:t>IMU 的誤差跟時間平方成正比</a:t>
             </a:r>
             <a:r>
-              <a:rPr sz="1250" lang="zh-TW" dirty="0">
+              <a:rPr sz="1200" lang="zh-TW" dirty="0">
                 <a:solidFill>
                   <a:srgbClr val="000000"/>
                 </a:solidFill>

--- a/第八週(10-29)/第八週_第3節_簡報.pptx
+++ b/第八週(10-29)/第八週_第3節_簡報.pptx
@@ -696,7 +696,7 @@
                 <a:ea typeface="Arial Unicode MS"/>
                 <a:cs typeface="Arial Unicode MS"/>
               </a:rPr>
-              <a:t>：互補，每一顆給不同的資訊，相機說是什麼、光達說多遠、雷達說多快；備援，壞了一顆還開得下去。
+              <a:t>：互補，每一顆給不同的資訊，相機說是什麼、光達說多遠、雷達說多快；備援，其中一顆感測器壞了，車子還能繼續開。
 </a:t>
             </a:r>
           </a:p>
@@ -762,7 +762,7 @@
                 <a:ea typeface="Arial Unicode MS"/>
                 <a:cs typeface="Arial Unicode MS"/>
               </a:rPr>
-              <a:t>：愈早合，留下的資訊愈多，但對齊要愈準。前期對到點、中期對到格、後期對到物體。後期融合要做「對應」：雷達的目標配相機的框。
+              <a:t>：愈早把資料合起來，保留下來的資訊愈多，但是兩個感測器的資料也要對得愈準。前期融合是把每一個點對起來，中期融合是把鳥瞰圖上的每一格對起來，後期融合是把各自找出來的物體對起來。後期融合要做「對應」：雷達的目標配相機的框。
 </a:t>
             </a:r>
           </a:p>
@@ -784,7 +784,7 @@
                 <a:ea typeface="Arial Unicode MS"/>
                 <a:cs typeface="Arial Unicode MS"/>
               </a:rPr>
-              <a:t>聽誰的</a:t>
+              <a:t>要相信誰</a:t>
             </a:r>
             <a:r>
               <a:rPr sz="1600" lang="zh-TW" dirty="0">
@@ -795,7 +795,7 @@
                 <a:ea typeface="Arial Unicode MS"/>
                 <a:cs typeface="Arial Unicode MS"/>
               </a:rPr>
-              <a:t>：比較準的多相信一點。IMU 說 120（誤差 1），GPS 說 118（誤差 3）。誤差差 3 倍，信任差 9 倍：9 乘 120 加 1 乘 118，除以 10，得 119.8 公尺。這一題很適合考計算。
+              <a:t>：比較準的那一個，要多相信一點。IMU 說 120（誤差 1），GPS 說 118（誤差 3）。誤差差 3 倍，信任差 9 倍：9 乘 120 加 1 乘 118，除以 10，得 119.8 公尺。這一題很適合考計算。
 </a:t>
             </a:r>
           </a:p>
@@ -1114,7 +1114,7 @@
                 <a:ea typeface="Arial Unicode MS"/>
                 <a:cs typeface="Arial Unicode MS"/>
               </a:rPr>
-              <a:t>一遠、一暗就漏。</a:t>
+              <a:t>東西離得愈遠、光線愈暗，模型就愈容易漏掉。</a:t>
             </a:r>
             <a:r>
               <a:rPr sz="1300" lang="zh-TW" dirty="0">
@@ -1311,11 +1311,11 @@
                 <a:spcPts val="0"/>
               </a:spcBef>
               <a:spcAft>
-                <a:spcPts val="250"/>
+                <a:spcPts val="233"/>
               </a:spcAft>
             </a:pPr>
             <a:r>
-              <a:rPr sz="1500" b="1" lang="zh-TW" dirty="0">
+              <a:rPr sz="1400" b="1" lang="zh-TW" dirty="0">
                 <a:solidFill>
                   <a:srgbClr val="000000"/>
                 </a:solidFill>
@@ -1326,7 +1326,7 @@
               <a:t>這一張的目的：</a:t>
             </a:r>
             <a:r>
-              <a:rPr sz="1500" lang="zh-TW" dirty="0">
+              <a:rPr sz="1400" lang="zh-TW" dirty="0">
                 <a:solidFill>
                   <a:srgbClr val="000000"/>
                 </a:solidFill>
@@ -1344,11 +1344,11 @@
                 <a:spcPts val="0"/>
               </a:spcBef>
               <a:spcAft>
-                <a:spcPts val="250"/>
+                <a:spcPts val="233"/>
               </a:spcAft>
             </a:pPr>
             <a:r>
-              <a:rPr sz="1500" lang="zh-TW" dirty="0">
+              <a:rPr sz="1400" lang="zh-TW" dirty="0">
                 <a:solidFill>
                   <a:srgbClr val="000000"/>
                 </a:solidFill>
@@ -1366,11 +1366,11 @@
                 <a:spcPts val="0"/>
               </a:spcBef>
               <a:spcAft>
-                <a:spcPts val="250"/>
+                <a:spcPts val="233"/>
               </a:spcAft>
             </a:pPr>
             <a:r>
-              <a:rPr sz="1500" lang="zh-TW" dirty="0">
+              <a:rPr sz="1400" lang="zh-TW" dirty="0">
                 <a:solidFill>
                   <a:srgbClr val="000000"/>
                 </a:solidFill>
@@ -1381,7 +1381,7 @@
               <a:t>一、</a:t>
             </a:r>
             <a:r>
-              <a:rPr sz="1500" b="1" lang="zh-TW" dirty="0">
+              <a:rPr sz="1400" b="1" lang="zh-TW" dirty="0">
                 <a:solidFill>
                   <a:srgbClr val="000000"/>
                 </a:solidFill>
@@ -1392,7 +1392,7 @@
               <a:t>AEB 不是 L1，是 L0</a:t>
             </a:r>
             <a:r>
-              <a:rPr sz="1500" lang="zh-TW" dirty="0">
+              <a:rPr sz="1400" lang="zh-TW" dirty="0">
                 <a:solidFill>
                   <a:srgbClr val="000000"/>
                 </a:solidFill>
@@ -1410,11 +1410,11 @@
                 <a:spcPts val="0"/>
               </a:spcBef>
               <a:spcAft>
-                <a:spcPts val="250"/>
+                <a:spcPts val="233"/>
               </a:spcAft>
             </a:pPr>
             <a:r>
-              <a:rPr sz="1500" lang="zh-TW" dirty="0">
+              <a:rPr sz="1400" lang="zh-TW" dirty="0">
                 <a:solidFill>
                   <a:srgbClr val="000000"/>
                 </a:solidFill>
@@ -1425,7 +1425,7 @@
               <a:t>二、</a:t>
             </a:r>
             <a:r>
-              <a:rPr sz="1500" b="1" lang="zh-TW" dirty="0">
+              <a:rPr sz="1400" b="1" lang="zh-TW" dirty="0">
                 <a:solidFill>
                   <a:srgbClr val="000000"/>
                 </a:solidFill>
@@ -1436,7 +1436,7 @@
               <a:t>沒有方向盤不等於 L5。</a:t>
             </a:r>
             <a:r>
-              <a:rPr sz="1500" lang="zh-TW" dirty="0">
+              <a:rPr sz="1400" lang="zh-TW" dirty="0">
                 <a:solidFill>
                   <a:srgbClr val="000000"/>
                 </a:solidFill>
@@ -1454,11 +1454,11 @@
                 <a:spcPts val="0"/>
               </a:spcBef>
               <a:spcAft>
-                <a:spcPts val="250"/>
+                <a:spcPts val="233"/>
               </a:spcAft>
             </a:pPr>
             <a:r>
-              <a:rPr sz="1500" lang="zh-TW" dirty="0">
+              <a:rPr sz="1400" lang="zh-TW" dirty="0">
                 <a:solidFill>
                   <a:srgbClr val="000000"/>
                 </a:solidFill>
@@ -1469,26 +1469,26 @@
               <a:t>三、</a:t>
             </a:r>
             <a:r>
-              <a:rPr sz="1500" b="1" lang="zh-TW" dirty="0">
-                <a:solidFill>
-                  <a:srgbClr val="000000"/>
-                </a:solidFill>
-                <a:latin typeface="Arial Unicode MS"/>
-                <a:ea typeface="Arial Unicode MS"/>
-                <a:cs typeface="Arial Unicode MS"/>
-              </a:rPr>
-              <a:t>94% 是事故鏈的最後一環</a:t>
-            </a:r>
-            <a:r>
-              <a:rPr sz="1500" lang="zh-TW" dirty="0">
-                <a:solidFill>
-                  <a:srgbClr val="000000"/>
-                </a:solidFill>
-                <a:latin typeface="Arial Unicode MS"/>
-                <a:ea typeface="Arial Unicode MS"/>
-                <a:cs typeface="Arial Unicode MS"/>
-              </a:rPr>
-              <a:t>，不是換掉人就少 94%。
+              <a:rPr sz="1400" b="1" lang="zh-TW" dirty="0">
+                <a:solidFill>
+                  <a:srgbClr val="000000"/>
+                </a:solidFill>
+                <a:latin typeface="Arial Unicode MS"/>
+                <a:ea typeface="Arial Unicode MS"/>
+                <a:cs typeface="Arial Unicode MS"/>
+              </a:rPr>
+              <a:t>94% 指的是：人的錯誤是事故鏈的最後一環</a:t>
+            </a:r>
+            <a:r>
+              <a:rPr sz="1400" lang="zh-TW" dirty="0">
+                <a:solidFill>
+                  <a:srgbClr val="000000"/>
+                </a:solidFill>
+                <a:latin typeface="Arial Unicode MS"/>
+                <a:ea typeface="Arial Unicode MS"/>
+                <a:cs typeface="Arial Unicode MS"/>
+              </a:rPr>
+              <a:t>，不是把開車的人換成電腦，事故就會少 94%。
 </a:t>
             </a:r>
           </a:p>
@@ -1498,11 +1498,11 @@
                 <a:spcPts val="0"/>
               </a:spcBef>
               <a:spcAft>
-                <a:spcPts val="250"/>
+                <a:spcPts val="233"/>
               </a:spcAft>
             </a:pPr>
             <a:r>
-              <a:rPr sz="1500" lang="zh-TW" dirty="0">
+              <a:rPr sz="1400" lang="zh-TW" dirty="0">
                 <a:solidFill>
                   <a:srgbClr val="000000"/>
                 </a:solidFill>
@@ -1513,7 +1513,7 @@
               <a:t>四、</a:t>
             </a:r>
             <a:r>
-              <a:rPr sz="1500" b="1" lang="zh-TW" dirty="0">
+              <a:rPr sz="1400" b="1" lang="zh-TW" dirty="0">
                 <a:solidFill>
                   <a:srgbClr val="000000"/>
                 </a:solidFill>
@@ -1524,7 +1524,7 @@
               <a:t>測距 200 公尺</a:t>
             </a:r>
             <a:r>
-              <a:rPr sz="1500" lang="zh-TW" dirty="0">
+              <a:rPr sz="1400" lang="zh-TW" dirty="0">
                 <a:solidFill>
                   <a:srgbClr val="000000"/>
                 </a:solidFill>
@@ -1542,11 +1542,11 @@
                 <a:spcPts val="0"/>
               </a:spcBef>
               <a:spcAft>
-                <a:spcPts val="250"/>
+                <a:spcPts val="233"/>
               </a:spcAft>
             </a:pPr>
             <a:r>
-              <a:rPr sz="1500" lang="zh-TW" dirty="0">
+              <a:rPr sz="1400" lang="zh-TW" dirty="0">
                 <a:solidFill>
                   <a:srgbClr val="000000"/>
                 </a:solidFill>
@@ -1557,7 +1557,7 @@
               <a:t>五、</a:t>
             </a:r>
             <a:r>
-              <a:rPr sz="1500" b="1" lang="zh-TW" dirty="0">
+              <a:rPr sz="1400" b="1" lang="zh-TW" dirty="0">
                 <a:solidFill>
                   <a:srgbClr val="000000"/>
                 </a:solidFill>
@@ -1568,7 +1568,7 @@
               <a:t>光達會受天氣影響</a:t>
             </a:r>
             <a:r>
-              <a:rPr sz="1500" lang="zh-TW" dirty="0">
+              <a:rPr sz="1400" lang="zh-TW" dirty="0">
                 <a:solidFill>
                   <a:srgbClr val="000000"/>
                 </a:solidFill>
@@ -1586,11 +1586,11 @@
                 <a:spcPts val="0"/>
               </a:spcBef>
               <a:spcAft>
-                <a:spcPts val="250"/>
+                <a:spcPts val="233"/>
               </a:spcAft>
             </a:pPr>
             <a:r>
-              <a:rPr sz="1500" lang="zh-TW" dirty="0">
+              <a:rPr sz="1400" lang="zh-TW" dirty="0">
                 <a:solidFill>
                   <a:srgbClr val="000000"/>
                 </a:solidFill>
@@ -1601,7 +1601,7 @@
               <a:t>六、</a:t>
             </a:r>
             <a:r>
-              <a:rPr sz="1500" b="1" lang="zh-TW" dirty="0">
+              <a:rPr sz="1400" b="1" lang="zh-TW" dirty="0">
                 <a:solidFill>
                   <a:srgbClr val="000000"/>
                 </a:solidFill>
@@ -1612,7 +1612,7 @@
               <a:t>雷達不是不能看人</a:t>
             </a:r>
             <a:r>
-              <a:rPr sz="1500" lang="zh-TW" dirty="0">
+              <a:rPr sz="1400" lang="zh-TW" dirty="0">
                 <a:solidFill>
                   <a:srgbClr val="000000"/>
                 </a:solidFill>
@@ -1630,11 +1630,11 @@
                 <a:spcPts val="0"/>
               </a:spcBef>
               <a:spcAft>
-                <a:spcPts val="250"/>
+                <a:spcPts val="233"/>
               </a:spcAft>
             </a:pPr>
             <a:r>
-              <a:rPr sz="1500" lang="zh-TW" dirty="0">
+              <a:rPr sz="1400" lang="zh-TW" dirty="0">
                 <a:solidFill>
                   <a:srgbClr val="000000"/>
                 </a:solidFill>
@@ -1645,26 +1645,26 @@
               <a:t>七、</a:t>
             </a:r>
             <a:r>
-              <a:rPr sz="1500" b="1" lang="zh-TW" dirty="0">
-                <a:solidFill>
-                  <a:srgbClr val="000000"/>
-                </a:solidFill>
-                <a:latin typeface="Arial Unicode MS"/>
-                <a:ea typeface="Arial Unicode MS"/>
-                <a:cs typeface="Arial Unicode MS"/>
-              </a:rPr>
-              <a:t>兩顆好的合起來不一定好</a:t>
-            </a:r>
-            <a:r>
-              <a:rPr sz="1500" lang="zh-TW" dirty="0">
-                <a:solidFill>
-                  <a:srgbClr val="000000"/>
-                </a:solidFill>
-                <a:latin typeface="Arial Unicode MS"/>
-                <a:ea typeface="Arial Unicode MS"/>
-                <a:cs typeface="Arial Unicode MS"/>
-              </a:rPr>
-              <a:t>，沒標定、沒同步，一樣錯。
+              <a:rPr sz="1400" b="1" lang="zh-TW" dirty="0">
+                <a:solidFill>
+                  <a:srgbClr val="000000"/>
+                </a:solidFill>
+                <a:latin typeface="Arial Unicode MS"/>
+                <a:ea typeface="Arial Unicode MS"/>
+                <a:cs typeface="Arial Unicode MS"/>
+              </a:rPr>
+              <a:t>兩顆好的感測器合起來，結果不一定好</a:t>
+            </a:r>
+            <a:r>
+              <a:rPr sz="1400" lang="zh-TW" dirty="0">
+                <a:solidFill>
+                  <a:srgbClr val="000000"/>
+                </a:solidFill>
+                <a:latin typeface="Arial Unicode MS"/>
+                <a:ea typeface="Arial Unicode MS"/>
+                <a:cs typeface="Arial Unicode MS"/>
+              </a:rPr>
+              <a:t>；如果沒有標定、沒有同步，合起來一樣會錯。
 </a:t>
             </a:r>
           </a:p>
@@ -1674,11 +1674,11 @@
                 <a:spcPts val="0"/>
               </a:spcBef>
               <a:spcAft>
-                <a:spcPts val="250"/>
+                <a:spcPts val="233"/>
               </a:spcAft>
             </a:pPr>
             <a:r>
-              <a:rPr sz="1500" lang="zh-TW" dirty="0">
+              <a:rPr sz="1400" lang="zh-TW" dirty="0">
                 <a:solidFill>
                   <a:srgbClr val="000000"/>
                 </a:solidFill>
@@ -1689,7 +1689,7 @@
               <a:t>八、</a:t>
             </a:r>
             <a:r>
-              <a:rPr sz="1500" b="1" lang="zh-TW" dirty="0">
+              <a:rPr sz="1400" b="1" lang="zh-TW" dirty="0">
                 <a:solidFill>
                   <a:srgbClr val="000000"/>
                 </a:solidFill>
@@ -1700,7 +1700,7 @@
               <a:t>分數 0.91 不是百分之九十一一定對</a:t>
             </a:r>
             <a:r>
-              <a:rPr sz="1500" lang="zh-TW" dirty="0">
+              <a:rPr sz="1400" lang="zh-TW" dirty="0">
                 <a:solidFill>
                   <a:srgbClr val="000000"/>
                 </a:solidFill>
@@ -3479,7 +3479,7 @@
                 <a:ea typeface="Arial Unicode MS"/>
                 <a:cs typeface="Arial Unicode MS"/>
               </a:rPr>
-              <a:t>第三週：量得到距離，不等於知道是什麼；距離兩倍，相機誤差四倍。</a:t>
+              <a:t>第三週：量得到距離，不等於知道那是什麼；距離變成兩倍，相機估距離的誤差就變成四倍。</a:t>
             </a:r>
             <a:r>
               <a:rPr sz="800" lang="zh-TW" dirty="0">
@@ -3534,7 +3534,7 @@
                 <a:ea typeface="Arial Unicode MS"/>
                 <a:cs typeface="Arial Unicode MS"/>
               </a:rPr>
-              <a:t>第四週：時速 50 煞停 20 公尺，至少要看到 25 公尺；模擬是一道篩子。</a:t>
+              <a:t>第四週：時速 50 的煞停距離大約 20 公尺，感測器至少要看到 25 公尺遠；模擬是一道篩子。</a:t>
             </a:r>
             <a:r>
               <a:rPr sz="800" lang="zh-TW" dirty="0">
@@ -3545,7 +3545,7 @@
                 <a:ea typeface="Arial Unicode MS"/>
                 <a:cs typeface="Arial Unicode MS"/>
               </a:rPr>
-              <a:t>煞停距離分兩段：反應那 0.3 秒走的路，加上踩煞車到停下來的路。時速 50 是每秒 13.9 公尺，反應 4.2 公尺、煞車 16.1 公尺，合起來大約 20 公尺。感測器至少要看到它的 1.25 倍，25 公尺，這個 1.25 是本課取的餘裕。看到的距離比煞停距離短，就是一定撞。「模擬是篩子」：在模擬器裡過不了的設計，可以先淘汰；可是模擬裡不撞，不代表真車不撞，因為模擬和現實有三種落差：外觀、行為、物理。通過模擬，只是拿到上真車測試的門票。還有，證明安全的單位是</a:t>
+              <a:t>煞停距離分兩段：反應那 0.3 秒走的路，加上踩煞車到停下來的路。時速 50 是每秒 13.9 公尺，反應 4.2 公尺、煞車 16.1 公尺，合起來大約 20 公尺。感測器至少要看到它的 1.25 倍，25 公尺，這個 1.25 是本課取的餘裕。感測器看得到的距離，如果比煞停距離還短，就一定會撞上。「模擬是篩子」：在模擬器裡過不了的設計，可以先淘汰；可是模擬裡不撞，不代表真車不撞，因為模擬和現實有三種落差：外觀、行為、物理。通過模擬，只是拿到上真車測試的門票。還有，證明安全的單位是</a:t>
             </a:r>
             <a:r>
               <a:rPr sz="800" b="1" lang="zh-TW" dirty="0">
@@ -3589,7 +3589,7 @@
                 <a:ea typeface="Arial Unicode MS"/>
                 <a:cs typeface="Arial Unicode MS"/>
               </a:rPr>
-              <a:t>第五週：測距要問對多少反射率；差 1 度，50 公尺外差 0.87 公尺。</a:t>
+              <a:t>第五週：規格表上的測距，要追問是對多少反射率的目標量的；相機和光達的安裝角度差 1 度，50 公尺外就偏 0.87 公尺。</a:t>
             </a:r>
             <a:r>
               <a:rPr sz="800" lang="zh-TW" dirty="0">
@@ -3677,7 +3677,7 @@
                 <a:ea typeface="Arial Unicode MS"/>
                 <a:cs typeface="Arial Unicode MS"/>
               </a:rPr>
-              <a:t>第七週：每一種都會壞；合起來的時候，比較準的多相信一點。</a:t>
+              <a:t>第七週：每一種感測器都會失效；把它們合起來的時候，比較準的那一個要多相信一點。</a:t>
             </a:r>
             <a:r>
               <a:rPr sz="800" lang="zh-TW" dirty="0">
@@ -3710,7 +3710,7 @@
                 <a:ea typeface="Arial Unicode MS"/>
                 <a:cs typeface="Arial Unicode MS"/>
               </a:rPr>
-              <a:t>：雨害相機，遠處的行人害雷達，隧道害衛星定位。壞法有三種，最危險的是「看不到卻說沒事」，就像油表壞了卻一直顯示滿格。既然每一種都會壞，就要合起來，叫融合。合的時候不是平均，而是</a:t>
+              <a:t>：下雨會讓相機失效，遠處的行人雷達抓不穩，進了隧道衛星定位就收不到訊號。感測器失效的方式有三種，最危險的是「看不到卻說沒事」，就像油表壞了卻一直顯示滿格。既然每一種都會壞，就要合起來，叫融合。合的時候不是平均，而是</a:t>
             </a:r>
             <a:r>
               <a:rPr sz="800" b="1" lang="zh-TW" dirty="0">
@@ -3754,7 +3754,7 @@
                 <a:ea typeface="Arial Unicode MS"/>
                 <a:cs typeface="Arial Unicode MS"/>
               </a:rPr>
-              <a:t>第八週：模型從例子學；給框、類別、分數；一遠、一暗就漏。</a:t>
+              <a:t>第八週：模型是從例子學出來的；它給出框、類別和分數；東西離得愈遠、光線愈暗，模型就愈容易漏掉。</a:t>
             </a:r>
             <a:r>
               <a:rPr sz="800" lang="zh-TW" dirty="0">
@@ -3831,7 +3831,7 @@
                 <a:ea typeface="Arial Unicode MS"/>
                 <a:cs typeface="Arial Unicode MS"/>
               </a:rPr>
-              <a:t>（多有把握）。分數拿來設門檻：門檻低就多報，門檻高就漏掉。而且它一遠、一暗就漏：行人在十公尺內抓到 82%，四十到五十公尺只剩 3%；晚上十到二十公尺的行人，從白天的 66% 掉到 49%。這跟前幾週的感測器一樣，沒有一種是完美的。
+              <a:t>（多有把握）。分數拿來設門檻：門檻設得低，就會多報出不存在的東西；門檻設得高，就會漏掉真的車和人。而且東西離得愈遠、光線愈暗，它就愈容易漏掉：行人在十公尺內抓到 82%，四十到五十公尺只剩 3%；晚上十到二十公尺的行人，從白天的 66% 掉到 49%。這跟前幾週的感測器一樣，沒有一種是完美的。
 </a:t>
             </a:r>
           </a:p>
@@ -5547,7 +5547,7 @@
                 <a:ea typeface="Arial Unicode MS"/>
                 <a:cs typeface="Arial Unicode MS"/>
               </a:rPr>
-              <a:t>會慢一拍</a:t>
+              <a:t>會比較慢才得到結果</a:t>
             </a:r>
             <a:r>
               <a:rPr sz="950" lang="zh-TW" dirty="0">
@@ -5800,7 +5800,7 @@
                 <a:ea typeface="Arial Unicode MS"/>
                 <a:cs typeface="Arial Unicode MS"/>
               </a:rPr>
-              <a:t>讓大家會讀煞停距離表，記得「比煞停距離晚看到，就一定撞」。
+              <a:t>讓大家會讀煞停距離表，記得「感測器看到障礙物的距離，如果比煞停距離還短，就一定會撞上」。
 </a:t>
             </a:r>
           </a:p>
@@ -6284,7 +6284,7 @@
                 <a:ea typeface="Arial Unicode MS"/>
                 <a:cs typeface="Arial Unicode MS"/>
               </a:rPr>
-              <a:t>長度過了門檻就沒用</a:t>
+              <a:t>長度超過需要的門檻以後，再加長就沒有用</a:t>
             </a:r>
             <a:r>
               <a:rPr sz="850" lang="zh-TW" dirty="0">
@@ -6306,7 +6306,7 @@
                 <a:ea typeface="Arial Unicode MS"/>
                 <a:cs typeface="Arial Unicode MS"/>
               </a:rPr>
-              <a:t>張角開太大反而攤稀</a:t>
+              <a:t>張角開太大，射線反而會被攤得太稀</a:t>
             </a:r>
             <a:r>
               <a:rPr sz="850" lang="zh-TW" dirty="0">
@@ -6448,11 +6448,11 @@
                 <a:spcPts val="0"/>
               </a:spcBef>
               <a:spcAft>
-                <a:spcPts val="200"/>
+                <a:spcPts val="192"/>
               </a:spcAft>
             </a:pPr>
             <a:r>
-              <a:rPr sz="1200" b="1" lang="zh-TW" dirty="0">
+              <a:rPr sz="1150" b="1" lang="zh-TW" dirty="0">
                 <a:solidFill>
                   <a:srgbClr val="000000"/>
                 </a:solidFill>
@@ -6463,7 +6463,7 @@
               <a:t>這一張的目的：</a:t>
             </a:r>
             <a:r>
-              <a:rPr sz="1200" lang="zh-TW" dirty="0">
+              <a:rPr sz="1150" lang="zh-TW" dirty="0">
                 <a:solidFill>
                   <a:srgbClr val="000000"/>
                 </a:solidFill>
@@ -6481,11 +6481,11 @@
                 <a:spcPts val="0"/>
               </a:spcBef>
               <a:spcAft>
-                <a:spcPts val="200"/>
+                <a:spcPts val="192"/>
               </a:spcAft>
             </a:pPr>
             <a:r>
-              <a:rPr sz="1200" lang="zh-TW" dirty="0">
+              <a:rPr sz="1150" lang="zh-TW" dirty="0">
                 <a:solidFill>
                   <a:srgbClr val="000000"/>
                 </a:solidFill>
@@ -6503,11 +6503,11 @@
                 <a:spcPts val="0"/>
               </a:spcBef>
               <a:spcAft>
-                <a:spcPts val="200"/>
+                <a:spcPts val="192"/>
               </a:spcAft>
             </a:pPr>
             <a:r>
-              <a:rPr sz="1200" b="1" lang="zh-TW" dirty="0">
+              <a:rPr sz="1150" b="1" lang="zh-TW" dirty="0">
                 <a:solidFill>
                   <a:srgbClr val="000000"/>
                 </a:solidFill>
@@ -6518,7 +6518,7 @@
               <a:t>OS1 測距 170 和 90</a:t>
             </a:r>
             <a:r>
-              <a:rPr sz="1200" lang="zh-TW" dirty="0">
+              <a:rPr sz="1150" lang="zh-TW" dirty="0">
                 <a:solidFill>
                   <a:srgbClr val="000000"/>
                 </a:solidFill>
@@ -6536,30 +6536,30 @@
                 <a:spcPts val="0"/>
               </a:spcBef>
               <a:spcAft>
-                <a:spcPts val="200"/>
+                <a:spcPts val="192"/>
               </a:spcAft>
             </a:pPr>
             <a:r>
-              <a:rPr sz="1200" b="1" lang="zh-TW" dirty="0">
-                <a:solidFill>
-                  <a:srgbClr val="000000"/>
-                </a:solidFill>
-                <a:latin typeface="Arial Unicode MS"/>
-                <a:ea typeface="Arial Unicode MS"/>
-                <a:cs typeface="Arial Unicode MS"/>
-              </a:rPr>
-              <a:t>外參差 1 度，50 公尺外差 0.87 公尺</a:t>
-            </a:r>
-            <a:r>
-              <a:rPr sz="1200" lang="zh-TW" dirty="0">
-                <a:solidFill>
-                  <a:srgbClr val="000000"/>
-                </a:solidFill>
-                <a:latin typeface="Arial Unicode MS"/>
-                <a:ea typeface="Arial Unicode MS"/>
-                <a:cs typeface="Arial Unicode MS"/>
-              </a:rPr>
-              <a:t>，而且是橫向的，快半個車道。
+              <a:rPr sz="1150" b="1" lang="zh-TW" dirty="0">
+                <a:solidFill>
+                  <a:srgbClr val="000000"/>
+                </a:solidFill>
+                <a:latin typeface="Arial Unicode MS"/>
+                <a:ea typeface="Arial Unicode MS"/>
+                <a:cs typeface="Arial Unicode MS"/>
+              </a:rPr>
+              <a:t>相機和光達的外參差 1 度，50 公尺外就會偏 0.87 公尺</a:t>
+            </a:r>
+            <a:r>
+              <a:rPr sz="1150" lang="zh-TW" dirty="0">
+                <a:solidFill>
+                  <a:srgbClr val="000000"/>
+                </a:solidFill>
+                <a:latin typeface="Arial Unicode MS"/>
+                <a:ea typeface="Arial Unicode MS"/>
+                <a:cs typeface="Arial Unicode MS"/>
+              </a:rPr>
+              <a:t>，而且是橫向的偏移，快要半個車道。
 </a:t>
             </a:r>
           </a:p>
@@ -6569,11 +6569,11 @@
                 <a:spcPts val="0"/>
               </a:spcBef>
               <a:spcAft>
-                <a:spcPts val="200"/>
+                <a:spcPts val="192"/>
               </a:spcAft>
             </a:pPr>
             <a:r>
-              <a:rPr sz="1200" b="1" lang="zh-TW" dirty="0">
+              <a:rPr sz="1150" b="1" lang="zh-TW" dirty="0">
                 <a:solidFill>
                   <a:srgbClr val="000000"/>
                 </a:solidFill>
@@ -6584,7 +6584,7 @@
               <a:t>同一塊影像感測器，鏡頭 3.6 mm 視野 81 度，8 mm 是 42 度。</a:t>
             </a:r>
             <a:r>
-              <a:rPr sz="1200" lang="zh-TW" dirty="0">
+              <a:rPr sz="1150" lang="zh-TW" dirty="0">
                 <a:solidFill>
                   <a:srgbClr val="000000"/>
                 </a:solidFill>
@@ -6595,7 +6595,7 @@
               <a:t>規則是</a:t>
             </a:r>
             <a:r>
-              <a:rPr sz="1200" b="1" lang="zh-TW" dirty="0">
+              <a:rPr sz="1150" b="1" lang="zh-TW" dirty="0">
                 <a:solidFill>
                   <a:srgbClr val="000000"/>
                 </a:solidFill>
@@ -6606,7 +6606,7 @@
               <a:t>焦距愈長，視野愈窄</a:t>
             </a:r>
             <a:r>
-              <a:rPr sz="1200" lang="zh-TW" dirty="0">
+              <a:rPr sz="1150" lang="zh-TW" dirty="0">
                 <a:solidFill>
                   <a:srgbClr val="000000"/>
                 </a:solidFill>
@@ -6624,11 +6624,11 @@
                 <a:spcPts val="0"/>
               </a:spcBef>
               <a:spcAft>
-                <a:spcPts val="200"/>
+                <a:spcPts val="192"/>
               </a:spcAft>
             </a:pPr>
             <a:r>
-              <a:rPr sz="1200" b="1" lang="zh-TW" dirty="0">
+              <a:rPr sz="1150" b="1" lang="zh-TW" dirty="0">
                 <a:solidFill>
                   <a:srgbClr val="000000"/>
                 </a:solidFill>
@@ -6639,7 +6639,7 @@
               <a:t>雷達角解析度 1.6 度</a:t>
             </a:r>
             <a:r>
-              <a:rPr sz="1200" lang="zh-TW" dirty="0">
+              <a:rPr sz="1150" lang="zh-TW" dirty="0">
                 <a:solidFill>
                   <a:srgbClr val="000000"/>
                 </a:solidFill>
@@ -6657,11 +6657,11 @@
                 <a:spcPts val="0"/>
               </a:spcBef>
               <a:spcAft>
-                <a:spcPts val="200"/>
+                <a:spcPts val="192"/>
               </a:spcAft>
             </a:pPr>
             <a:r>
-              <a:rPr sz="1200" b="1" lang="zh-TW" dirty="0">
+              <a:rPr sz="1150" b="1" lang="zh-TW" dirty="0">
                 <a:solidFill>
                   <a:srgbClr val="000000"/>
                 </a:solidFill>
@@ -6672,7 +6672,7 @@
               <a:t>超音波 USS6 只量得到 5.5 公尺。</a:t>
             </a:r>
             <a:r>
-              <a:rPr sz="1200" lang="zh-TW" dirty="0">
+              <a:rPr sz="1150" lang="zh-TW" dirty="0">
                 <a:solidFill>
                   <a:srgbClr val="000000"/>
                 </a:solidFill>
@@ -6690,11 +6690,11 @@
                 <a:spcPts val="0"/>
               </a:spcBef>
               <a:spcAft>
-                <a:spcPts val="200"/>
+                <a:spcPts val="192"/>
               </a:spcAft>
             </a:pPr>
             <a:r>
-              <a:rPr sz="1200" b="1" lang="zh-TW" dirty="0">
+              <a:rPr sz="1150" b="1" lang="zh-TW" dirty="0">
                 <a:solidFill>
                   <a:srgbClr val="000000"/>
                 </a:solidFill>
@@ -6705,7 +6705,7 @@
               <a:t>衛星定位 2.5 m CEP</a:t>
             </a:r>
             <a:r>
-              <a:rPr sz="1200" lang="zh-TW" dirty="0">
+              <a:rPr sz="1150" lang="zh-TW" dirty="0">
                 <a:solidFill>
                   <a:srgbClr val="000000"/>
                 </a:solidFill>
@@ -6723,11 +6723,11 @@
                 <a:spcPts val="0"/>
               </a:spcBef>
               <a:spcAft>
-                <a:spcPts val="200"/>
+                <a:spcPts val="192"/>
               </a:spcAft>
             </a:pPr>
             <a:r>
-              <a:rPr sz="1200" b="1" lang="zh-TW" dirty="0">
+              <a:rPr sz="1150" b="1" lang="zh-TW" dirty="0">
                 <a:solidFill>
                   <a:srgbClr val="000000"/>
                 </a:solidFill>
@@ -6738,7 +6738,7 @@
               <a:t>IMU 的誤差跟時間平方成正比</a:t>
             </a:r>
             <a:r>
-              <a:rPr sz="1200" lang="zh-TW" dirty="0">
+              <a:rPr sz="1150" lang="zh-TW" dirty="0">
                 <a:solidFill>
                   <a:srgbClr val="000000"/>
                 </a:solidFill>
@@ -6878,7 +6878,7 @@
                 <a:ea typeface="Arial Unicode MS"/>
                 <a:cs typeface="Arial Unicode MS"/>
               </a:rPr>
-              <a:t>讓大家會讀失效對照表：橫著看一種條件誰會壞，直著看一種感測器怕什麼。
+              <a:t>讓大家會讀失效對照表：橫著看，是看在某一種條件下，哪些感測器會失效；直著看，是看某一種感測器怕哪些條件。
 </a:t>
             </a:r>
           </a:p>
@@ -6933,7 +6933,7 @@
                 <a:ea typeface="Arial Unicode MS"/>
                 <a:cs typeface="Arial Unicode MS"/>
               </a:rPr>
-              <a:t>，一種條件下誰會壞：大雨濃霧，相機失靈、光達變差，雷達照常。夜間，只有相機變差。隧道，衛星定位失靈、IMU 變差。
+              <a:t>，看在某一種條件下，哪些感測器會失效：大雨濃霧，相機失靈、光達變差，雷達照常。夜間，只有相機變差。隧道，衛星定位失靈、IMU 變差。
 </a:t>
             </a:r>
           </a:p>
@@ -6966,7 +6966,7 @@
                 <a:ea typeface="Arial Unicode MS"/>
                 <a:cs typeface="Arial Unicode MS"/>
               </a:rPr>
-              <a:t>，一種感測器怕什麼：雷達這一欄幾乎全是 ✓，可是「遠處的行人、機車」是 ✗，靜止物是 ▲。相機怕雨、怕逆光、怕被蓋住。
+              <a:t>，看某一種感測器怕哪些條件：雷達這一欄幾乎全是 ✓，可是「遠處的行人、機車」是 ✗，靜止物是 ▲。相機怕雨、怕逆光、怕被蓋住。
 </a:t>
             </a:r>
           </a:p>
@@ -7032,7 +7032,7 @@
                 <a:ea typeface="Arial Unicode MS"/>
                 <a:cs typeface="Arial Unicode MS"/>
               </a:rPr>
-              <a:t>第七週另外三件事：三種壞法，看不到、看錯、看不到卻說沒事，第三種最危險；融合的兩個好處，互補和備援；兩個前提，空間要標定、時間要同步。</a:t>
+              <a:t>第七週另外還有三件事。第一，感測器失效有三種方式：看不到、看錯，還有看不到卻回報說沒事，第三種最危險。第二，融合有兩個好處：互補和備援。第三，融合有兩個前提：空間要標定，時間要同步。</a:t>
             </a:r>
           </a:p>
         </p:txBody>

--- a/第八週(10-29)/第八週_第3節_簡報.pptx
+++ b/第八週(10-29)/第八週_第3節_簡報.pptx
@@ -2478,7 +2478,7 @@
                 <a:ea typeface="Arial Unicode MS"/>
                 <a:cs typeface="Arial Unicode MS"/>
               </a:rPr>
-              <a:t>（巡堂：看大家錯在哪幾題。最後三分鐘，挑全班錯最多的兩三題講。根據各週教材，最容易錯的是：第 1 題 AEB 是 L0、第 6 題「至少」是下限、第 19 題 CEP 是 50%、第 23 題 119.8 的算法。）</a:t>
+              <a:t>（巡堂：看大家錯在哪幾題。最後三分鐘，挑全班錯最多的兩三題講。根據各週教材，最容易錯的是：第 1 題 AEB 是 L0、第 6 題「至少」是下限、第 19 題 CEP 是 50%、第 23 題 119.8 怎麼算。）</a:t>
             </a:r>
           </a:p>
         </p:txBody>

--- a/第八週(10-29)/第八週_第3節_簡報.pptx
+++ b/第八週(10-29)/第八週_第3節_簡報.pptx
@@ -2280,6 +2280,28 @@
                 <a:ea typeface="Arial Unicode MS"/>
                 <a:cs typeface="Arial Unicode MS"/>
               </a:rPr>
+              <a:t>每一題的右上角還有一個「解釋說明」按鈕。按下去，交卷前就能看到這一題的說明。說明裡會直接講出答案，所以今天在課堂上先不要按，當成真的考試來做。回家複習的時候，答不出來的題目就可以按開來看。交卷前看過說明的題目，成績那一塊會列出題號，所以老師看截圖也知道哪幾題是看了說明才答的。
+</a:t>
+            </a:r>
+          </a:p>
+          <a:p>
+            <a:pPr algn="l">
+              <a:spcBef>
+                <a:spcPts val="0"/>
+              </a:spcBef>
+              <a:spcAft>
+                <a:spcPts val="267"/>
+              </a:spcAft>
+            </a:pPr>
+            <a:r>
+              <a:rPr sz="1600" lang="zh-TW" dirty="0">
+                <a:solidFill>
+                  <a:srgbClr val="000000"/>
+                </a:solidFill>
+                <a:latin typeface="Arial Unicode MS"/>
+                <a:ea typeface="Arial Unicode MS"/>
+                <a:cs typeface="Arial Unicode MS"/>
+              </a:rPr>
               <a:t>截圖最下面那一塊，傳到 LINE。考前在家可以再做一次，按「重做」就會清掉答案。</a:t>
             </a:r>
           </a:p>
@@ -2456,7 +2478,7 @@
                 <a:ea typeface="Arial Unicode MS"/>
                 <a:cs typeface="Arial Unicode MS"/>
               </a:rPr>
-              <a:t>做的時候，先不要翻講義，當成真的考試。沒有把握的題目，自己記一下，交卷後特別看那幾題的說明。
+              <a:t>做的時候，先不要翻講義，也先不要按「解釋說明」，當成真的考試。沒有把握的題目，自己記一下，交卷後特別看那幾題的說明。
 </a:t>
             </a:r>
           </a:p>
@@ -2698,7 +2720,7 @@
                 <a:ea typeface="Arial Unicode MS"/>
                 <a:cs typeface="Arial Unicode MS"/>
               </a:rPr>
-              <a:t>，講義再讀一次。模擬考可以在家再做，題目不會變，可是不要背答案，要看懂說明。
+              <a:t>，講義再讀一次。模擬考可以在家再做，題目不會變，可是不要背答案，要看懂說明。在家做的時候，答不出來的題目可以按那一題右上角的「解釋說明」，看完再回去翻那一週的講義。
 </a:t>
             </a:r>
           </a:p>

--- a/第八週(10-29)/第八週_第3節_簡報.pptx
+++ b/第八週(10-29)/第八週_第3節_簡報.pptx
@@ -1598,11 +1598,11 @@
                 <a:spcPts val="0"/>
               </a:spcBef>
               <a:spcAft>
-                <a:spcPts val="233"/>
+                <a:spcPts val="142"/>
               </a:spcAft>
             </a:pPr>
             <a:r>
-              <a:rPr sz="1400" b="1" lang="zh-TW" dirty="0">
+              <a:rPr sz="850" b="1" lang="zh-TW" dirty="0">
                 <a:solidFill>
                   <a:srgbClr val="000000"/>
                 </a:solidFill>
@@ -1613,15 +1613,15 @@
               <a:t>這一張的目的：</a:t>
             </a:r>
             <a:r>
-              <a:rPr sz="1400" lang="zh-TW" dirty="0">
-                <a:solidFill>
-                  <a:srgbClr val="000000"/>
-                </a:solidFill>
-                <a:latin typeface="Arial Unicode MS"/>
-                <a:ea typeface="Arial Unicode MS"/>
-                <a:cs typeface="Arial Unicode MS"/>
-              </a:rPr>
-              <a:t>讓大家把最容易講錯的八句話記下來，考試看到這種選項要小心。
+              <a:rPr sz="850" lang="zh-TW" dirty="0">
+                <a:solidFill>
+                  <a:srgbClr val="000000"/>
+                </a:solidFill>
+                <a:latin typeface="Arial Unicode MS"/>
+                <a:ea typeface="Arial Unicode MS"/>
+                <a:cs typeface="Arial Unicode MS"/>
+              </a:rPr>
+              <a:t>讓大家把最容易講錯的八句話記下來，知道每一句錯在哪裡、正確的說法是什麼，考試看到這種選項時認得出來。
 </a:t>
             </a:r>
           </a:p>
@@ -1631,19 +1631,19 @@
                 <a:spcPts val="0"/>
               </a:spcBef>
               <a:spcAft>
-                <a:spcPts val="233"/>
+                <a:spcPts val="142"/>
               </a:spcAft>
             </a:pPr>
             <a:r>
-              <a:rPr sz="1400" lang="zh-TW" dirty="0">
-                <a:solidFill>
-                  <a:srgbClr val="000000"/>
-                </a:solidFill>
-                <a:latin typeface="Arial Unicode MS"/>
-                <a:ea typeface="Arial Unicode MS"/>
-                <a:cs typeface="Arial Unicode MS"/>
-              </a:rPr>
-              <a:t>這八句話，都是各週教材裡特別提醒過、很多人會講錯的。可以先把右邊遮住，自己說說看哪裡錯。
+              <a:rPr sz="850" lang="zh-TW" dirty="0">
+                <a:solidFill>
+                  <a:srgbClr val="000000"/>
+                </a:solidFill>
+                <a:latin typeface="Arial Unicode MS"/>
+                <a:ea typeface="Arial Unicode MS"/>
+                <a:cs typeface="Arial Unicode MS"/>
+              </a:rPr>
+              <a:t>這八句話，都是各週教材裡特別提醒過、很多人會講錯的。請大家先把右邊遮住，自己說說看左邊那一句哪裡錯，再聽我講。
 </a:t>
             </a:r>
           </a:p>
@@ -1653,41 +1653,30 @@
                 <a:spcPts val="0"/>
               </a:spcBef>
               <a:spcAft>
-                <a:spcPts val="233"/>
+                <a:spcPts val="142"/>
               </a:spcAft>
             </a:pPr>
             <a:r>
-              <a:rPr sz="1400" lang="zh-TW" dirty="0">
-                <a:solidFill>
-                  <a:srgbClr val="000000"/>
-                </a:solidFill>
-                <a:latin typeface="Arial Unicode MS"/>
-                <a:ea typeface="Arial Unicode MS"/>
-                <a:cs typeface="Arial Unicode MS"/>
-              </a:rPr>
-              <a:t>一、</a:t>
-            </a:r>
-            <a:r>
-              <a:rPr sz="1400" b="1" lang="zh-TW" dirty="0">
-                <a:solidFill>
-                  <a:srgbClr val="000000"/>
-                </a:solidFill>
-                <a:latin typeface="Arial Unicode MS"/>
-                <a:ea typeface="Arial Unicode MS"/>
-                <a:cs typeface="Arial Unicode MS"/>
-              </a:rPr>
-              <a:t>AEB 不是 L1，是 L0</a:t>
-            </a:r>
-            <a:r>
-              <a:rPr sz="1400" lang="zh-TW" dirty="0">
-                <a:solidFill>
-                  <a:srgbClr val="000000"/>
-                </a:solidFill>
-                <a:latin typeface="Arial Unicode MS"/>
-                <a:ea typeface="Arial Unicode MS"/>
-                <a:cs typeface="Arial Unicode MS"/>
-              </a:rPr>
-              <a:t>，它只是瞬間介入。
+              <a:rPr sz="850" b="1" lang="zh-TW" dirty="0">
+                <a:solidFill>
+                  <a:srgbClr val="000000"/>
+                </a:solidFill>
+                <a:latin typeface="Arial Unicode MS"/>
+                <a:ea typeface="Arial Unicode MS"/>
+                <a:cs typeface="Arial Unicode MS"/>
+              </a:rPr>
+              <a:t>一、AEB 不是 L1，是 L0。</a:t>
+            </a:r>
+            <a:r>
+              <a:rPr sz="850" lang="zh-TW" dirty="0">
+                <a:solidFill>
+                  <a:srgbClr val="000000"/>
+                </a:solidFill>
+                <a:latin typeface="Arial Unicode MS"/>
+                <a:ea typeface="Arial Unicode MS"/>
+                <a:cs typeface="Arial Unicode MS"/>
+              </a:rPr>
+              <a:t>AEB 是自動緊急煞車，快要撞上的時候，車子自己踩煞車。它的技術很厲害，可是它只在最後那一瞬間出手，平常完全不管開車。第一週的判斷三步驟，第一步就是問：系統是「瞬間介入」，還是「持續控制」？瞬間介入的，不管技術多厲害，都還是 L0。L1 要能持續控制一項，例如 ACC 自動跟車，一路幫你控制速度。等級看的是分工，不是看技術厲不厲害。
 </a:t>
             </a:r>
           </a:p>
@@ -1697,41 +1686,30 @@
                 <a:spcPts val="0"/>
               </a:spcBef>
               <a:spcAft>
-                <a:spcPts val="233"/>
+                <a:spcPts val="142"/>
               </a:spcAft>
             </a:pPr>
             <a:r>
-              <a:rPr sz="1400" lang="zh-TW" dirty="0">
-                <a:solidFill>
-                  <a:srgbClr val="000000"/>
-                </a:solidFill>
-                <a:latin typeface="Arial Unicode MS"/>
-                <a:ea typeface="Arial Unicode MS"/>
-                <a:cs typeface="Arial Unicode MS"/>
-              </a:rPr>
-              <a:t>二、</a:t>
-            </a:r>
-            <a:r>
-              <a:rPr sz="1400" b="1" lang="zh-TW" dirty="0">
-                <a:solidFill>
-                  <a:srgbClr val="000000"/>
-                </a:solidFill>
-                <a:latin typeface="Arial Unicode MS"/>
-                <a:ea typeface="Arial Unicode MS"/>
-                <a:cs typeface="Arial Unicode MS"/>
-              </a:rPr>
-              <a:t>沒有方向盤不等於 L5。</a:t>
-            </a:r>
-            <a:r>
-              <a:rPr sz="1400" lang="zh-TW" dirty="0">
-                <a:solidFill>
-                  <a:srgbClr val="000000"/>
-                </a:solidFill>
-                <a:latin typeface="Arial Unicode MS"/>
-                <a:ea typeface="Arial Unicode MS"/>
-                <a:cs typeface="Arial Unicode MS"/>
-              </a:rPr>
-              <a:t>L5 的意思是沒有 ODD 限制，目前不存在。
+              <a:rPr sz="850" b="1" lang="zh-TW" dirty="0">
+                <a:solidFill>
+                  <a:srgbClr val="000000"/>
+                </a:solidFill>
+                <a:latin typeface="Arial Unicode MS"/>
+                <a:ea typeface="Arial Unicode MS"/>
+                <a:cs typeface="Arial Unicode MS"/>
+              </a:rPr>
+              <a:t>二、沒有方向盤，不等於 L5。</a:t>
+            </a:r>
+            <a:r>
+              <a:rPr sz="850" lang="zh-TW" dirty="0">
+                <a:solidFill>
+                  <a:srgbClr val="000000"/>
+                </a:solidFill>
+                <a:latin typeface="Arial Unicode MS"/>
+                <a:ea typeface="Arial Unicode MS"/>
+                <a:cs typeface="Arial Unicode MS"/>
+              </a:rPr>
+              <a:t>L5 的意思是沒有 ODD 限制：任何路、任何天氣、任何地方都能自己開。目前世界上沒有這種車。有些無人接駁車、無人計程車，車上真的沒有方向盤，可是它只能在劃好的區域裡開，出了那個區域就不行，所以還是 L4。等級描述的是人和系統怎麼分工、在什麼範圍內分工，不是看車子長什麼樣子。
 </a:t>
             </a:r>
           </a:p>
@@ -1741,41 +1719,30 @@
                 <a:spcPts val="0"/>
               </a:spcBef>
               <a:spcAft>
-                <a:spcPts val="233"/>
+                <a:spcPts val="142"/>
               </a:spcAft>
             </a:pPr>
             <a:r>
-              <a:rPr sz="1400" lang="zh-TW" dirty="0">
-                <a:solidFill>
-                  <a:srgbClr val="000000"/>
-                </a:solidFill>
-                <a:latin typeface="Arial Unicode MS"/>
-                <a:ea typeface="Arial Unicode MS"/>
-                <a:cs typeface="Arial Unicode MS"/>
-              </a:rPr>
-              <a:t>三、</a:t>
-            </a:r>
-            <a:r>
-              <a:rPr sz="1400" b="1" lang="zh-TW" dirty="0">
-                <a:solidFill>
-                  <a:srgbClr val="000000"/>
-                </a:solidFill>
-                <a:latin typeface="Arial Unicode MS"/>
-                <a:ea typeface="Arial Unicode MS"/>
-                <a:cs typeface="Arial Unicode MS"/>
-              </a:rPr>
-              <a:t>94% 指的是：人的錯誤是事故鏈的最後一環</a:t>
-            </a:r>
-            <a:r>
-              <a:rPr sz="1400" lang="zh-TW" dirty="0">
-                <a:solidFill>
-                  <a:srgbClr val="000000"/>
-                </a:solidFill>
-                <a:latin typeface="Arial Unicode MS"/>
-                <a:ea typeface="Arial Unicode MS"/>
-                <a:cs typeface="Arial Unicode MS"/>
-              </a:rPr>
-              <a:t>，不是把開車的人換成電腦，事故就會少 94%。
+              <a:rPr sz="850" b="1" lang="zh-TW" dirty="0">
+                <a:solidFill>
+                  <a:srgbClr val="000000"/>
+                </a:solidFill>
+                <a:latin typeface="Arial Unicode MS"/>
+                <a:ea typeface="Arial Unicode MS"/>
+                <a:cs typeface="Arial Unicode MS"/>
+              </a:rPr>
+              <a:t>三、「94% 的車禍是人為錯誤」，不代表換掉人就少 94% 的車禍。</a:t>
+            </a:r>
+            <a:r>
+              <a:rPr sz="850" lang="zh-TW" dirty="0">
+                <a:solidFill>
+                  <a:srgbClr val="000000"/>
+                </a:solidFill>
+                <a:latin typeface="Arial Unicode MS"/>
+                <a:ea typeface="Arial Unicode MS"/>
+                <a:cs typeface="Arial Unicode MS"/>
+              </a:rPr>
+              <a:t>這個數字來自美國 NHTSA 2015 年的報告。報告說的是：94% 事故的「關鍵原因」歸給駕駛人，而且報告自己寫明，關鍵原因不等於事故的成因，也不代表誰要負責。一場車禍通常是一串事情接在一起：例如下雨路滑、路口視線被擋、對方車速太快，最後駕駛來不及煞車。報告把最後那一環記成關鍵原因，可是前面每一環都有份。IIHS 2020 年用同一份資料重新分析：如果自駕車只是看得比較清楚、反應比較快，其他判斷都跟人一樣，大約只能避免三分之一的事故。2022 年 NHTSA 也把這個數字從宣導材料裡拿掉了。
 </a:t>
             </a:r>
           </a:p>
@@ -1785,41 +1752,30 @@
                 <a:spcPts val="0"/>
               </a:spcBef>
               <a:spcAft>
-                <a:spcPts val="233"/>
+                <a:spcPts val="142"/>
               </a:spcAft>
             </a:pPr>
             <a:r>
-              <a:rPr sz="1400" lang="zh-TW" dirty="0">
-                <a:solidFill>
-                  <a:srgbClr val="000000"/>
-                </a:solidFill>
-                <a:latin typeface="Arial Unicode MS"/>
-                <a:ea typeface="Arial Unicode MS"/>
-                <a:cs typeface="Arial Unicode MS"/>
-              </a:rPr>
-              <a:t>四、</a:t>
-            </a:r>
-            <a:r>
-              <a:rPr sz="1400" b="1" lang="zh-TW" dirty="0">
-                <a:solidFill>
-                  <a:srgbClr val="000000"/>
-                </a:solidFill>
-                <a:latin typeface="Arial Unicode MS"/>
-                <a:ea typeface="Arial Unicode MS"/>
-                <a:cs typeface="Arial Unicode MS"/>
-              </a:rPr>
-              <a:t>測距 200 公尺</a:t>
-            </a:r>
-            <a:r>
-              <a:rPr sz="1400" lang="zh-TW" dirty="0">
-                <a:solidFill>
-                  <a:srgbClr val="000000"/>
-                </a:solidFill>
-                <a:latin typeface="Arial Unicode MS"/>
-                <a:ea typeface="Arial Unicode MS"/>
-                <a:cs typeface="Arial Unicode MS"/>
-              </a:rPr>
-              <a:t>，要追問對多少反射率、偵測機率多少，不是 200 公尺內都看得到。
+              <a:rPr sz="850" b="1" lang="zh-TW" dirty="0">
+                <a:solidFill>
+                  <a:srgbClr val="000000"/>
+                </a:solidFill>
+                <a:latin typeface="Arial Unicode MS"/>
+                <a:ea typeface="Arial Unicode MS"/>
+                <a:cs typeface="Arial Unicode MS"/>
+              </a:rPr>
+              <a:t>四、規格表寫「測距 200 公尺」，不代表 200 公尺內的東西都看得到。</a:t>
+            </a:r>
+            <a:r>
+              <a:rPr sz="850" lang="zh-TW" dirty="0">
+                <a:solidFill>
+                  <a:srgbClr val="000000"/>
+                </a:solidFill>
+                <a:latin typeface="Arial Unicode MS"/>
+                <a:ea typeface="Arial Unicode MS"/>
+                <a:cs typeface="Arial Unicode MS"/>
+              </a:rPr>
+              <a:t>第五週看過 OS1 光達的規格表：對反射率 80% 的白色目標，測距 170 公尺；對反射率 10% 的黑色目標，只有 90 公尺。而且這一行還綁著條件，例如偵測機率要大於九成、陽光強度多少。就像手電筒照白牆和照黑布，看得到的距離差很多。路上有黑色的車、穿深色衣服的人，所以設計時要用比較差的那個數字。看到測距，一定要追問：對多少反射率？偵測機率多少？
 </a:t>
             </a:r>
           </a:p>
@@ -1829,41 +1785,30 @@
                 <a:spcPts val="0"/>
               </a:spcBef>
               <a:spcAft>
-                <a:spcPts val="233"/>
+                <a:spcPts val="142"/>
               </a:spcAft>
             </a:pPr>
             <a:r>
-              <a:rPr sz="1400" lang="zh-TW" dirty="0">
-                <a:solidFill>
-                  <a:srgbClr val="000000"/>
-                </a:solidFill>
-                <a:latin typeface="Arial Unicode MS"/>
-                <a:ea typeface="Arial Unicode MS"/>
-                <a:cs typeface="Arial Unicode MS"/>
-              </a:rPr>
-              <a:t>五、</a:t>
-            </a:r>
-            <a:r>
-              <a:rPr sz="1400" b="1" lang="zh-TW" dirty="0">
-                <a:solidFill>
-                  <a:srgbClr val="000000"/>
-                </a:solidFill>
-                <a:latin typeface="Arial Unicode MS"/>
-                <a:ea typeface="Arial Unicode MS"/>
-                <a:cs typeface="Arial Unicode MS"/>
-              </a:rPr>
-              <a:t>光達會受天氣影響</a:t>
-            </a:r>
-            <a:r>
-              <a:rPr sz="1400" lang="zh-TW" dirty="0">
-                <a:solidFill>
-                  <a:srgbClr val="000000"/>
-                </a:solidFill>
-                <a:latin typeface="Arial Unicode MS"/>
-                <a:ea typeface="Arial Unicode MS"/>
-                <a:cs typeface="Arial Unicode MS"/>
-              </a:rPr>
-              <a:t>，比較不怕的是雷達。
+              <a:rPr sz="850" b="1" lang="zh-TW" dirty="0">
+                <a:solidFill>
+                  <a:srgbClr val="000000"/>
+                </a:solidFill>
+                <a:latin typeface="Arial Unicode MS"/>
+                <a:ea typeface="Arial Unicode MS"/>
+                <a:cs typeface="Arial Unicode MS"/>
+              </a:rPr>
+              <a:t>五、光達會受天氣影響，比較不怕雨霧的是雷達。</a:t>
+            </a:r>
+            <a:r>
+              <a:rPr sz="850" lang="zh-TW" dirty="0">
+                <a:solidFill>
+                  <a:srgbClr val="000000"/>
+                </a:solidFill>
+                <a:latin typeface="Arial Unicode MS"/>
+                <a:ea typeface="Arial Unicode MS"/>
+                <a:cs typeface="Arial Unicode MS"/>
+              </a:rPr>
+              <a:t>第七週的失效對照表，「大雨、濃霧」那一列：相機是叉叉，光達是三角形，雷達是勾。光達的雷射會打到半空中的雨滴、霧滴，提早彈回來，點雲上多出一堆雜點，看得到的距離也變短。雷達的波長大約四公釐，比一公釐的雨滴大，可以繞過去，所以雨霧對它的影響比較小。
 </a:t>
             </a:r>
           </a:p>
@@ -1873,41 +1818,30 @@
                 <a:spcPts val="0"/>
               </a:spcBef>
               <a:spcAft>
-                <a:spcPts val="233"/>
+                <a:spcPts val="142"/>
               </a:spcAft>
             </a:pPr>
             <a:r>
-              <a:rPr sz="1400" lang="zh-TW" dirty="0">
-                <a:solidFill>
-                  <a:srgbClr val="000000"/>
-                </a:solidFill>
-                <a:latin typeface="Arial Unicode MS"/>
-                <a:ea typeface="Arial Unicode MS"/>
-                <a:cs typeface="Arial Unicode MS"/>
-              </a:rPr>
-              <a:t>六、</a:t>
-            </a:r>
-            <a:r>
-              <a:rPr sz="1400" b="1" lang="zh-TW" dirty="0">
-                <a:solidFill>
-                  <a:srgbClr val="000000"/>
-                </a:solidFill>
-                <a:latin typeface="Arial Unicode MS"/>
-                <a:ea typeface="Arial Unicode MS"/>
-                <a:cs typeface="Arial Unicode MS"/>
-              </a:rPr>
-              <a:t>雷達不是不能看人</a:t>
-            </a:r>
-            <a:r>
-              <a:rPr sz="1400" lang="zh-TW" dirty="0">
-                <a:solidFill>
-                  <a:srgbClr val="000000"/>
-                </a:solidFill>
-                <a:latin typeface="Arial Unicode MS"/>
-                <a:ea typeface="Arial Unicode MS"/>
-                <a:cs typeface="Arial Unicode MS"/>
-              </a:rPr>
-              <a:t>，是看得到但抓不穩，不能單獨用。
+              <a:rPr sz="850" b="1" lang="zh-TW" dirty="0">
+                <a:solidFill>
+                  <a:srgbClr val="000000"/>
+                </a:solidFill>
+                <a:latin typeface="Arial Unicode MS"/>
+                <a:ea typeface="Arial Unicode MS"/>
+                <a:cs typeface="Arial Unicode MS"/>
+              </a:rPr>
+              <a:t>六、雷達不是看不到人，是看得到但抓不穩，所以不能單獨用來找人。</a:t>
+            </a:r>
+            <a:r>
+              <a:rPr sz="850" lang="zh-TW" dirty="0">
+                <a:solidFill>
+                  <a:srgbClr val="000000"/>
+                </a:solidFill>
+                <a:latin typeface="Arial Unicode MS"/>
+                <a:ea typeface="Arial Unicode MS"/>
+                <a:cs typeface="Arial Unicode MS"/>
+              </a:rPr>
+              <a:t>人和機車比較小，又不是金屬，雷達波打到身上，反射回來很弱。第七週看過 nuScenes 的真實資料：十公尺內的車子，將近七成框裡有雷達點；十公尺內的行人，只有兩成多有雷達點，三十公尺外不到一成。所以雷達有時候抓得到人、有時候抓不到。要找人，主要還是靠相機和光達，雷達是補充。
 </a:t>
             </a:r>
           </a:p>
@@ -1917,41 +1851,30 @@
                 <a:spcPts val="0"/>
               </a:spcBef>
               <a:spcAft>
-                <a:spcPts val="233"/>
+                <a:spcPts val="142"/>
               </a:spcAft>
             </a:pPr>
             <a:r>
-              <a:rPr sz="1400" lang="zh-TW" dirty="0">
-                <a:solidFill>
-                  <a:srgbClr val="000000"/>
-                </a:solidFill>
-                <a:latin typeface="Arial Unicode MS"/>
-                <a:ea typeface="Arial Unicode MS"/>
-                <a:cs typeface="Arial Unicode MS"/>
-              </a:rPr>
-              <a:t>七、</a:t>
-            </a:r>
-            <a:r>
-              <a:rPr sz="1400" b="1" lang="zh-TW" dirty="0">
-                <a:solidFill>
-                  <a:srgbClr val="000000"/>
-                </a:solidFill>
-                <a:latin typeface="Arial Unicode MS"/>
-                <a:ea typeface="Arial Unicode MS"/>
-                <a:cs typeface="Arial Unicode MS"/>
-              </a:rPr>
-              <a:t>兩顆好的感測器合起來，結果不一定好</a:t>
-            </a:r>
-            <a:r>
-              <a:rPr sz="1400" lang="zh-TW" dirty="0">
-                <a:solidFill>
-                  <a:srgbClr val="000000"/>
-                </a:solidFill>
-                <a:latin typeface="Arial Unicode MS"/>
-                <a:ea typeface="Arial Unicode MS"/>
-                <a:cs typeface="Arial Unicode MS"/>
-              </a:rPr>
-              <a:t>；如果沒有標定、沒有同步，合起來一樣會錯。
+              <a:rPr sz="850" b="1" lang="zh-TW" dirty="0">
+                <a:solidFill>
+                  <a:srgbClr val="000000"/>
+                </a:solidFill>
+                <a:latin typeface="Arial Unicode MS"/>
+                <a:ea typeface="Arial Unicode MS"/>
+                <a:cs typeface="Arial Unicode MS"/>
+              </a:rPr>
+              <a:t>七、兩顆好的感測器合起來，結果不一定好。</a:t>
+            </a:r>
+            <a:r>
+              <a:rPr sz="850" lang="zh-TW" dirty="0">
+                <a:solidFill>
+                  <a:srgbClr val="000000"/>
+                </a:solidFill>
+                <a:latin typeface="Arial Unicode MS"/>
+                <a:ea typeface="Arial Unicode MS"/>
+                <a:cs typeface="Arial Unicode MS"/>
+              </a:rPr>
+              <a:t>合起來之前，要先對齊空間，叫標定；也要對齊時間，叫同步。空間方面，第五週算過：相機和光達的安裝角度差 1 度，50 公尺外就偏 0.87 公尺，快半個車道。時間方面，第七週看過真實的例子：光達改用早 0.2 秒的那一圈，時速 37 的車子已經往前走了 2 公尺，車頭上就沒有光達點了。就像兩個人拍同一台開過去的車，一個人晚半秒按快門，兩張照片疊起來，車子變成兩台。每一顆感測器各自都是好的，但沒有標定、沒有同步，合起來一樣會錯。
 </a:t>
             </a:r>
           </a:p>
@@ -1961,41 +1884,52 @@
                 <a:spcPts val="0"/>
               </a:spcBef>
               <a:spcAft>
-                <a:spcPts val="233"/>
+                <a:spcPts val="142"/>
               </a:spcAft>
             </a:pPr>
             <a:r>
-              <a:rPr sz="1400" lang="zh-TW" dirty="0">
-                <a:solidFill>
-                  <a:srgbClr val="000000"/>
-                </a:solidFill>
-                <a:latin typeface="Arial Unicode MS"/>
-                <a:ea typeface="Arial Unicode MS"/>
-                <a:cs typeface="Arial Unicode MS"/>
-              </a:rPr>
-              <a:t>八、</a:t>
-            </a:r>
-            <a:r>
-              <a:rPr sz="1400" b="1" lang="zh-TW" dirty="0">
-                <a:solidFill>
-                  <a:srgbClr val="000000"/>
-                </a:solidFill>
-                <a:latin typeface="Arial Unicode MS"/>
-                <a:ea typeface="Arial Unicode MS"/>
-                <a:cs typeface="Arial Unicode MS"/>
-              </a:rPr>
-              <a:t>分數 0.91 不是百分之九十一一定對</a:t>
-            </a:r>
-            <a:r>
-              <a:rPr sz="1400" lang="zh-TW" dirty="0">
-                <a:solidFill>
-                  <a:srgbClr val="000000"/>
-                </a:solidFill>
-                <a:latin typeface="Arial Unicode MS"/>
-                <a:ea typeface="Arial Unicode MS"/>
-                <a:cs typeface="Arial Unicode MS"/>
-              </a:rPr>
-              <a:t>，是拿來排序、設門檻的。</a:t>
+              <a:rPr sz="850" b="1" lang="zh-TW" dirty="0">
+                <a:solidFill>
+                  <a:srgbClr val="000000"/>
+                </a:solidFill>
+                <a:latin typeface="Arial Unicode MS"/>
+                <a:ea typeface="Arial Unicode MS"/>
+                <a:cs typeface="Arial Unicode MS"/>
+              </a:rPr>
+              <a:t>八、分數 0.91 不是「百分之九十一一定對」。</a:t>
+            </a:r>
+            <a:r>
+              <a:rPr sz="850" lang="zh-TW" dirty="0">
+                <a:solidFill>
+                  <a:srgbClr val="000000"/>
+                </a:solidFill>
+                <a:latin typeface="Arial Unicode MS"/>
+                <a:ea typeface="Arial Unicode MS"/>
+                <a:cs typeface="Arial Unicode MS"/>
+              </a:rPr>
+              <a:t>分數比較像考試時，你在答案旁邊寫「我有幾分把握」，寫九分的人也會答錯。第八週第 1 節的例子：遠處那台模型說是「卡車 0.52」，其實是公車。分數真正的用途，是拿來排序，以及設一個門檻，低於門檻的框就丟掉。門檻設在哪裡影響很大：nuScenes 404 張照片，門檻從 0.3 調到 0.7，對不到標註的框從 284 個降到 35 個，可是行人抓到的比例也從 53% 掉到 30%。
+</a:t>
+            </a:r>
+          </a:p>
+          <a:p>
+            <a:pPr algn="l">
+              <a:spcBef>
+                <a:spcPts val="0"/>
+              </a:spcBef>
+              <a:spcAft>
+                <a:spcPts val="142"/>
+              </a:spcAft>
+            </a:pPr>
+            <a:r>
+              <a:rPr sz="850" lang="zh-TW" dirty="0">
+                <a:solidFill>
+                  <a:srgbClr val="000000"/>
+                </a:solidFill>
+                <a:latin typeface="Arial Unicode MS"/>
+                <a:ea typeface="Arial Unicode MS"/>
+                <a:cs typeface="Arial Unicode MS"/>
+              </a:rPr>
+              <a:t>考試看到選項裡有「一定」「全部」「只要……就……」這種說法，要特別小心，這八句錯的說法，幾乎都是把有條件的事情講成沒有條件。</a:t>
             </a:r>
           </a:p>
         </p:txBody>

--- a/第八週(10-29)/第八週_第3節_簡報.pptx
+++ b/第八週(10-29)/第八週_第3節_簡報.pptx
@@ -7044,7 +7044,7 @@
                 <a:ea typeface="Arial Unicode MS"/>
                 <a:cs typeface="Arial Unicode MS"/>
               </a:rPr>
-              <a:t>超音波 USS6 只量得到 5.5 公尺。</a:t>
+              <a:t>超音波只量得到 5.5 公尺。</a:t>
             </a:r>
             <a:r>
               <a:rPr sz="1150" lang="zh-TW" dirty="0">
@@ -7055,7 +7055,7 @@
                 <a:ea typeface="Arial Unicode MS"/>
                 <a:cs typeface="Arial Unicode MS"/>
               </a:rPr>
-              <a:t>時速 20 的煞停距離約 4.2 公尺，再加 5 公尺的安全距離，要 9.2 公尺，超音波不夠，所以它只在停車場過關，是停車、倒車用的。注意：第三週那張表寫超音波 4.5 公尺，那是課堂設定的值；5.5 公尺是第六週那一顆產品的規格，兩個數字來源不同。
+              <a:t>這個數字來自第六週看過的那一份規格表：Bosch 第六代車用超音波感測器。規格表上寫的 USS 是 Ultrasonic Sensor 的縮寫，就是超音波感測器；後面的 6 是第六代。它就是汽車保險桿上那幾個圓圓的點。時速 20 的煞停距離約 4.2 公尺，再加 5 公尺的安全距離，要 9.2 公尺，超音波不夠，所以它只在停車場過關，是停車、倒車用的。注意：第三週那張表寫超音波 4.5 公尺，那是課堂設定的值；5.5 公尺是第六週那一顆產品的規格，兩個數字來源不同。
 </a:t>
             </a:r>
           </a:p>
